--- a/public/downloads/praesentation/M10.pptx
+++ b/public/downloads/praesentation/M10.pptx
@@ -19,7 +19,6 @@
     <p:sldId id="267" r:id="rId18"/>
     <p:sldId id="268" r:id="rId19"/>
     <p:sldId id="269" r:id="rId20"/>
-    <p:sldId id="270" r:id="rId21"/>
   </p:sldIdLst>
   <p:sldSz cx="12188952" cy="6858000" type="screen4x3"/>
   <p:notesSz cx="6858000" cy="9144000"/>
@@ -3161,8 +3160,8 @@
         </p:nvSpPr>
         <p:spPr>
           <a:xfrm>
-            <a:off x="365760" y="365760"/>
-            <a:ext cx="11430000" cy="457200"/>
+            <a:off x="365760" y="320040"/>
+            <a:ext cx="11430000" cy="411480"/>
           </a:xfrm>
           <a:prstGeom prst="rect">
             <a:avLst/>
@@ -3177,13 +3176,13 @@
           <a:p>
             <a:pPr algn="l"/>
             <a:r>
-              <a:rPr sz="1100" b="0">
+              <a:rPr sz="1100" b="0" i="0">
                 <a:solidFill>
-                  <a:srgbClr val="FFFFFF"/>
+                  <a:srgbClr val="BBCCEE"/>
                 </a:solidFill>
                 <a:latin typeface="Arial"/>
               </a:rPr>
-              <a:t>M10  ·  K-03 Gesprächsführung &amp; Beratung  ·  Sparring  ·  90 Min.</a:t>
+              <a:t>M10  ·  K-03 Gesprächsführung &amp; Beratung  ·  Zielstufe: Sparring  ·  90 Min.</a:t>
             </a:r>
           </a:p>
         </p:txBody>
@@ -3196,14 +3195,14 @@
         </p:nvSpPr>
         <p:spPr>
           <a:xfrm>
-            <a:off x="365760" y="868680"/>
-            <a:ext cx="7315200" cy="27432"/>
+            <a:off x="365760" y="804672"/>
+            <a:ext cx="8229600" cy="22860"/>
           </a:xfrm>
           <a:prstGeom prst="rect">
             <a:avLst/>
           </a:prstGeom>
           <a:solidFill>
-            <a:srgbClr val="FFFFFF"/>
+            <a:srgbClr val="335CC0"/>
           </a:solidFill>
           <a:ln>
             <a:noFill/>
@@ -3239,8 +3238,8 @@
         </p:nvSpPr>
         <p:spPr>
           <a:xfrm>
-            <a:off x="365760" y="1097280"/>
-            <a:ext cx="11430000" cy="2286000"/>
+            <a:off x="365760" y="1005840"/>
+            <a:ext cx="11430000" cy="2560320"/>
           </a:xfrm>
           <a:prstGeom prst="rect">
             <a:avLst/>
@@ -3255,7 +3254,7 @@
           <a:p>
             <a:pPr algn="l"/>
             <a:r>
-              <a:rPr sz="4000" b="1">
+              <a:rPr sz="4200" b="1" i="0">
                 <a:solidFill>
                   <a:srgbClr val="FFFFFF"/>
                 </a:solidFill>
@@ -3274,8 +3273,8 @@
         </p:nvSpPr>
         <p:spPr>
           <a:xfrm>
-            <a:off x="365760" y="3200400"/>
-            <a:ext cx="9144000" cy="914400"/>
+            <a:off x="365760" y="3383280"/>
+            <a:ext cx="10058400" cy="822960"/>
           </a:xfrm>
           <a:prstGeom prst="rect">
             <a:avLst/>
@@ -3290,7 +3289,7 @@
           <a:p>
             <a:pPr algn="l"/>
             <a:r>
-              <a:rPr sz="2000" b="0">
+              <a:rPr sz="2000" b="0" i="1">
                 <a:solidFill>
                   <a:srgbClr val="CCD6F0"/>
                 </a:solidFill>
@@ -3309,8 +3308,8 @@
         </p:nvSpPr>
         <p:spPr>
           <a:xfrm>
-            <a:off x="365760" y="6217920"/>
-            <a:ext cx="11430000" cy="457200"/>
+            <a:off x="365760" y="6309360"/>
+            <a:ext cx="11430000" cy="365760"/>
           </a:xfrm>
           <a:prstGeom prst="rect">
             <a:avLst/>
@@ -3325,9 +3324,9 @@
           <a:p>
             <a:pPr algn="l"/>
             <a:r>
-              <a:rPr sz="1000" b="0">
+              <a:rPr sz="900" b="0" i="0">
                 <a:solidFill>
-                  <a:srgbClr val="99AACC"/>
+                  <a:srgbClr val="889ACC"/>
                 </a:solidFill>
                 <a:latin typeface="Arial"/>
               </a:rPr>
@@ -3345,6 +3344,636 @@
 </file>
 
 <file path=ppt/slides/slide10.xml><?xml version="1.0" encoding="utf-8"?>
+<p:sld xmlns:a="http://schemas.openxmlformats.org/drawingml/2006/main" xmlns:p="http://schemas.openxmlformats.org/presentationml/2006/main" xmlns:r="http://schemas.openxmlformats.org/officeDocument/2006/relationships">
+  <p:cSld>
+    <p:bg>
+      <p:bgPr>
+        <a:solidFill>
+          <a:srgbClr val="FFFFFF"/>
+        </a:solidFill>
+        <a:effectLst/>
+      </p:bgPr>
+    </p:bg>
+    <p:spTree>
+      <p:nvGrpSpPr>
+        <p:cNvPr id="1" name=""/>
+        <p:cNvGrpSpPr/>
+        <p:nvPr/>
+      </p:nvGrpSpPr>
+      <p:grpSpPr/>
+      <p:sp>
+        <p:nvSpPr>
+          <p:cNvPr id="2" name="Rectangle 1"/>
+          <p:cNvSpPr/>
+          <p:nvPr/>
+        </p:nvSpPr>
+        <p:spPr>
+          <a:xfrm>
+            <a:off x="0" y="0"/>
+            <a:ext cx="73152" cy="6858000"/>
+          </a:xfrm>
+          <a:prstGeom prst="rect">
+            <a:avLst/>
+          </a:prstGeom>
+          <a:solidFill>
+            <a:srgbClr val="003DA5"/>
+          </a:solidFill>
+          <a:ln>
+            <a:noFill/>
+          </a:ln>
+        </p:spPr>
+        <p:style>
+          <a:lnRef idx="1">
+            <a:schemeClr val="accent1"/>
+          </a:lnRef>
+          <a:fillRef idx="3">
+            <a:schemeClr val="accent1"/>
+          </a:fillRef>
+          <a:effectRef idx="2">
+            <a:schemeClr val="accent1"/>
+          </a:effectRef>
+          <a:fontRef idx="minor">
+            <a:schemeClr val="lt1"/>
+          </a:fontRef>
+        </p:style>
+        <p:txBody>
+          <a:bodyPr rtlCol="0" anchor="ctr"/>
+          <a:lstStyle/>
+          <a:p>
+            <a:pPr algn="ctr"/>
+          </a:p>
+        </p:txBody>
+      </p:sp>
+      <p:sp>
+        <p:nvSpPr>
+          <p:cNvPr id="3" name="TextBox 2"/>
+          <p:cNvSpPr txBox="1"/>
+          <p:nvPr/>
+        </p:nvSpPr>
+        <p:spPr>
+          <a:xfrm>
+            <a:off x="228600" y="182880"/>
+            <a:ext cx="11430000" cy="320040"/>
+          </a:xfrm>
+          <a:prstGeom prst="rect">
+            <a:avLst/>
+          </a:prstGeom>
+          <a:noFill/>
+        </p:spPr>
+        <p:txBody>
+          <a:bodyPr wrap="square">
+            <a:spAutoFit/>
+          </a:bodyPr>
+          <a:lstStyle/>
+          <a:p>
+            <a:pPr algn="l"/>
+            <a:r>
+              <a:rPr sz="900" b="0" i="0">
+                <a:solidFill>
+                  <a:srgbClr val="556575"/>
+                </a:solidFill>
+                <a:latin typeface="Arial"/>
+              </a:rPr>
+              <a:t>M10 · Modulinhalte</a:t>
+            </a:r>
+          </a:p>
+        </p:txBody>
+      </p:sp>
+      <p:sp>
+        <p:nvSpPr>
+          <p:cNvPr id="4" name="TextBox 3"/>
+          <p:cNvSpPr txBox="1"/>
+          <p:nvPr/>
+        </p:nvSpPr>
+        <p:spPr>
+          <a:xfrm>
+            <a:off x="365760" y="274320"/>
+            <a:ext cx="11430000" cy="777240"/>
+          </a:xfrm>
+          <a:prstGeom prst="rect">
+            <a:avLst/>
+          </a:prstGeom>
+          <a:noFill/>
+        </p:spPr>
+        <p:txBody>
+          <a:bodyPr wrap="square">
+            <a:spAutoFit/>
+          </a:bodyPr>
+          <a:lstStyle/>
+          <a:p>
+            <a:pPr algn="l"/>
+            <a:r>
+              <a:rPr sz="2200" b="1" i="0">
+                <a:solidFill>
+                  <a:srgbClr val="003DA5"/>
+                </a:solidFill>
+                <a:latin typeface="Arial"/>
+              </a:rPr>
+              <a:t>Latente Bedarfe (nur dem Unternehmer bekannt – für Rollenspieler)</a:t>
+            </a:r>
+          </a:p>
+        </p:txBody>
+      </p:sp>
+      <p:sp>
+        <p:nvSpPr>
+          <p:cNvPr id="5" name="Rectangle 4"/>
+          <p:cNvSpPr/>
+          <p:nvPr/>
+        </p:nvSpPr>
+        <p:spPr>
+          <a:xfrm>
+            <a:off x="365760" y="1005840"/>
+            <a:ext cx="11430000" cy="27432"/>
+          </a:xfrm>
+          <a:prstGeom prst="rect">
+            <a:avLst/>
+          </a:prstGeom>
+          <a:solidFill>
+            <a:srgbClr val="D1D5DB"/>
+          </a:solidFill>
+          <a:ln>
+            <a:noFill/>
+          </a:ln>
+        </p:spPr>
+        <p:style>
+          <a:lnRef idx="1">
+            <a:schemeClr val="accent1"/>
+          </a:lnRef>
+          <a:fillRef idx="3">
+            <a:schemeClr val="accent1"/>
+          </a:fillRef>
+          <a:effectRef idx="2">
+            <a:schemeClr val="accent1"/>
+          </a:effectRef>
+          <a:fontRef idx="minor">
+            <a:schemeClr val="lt1"/>
+          </a:fontRef>
+        </p:style>
+        <p:txBody>
+          <a:bodyPr rtlCol="0" anchor="ctr"/>
+          <a:lstStyle/>
+          <a:p>
+            <a:pPr algn="ctr"/>
+          </a:p>
+        </p:txBody>
+      </p:sp>
+      <p:sp>
+        <p:nvSpPr>
+          <p:cNvPr id="6" name="TextBox 5"/>
+          <p:cNvSpPr txBox="1"/>
+          <p:nvPr/>
+        </p:nvSpPr>
+        <p:spPr>
+          <a:xfrm>
+            <a:off x="365760" y="1143000"/>
+            <a:ext cx="11430000" cy="5212080"/>
+          </a:xfrm>
+          <a:prstGeom prst="rect">
+            <a:avLst/>
+          </a:prstGeom>
+          <a:noFill/>
+        </p:spPr>
+        <p:txBody>
+          <a:bodyPr wrap="square">
+            <a:spAutoFit/>
+          </a:bodyPr>
+          <a:lstStyle/>
+          <a:p>
+            <a:pPr>
+              <a:spcBef>
+                <a:spcPts val="500"/>
+              </a:spcBef>
+            </a:pPr>
+            <a:r>
+              <a:rPr sz="1500">
+                <a:solidFill>
+                  <a:srgbClr val="003DA5"/>
+                </a:solidFill>
+                <a:latin typeface="Arial"/>
+              </a:rPr>
+              <a:t>▪  </a:t>
+            </a:r>
+            <a:r>
+              <a:rPr sz="1700" b="1">
+                <a:solidFill>
+                  <a:srgbClr val="003DA5"/>
+                </a:solidFill>
+                <a:latin typeface="Arial"/>
+              </a:rPr>
+              <a:t>Nachfolge ungeklärt: </a:t>
+            </a:r>
+            <a:r>
+              <a:rPr sz="1700">
+                <a:solidFill>
+                  <a:srgbClr val="1A1A1A"/>
+                </a:solidFill>
+                <a:latin typeface="Arial"/>
+              </a:rPr>
+              <a:t>(echter latenter Bedarf): Sohn (26) zeigt kein Interesse; Maurer hat kein Testament, keinen Gesellschaftervertrag für den Todesfall. Maurer spricht nicht darüber, weil er das…</a:t>
+            </a:r>
+          </a:p>
+          <a:p>
+            <a:pPr>
+              <a:spcBef>
+                <a:spcPts val="500"/>
+              </a:spcBef>
+            </a:pPr>
+            <a:r>
+              <a:rPr sz="1500">
+                <a:solidFill>
+                  <a:srgbClr val="003DA5"/>
+                </a:solidFill>
+                <a:latin typeface="Arial"/>
+              </a:rPr>
+              <a:t>▪  </a:t>
+            </a:r>
+            <a:r>
+              <a:rPr sz="1700" b="1">
+                <a:solidFill>
+                  <a:srgbClr val="003DA5"/>
+                </a:solidFill>
+                <a:latin typeface="Arial"/>
+              </a:rPr>
+              <a:t>Stille Beteiligung läuft aus: </a:t>
+            </a:r>
+            <a:r>
+              <a:rPr sz="1700">
+                <a:solidFill>
+                  <a:srgbClr val="1A1A1A"/>
+                </a:solidFill>
+                <a:latin typeface="Arial"/>
+              </a:rPr>
+              <a:t>(echter latenter Bedarf): Ein Schwager ist seit 2012 stiller Gesellschafter (80 TEUR). Die Beteiligung hat eine Kündigungsfrist bis Ende 2025; Maurer hat noch keine…</a:t>
+            </a:r>
+          </a:p>
+          <a:p>
+            <a:pPr>
+              <a:spcBef>
+                <a:spcPts val="500"/>
+              </a:spcBef>
+            </a:pPr>
+            <a:r>
+              <a:rPr sz="1500">
+                <a:solidFill>
+                  <a:srgbClr val="003DA5"/>
+                </a:solidFill>
+                <a:latin typeface="Arial"/>
+              </a:rPr>
+              <a:t>▪  </a:t>
+            </a:r>
+            <a:r>
+              <a:rPr sz="1700" b="1">
+                <a:solidFill>
+                  <a:srgbClr val="003DA5"/>
+                </a:solidFill>
+                <a:latin typeface="Arial"/>
+              </a:rPr>
+              <a:t>Liquiditätsengpass: </a:t>
+            </a:r>
+            <a:r>
+              <a:rPr sz="1700">
+                <a:solidFill>
+                  <a:srgbClr val="1A1A1A"/>
+                </a:solidFill>
+                <a:latin typeface="Arial"/>
+              </a:rPr>
+              <a:t>(bekannt, aber nicht priorisiert): Der neue Großkunde zahlt mit 60 Tagen Ziel; bei Großaufträgen (&gt; 80 TEUR) entsteht Vorlauffinanzierungsbedarf. Maurer hält das für ein…</a:t>
+            </a:r>
+          </a:p>
+          <a:p>
+            <a:pPr>
+              <a:spcBef>
+                <a:spcPts val="500"/>
+              </a:spcBef>
+            </a:pPr>
+            <a:r>
+              <a:rPr sz="1500">
+                <a:solidFill>
+                  <a:srgbClr val="003DA5"/>
+                </a:solidFill>
+                <a:latin typeface="Arial"/>
+              </a:rPr>
+              <a:t>▪  </a:t>
+            </a:r>
+            <a:r>
+              <a:rPr sz="1700" b="1">
+                <a:solidFill>
+                  <a:srgbClr val="003DA5"/>
+                </a:solidFill>
+                <a:latin typeface="Arial"/>
+              </a:rPr>
+              <a:t>Private Absicherung: </a:t>
+            </a:r>
+            <a:r>
+              <a:rPr sz="1700">
+                <a:solidFill>
+                  <a:srgbClr val="1A1A1A"/>
+                </a:solidFill>
+                <a:latin typeface="Arial"/>
+              </a:rPr>
+              <a:t>(latent): Florian Maurer hat seit Jahren keine BU-Versicherung mehr; private Krankenversicherung läuft als Einzelvertrag ohne Unternehmensbezug.</a:t>
+            </a:r>
+          </a:p>
+          <a:p>
+            <a:pPr>
+              <a:spcBef>
+                <a:spcPts val="500"/>
+              </a:spcBef>
+            </a:pPr>
+            <a:r>
+              <a:rPr sz="1500">
+                <a:solidFill>
+                  <a:srgbClr val="003DA5"/>
+                </a:solidFill>
+                <a:latin typeface="Arial"/>
+              </a:rPr>
+              <a:t>▪  </a:t>
+            </a:r>
+            <a:r>
+              <a:rPr sz="1700" b="1">
+                <a:solidFill>
+                  <a:srgbClr val="003DA5"/>
+                </a:solidFill>
+                <a:latin typeface="Arial"/>
+              </a:rPr>
+              <a:t>Gesprächsziel für den Berater: </a:t>
+            </a:r>
+            <a:r>
+              <a:rPr sz="1700">
+                <a:solidFill>
+                  <a:srgbClr val="1A1A1A"/>
+                </a:solidFill>
+                <a:latin typeface="Arial"/>
+              </a:rPr>
+              <a:t>Den UnternehmerDialog systematisch durcharbeiten. Mindestens 2 latente Bedarfe sollen durch gezielte SPIN-Fragen sichtbar werden. Bewertungsmaßstab: Wie viele Implikationsfragen…</a:t>
+            </a:r>
+          </a:p>
+        </p:txBody>
+      </p:sp>
+    </p:spTree>
+  </p:cSld>
+  <p:clrMapOvr>
+    <a:masterClrMapping/>
+  </p:clrMapOvr>
+</p:sld>
+</file>
+
+<file path=ppt/slides/slide11.xml><?xml version="1.0" encoding="utf-8"?>
+<p:sld xmlns:a="http://schemas.openxmlformats.org/drawingml/2006/main" xmlns:p="http://schemas.openxmlformats.org/presentationml/2006/main" xmlns:r="http://schemas.openxmlformats.org/officeDocument/2006/relationships">
+  <p:cSld>
+    <p:bg>
+      <p:bgPr>
+        <a:solidFill>
+          <a:srgbClr val="FFFFFF"/>
+        </a:solidFill>
+        <a:effectLst/>
+      </p:bgPr>
+    </p:bg>
+    <p:spTree>
+      <p:nvGrpSpPr>
+        <p:cNvPr id="1" name=""/>
+        <p:cNvGrpSpPr/>
+        <p:nvPr/>
+      </p:nvGrpSpPr>
+      <p:grpSpPr/>
+      <p:sp>
+        <p:nvSpPr>
+          <p:cNvPr id="2" name="Rectangle 1"/>
+          <p:cNvSpPr/>
+          <p:nvPr/>
+        </p:nvSpPr>
+        <p:spPr>
+          <a:xfrm>
+            <a:off x="0" y="0"/>
+            <a:ext cx="73152" cy="6858000"/>
+          </a:xfrm>
+          <a:prstGeom prst="rect">
+            <a:avLst/>
+          </a:prstGeom>
+          <a:solidFill>
+            <a:srgbClr val="003DA5"/>
+          </a:solidFill>
+          <a:ln>
+            <a:noFill/>
+          </a:ln>
+        </p:spPr>
+        <p:style>
+          <a:lnRef idx="1">
+            <a:schemeClr val="accent1"/>
+          </a:lnRef>
+          <a:fillRef idx="3">
+            <a:schemeClr val="accent1"/>
+          </a:fillRef>
+          <a:effectRef idx="2">
+            <a:schemeClr val="accent1"/>
+          </a:effectRef>
+          <a:fontRef idx="minor">
+            <a:schemeClr val="lt1"/>
+          </a:fontRef>
+        </p:style>
+        <p:txBody>
+          <a:bodyPr rtlCol="0" anchor="ctr"/>
+          <a:lstStyle/>
+          <a:p>
+            <a:pPr algn="ctr"/>
+          </a:p>
+        </p:txBody>
+      </p:sp>
+      <p:sp>
+        <p:nvSpPr>
+          <p:cNvPr id="3" name="TextBox 2"/>
+          <p:cNvSpPr txBox="1"/>
+          <p:nvPr/>
+        </p:nvSpPr>
+        <p:spPr>
+          <a:xfrm>
+            <a:off x="228600" y="182880"/>
+            <a:ext cx="11430000" cy="320040"/>
+          </a:xfrm>
+          <a:prstGeom prst="rect">
+            <a:avLst/>
+          </a:prstGeom>
+          <a:noFill/>
+        </p:spPr>
+        <p:txBody>
+          <a:bodyPr wrap="square">
+            <a:spAutoFit/>
+          </a:bodyPr>
+          <a:lstStyle/>
+          <a:p>
+            <a:pPr algn="l"/>
+            <a:r>
+              <a:rPr sz="900" b="0" i="0">
+                <a:solidFill>
+                  <a:srgbClr val="556575"/>
+                </a:solidFill>
+                <a:latin typeface="Arial"/>
+              </a:rPr>
+              <a:t>M10 · Modulinhalte</a:t>
+            </a:r>
+          </a:p>
+        </p:txBody>
+      </p:sp>
+      <p:sp>
+        <p:nvSpPr>
+          <p:cNvPr id="4" name="TextBox 3"/>
+          <p:cNvSpPr txBox="1"/>
+          <p:nvPr/>
+        </p:nvSpPr>
+        <p:spPr>
+          <a:xfrm>
+            <a:off x="365760" y="274320"/>
+            <a:ext cx="11430000" cy="777240"/>
+          </a:xfrm>
+          <a:prstGeom prst="rect">
+            <a:avLst/>
+          </a:prstGeom>
+          <a:noFill/>
+        </p:spPr>
+        <p:txBody>
+          <a:bodyPr wrap="square">
+            <a:spAutoFit/>
+          </a:bodyPr>
+          <a:lstStyle/>
+          <a:p>
+            <a:pPr algn="l"/>
+            <a:r>
+              <a:rPr sz="2200" b="1" i="0">
+                <a:solidFill>
+                  <a:srgbClr val="003DA5"/>
+                </a:solidFill>
+                <a:latin typeface="Arial"/>
+              </a:rPr>
+              <a:t>Optionale Rollenspielvarianten (für erfahrene Gruppen oder zweite Runde)</a:t>
+            </a:r>
+          </a:p>
+        </p:txBody>
+      </p:sp>
+      <p:sp>
+        <p:nvSpPr>
+          <p:cNvPr id="5" name="Rectangle 4"/>
+          <p:cNvSpPr/>
+          <p:nvPr/>
+        </p:nvSpPr>
+        <p:spPr>
+          <a:xfrm>
+            <a:off x="365760" y="1005840"/>
+            <a:ext cx="11430000" cy="27432"/>
+          </a:xfrm>
+          <a:prstGeom prst="rect">
+            <a:avLst/>
+          </a:prstGeom>
+          <a:solidFill>
+            <a:srgbClr val="D1D5DB"/>
+          </a:solidFill>
+          <a:ln>
+            <a:noFill/>
+          </a:ln>
+        </p:spPr>
+        <p:style>
+          <a:lnRef idx="1">
+            <a:schemeClr val="accent1"/>
+          </a:lnRef>
+          <a:fillRef idx="3">
+            <a:schemeClr val="accent1"/>
+          </a:fillRef>
+          <a:effectRef idx="2">
+            <a:schemeClr val="accent1"/>
+          </a:effectRef>
+          <a:fontRef idx="minor">
+            <a:schemeClr val="lt1"/>
+          </a:fontRef>
+        </p:style>
+        <p:txBody>
+          <a:bodyPr rtlCol="0" anchor="ctr"/>
+          <a:lstStyle/>
+          <a:p>
+            <a:pPr algn="ctr"/>
+          </a:p>
+        </p:txBody>
+      </p:sp>
+      <p:sp>
+        <p:nvSpPr>
+          <p:cNvPr id="6" name="TextBox 5"/>
+          <p:cNvSpPr txBox="1"/>
+          <p:nvPr/>
+        </p:nvSpPr>
+        <p:spPr>
+          <a:xfrm>
+            <a:off x="365760" y="1143000"/>
+            <a:ext cx="11430000" cy="5212080"/>
+          </a:xfrm>
+          <a:prstGeom prst="rect">
+            <a:avLst/>
+          </a:prstGeom>
+          <a:noFill/>
+        </p:spPr>
+        <p:txBody>
+          <a:bodyPr wrap="square">
+            <a:spAutoFit/>
+          </a:bodyPr>
+          <a:lstStyle/>
+          <a:p>
+            <a:pPr>
+              <a:spcBef>
+                <a:spcPts val="500"/>
+              </a:spcBef>
+            </a:pPr>
+            <a:r>
+              <a:rPr sz="1500">
+                <a:solidFill>
+                  <a:srgbClr val="003DA5"/>
+                </a:solidFill>
+                <a:latin typeface="Arial"/>
+              </a:rPr>
+              <a:t>▪  </a:t>
+            </a:r>
+            <a:r>
+              <a:rPr sz="1700">
+                <a:solidFill>
+                  <a:srgbClr val="1A1A1A"/>
+                </a:solidFill>
+                <a:latin typeface="Arial"/>
+              </a:rPr>
+              <a:t>Variante A – Der wortkarger Unternehmer Rollenkarte für Unternehmer-Spieler: Sie sind grundsätzlich zufrieden mit Ihrer Bank und sehen keinen Handlungsbedarf.…</a:t>
+            </a:r>
+          </a:p>
+          <a:p>
+            <a:pPr>
+              <a:spcBef>
+                <a:spcPts val="500"/>
+              </a:spcBef>
+            </a:pPr>
+            <a:r>
+              <a:rPr sz="1500">
+                <a:solidFill>
+                  <a:srgbClr val="003DA5"/>
+                </a:solidFill>
+                <a:latin typeface="Arial"/>
+              </a:rPr>
+              <a:t>▪  </a:t>
+            </a:r>
+            <a:r>
+              <a:rPr sz="1700">
+                <a:solidFill>
+                  <a:srgbClr val="1A1A1A"/>
+                </a:solidFill>
+                <a:latin typeface="Arial"/>
+              </a:rPr>
+              <a:t>Variante B – Zwei Gesellschafter am Tisch (GbR-Situation) Rollenkarten für zwei Unternehmer-Spieler: Sie sind gemeinsam GF einer GmbH &amp; Co. KG. Gesellschafter…</a:t>
+            </a:r>
+          </a:p>
+        </p:txBody>
+      </p:sp>
+    </p:spTree>
+  </p:cSld>
+  <p:clrMapOvr>
+    <a:masterClrMapping/>
+  </p:clrMapOvr>
+</p:sld>
+</file>
+
+<file path=ppt/slides/slide12.xml><?xml version="1.0" encoding="utf-8"?>
 <p:sld xmlns:a="http://schemas.openxmlformats.org/drawingml/2006/main" xmlns:p="http://schemas.openxmlformats.org/presentationml/2006/main" xmlns:r="http://schemas.openxmlformats.org/officeDocument/2006/relationships">
   <p:cSld>
     <p:bg>
@@ -3413,8 +4042,8 @@
         </p:nvSpPr>
         <p:spPr>
           <a:xfrm>
-            <a:off x="365760" y="2286000"/>
-            <a:ext cx="11430000" cy="1828800"/>
+            <a:off x="365760" y="2011680"/>
+            <a:ext cx="11430000" cy="2011680"/>
           </a:xfrm>
           <a:prstGeom prst="rect">
             <a:avLst/>
@@ -3429,13 +4058,13 @@
           <a:p>
             <a:pPr algn="l"/>
             <a:r>
-              <a:rPr sz="3600" b="1">
+              <a:rPr sz="3600" b="1" i="0">
                 <a:solidFill>
                   <a:srgbClr val="FFFFFF"/>
                 </a:solidFill>
                 <a:latin typeface="Arial"/>
               </a:rPr>
-              <a:t>Selbstcheck nach 4 Wochen</a:t>
+              <a:t>4.4 Beobachtungsbogen (für den dritten Rollenspieler)</a:t>
             </a:r>
           </a:p>
         </p:txBody>
@@ -3448,13 +4077,1213 @@
 </p:sld>
 </file>
 
-<file path=ppt/slides/slide11.xml><?xml version="1.0" encoding="utf-8"?>
+<file path=ppt/slides/slide13.xml><?xml version="1.0" encoding="utf-8"?>
 <p:sld xmlns:a="http://schemas.openxmlformats.org/drawingml/2006/main" xmlns:p="http://schemas.openxmlformats.org/presentationml/2006/main" xmlns:r="http://schemas.openxmlformats.org/officeDocument/2006/relationships">
   <p:cSld>
     <p:bg>
       <p:bgPr>
         <a:solidFill>
-          <a:srgbClr val="1A1A1A"/>
+          <a:srgbClr val="FFFFFF"/>
+        </a:solidFill>
+        <a:effectLst/>
+      </p:bgPr>
+    </p:bg>
+    <p:spTree>
+      <p:nvGrpSpPr>
+        <p:cNvPr id="1" name=""/>
+        <p:cNvGrpSpPr/>
+        <p:nvPr/>
+      </p:nvGrpSpPr>
+      <p:grpSpPr/>
+      <p:sp>
+        <p:nvSpPr>
+          <p:cNvPr id="2" name="Rectangle 1"/>
+          <p:cNvSpPr/>
+          <p:nvPr/>
+        </p:nvSpPr>
+        <p:spPr>
+          <a:xfrm>
+            <a:off x="0" y="0"/>
+            <a:ext cx="73152" cy="6858000"/>
+          </a:xfrm>
+          <a:prstGeom prst="rect">
+            <a:avLst/>
+          </a:prstGeom>
+          <a:solidFill>
+            <a:srgbClr val="003DA5"/>
+          </a:solidFill>
+          <a:ln>
+            <a:noFill/>
+          </a:ln>
+        </p:spPr>
+        <p:style>
+          <a:lnRef idx="1">
+            <a:schemeClr val="accent1"/>
+          </a:lnRef>
+          <a:fillRef idx="3">
+            <a:schemeClr val="accent1"/>
+          </a:fillRef>
+          <a:effectRef idx="2">
+            <a:schemeClr val="accent1"/>
+          </a:effectRef>
+          <a:fontRef idx="minor">
+            <a:schemeClr val="lt1"/>
+          </a:fontRef>
+        </p:style>
+        <p:txBody>
+          <a:bodyPr rtlCol="0" anchor="ctr"/>
+          <a:lstStyle/>
+          <a:p>
+            <a:pPr algn="ctr"/>
+          </a:p>
+        </p:txBody>
+      </p:sp>
+      <p:sp>
+        <p:nvSpPr>
+          <p:cNvPr id="3" name="TextBox 2"/>
+          <p:cNvSpPr txBox="1"/>
+          <p:nvPr/>
+        </p:nvSpPr>
+        <p:spPr>
+          <a:xfrm>
+            <a:off x="228600" y="182880"/>
+            <a:ext cx="11430000" cy="320040"/>
+          </a:xfrm>
+          <a:prstGeom prst="rect">
+            <a:avLst/>
+          </a:prstGeom>
+          <a:noFill/>
+        </p:spPr>
+        <p:txBody>
+          <a:bodyPr wrap="square">
+            <a:spAutoFit/>
+          </a:bodyPr>
+          <a:lstStyle/>
+          <a:p>
+            <a:pPr algn="l"/>
+            <a:r>
+              <a:rPr sz="900" b="0" i="0">
+                <a:solidFill>
+                  <a:srgbClr val="556575"/>
+                </a:solidFill>
+                <a:latin typeface="Arial"/>
+              </a:rPr>
+              <a:t>M10 · Modulinhalte</a:t>
+            </a:r>
+          </a:p>
+        </p:txBody>
+      </p:sp>
+      <p:sp>
+        <p:nvSpPr>
+          <p:cNvPr id="4" name="TextBox 3"/>
+          <p:cNvSpPr txBox="1"/>
+          <p:nvPr/>
+        </p:nvSpPr>
+        <p:spPr>
+          <a:xfrm>
+            <a:off x="365760" y="274320"/>
+            <a:ext cx="11430000" cy="777240"/>
+          </a:xfrm>
+          <a:prstGeom prst="rect">
+            <a:avLst/>
+          </a:prstGeom>
+          <a:noFill/>
+        </p:spPr>
+        <p:txBody>
+          <a:bodyPr wrap="square">
+            <a:spAutoFit/>
+          </a:bodyPr>
+          <a:lstStyle/>
+          <a:p>
+            <a:pPr algn="l"/>
+            <a:r>
+              <a:rPr sz="2200" b="1" i="0">
+                <a:solidFill>
+                  <a:srgbClr val="003DA5"/>
+                </a:solidFill>
+                <a:latin typeface="Arial"/>
+              </a:rPr>
+              <a:t>4.4 Beobachtungsbogen (für den dritten Rollenspieler)</a:t>
+            </a:r>
+          </a:p>
+        </p:txBody>
+      </p:sp>
+      <p:sp>
+        <p:nvSpPr>
+          <p:cNvPr id="5" name="Rectangle 4"/>
+          <p:cNvSpPr/>
+          <p:nvPr/>
+        </p:nvSpPr>
+        <p:spPr>
+          <a:xfrm>
+            <a:off x="365760" y="1005840"/>
+            <a:ext cx="11430000" cy="27432"/>
+          </a:xfrm>
+          <a:prstGeom prst="rect">
+            <a:avLst/>
+          </a:prstGeom>
+          <a:solidFill>
+            <a:srgbClr val="D1D5DB"/>
+          </a:solidFill>
+          <a:ln>
+            <a:noFill/>
+          </a:ln>
+        </p:spPr>
+        <p:style>
+          <a:lnRef idx="1">
+            <a:schemeClr val="accent1"/>
+          </a:lnRef>
+          <a:fillRef idx="3">
+            <a:schemeClr val="accent1"/>
+          </a:fillRef>
+          <a:effectRef idx="2">
+            <a:schemeClr val="accent1"/>
+          </a:effectRef>
+          <a:fontRef idx="minor">
+            <a:schemeClr val="lt1"/>
+          </a:fontRef>
+        </p:style>
+        <p:txBody>
+          <a:bodyPr rtlCol="0" anchor="ctr"/>
+          <a:lstStyle/>
+          <a:p>
+            <a:pPr algn="ctr"/>
+          </a:p>
+        </p:txBody>
+      </p:sp>
+      <p:graphicFrame>
+        <p:nvGraphicFramePr>
+          <p:cNvPr id="6" name="Table 5"/>
+          <p:cNvGraphicFramePr>
+            <a:graphicFrameLocks noGrp="1"/>
+          </p:cNvGraphicFramePr>
+          <p:nvPr/>
+        </p:nvGraphicFramePr>
+        <p:xfrm>
+          <a:off x="365760" y="1143000"/>
+          <a:ext cx="11430000" cy="5029200"/>
+        </p:xfrm>
+        <a:graphic>
+          <a:graphicData uri="http://schemas.openxmlformats.org/drawingml/2006/table">
+            <a:tbl>
+              <a:tblPr firstRow="1" bandRow="1">
+                <a:tableStyleId>{5C22544A-7EE6-4342-B048-85BDC9FD1C3A}</a:tableStyleId>
+              </a:tblPr>
+              <a:tblGrid>
+                <a:gridCol w="2857500"/>
+                <a:gridCol w="2857500"/>
+                <a:gridCol w="2857500"/>
+                <a:gridCol w="2857500"/>
+              </a:tblGrid>
+              <a:tr h="457200">
+                <a:tc>
+                  <a:txBody>
+                    <a:bodyPr wrap="square"/>
+                    <a:lstStyle/>
+                    <a:p>
+                      <a:r>
+                        <a:rPr sz="1100" b="1">
+                          <a:solidFill>
+                            <a:srgbClr val="FFFFFF"/>
+                          </a:solidFill>
+                          <a:latin typeface="Arial"/>
+                        </a:rPr>
+                        <a:t>Beobachtungskriterium</a:t>
+                      </a:r>
+                    </a:p>
+                  </a:txBody>
+                  <a:tcPr>
+                    <a:solidFill>
+                      <a:srgbClr val="003DA5"/>
+                    </a:solidFill>
+                  </a:tcPr>
+                </a:tc>
+                <a:tc>
+                  <a:txBody>
+                    <a:bodyPr wrap="square"/>
+                    <a:lstStyle/>
+                    <a:p>
+                      <a:r>
+                        <a:rPr sz="1100" b="1">
+                          <a:solidFill>
+                            <a:srgbClr val="FFFFFF"/>
+                          </a:solidFill>
+                          <a:latin typeface="Arial"/>
+                        </a:rPr>
+                        <a:t>Klar erfüllt</a:t>
+                      </a:r>
+                    </a:p>
+                  </a:txBody>
+                  <a:tcPr>
+                    <a:solidFill>
+                      <a:srgbClr val="003DA5"/>
+                    </a:solidFill>
+                  </a:tcPr>
+                </a:tc>
+                <a:tc>
+                  <a:txBody>
+                    <a:bodyPr wrap="square"/>
+                    <a:lstStyle/>
+                    <a:p>
+                      <a:r>
+                        <a:rPr sz="1100" b="1">
+                          <a:solidFill>
+                            <a:srgbClr val="FFFFFF"/>
+                          </a:solidFill>
+                          <a:latin typeface="Arial"/>
+                        </a:rPr>
+                        <a:t>Teilweise</a:t>
+                      </a:r>
+                    </a:p>
+                  </a:txBody>
+                  <a:tcPr>
+                    <a:solidFill>
+                      <a:srgbClr val="003DA5"/>
+                    </a:solidFill>
+                  </a:tcPr>
+                </a:tc>
+                <a:tc>
+                  <a:txBody>
+                    <a:bodyPr wrap="square"/>
+                    <a:lstStyle/>
+                    <a:p>
+                      <a:r>
+                        <a:rPr sz="1100" b="1">
+                          <a:solidFill>
+                            <a:srgbClr val="FFFFFF"/>
+                          </a:solidFill>
+                          <a:latin typeface="Arial"/>
+                        </a:rPr>
+                        <a:t>Nicht erfüllt</a:t>
+                      </a:r>
+                    </a:p>
+                  </a:txBody>
+                  <a:tcPr>
+                    <a:solidFill>
+                      <a:srgbClr val="003DA5"/>
+                    </a:solidFill>
+                  </a:tcPr>
+                </a:tc>
+              </a:tr>
+              <a:tr h="457200">
+                <a:tc>
+                  <a:txBody>
+                    <a:bodyPr wrap="square"/>
+                    <a:lstStyle/>
+                    <a:p>
+                      <a:r>
+                        <a:rPr sz="1100" b="0">
+                          <a:solidFill>
+                            <a:srgbClr val="1A1A1A"/>
+                          </a:solidFill>
+                          <a:latin typeface="Arial"/>
+                        </a:rPr>
+                        <a:t>Begrüßung und Erwartungsklärung zu Beginn</a:t>
+                      </a:r>
+                    </a:p>
+                  </a:txBody>
+                  <a:tcPr>
+                    <a:solidFill>
+                      <a:srgbClr val="FFFFFF"/>
+                    </a:solidFill>
+                  </a:tcPr>
+                </a:tc>
+                <a:tc>
+                  <a:txBody>
+                    <a:bodyPr wrap="square"/>
+                    <a:lstStyle/>
+                    <a:p>
+                      <a:r>
+                        <a:rPr sz="1100" b="0">
+                          <a:solidFill>
+                            <a:srgbClr val="1A1A1A"/>
+                          </a:solidFill>
+                          <a:latin typeface="Arial"/>
+                        </a:rPr>
+                        <a:t>☐</a:t>
+                      </a:r>
+                    </a:p>
+                  </a:txBody>
+                  <a:tcPr>
+                    <a:solidFill>
+                      <a:srgbClr val="FFFFFF"/>
+                    </a:solidFill>
+                  </a:tcPr>
+                </a:tc>
+                <a:tc>
+                  <a:txBody>
+                    <a:bodyPr wrap="square"/>
+                    <a:lstStyle/>
+                    <a:p>
+                      <a:r>
+                        <a:rPr sz="1100" b="0">
+                          <a:solidFill>
+                            <a:srgbClr val="1A1A1A"/>
+                          </a:solidFill>
+                          <a:latin typeface="Arial"/>
+                        </a:rPr>
+                        <a:t>☐</a:t>
+                      </a:r>
+                    </a:p>
+                  </a:txBody>
+                  <a:tcPr>
+                    <a:solidFill>
+                      <a:srgbClr val="FFFFFF"/>
+                    </a:solidFill>
+                  </a:tcPr>
+                </a:tc>
+                <a:tc>
+                  <a:txBody>
+                    <a:bodyPr wrap="square"/>
+                    <a:lstStyle/>
+                    <a:p>
+                      <a:r>
+                        <a:rPr sz="1100" b="0">
+                          <a:solidFill>
+                            <a:srgbClr val="1A1A1A"/>
+                          </a:solidFill>
+                          <a:latin typeface="Arial"/>
+                        </a:rPr>
+                        <a:t>☐</a:t>
+                      </a:r>
+                    </a:p>
+                  </a:txBody>
+                  <a:tcPr>
+                    <a:solidFill>
+                      <a:srgbClr val="FFFFFF"/>
+                    </a:solidFill>
+                  </a:tcPr>
+                </a:tc>
+              </a:tr>
+              <a:tr h="457200">
+                <a:tc>
+                  <a:txBody>
+                    <a:bodyPr wrap="square"/>
+                    <a:lstStyle/>
+                    <a:p>
+                      <a:r>
+                        <a:rPr sz="1100" b="0">
+                          <a:solidFill>
+                            <a:srgbClr val="1A1A1A"/>
+                          </a:solidFill>
+                          <a:latin typeface="Arial"/>
+                        </a:rPr>
+                        <a:t>Situationsfragen: Fakten systematisch erhoben</a:t>
+                      </a:r>
+                    </a:p>
+                  </a:txBody>
+                  <a:tcPr>
+                    <a:solidFill>
+                      <a:srgbClr val="F4F6FA"/>
+                    </a:solidFill>
+                  </a:tcPr>
+                </a:tc>
+                <a:tc>
+                  <a:txBody>
+                    <a:bodyPr wrap="square"/>
+                    <a:lstStyle/>
+                    <a:p>
+                      <a:r>
+                        <a:rPr sz="1100" b="0">
+                          <a:solidFill>
+                            <a:srgbClr val="1A1A1A"/>
+                          </a:solidFill>
+                          <a:latin typeface="Arial"/>
+                        </a:rPr>
+                        <a:t>☐</a:t>
+                      </a:r>
+                    </a:p>
+                  </a:txBody>
+                  <a:tcPr>
+                    <a:solidFill>
+                      <a:srgbClr val="F4F6FA"/>
+                    </a:solidFill>
+                  </a:tcPr>
+                </a:tc>
+                <a:tc>
+                  <a:txBody>
+                    <a:bodyPr wrap="square"/>
+                    <a:lstStyle/>
+                    <a:p>
+                      <a:r>
+                        <a:rPr sz="1100" b="0">
+                          <a:solidFill>
+                            <a:srgbClr val="1A1A1A"/>
+                          </a:solidFill>
+                          <a:latin typeface="Arial"/>
+                        </a:rPr>
+                        <a:t>☐</a:t>
+                      </a:r>
+                    </a:p>
+                  </a:txBody>
+                  <a:tcPr>
+                    <a:solidFill>
+                      <a:srgbClr val="F4F6FA"/>
+                    </a:solidFill>
+                  </a:tcPr>
+                </a:tc>
+                <a:tc>
+                  <a:txBody>
+                    <a:bodyPr wrap="square"/>
+                    <a:lstStyle/>
+                    <a:p>
+                      <a:r>
+                        <a:rPr sz="1100" b="0">
+                          <a:solidFill>
+                            <a:srgbClr val="1A1A1A"/>
+                          </a:solidFill>
+                          <a:latin typeface="Arial"/>
+                        </a:rPr>
+                        <a:t>☐</a:t>
+                      </a:r>
+                    </a:p>
+                  </a:txBody>
+                  <a:tcPr>
+                    <a:solidFill>
+                      <a:srgbClr val="F4F6FA"/>
+                    </a:solidFill>
+                  </a:tcPr>
+                </a:tc>
+              </a:tr>
+              <a:tr h="457200">
+                <a:tc>
+                  <a:txBody>
+                    <a:bodyPr wrap="square"/>
+                    <a:lstStyle/>
+                    <a:p>
+                      <a:r>
+                        <a:rPr sz="1100" b="0">
+                          <a:solidFill>
+                            <a:srgbClr val="1A1A1A"/>
+                          </a:solidFill>
+                          <a:latin typeface="Arial"/>
+                        </a:rPr>
+                        <a:t>Problemfragen: mindestens 2 Herausforderungen thematisiert</a:t>
+                      </a:r>
+                    </a:p>
+                  </a:txBody>
+                  <a:tcPr>
+                    <a:solidFill>
+                      <a:srgbClr val="FFFFFF"/>
+                    </a:solidFill>
+                  </a:tcPr>
+                </a:tc>
+                <a:tc>
+                  <a:txBody>
+                    <a:bodyPr wrap="square"/>
+                    <a:lstStyle/>
+                    <a:p>
+                      <a:r>
+                        <a:rPr sz="1100" b="0">
+                          <a:solidFill>
+                            <a:srgbClr val="1A1A1A"/>
+                          </a:solidFill>
+                          <a:latin typeface="Arial"/>
+                        </a:rPr>
+                        <a:t>☐</a:t>
+                      </a:r>
+                    </a:p>
+                  </a:txBody>
+                  <a:tcPr>
+                    <a:solidFill>
+                      <a:srgbClr val="FFFFFF"/>
+                    </a:solidFill>
+                  </a:tcPr>
+                </a:tc>
+                <a:tc>
+                  <a:txBody>
+                    <a:bodyPr wrap="square"/>
+                    <a:lstStyle/>
+                    <a:p>
+                      <a:r>
+                        <a:rPr sz="1100" b="0">
+                          <a:solidFill>
+                            <a:srgbClr val="1A1A1A"/>
+                          </a:solidFill>
+                          <a:latin typeface="Arial"/>
+                        </a:rPr>
+                        <a:t>☐</a:t>
+                      </a:r>
+                    </a:p>
+                  </a:txBody>
+                  <a:tcPr>
+                    <a:solidFill>
+                      <a:srgbClr val="FFFFFF"/>
+                    </a:solidFill>
+                  </a:tcPr>
+                </a:tc>
+                <a:tc>
+                  <a:txBody>
+                    <a:bodyPr wrap="square"/>
+                    <a:lstStyle/>
+                    <a:p>
+                      <a:r>
+                        <a:rPr sz="1100" b="0">
+                          <a:solidFill>
+                            <a:srgbClr val="1A1A1A"/>
+                          </a:solidFill>
+                          <a:latin typeface="Arial"/>
+                        </a:rPr>
+                        <a:t>☐</a:t>
+                      </a:r>
+                    </a:p>
+                  </a:txBody>
+                  <a:tcPr>
+                    <a:solidFill>
+                      <a:srgbClr val="FFFFFF"/>
+                    </a:solidFill>
+                  </a:tcPr>
+                </a:tc>
+              </a:tr>
+              <a:tr h="457200">
+                <a:tc>
+                  <a:txBody>
+                    <a:bodyPr wrap="square"/>
+                    <a:lstStyle/>
+                    <a:p>
+                      <a:r>
+                        <a:rPr sz="1100" b="0">
+                          <a:solidFill>
+                            <a:srgbClr val="1A1A1A"/>
+                          </a:solidFill>
+                          <a:latin typeface="Arial"/>
+                        </a:rPr>
+                        <a:t>Implikationsfragen: Konsequenzen von Problemen vertieft</a:t>
+                      </a:r>
+                    </a:p>
+                  </a:txBody>
+                  <a:tcPr>
+                    <a:solidFill>
+                      <a:srgbClr val="F4F6FA"/>
+                    </a:solidFill>
+                  </a:tcPr>
+                </a:tc>
+                <a:tc>
+                  <a:txBody>
+                    <a:bodyPr wrap="square"/>
+                    <a:lstStyle/>
+                    <a:p>
+                      <a:r>
+                        <a:rPr sz="1100" b="0">
+                          <a:solidFill>
+                            <a:srgbClr val="1A1A1A"/>
+                          </a:solidFill>
+                          <a:latin typeface="Arial"/>
+                        </a:rPr>
+                        <a:t>☐</a:t>
+                      </a:r>
+                    </a:p>
+                  </a:txBody>
+                  <a:tcPr>
+                    <a:solidFill>
+                      <a:srgbClr val="F4F6FA"/>
+                    </a:solidFill>
+                  </a:tcPr>
+                </a:tc>
+                <a:tc>
+                  <a:txBody>
+                    <a:bodyPr wrap="square"/>
+                    <a:lstStyle/>
+                    <a:p>
+                      <a:r>
+                        <a:rPr sz="1100" b="0">
+                          <a:solidFill>
+                            <a:srgbClr val="1A1A1A"/>
+                          </a:solidFill>
+                          <a:latin typeface="Arial"/>
+                        </a:rPr>
+                        <a:t>☐</a:t>
+                      </a:r>
+                    </a:p>
+                  </a:txBody>
+                  <a:tcPr>
+                    <a:solidFill>
+                      <a:srgbClr val="F4F6FA"/>
+                    </a:solidFill>
+                  </a:tcPr>
+                </a:tc>
+                <a:tc>
+                  <a:txBody>
+                    <a:bodyPr wrap="square"/>
+                    <a:lstStyle/>
+                    <a:p>
+                      <a:r>
+                        <a:rPr sz="1100" b="0">
+                          <a:solidFill>
+                            <a:srgbClr val="1A1A1A"/>
+                          </a:solidFill>
+                          <a:latin typeface="Arial"/>
+                        </a:rPr>
+                        <a:t>☐</a:t>
+                      </a:r>
+                    </a:p>
+                  </a:txBody>
+                  <a:tcPr>
+                    <a:solidFill>
+                      <a:srgbClr val="F4F6FA"/>
+                    </a:solidFill>
+                  </a:tcPr>
+                </a:tc>
+              </a:tr>
+              <a:tr h="457200">
+                <a:tc>
+                  <a:txBody>
+                    <a:bodyPr wrap="square"/>
+                    <a:lstStyle/>
+                    <a:p>
+                      <a:r>
+                        <a:rPr sz="1100" b="0">
+                          <a:solidFill>
+                            <a:srgbClr val="1A1A1A"/>
+                          </a:solidFill>
+                          <a:latin typeface="Arial"/>
+                        </a:rPr>
+                        <a:t>Nutzenfragen: Mehrwert durch Kunden formulieren lassen</a:t>
+                      </a:r>
+                    </a:p>
+                  </a:txBody>
+                  <a:tcPr>
+                    <a:solidFill>
+                      <a:srgbClr val="FFFFFF"/>
+                    </a:solidFill>
+                  </a:tcPr>
+                </a:tc>
+                <a:tc>
+                  <a:txBody>
+                    <a:bodyPr wrap="square"/>
+                    <a:lstStyle/>
+                    <a:p>
+                      <a:r>
+                        <a:rPr sz="1100" b="0">
+                          <a:solidFill>
+                            <a:srgbClr val="1A1A1A"/>
+                          </a:solidFill>
+                          <a:latin typeface="Arial"/>
+                        </a:rPr>
+                        <a:t>☐</a:t>
+                      </a:r>
+                    </a:p>
+                  </a:txBody>
+                  <a:tcPr>
+                    <a:solidFill>
+                      <a:srgbClr val="FFFFFF"/>
+                    </a:solidFill>
+                  </a:tcPr>
+                </a:tc>
+                <a:tc>
+                  <a:txBody>
+                    <a:bodyPr wrap="square"/>
+                    <a:lstStyle/>
+                    <a:p>
+                      <a:r>
+                        <a:rPr sz="1100" b="0">
+                          <a:solidFill>
+                            <a:srgbClr val="1A1A1A"/>
+                          </a:solidFill>
+                          <a:latin typeface="Arial"/>
+                        </a:rPr>
+                        <a:t>☐</a:t>
+                      </a:r>
+                    </a:p>
+                  </a:txBody>
+                  <a:tcPr>
+                    <a:solidFill>
+                      <a:srgbClr val="FFFFFF"/>
+                    </a:solidFill>
+                  </a:tcPr>
+                </a:tc>
+                <a:tc>
+                  <a:txBody>
+                    <a:bodyPr wrap="square"/>
+                    <a:lstStyle/>
+                    <a:p>
+                      <a:r>
+                        <a:rPr sz="1100" b="0">
+                          <a:solidFill>
+                            <a:srgbClr val="1A1A1A"/>
+                          </a:solidFill>
+                          <a:latin typeface="Arial"/>
+                        </a:rPr>
+                        <a:t>☐</a:t>
+                      </a:r>
+                    </a:p>
+                  </a:txBody>
+                  <a:tcPr>
+                    <a:solidFill>
+                      <a:srgbClr val="FFFFFF"/>
+                    </a:solidFill>
+                  </a:tcPr>
+                </a:tc>
+              </a:tr>
+              <a:tr h="457200">
+                <a:tc>
+                  <a:txBody>
+                    <a:bodyPr wrap="square"/>
+                    <a:lstStyle/>
+                    <a:p>
+                      <a:r>
+                        <a:rPr sz="1100" b="0">
+                          <a:solidFill>
+                            <a:srgbClr val="1A1A1A"/>
+                          </a:solidFill>
+                          <a:latin typeface="Arial"/>
+                        </a:rPr>
+                        <a:t>Aktives Zuhören (Paraphrasieren, kein sofortiges Gegenschlagen)</a:t>
+                      </a:r>
+                    </a:p>
+                  </a:txBody>
+                  <a:tcPr>
+                    <a:solidFill>
+                      <a:srgbClr val="F4F6FA"/>
+                    </a:solidFill>
+                  </a:tcPr>
+                </a:tc>
+                <a:tc>
+                  <a:txBody>
+                    <a:bodyPr wrap="square"/>
+                    <a:lstStyle/>
+                    <a:p>
+                      <a:r>
+                        <a:rPr sz="1100" b="0">
+                          <a:solidFill>
+                            <a:srgbClr val="1A1A1A"/>
+                          </a:solidFill>
+                          <a:latin typeface="Arial"/>
+                        </a:rPr>
+                        <a:t>☐</a:t>
+                      </a:r>
+                    </a:p>
+                  </a:txBody>
+                  <a:tcPr>
+                    <a:solidFill>
+                      <a:srgbClr val="F4F6FA"/>
+                    </a:solidFill>
+                  </a:tcPr>
+                </a:tc>
+                <a:tc>
+                  <a:txBody>
+                    <a:bodyPr wrap="square"/>
+                    <a:lstStyle/>
+                    <a:p>
+                      <a:r>
+                        <a:rPr sz="1100" b="0">
+                          <a:solidFill>
+                            <a:srgbClr val="1A1A1A"/>
+                          </a:solidFill>
+                          <a:latin typeface="Arial"/>
+                        </a:rPr>
+                        <a:t>☐</a:t>
+                      </a:r>
+                    </a:p>
+                  </a:txBody>
+                  <a:tcPr>
+                    <a:solidFill>
+                      <a:srgbClr val="F4F6FA"/>
+                    </a:solidFill>
+                  </a:tcPr>
+                </a:tc>
+                <a:tc>
+                  <a:txBody>
+                    <a:bodyPr wrap="square"/>
+                    <a:lstStyle/>
+                    <a:p>
+                      <a:r>
+                        <a:rPr sz="1100" b="0">
+                          <a:solidFill>
+                            <a:srgbClr val="1A1A1A"/>
+                          </a:solidFill>
+                          <a:latin typeface="Arial"/>
+                        </a:rPr>
+                        <a:t>☐</a:t>
+                      </a:r>
+                    </a:p>
+                  </a:txBody>
+                  <a:tcPr>
+                    <a:solidFill>
+                      <a:srgbClr val="F4F6FA"/>
+                    </a:solidFill>
+                  </a:tcPr>
+                </a:tc>
+              </a:tr>
+              <a:tr h="457200">
+                <a:tc>
+                  <a:txBody>
+                    <a:bodyPr wrap="square"/>
+                    <a:lstStyle/>
+                    <a:p>
+                      <a:r>
+                        <a:rPr sz="1100" b="0">
+                          <a:solidFill>
+                            <a:srgbClr val="1A1A1A"/>
+                          </a:solidFill>
+                          <a:latin typeface="Arial"/>
+                        </a:rPr>
+                        <a:t>Vier-Ohren: Signale jenseits des Sachinhalts aufgegriffen</a:t>
+                      </a:r>
+                    </a:p>
+                  </a:txBody>
+                  <a:tcPr>
+                    <a:solidFill>
+                      <a:srgbClr val="FFFFFF"/>
+                    </a:solidFill>
+                  </a:tcPr>
+                </a:tc>
+                <a:tc>
+                  <a:txBody>
+                    <a:bodyPr wrap="square"/>
+                    <a:lstStyle/>
+                    <a:p>
+                      <a:r>
+                        <a:rPr sz="1100" b="0">
+                          <a:solidFill>
+                            <a:srgbClr val="1A1A1A"/>
+                          </a:solidFill>
+                          <a:latin typeface="Arial"/>
+                        </a:rPr>
+                        <a:t>☐</a:t>
+                      </a:r>
+                    </a:p>
+                  </a:txBody>
+                  <a:tcPr>
+                    <a:solidFill>
+                      <a:srgbClr val="FFFFFF"/>
+                    </a:solidFill>
+                  </a:tcPr>
+                </a:tc>
+                <a:tc>
+                  <a:txBody>
+                    <a:bodyPr wrap="square"/>
+                    <a:lstStyle/>
+                    <a:p>
+                      <a:r>
+                        <a:rPr sz="1100" b="0">
+                          <a:solidFill>
+                            <a:srgbClr val="1A1A1A"/>
+                          </a:solidFill>
+                          <a:latin typeface="Arial"/>
+                        </a:rPr>
+                        <a:t>☐</a:t>
+                      </a:r>
+                    </a:p>
+                  </a:txBody>
+                  <a:tcPr>
+                    <a:solidFill>
+                      <a:srgbClr val="FFFFFF"/>
+                    </a:solidFill>
+                  </a:tcPr>
+                </a:tc>
+                <a:tc>
+                  <a:txBody>
+                    <a:bodyPr wrap="square"/>
+                    <a:lstStyle/>
+                    <a:p>
+                      <a:r>
+                        <a:rPr sz="1100" b="0">
+                          <a:solidFill>
+                            <a:srgbClr val="1A1A1A"/>
+                          </a:solidFill>
+                          <a:latin typeface="Arial"/>
+                        </a:rPr>
+                        <a:t>☐</a:t>
+                      </a:r>
+                    </a:p>
+                  </a:txBody>
+                  <a:tcPr>
+                    <a:solidFill>
+                      <a:srgbClr val="FFFFFF"/>
+                    </a:solidFill>
+                  </a:tcPr>
+                </a:tc>
+              </a:tr>
+              <a:tr h="457200">
+                <a:tc>
+                  <a:txBody>
+                    <a:bodyPr wrap="square"/>
+                    <a:lstStyle/>
+                    <a:p>
+                      <a:r>
+                        <a:rPr sz="1100" b="0">
+                          <a:solidFill>
+                            <a:srgbClr val="1A1A1A"/>
+                          </a:solidFill>
+                          <a:latin typeface="Arial"/>
+                        </a:rPr>
+                        <a:t>Themenübergänge im UnternehmerDialog strukturiert gestaltet</a:t>
+                      </a:r>
+                    </a:p>
+                  </a:txBody>
+                  <a:tcPr>
+                    <a:solidFill>
+                      <a:srgbClr val="F4F6FA"/>
+                    </a:solidFill>
+                  </a:tcPr>
+                </a:tc>
+                <a:tc>
+                  <a:txBody>
+                    <a:bodyPr wrap="square"/>
+                    <a:lstStyle/>
+                    <a:p>
+                      <a:r>
+                        <a:rPr sz="1100" b="0">
+                          <a:solidFill>
+                            <a:srgbClr val="1A1A1A"/>
+                          </a:solidFill>
+                          <a:latin typeface="Arial"/>
+                        </a:rPr>
+                        <a:t>☐</a:t>
+                      </a:r>
+                    </a:p>
+                  </a:txBody>
+                  <a:tcPr>
+                    <a:solidFill>
+                      <a:srgbClr val="F4F6FA"/>
+                    </a:solidFill>
+                  </a:tcPr>
+                </a:tc>
+                <a:tc>
+                  <a:txBody>
+                    <a:bodyPr wrap="square"/>
+                    <a:lstStyle/>
+                    <a:p>
+                      <a:r>
+                        <a:rPr sz="1100" b="0">
+                          <a:solidFill>
+                            <a:srgbClr val="1A1A1A"/>
+                          </a:solidFill>
+                          <a:latin typeface="Arial"/>
+                        </a:rPr>
+                        <a:t>☐</a:t>
+                      </a:r>
+                    </a:p>
+                  </a:txBody>
+                  <a:tcPr>
+                    <a:solidFill>
+                      <a:srgbClr val="F4F6FA"/>
+                    </a:solidFill>
+                  </a:tcPr>
+                </a:tc>
+                <a:tc>
+                  <a:txBody>
+                    <a:bodyPr wrap="square"/>
+                    <a:lstStyle/>
+                    <a:p>
+                      <a:r>
+                        <a:rPr sz="1100" b="0">
+                          <a:solidFill>
+                            <a:srgbClr val="1A1A1A"/>
+                          </a:solidFill>
+                          <a:latin typeface="Arial"/>
+                        </a:rPr>
+                        <a:t>☐</a:t>
+                      </a:r>
+                    </a:p>
+                  </a:txBody>
+                  <a:tcPr>
+                    <a:solidFill>
+                      <a:srgbClr val="F4F6FA"/>
+                    </a:solidFill>
+                  </a:tcPr>
+                </a:tc>
+              </a:tr>
+              <a:tr h="457200">
+                <a:tc>
+                  <a:txBody>
+                    <a:bodyPr wrap="square"/>
+                    <a:lstStyle/>
+                    <a:p>
+                      <a:r>
+                        <a:rPr sz="1100" b="0">
+                          <a:solidFill>
+                            <a:srgbClr val="1A1A1A"/>
+                          </a:solidFill>
+                          <a:latin typeface="Arial"/>
+                        </a:rPr>
+                        <a:t>Latenter Bedarf identifiziert (min. 1)</a:t>
+                      </a:r>
+                    </a:p>
+                  </a:txBody>
+                  <a:tcPr>
+                    <a:solidFill>
+                      <a:srgbClr val="FFFFFF"/>
+                    </a:solidFill>
+                  </a:tcPr>
+                </a:tc>
+                <a:tc>
+                  <a:txBody>
+                    <a:bodyPr wrap="square"/>
+                    <a:lstStyle/>
+                    <a:p>
+                      <a:r>
+                        <a:rPr sz="1100" b="0">
+                          <a:solidFill>
+                            <a:srgbClr val="1A1A1A"/>
+                          </a:solidFill>
+                          <a:latin typeface="Arial"/>
+                        </a:rPr>
+                        <a:t>☐</a:t>
+                      </a:r>
+                    </a:p>
+                  </a:txBody>
+                  <a:tcPr>
+                    <a:solidFill>
+                      <a:srgbClr val="FFFFFF"/>
+                    </a:solidFill>
+                  </a:tcPr>
+                </a:tc>
+                <a:tc>
+                  <a:txBody>
+                    <a:bodyPr wrap="square"/>
+                    <a:lstStyle/>
+                    <a:p>
+                      <a:r>
+                        <a:rPr sz="1100" b="0">
+                          <a:solidFill>
+                            <a:srgbClr val="1A1A1A"/>
+                          </a:solidFill>
+                          <a:latin typeface="Arial"/>
+                        </a:rPr>
+                        <a:t>☐</a:t>
+                      </a:r>
+                    </a:p>
+                  </a:txBody>
+                  <a:tcPr>
+                    <a:solidFill>
+                      <a:srgbClr val="FFFFFF"/>
+                    </a:solidFill>
+                  </a:tcPr>
+                </a:tc>
+                <a:tc>
+                  <a:txBody>
+                    <a:bodyPr wrap="square"/>
+                    <a:lstStyle/>
+                    <a:p>
+                      <a:r>
+                        <a:rPr sz="1100" b="0">
+                          <a:solidFill>
+                            <a:srgbClr val="1A1A1A"/>
+                          </a:solidFill>
+                          <a:latin typeface="Arial"/>
+                        </a:rPr>
+                        <a:t>☐</a:t>
+                      </a:r>
+                    </a:p>
+                  </a:txBody>
+                  <a:tcPr>
+                    <a:solidFill>
+                      <a:srgbClr val="FFFFFF"/>
+                    </a:solidFill>
+                  </a:tcPr>
+                </a:tc>
+              </a:tr>
+              <a:tr h="457200">
+                <a:tc>
+                  <a:txBody>
+                    <a:bodyPr wrap="square"/>
+                    <a:lstStyle/>
+                    <a:p>
+                      <a:r>
+                        <a:rPr sz="1100" b="0">
+                          <a:solidFill>
+                            <a:srgbClr val="1A1A1A"/>
+                          </a:solidFill>
+                          <a:latin typeface="Arial"/>
+                        </a:rPr>
+                        <a:t>Vereinbarungen / Maßnahmen am Ende festgehalten</a:t>
+                      </a:r>
+                    </a:p>
+                  </a:txBody>
+                  <a:tcPr>
+                    <a:solidFill>
+                      <a:srgbClr val="F4F6FA"/>
+                    </a:solidFill>
+                  </a:tcPr>
+                </a:tc>
+                <a:tc>
+                  <a:txBody>
+                    <a:bodyPr wrap="square"/>
+                    <a:lstStyle/>
+                    <a:p>
+                      <a:r>
+                        <a:rPr sz="1100" b="0">
+                          <a:solidFill>
+                            <a:srgbClr val="1A1A1A"/>
+                          </a:solidFill>
+                          <a:latin typeface="Arial"/>
+                        </a:rPr>
+                        <a:t>☐</a:t>
+                      </a:r>
+                    </a:p>
+                  </a:txBody>
+                  <a:tcPr>
+                    <a:solidFill>
+                      <a:srgbClr val="F4F6FA"/>
+                    </a:solidFill>
+                  </a:tcPr>
+                </a:tc>
+                <a:tc>
+                  <a:txBody>
+                    <a:bodyPr wrap="square"/>
+                    <a:lstStyle/>
+                    <a:p>
+                      <a:r>
+                        <a:rPr sz="1100" b="0">
+                          <a:solidFill>
+                            <a:srgbClr val="1A1A1A"/>
+                          </a:solidFill>
+                          <a:latin typeface="Arial"/>
+                        </a:rPr>
+                        <a:t>☐</a:t>
+                      </a:r>
+                    </a:p>
+                  </a:txBody>
+                  <a:tcPr>
+                    <a:solidFill>
+                      <a:srgbClr val="F4F6FA"/>
+                    </a:solidFill>
+                  </a:tcPr>
+                </a:tc>
+                <a:tc>
+                  <a:txBody>
+                    <a:bodyPr wrap="square"/>
+                    <a:lstStyle/>
+                    <a:p>
+                      <a:r>
+                        <a:rPr sz="1100" b="0">
+                          <a:solidFill>
+                            <a:srgbClr val="1A1A1A"/>
+                          </a:solidFill>
+                          <a:latin typeface="Arial"/>
+                        </a:rPr>
+                        <a:t>☐</a:t>
+                      </a:r>
+                    </a:p>
+                  </a:txBody>
+                  <a:tcPr>
+                    <a:solidFill>
+                      <a:srgbClr val="F4F6FA"/>
+                    </a:solidFill>
+                  </a:tcPr>
+                </a:tc>
+              </a:tr>
+            </a:tbl>
+          </a:graphicData>
+        </a:graphic>
+      </p:graphicFrame>
+    </p:spTree>
+  </p:cSld>
+  <p:clrMapOvr>
+    <a:masterClrMapping/>
+  </p:clrMapOvr>
+</p:sld>
+</file>
+
+<file path=ppt/slides/slide14.xml><?xml version="1.0" encoding="utf-8"?>
+<p:sld xmlns:a="http://schemas.openxmlformats.org/drawingml/2006/main" xmlns:p="http://schemas.openxmlformats.org/presentationml/2006/main" xmlns:r="http://schemas.openxmlformats.org/officeDocument/2006/relationships">
+  <p:cSld>
+    <p:bg>
+      <p:bgPr>
+        <a:solidFill>
+          <a:srgbClr val="003DA5"/>
         </a:solidFill>
         <a:effectLst/>
       </p:bgPr>
@@ -3517,8 +5346,8 @@
         </p:nvSpPr>
         <p:spPr>
           <a:xfrm>
-            <a:off x="365760" y="2286000"/>
-            <a:ext cx="11430000" cy="1828800"/>
+            <a:off x="365760" y="347472"/>
+            <a:ext cx="7315200" cy="384048"/>
           </a:xfrm>
           <a:prstGeom prst="rect">
             <a:avLst/>
@@ -3533,13 +5362,224 @@
           <a:p>
             <a:pPr algn="l"/>
             <a:r>
-              <a:rPr sz="3600" b="1">
+              <a:rPr sz="900" b="1" i="0">
+                <a:solidFill>
+                  <a:srgbClr val="CCD6F0"/>
+                </a:solidFill>
+                <a:latin typeface="Arial"/>
+              </a:rPr>
+              <a:t>PRAXISTRANSFER &amp; NÄCHSTE SCHRITTE</a:t>
+            </a:r>
+          </a:p>
+        </p:txBody>
+      </p:sp>
+      <p:sp>
+        <p:nvSpPr>
+          <p:cNvPr id="4" name="Rectangle 3"/>
+          <p:cNvSpPr/>
+          <p:nvPr/>
+        </p:nvSpPr>
+        <p:spPr>
+          <a:xfrm>
+            <a:off x="365760" y="804672"/>
+            <a:ext cx="8229600" cy="22860"/>
+          </a:xfrm>
+          <a:prstGeom prst="rect">
+            <a:avLst/>
+          </a:prstGeom>
+          <a:solidFill>
+            <a:srgbClr val="335CC0"/>
+          </a:solidFill>
+          <a:ln>
+            <a:noFill/>
+          </a:ln>
+        </p:spPr>
+        <p:style>
+          <a:lnRef idx="1">
+            <a:schemeClr val="accent1"/>
+          </a:lnRef>
+          <a:fillRef idx="3">
+            <a:schemeClr val="accent1"/>
+          </a:fillRef>
+          <a:effectRef idx="2">
+            <a:schemeClr val="accent1"/>
+          </a:effectRef>
+          <a:fontRef idx="minor">
+            <a:schemeClr val="lt1"/>
+          </a:fontRef>
+        </p:style>
+        <p:txBody>
+          <a:bodyPr rtlCol="0" anchor="ctr"/>
+          <a:lstStyle/>
+          <a:p>
+            <a:pPr algn="ctr"/>
+          </a:p>
+        </p:txBody>
+      </p:sp>
+      <p:sp>
+        <p:nvSpPr>
+          <p:cNvPr id="5" name="TextBox 4"/>
+          <p:cNvSpPr txBox="1"/>
+          <p:nvPr/>
+        </p:nvSpPr>
+        <p:spPr>
+          <a:xfrm>
+            <a:off x="365760" y="960120"/>
+            <a:ext cx="9144000" cy="914400"/>
+          </a:xfrm>
+          <a:prstGeom prst="rect">
+            <a:avLst/>
+          </a:prstGeom>
+          <a:noFill/>
+        </p:spPr>
+        <p:txBody>
+          <a:bodyPr wrap="square">
+            <a:spAutoFit/>
+          </a:bodyPr>
+          <a:lstStyle/>
+          <a:p>
+            <a:pPr algn="l"/>
+            <a:r>
+              <a:rPr sz="3000" b="1" i="0">
                 <a:solidFill>
                   <a:srgbClr val="FFFFFF"/>
                 </a:solidFill>
                 <a:latin typeface="Arial"/>
               </a:rPr>
-              <a:t>Kommunikation &amp; Gesprächsführung</a:t>
+              <a:t>Was nehmen Sie mit?</a:t>
+            </a:r>
+          </a:p>
+        </p:txBody>
+      </p:sp>
+      <p:sp>
+        <p:nvSpPr>
+          <p:cNvPr id="6" name="TextBox 5"/>
+          <p:cNvSpPr txBox="1"/>
+          <p:nvPr/>
+        </p:nvSpPr>
+        <p:spPr>
+          <a:xfrm>
+            <a:off x="365760" y="2103120"/>
+            <a:ext cx="11430000" cy="4114800"/>
+          </a:xfrm>
+          <a:prstGeom prst="rect">
+            <a:avLst/>
+          </a:prstGeom>
+          <a:noFill/>
+        </p:spPr>
+        <p:txBody>
+          <a:bodyPr wrap="square">
+            <a:spAutoFit/>
+          </a:bodyPr>
+          <a:lstStyle/>
+          <a:p>
+            <a:pPr>
+              <a:spcBef>
+                <a:spcPts val="500"/>
+              </a:spcBef>
+            </a:pPr>
+            <a:r>
+              <a:rPr sz="1600">
+                <a:solidFill>
+                  <a:srgbClr val="E05B00"/>
+                </a:solidFill>
+                <a:latin typeface="Arial"/>
+              </a:rPr>
+              <a:t>▪  </a:t>
+            </a:r>
+            <a:r>
+              <a:rPr sz="1800">
+                <a:solidFill>
+                  <a:srgbClr val="FFFFFF"/>
+                </a:solidFill>
+                <a:latin typeface="Arial"/>
+              </a:rPr>
+              <a:t>Transferaufgabe: Wenden Sie das Gelernte in den nächsten 14 Tagen bei einem konkreten Kunden an.</a:t>
+            </a:r>
+          </a:p>
+          <a:p>
+            <a:pPr>
+              <a:spcBef>
+                <a:spcPts val="500"/>
+              </a:spcBef>
+            </a:pPr>
+            <a:r>
+              <a:rPr sz="1600">
+                <a:solidFill>
+                  <a:srgbClr val="E05B00"/>
+                </a:solidFill>
+                <a:latin typeface="Arial"/>
+              </a:rPr>
+              <a:t>▪  </a:t>
+            </a:r>
+            <a:r>
+              <a:rPr sz="1800">
+                <a:solidFill>
+                  <a:srgbClr val="FFFFFF"/>
+                </a:solidFill>
+                <a:latin typeface="Arial"/>
+              </a:rPr>
+              <a:t>Selbstcheck nach 4 Wochen: Bewerten Sie Ihre Fortschritte ehrlich.</a:t>
+            </a:r>
+          </a:p>
+          <a:p>
+            <a:pPr>
+              <a:spcBef>
+                <a:spcPts val="500"/>
+              </a:spcBef>
+            </a:pPr>
+            <a:r>
+              <a:rPr sz="1600">
+                <a:solidFill>
+                  <a:srgbClr val="E05B00"/>
+                </a:solidFill>
+                <a:latin typeface="Arial"/>
+              </a:rPr>
+              <a:t>▪  </a:t>
+            </a:r>
+            <a:r>
+              <a:rPr sz="1800">
+                <a:solidFill>
+                  <a:srgbClr val="FFFFFF"/>
+                </a:solidFill>
+                <a:latin typeface="Arial"/>
+              </a:rPr>
+              <a:t>Nächste Module: M11, M12</a:t>
+            </a:r>
+          </a:p>
+        </p:txBody>
+      </p:sp>
+      <p:sp>
+        <p:nvSpPr>
+          <p:cNvPr id="7" name="TextBox 6"/>
+          <p:cNvSpPr txBox="1"/>
+          <p:nvPr/>
+        </p:nvSpPr>
+        <p:spPr>
+          <a:xfrm>
+            <a:off x="365760" y="6309360"/>
+            <a:ext cx="11430000" cy="365760"/>
+          </a:xfrm>
+          <a:prstGeom prst="rect">
+            <a:avLst/>
+          </a:prstGeom>
+          <a:noFill/>
+        </p:spPr>
+        <p:txBody>
+          <a:bodyPr wrap="square">
+            <a:spAutoFit/>
+          </a:bodyPr>
+          <a:lstStyle/>
+          <a:p>
+            <a:pPr algn="l"/>
+            <a:r>
+              <a:rPr sz="900" b="0" i="0">
+                <a:solidFill>
+                  <a:srgbClr val="889ACC"/>
+                </a:solidFill>
+                <a:latin typeface="Arial"/>
+              </a:rPr>
+              <a:t>M10 · Strukturierte Bedarfsanalyse  ·  v1.0  ·  Benedikt Zoller Coaching</a:t>
             </a:r>
           </a:p>
         </p:txBody>
@@ -3552,7 +5592,287 @@
 </p:sld>
 </file>
 
-<file path=ppt/slides/slide12.xml><?xml version="1.0" encoding="utf-8"?>
+<file path=ppt/slides/slide2.xml><?xml version="1.0" encoding="utf-8"?>
+<p:sld xmlns:a="http://schemas.openxmlformats.org/drawingml/2006/main" xmlns:p="http://schemas.openxmlformats.org/presentationml/2006/main" xmlns:r="http://schemas.openxmlformats.org/officeDocument/2006/relationships">
+  <p:cSld>
+    <p:bg>
+      <p:bgPr>
+        <a:solidFill>
+          <a:srgbClr val="F4F6FA"/>
+        </a:solidFill>
+        <a:effectLst/>
+      </p:bgPr>
+    </p:bg>
+    <p:spTree>
+      <p:nvGrpSpPr>
+        <p:cNvPr id="1" name=""/>
+        <p:cNvGrpSpPr/>
+        <p:nvPr/>
+      </p:nvGrpSpPr>
+      <p:grpSpPr/>
+      <p:sp>
+        <p:nvSpPr>
+          <p:cNvPr id="2" name="Rectangle 1"/>
+          <p:cNvSpPr/>
+          <p:nvPr/>
+        </p:nvSpPr>
+        <p:spPr>
+          <a:xfrm>
+            <a:off x="0" y="0"/>
+            <a:ext cx="73152" cy="6858000"/>
+          </a:xfrm>
+          <a:prstGeom prst="rect">
+            <a:avLst/>
+          </a:prstGeom>
+          <a:solidFill>
+            <a:srgbClr val="003DA5"/>
+          </a:solidFill>
+          <a:ln>
+            <a:noFill/>
+          </a:ln>
+        </p:spPr>
+        <p:style>
+          <a:lnRef idx="1">
+            <a:schemeClr val="accent1"/>
+          </a:lnRef>
+          <a:fillRef idx="3">
+            <a:schemeClr val="accent1"/>
+          </a:fillRef>
+          <a:effectRef idx="2">
+            <a:schemeClr val="accent1"/>
+          </a:effectRef>
+          <a:fontRef idx="minor">
+            <a:schemeClr val="lt1"/>
+          </a:fontRef>
+        </p:style>
+        <p:txBody>
+          <a:bodyPr rtlCol="0" anchor="ctr"/>
+          <a:lstStyle/>
+          <a:p>
+            <a:pPr algn="ctr"/>
+          </a:p>
+        </p:txBody>
+      </p:sp>
+      <p:sp>
+        <p:nvSpPr>
+          <p:cNvPr id="3" name="Rectangle 2"/>
+          <p:cNvSpPr/>
+          <p:nvPr/>
+        </p:nvSpPr>
+        <p:spPr>
+          <a:xfrm>
+            <a:off x="228600" y="804672"/>
+            <a:ext cx="11612880" cy="22860"/>
+          </a:xfrm>
+          <a:prstGeom prst="rect">
+            <a:avLst/>
+          </a:prstGeom>
+          <a:solidFill>
+            <a:srgbClr val="D1D5DB"/>
+          </a:solidFill>
+          <a:ln>
+            <a:noFill/>
+          </a:ln>
+        </p:spPr>
+        <p:style>
+          <a:lnRef idx="1">
+            <a:schemeClr val="accent1"/>
+          </a:lnRef>
+          <a:fillRef idx="3">
+            <a:schemeClr val="accent1"/>
+          </a:fillRef>
+          <a:effectRef idx="2">
+            <a:schemeClr val="accent1"/>
+          </a:effectRef>
+          <a:fontRef idx="minor">
+            <a:schemeClr val="lt1"/>
+          </a:fontRef>
+        </p:style>
+        <p:txBody>
+          <a:bodyPr rtlCol="0" anchor="ctr"/>
+          <a:lstStyle/>
+          <a:p>
+            <a:pPr algn="ctr"/>
+          </a:p>
+        </p:txBody>
+      </p:sp>
+      <p:sp>
+        <p:nvSpPr>
+          <p:cNvPr id="4" name="TextBox 3"/>
+          <p:cNvSpPr txBox="1"/>
+          <p:nvPr/>
+        </p:nvSpPr>
+        <p:spPr>
+          <a:xfrm>
+            <a:off x="365760" y="320040"/>
+            <a:ext cx="4572000" cy="347472"/>
+          </a:xfrm>
+          <a:prstGeom prst="rect">
+            <a:avLst/>
+          </a:prstGeom>
+          <a:noFill/>
+        </p:spPr>
+        <p:txBody>
+          <a:bodyPr wrap="square">
+            <a:spAutoFit/>
+          </a:bodyPr>
+          <a:lstStyle/>
+          <a:p>
+            <a:pPr algn="l"/>
+            <a:r>
+              <a:rPr sz="900" b="1" i="0">
+                <a:solidFill>
+                  <a:srgbClr val="003DA5"/>
+                </a:solidFill>
+                <a:latin typeface="Arial"/>
+              </a:rPr>
+              <a:t>LERNZIELE</a:t>
+            </a:r>
+          </a:p>
+        </p:txBody>
+      </p:sp>
+      <p:sp>
+        <p:nvSpPr>
+          <p:cNvPr id="5" name="TextBox 4"/>
+          <p:cNvSpPr txBox="1"/>
+          <p:nvPr/>
+        </p:nvSpPr>
+        <p:spPr>
+          <a:xfrm>
+            <a:off x="365760" y="502920"/>
+            <a:ext cx="10058400" cy="640080"/>
+          </a:xfrm>
+          <a:prstGeom prst="rect">
+            <a:avLst/>
+          </a:prstGeom>
+          <a:noFill/>
+        </p:spPr>
+        <p:txBody>
+          <a:bodyPr wrap="square">
+            <a:spAutoFit/>
+          </a:bodyPr>
+          <a:lstStyle/>
+          <a:p>
+            <a:pPr algn="l"/>
+            <a:r>
+              <a:rPr sz="2400" b="1" i="0">
+                <a:solidFill>
+                  <a:srgbClr val="1A1A1A"/>
+                </a:solidFill>
+                <a:latin typeface="Arial"/>
+              </a:rPr>
+              <a:t>Was Sie nach diesem Modul können.</a:t>
+            </a:r>
+          </a:p>
+        </p:txBody>
+      </p:sp>
+      <p:sp>
+        <p:nvSpPr>
+          <p:cNvPr id="6" name="TextBox 5"/>
+          <p:cNvSpPr txBox="1"/>
+          <p:nvPr/>
+        </p:nvSpPr>
+        <p:spPr>
+          <a:xfrm>
+            <a:off x="365760" y="1234440"/>
+            <a:ext cx="11430000" cy="5303520"/>
+          </a:xfrm>
+          <a:prstGeom prst="rect">
+            <a:avLst/>
+          </a:prstGeom>
+          <a:noFill/>
+        </p:spPr>
+        <p:txBody>
+          <a:bodyPr wrap="square">
+            <a:spAutoFit/>
+          </a:bodyPr>
+          <a:lstStyle/>
+          <a:p>
+            <a:pPr>
+              <a:spcBef>
+                <a:spcPts val="500"/>
+              </a:spcBef>
+            </a:pPr>
+            <a:r>
+              <a:rPr sz="1500">
+                <a:solidFill>
+                  <a:srgbClr val="003DA5"/>
+                </a:solidFill>
+                <a:latin typeface="Arial"/>
+              </a:rPr>
+              <a:t>▪  </a:t>
+            </a:r>
+            <a:r>
+              <a:rPr sz="1700">
+                <a:solidFill>
+                  <a:srgbClr val="1A1A1A"/>
+                </a:solidFill>
+                <a:latin typeface="Arial"/>
+              </a:rPr>
+              <a:t>Den UnternehmerDialog als strukturiertes Gesprächsführungsinstrument situationsgerecht einsetzen und alle relevanten Bedarfsdimensionen systematisch erschließen</a:t>
+            </a:r>
+          </a:p>
+          <a:p>
+            <a:pPr>
+              <a:spcBef>
+                <a:spcPts val="500"/>
+              </a:spcBef>
+            </a:pPr>
+            <a:r>
+              <a:rPr sz="1500">
+                <a:solidFill>
+                  <a:srgbClr val="003DA5"/>
+                </a:solidFill>
+                <a:latin typeface="Arial"/>
+              </a:rPr>
+              <a:t>▪  </a:t>
+            </a:r>
+            <a:r>
+              <a:rPr sz="1700">
+                <a:solidFill>
+                  <a:srgbClr val="1A1A1A"/>
+                </a:solidFill>
+                <a:latin typeface="Arial"/>
+              </a:rPr>
+              <a:t>Kundensignale auf den vier Kommunikationsebenen nach Schulz von Thun differenziert erkennen und den Bedeutungsrahmen hinter sachlichen Aussagen entschlüsseln</a:t>
+            </a:r>
+          </a:p>
+          <a:p>
+            <a:pPr>
+              <a:spcBef>
+                <a:spcPts val="500"/>
+              </a:spcBef>
+            </a:pPr>
+            <a:r>
+              <a:rPr sz="1500">
+                <a:solidFill>
+                  <a:srgbClr val="003DA5"/>
+                </a:solidFill>
+                <a:latin typeface="Arial"/>
+              </a:rPr>
+              <a:t>▪  </a:t>
+            </a:r>
+            <a:r>
+              <a:rPr sz="1700">
+                <a:solidFill>
+                  <a:srgbClr val="1A1A1A"/>
+                </a:solidFill>
+                <a:latin typeface="Arial"/>
+              </a:rPr>
+              <a:t>Den Vollständigkeitsgrad einer Bedarfsanalyse bewerten, offene Dimensionen benennen und die nächsten Gesprächsschritte priorisieren</a:t>
+            </a:r>
+          </a:p>
+        </p:txBody>
+      </p:sp>
+    </p:spTree>
+  </p:cSld>
+  <p:clrMapOvr>
+    <a:masterClrMapping/>
+  </p:clrMapOvr>
+</p:sld>
+</file>
+
+<file path=ppt/slides/slide3.xml><?xml version="1.0" encoding="utf-8"?>
 <p:sld xmlns:a="http://schemas.openxmlformats.org/drawingml/2006/main" xmlns:p="http://schemas.openxmlformats.org/presentationml/2006/main" xmlns:r="http://schemas.openxmlformats.org/officeDocument/2006/relationships">
   <p:cSld>
     <p:bg>
@@ -3621,8 +5941,8 @@
         </p:nvSpPr>
         <p:spPr>
           <a:xfrm>
-            <a:off x="365760" y="2286000"/>
-            <a:ext cx="11430000" cy="1828800"/>
+            <a:off x="365760" y="2011680"/>
+            <a:ext cx="11430000" cy="2011680"/>
           </a:xfrm>
           <a:prstGeom prst="rect">
             <a:avLst/>
@@ -3637,13 +5957,13 @@
           <a:p>
             <a:pPr algn="l"/>
             <a:r>
-              <a:rPr sz="3600" b="1">
+              <a:rPr sz="3600" b="1" i="0">
                 <a:solidFill>
                   <a:srgbClr val="FFFFFF"/>
                 </a:solidFill>
                 <a:latin typeface="Arial"/>
               </a:rPr>
-              <a:t>Bedarfsanalyse &amp; Consultative Selling</a:t>
+              <a:t>4.1 Theorie-Input: Das Vier-Ohren-Modell</a:t>
             </a:r>
           </a:p>
         </p:txBody>
@@ -3656,7 +5976,556 @@
 </p:sld>
 </file>
 
-<file path=ppt/slides/slide13.xml><?xml version="1.0" encoding="utf-8"?>
+<file path=ppt/slides/slide4.xml><?xml version="1.0" encoding="utf-8"?>
+<p:sld xmlns:a="http://schemas.openxmlformats.org/drawingml/2006/main" xmlns:p="http://schemas.openxmlformats.org/presentationml/2006/main" xmlns:r="http://schemas.openxmlformats.org/officeDocument/2006/relationships">
+  <p:cSld>
+    <p:bg>
+      <p:bgPr>
+        <a:solidFill>
+          <a:srgbClr val="FFFFFF"/>
+        </a:solidFill>
+        <a:effectLst/>
+      </p:bgPr>
+    </p:bg>
+    <p:spTree>
+      <p:nvGrpSpPr>
+        <p:cNvPr id="1" name=""/>
+        <p:cNvGrpSpPr/>
+        <p:nvPr/>
+      </p:nvGrpSpPr>
+      <p:grpSpPr/>
+      <p:sp>
+        <p:nvSpPr>
+          <p:cNvPr id="2" name="Rectangle 1"/>
+          <p:cNvSpPr/>
+          <p:nvPr/>
+        </p:nvSpPr>
+        <p:spPr>
+          <a:xfrm>
+            <a:off x="0" y="0"/>
+            <a:ext cx="73152" cy="6858000"/>
+          </a:xfrm>
+          <a:prstGeom prst="rect">
+            <a:avLst/>
+          </a:prstGeom>
+          <a:solidFill>
+            <a:srgbClr val="003DA5"/>
+          </a:solidFill>
+          <a:ln>
+            <a:noFill/>
+          </a:ln>
+        </p:spPr>
+        <p:style>
+          <a:lnRef idx="1">
+            <a:schemeClr val="accent1"/>
+          </a:lnRef>
+          <a:fillRef idx="3">
+            <a:schemeClr val="accent1"/>
+          </a:fillRef>
+          <a:effectRef idx="2">
+            <a:schemeClr val="accent1"/>
+          </a:effectRef>
+          <a:fontRef idx="minor">
+            <a:schemeClr val="lt1"/>
+          </a:fontRef>
+        </p:style>
+        <p:txBody>
+          <a:bodyPr rtlCol="0" anchor="ctr"/>
+          <a:lstStyle/>
+          <a:p>
+            <a:pPr algn="ctr"/>
+          </a:p>
+        </p:txBody>
+      </p:sp>
+      <p:sp>
+        <p:nvSpPr>
+          <p:cNvPr id="3" name="TextBox 2"/>
+          <p:cNvSpPr txBox="1"/>
+          <p:nvPr/>
+        </p:nvSpPr>
+        <p:spPr>
+          <a:xfrm>
+            <a:off x="228600" y="182880"/>
+            <a:ext cx="11430000" cy="320040"/>
+          </a:xfrm>
+          <a:prstGeom prst="rect">
+            <a:avLst/>
+          </a:prstGeom>
+          <a:noFill/>
+        </p:spPr>
+        <p:txBody>
+          <a:bodyPr wrap="square">
+            <a:spAutoFit/>
+          </a:bodyPr>
+          <a:lstStyle/>
+          <a:p>
+            <a:pPr algn="l"/>
+            <a:r>
+              <a:rPr sz="900" b="0" i="0">
+                <a:solidFill>
+                  <a:srgbClr val="556575"/>
+                </a:solidFill>
+                <a:latin typeface="Arial"/>
+              </a:rPr>
+              <a:t>M10 · Modulinhalte</a:t>
+            </a:r>
+          </a:p>
+        </p:txBody>
+      </p:sp>
+      <p:sp>
+        <p:nvSpPr>
+          <p:cNvPr id="4" name="TextBox 3"/>
+          <p:cNvSpPr txBox="1"/>
+          <p:nvPr/>
+        </p:nvSpPr>
+        <p:spPr>
+          <a:xfrm>
+            <a:off x="365760" y="274320"/>
+            <a:ext cx="11430000" cy="777240"/>
+          </a:xfrm>
+          <a:prstGeom prst="rect">
+            <a:avLst/>
+          </a:prstGeom>
+          <a:noFill/>
+        </p:spPr>
+        <p:txBody>
+          <a:bodyPr wrap="square">
+            <a:spAutoFit/>
+          </a:bodyPr>
+          <a:lstStyle/>
+          <a:p>
+            <a:pPr algn="l"/>
+            <a:r>
+              <a:rPr sz="2200" b="1" i="0">
+                <a:solidFill>
+                  <a:srgbClr val="003DA5"/>
+                </a:solidFill>
+                <a:latin typeface="Arial"/>
+              </a:rPr>
+              <a:t>4.1 Theorie-Input: Das Vier-Ohren-Modell</a:t>
+            </a:r>
+          </a:p>
+        </p:txBody>
+      </p:sp>
+      <p:sp>
+        <p:nvSpPr>
+          <p:cNvPr id="5" name="Rectangle 4"/>
+          <p:cNvSpPr/>
+          <p:nvPr/>
+        </p:nvSpPr>
+        <p:spPr>
+          <a:xfrm>
+            <a:off x="365760" y="1005840"/>
+            <a:ext cx="11430000" cy="27432"/>
+          </a:xfrm>
+          <a:prstGeom prst="rect">
+            <a:avLst/>
+          </a:prstGeom>
+          <a:solidFill>
+            <a:srgbClr val="D1D5DB"/>
+          </a:solidFill>
+          <a:ln>
+            <a:noFill/>
+          </a:ln>
+        </p:spPr>
+        <p:style>
+          <a:lnRef idx="1">
+            <a:schemeClr val="accent1"/>
+          </a:lnRef>
+          <a:fillRef idx="3">
+            <a:schemeClr val="accent1"/>
+          </a:fillRef>
+          <a:effectRef idx="2">
+            <a:schemeClr val="accent1"/>
+          </a:effectRef>
+          <a:fontRef idx="minor">
+            <a:schemeClr val="lt1"/>
+          </a:fontRef>
+        </p:style>
+        <p:txBody>
+          <a:bodyPr rtlCol="0" anchor="ctr"/>
+          <a:lstStyle/>
+          <a:p>
+            <a:pPr algn="ctr"/>
+          </a:p>
+        </p:txBody>
+      </p:sp>
+      <p:graphicFrame>
+        <p:nvGraphicFramePr>
+          <p:cNvPr id="6" name="Table 5"/>
+          <p:cNvGraphicFramePr>
+            <a:graphicFrameLocks noGrp="1"/>
+          </p:cNvGraphicFramePr>
+          <p:nvPr/>
+        </p:nvGraphicFramePr>
+        <p:xfrm>
+          <a:off x="365760" y="1143000"/>
+          <a:ext cx="11430000" cy="2377440"/>
+        </p:xfrm>
+        <a:graphic>
+          <a:graphicData uri="http://schemas.openxmlformats.org/drawingml/2006/table">
+            <a:tbl>
+              <a:tblPr firstRow="1" bandRow="1">
+                <a:tableStyleId>{5C22544A-7EE6-4342-B048-85BDC9FD1C3A}</a:tableStyleId>
+              </a:tblPr>
+              <a:tblGrid>
+                <a:gridCol w="3810000"/>
+                <a:gridCol w="3810000"/>
+                <a:gridCol w="3810000"/>
+              </a:tblGrid>
+              <a:tr h="475488">
+                <a:tc>
+                  <a:txBody>
+                    <a:bodyPr wrap="square"/>
+                    <a:lstStyle/>
+                    <a:p>
+                      <a:r>
+                        <a:rPr sz="1100" b="1">
+                          <a:solidFill>
+                            <a:srgbClr val="FFFFFF"/>
+                          </a:solidFill>
+                          <a:latin typeface="Arial"/>
+                        </a:rPr>
+                        <a:t>Kommunikationsebene</a:t>
+                      </a:r>
+                    </a:p>
+                  </a:txBody>
+                  <a:tcPr>
+                    <a:solidFill>
+                      <a:srgbClr val="003DA5"/>
+                    </a:solidFill>
+                  </a:tcPr>
+                </a:tc>
+                <a:tc>
+                  <a:txBody>
+                    <a:bodyPr wrap="square"/>
+                    <a:lstStyle/>
+                    <a:p>
+                      <a:r>
+                        <a:rPr sz="1100" b="1">
+                          <a:solidFill>
+                            <a:srgbClr val="FFFFFF"/>
+                          </a:solidFill>
+                          <a:latin typeface="Arial"/>
+                        </a:rPr>
+                        <a:t>Was der Unternehmer sagt/meint</a:t>
+                      </a:r>
+                    </a:p>
+                  </a:txBody>
+                  <a:tcPr>
+                    <a:solidFill>
+                      <a:srgbClr val="003DA5"/>
+                    </a:solidFill>
+                  </a:tcPr>
+                </a:tc>
+                <a:tc>
+                  <a:txBody>
+                    <a:bodyPr wrap="square"/>
+                    <a:lstStyle/>
+                    <a:p>
+                      <a:r>
+                        <a:rPr sz="1100" b="1">
+                          <a:solidFill>
+                            <a:srgbClr val="FFFFFF"/>
+                          </a:solidFill>
+                          <a:latin typeface="Arial"/>
+                        </a:rPr>
+                        <a:t>Was der Berater hören sollte</a:t>
+                      </a:r>
+                    </a:p>
+                  </a:txBody>
+                  <a:tcPr>
+                    <a:solidFill>
+                      <a:srgbClr val="003DA5"/>
+                    </a:solidFill>
+                  </a:tcPr>
+                </a:tc>
+              </a:tr>
+              <a:tr h="475488">
+                <a:tc>
+                  <a:txBody>
+                    <a:bodyPr wrap="square"/>
+                    <a:lstStyle/>
+                    <a:p>
+                      <a:r>
+                        <a:rPr sz="1100" b="0">
+                          <a:solidFill>
+                            <a:srgbClr val="1A1A1A"/>
+                          </a:solidFill>
+                          <a:latin typeface="Arial"/>
+                        </a:rPr>
+                        <a:t>① Sachinhalt</a:t>
+                      </a:r>
+                    </a:p>
+                  </a:txBody>
+                  <a:tcPr>
+                    <a:solidFill>
+                      <a:srgbClr val="FFFFFF"/>
+                    </a:solidFill>
+                  </a:tcPr>
+                </a:tc>
+                <a:tc>
+                  <a:txBody>
+                    <a:bodyPr wrap="square"/>
+                    <a:lstStyle/>
+                    <a:p>
+                      <a:r>
+                        <a:rPr sz="1100" b="0">
+                          <a:solidFill>
+                            <a:srgbClr val="1A1A1A"/>
+                          </a:solidFill>
+                          <a:latin typeface="Arial"/>
+                        </a:rPr>
+                        <a:t>Die explizite Information (Zahlen, Fakten, Daten)</a:t>
+                      </a:r>
+                    </a:p>
+                  </a:txBody>
+                  <a:tcPr>
+                    <a:solidFill>
+                      <a:srgbClr val="FFFFFF"/>
+                    </a:solidFill>
+                  </a:tcPr>
+                </a:tc>
+                <a:tc>
+                  <a:txBody>
+                    <a:bodyPr wrap="square"/>
+                    <a:lstStyle/>
+                    <a:p>
+                      <a:r>
+                        <a:rPr sz="1100" b="0">
+                          <a:solidFill>
+                            <a:srgbClr val="1A1A1A"/>
+                          </a:solidFill>
+                          <a:latin typeface="Arial"/>
+                        </a:rPr>
+                        <a:t>Korrekt aufnehmen, aber nicht stehenbleiben</a:t>
+                      </a:r>
+                    </a:p>
+                  </a:txBody>
+                  <a:tcPr>
+                    <a:solidFill>
+                      <a:srgbClr val="FFFFFF"/>
+                    </a:solidFill>
+                  </a:tcPr>
+                </a:tc>
+              </a:tr>
+              <a:tr h="475488">
+                <a:tc>
+                  <a:txBody>
+                    <a:bodyPr wrap="square"/>
+                    <a:lstStyle/>
+                    <a:p>
+                      <a:r>
+                        <a:rPr sz="1100" b="0">
+                          <a:solidFill>
+                            <a:srgbClr val="1A1A1A"/>
+                          </a:solidFill>
+                          <a:latin typeface="Arial"/>
+                        </a:rPr>
+                        <a:t>② Selbstoffenbarung</a:t>
+                      </a:r>
+                    </a:p>
+                  </a:txBody>
+                  <a:tcPr>
+                    <a:solidFill>
+                      <a:srgbClr val="F4F6FA"/>
+                    </a:solidFill>
+                  </a:tcPr>
+                </a:tc>
+                <a:tc>
+                  <a:txBody>
+                    <a:bodyPr wrap="square"/>
+                    <a:lstStyle/>
+                    <a:p>
+                      <a:r>
+                        <a:rPr sz="1100" b="0">
+                          <a:solidFill>
+                            <a:srgbClr val="1A1A1A"/>
+                          </a:solidFill>
+                          <a:latin typeface="Arial"/>
+                        </a:rPr>
+                        <a:t>Was er über sich, seine Situation, seine Sorgen preisgibt</a:t>
+                      </a:r>
+                    </a:p>
+                  </a:txBody>
+                  <a:tcPr>
+                    <a:solidFill>
+                      <a:srgbClr val="F4F6FA"/>
+                    </a:solidFill>
+                  </a:tcPr>
+                </a:tc>
+                <a:tc>
+                  <a:txBody>
+                    <a:bodyPr wrap="square"/>
+                    <a:lstStyle/>
+                    <a:p>
+                      <a:r>
+                        <a:rPr sz="1100" b="0">
+                          <a:solidFill>
+                            <a:srgbClr val="1A1A1A"/>
+                          </a:solidFill>
+                          <a:latin typeface="Arial"/>
+                        </a:rPr>
+                        <a:t>Zwischentöne, Zögern, Formulierungswahl beachten</a:t>
+                      </a:r>
+                    </a:p>
+                  </a:txBody>
+                  <a:tcPr>
+                    <a:solidFill>
+                      <a:srgbClr val="F4F6FA"/>
+                    </a:solidFill>
+                  </a:tcPr>
+                </a:tc>
+              </a:tr>
+              <a:tr h="475488">
+                <a:tc>
+                  <a:txBody>
+                    <a:bodyPr wrap="square"/>
+                    <a:lstStyle/>
+                    <a:p>
+                      <a:r>
+                        <a:rPr sz="1100" b="0">
+                          <a:solidFill>
+                            <a:srgbClr val="1A1A1A"/>
+                          </a:solidFill>
+                          <a:latin typeface="Arial"/>
+                        </a:rPr>
+                        <a:t>③ Beziehungsaspekt</a:t>
+                      </a:r>
+                    </a:p>
+                  </a:txBody>
+                  <a:tcPr>
+                    <a:solidFill>
+                      <a:srgbClr val="FFFFFF"/>
+                    </a:solidFill>
+                  </a:tcPr>
+                </a:tc>
+                <a:tc>
+                  <a:txBody>
+                    <a:bodyPr wrap="square"/>
+                    <a:lstStyle/>
+                    <a:p>
+                      <a:r>
+                        <a:rPr sz="1100" b="0">
+                          <a:solidFill>
+                            <a:srgbClr val="1A1A1A"/>
+                          </a:solidFill>
+                          <a:latin typeface="Arial"/>
+                        </a:rPr>
+                        <a:t>Wie er Sie als Berater wahrnimmt; Vertrauen oder Skepsis</a:t>
+                      </a:r>
+                    </a:p>
+                  </a:txBody>
+                  <a:tcPr>
+                    <a:solidFill>
+                      <a:srgbClr val="FFFFFF"/>
+                    </a:solidFill>
+                  </a:tcPr>
+                </a:tc>
+                <a:tc>
+                  <a:txBody>
+                    <a:bodyPr wrap="square"/>
+                    <a:lstStyle/>
+                    <a:p>
+                      <a:r>
+                        <a:rPr sz="1100" b="0">
+                          <a:solidFill>
+                            <a:srgbClr val="1A1A1A"/>
+                          </a:solidFill>
+                          <a:latin typeface="Arial"/>
+                        </a:rPr>
+                        <a:t>Gesprächsklima aktiv gestalten; Vertrauen voraussetzen</a:t>
+                      </a:r>
+                    </a:p>
+                  </a:txBody>
+                  <a:tcPr>
+                    <a:solidFill>
+                      <a:srgbClr val="FFFFFF"/>
+                    </a:solidFill>
+                  </a:tcPr>
+                </a:tc>
+              </a:tr>
+              <a:tr h="475488">
+                <a:tc>
+                  <a:txBody>
+                    <a:bodyPr wrap="square"/>
+                    <a:lstStyle/>
+                    <a:p>
+                      <a:r>
+                        <a:rPr sz="1100" b="0">
+                          <a:solidFill>
+                            <a:srgbClr val="1A1A1A"/>
+                          </a:solidFill>
+                          <a:latin typeface="Arial"/>
+                        </a:rPr>
+                        <a:t>④ Appell</a:t>
+                      </a:r>
+                    </a:p>
+                  </a:txBody>
+                  <a:tcPr>
+                    <a:solidFill>
+                      <a:srgbClr val="F4F6FA"/>
+                    </a:solidFill>
+                  </a:tcPr>
+                </a:tc>
+                <a:tc>
+                  <a:txBody>
+                    <a:bodyPr wrap="square"/>
+                    <a:lstStyle/>
+                    <a:p>
+                      <a:r>
+                        <a:rPr sz="1100" b="0">
+                          <a:solidFill>
+                            <a:srgbClr val="1A1A1A"/>
+                          </a:solidFill>
+                          <a:latin typeface="Arial"/>
+                        </a:rPr>
+                        <a:t>Was er von Ihnen erwartet oder erhofft</a:t>
+                      </a:r>
+                    </a:p>
+                  </a:txBody>
+                  <a:tcPr>
+                    <a:solidFill>
+                      <a:srgbClr val="F4F6FA"/>
+                    </a:solidFill>
+                  </a:tcPr>
+                </a:tc>
+                <a:tc>
+                  <a:txBody>
+                    <a:bodyPr wrap="square"/>
+                    <a:lstStyle/>
+                    <a:p>
+                      <a:r>
+                        <a:rPr sz="1100" b="0">
+                          <a:solidFill>
+                            <a:srgbClr val="1A1A1A"/>
+                          </a:solidFill>
+                          <a:latin typeface="Arial"/>
+                        </a:rPr>
+                        <a:t>Explizit nachfragen: „Was erwarten Sie von uns?"</a:t>
+                      </a:r>
+                    </a:p>
+                  </a:txBody>
+                  <a:tcPr>
+                    <a:solidFill>
+                      <a:srgbClr val="F4F6FA"/>
+                    </a:solidFill>
+                  </a:tcPr>
+                </a:tc>
+              </a:tr>
+            </a:tbl>
+          </a:graphicData>
+        </a:graphic>
+      </p:graphicFrame>
+    </p:spTree>
+  </p:cSld>
+  <p:clrMapOvr>
+    <a:masterClrMapping/>
+  </p:clrMapOvr>
+</p:sld>
+</file>
+
+<file path=ppt/slides/slide5.xml><?xml version="1.0" encoding="utf-8"?>
 <p:sld xmlns:a="http://schemas.openxmlformats.org/drawingml/2006/main" xmlns:p="http://schemas.openxmlformats.org/presentationml/2006/main" xmlns:r="http://schemas.openxmlformats.org/officeDocument/2006/relationships">
   <p:cSld>
     <p:bg>
@@ -3725,8 +6594,8 @@
         </p:nvSpPr>
         <p:spPr>
           <a:xfrm>
-            <a:off x="365760" y="2286000"/>
-            <a:ext cx="11430000" cy="1828800"/>
+            <a:off x="365760" y="2011680"/>
+            <a:ext cx="11430000" cy="2011680"/>
           </a:xfrm>
           <a:prstGeom prst="rect">
             <a:avLst/>
@@ -3741,13 +6610,13 @@
           <a:p>
             <a:pPr algn="l"/>
             <a:r>
-              <a:rPr sz="3600" b="1">
+              <a:rPr sz="3600" b="1" i="0">
                 <a:solidFill>
                   <a:srgbClr val="FFFFFF"/>
                 </a:solidFill>
                 <a:latin typeface="Arial"/>
               </a:rPr>
-              <a:t>Bankfachlich</a:t>
+              <a:t>4.2 Theorie-Input: Das SPIN-Fragenmodell</a:t>
             </a:r>
           </a:p>
         </p:txBody>
@@ -3760,7 +6629,667 @@
 </p:sld>
 </file>
 
-<file path=ppt/slides/slide14.xml><?xml version="1.0" encoding="utf-8"?>
+<file path=ppt/slides/slide6.xml><?xml version="1.0" encoding="utf-8"?>
+<p:sld xmlns:a="http://schemas.openxmlformats.org/drawingml/2006/main" xmlns:p="http://schemas.openxmlformats.org/presentationml/2006/main" xmlns:r="http://schemas.openxmlformats.org/officeDocument/2006/relationships">
+  <p:cSld>
+    <p:bg>
+      <p:bgPr>
+        <a:solidFill>
+          <a:srgbClr val="FFFFFF"/>
+        </a:solidFill>
+        <a:effectLst/>
+      </p:bgPr>
+    </p:bg>
+    <p:spTree>
+      <p:nvGrpSpPr>
+        <p:cNvPr id="1" name=""/>
+        <p:cNvGrpSpPr/>
+        <p:nvPr/>
+      </p:nvGrpSpPr>
+      <p:grpSpPr/>
+      <p:sp>
+        <p:nvSpPr>
+          <p:cNvPr id="2" name="Rectangle 1"/>
+          <p:cNvSpPr/>
+          <p:nvPr/>
+        </p:nvSpPr>
+        <p:spPr>
+          <a:xfrm>
+            <a:off x="0" y="0"/>
+            <a:ext cx="73152" cy="6858000"/>
+          </a:xfrm>
+          <a:prstGeom prst="rect">
+            <a:avLst/>
+          </a:prstGeom>
+          <a:solidFill>
+            <a:srgbClr val="003DA5"/>
+          </a:solidFill>
+          <a:ln>
+            <a:noFill/>
+          </a:ln>
+        </p:spPr>
+        <p:style>
+          <a:lnRef idx="1">
+            <a:schemeClr val="accent1"/>
+          </a:lnRef>
+          <a:fillRef idx="3">
+            <a:schemeClr val="accent1"/>
+          </a:fillRef>
+          <a:effectRef idx="2">
+            <a:schemeClr val="accent1"/>
+          </a:effectRef>
+          <a:fontRef idx="minor">
+            <a:schemeClr val="lt1"/>
+          </a:fontRef>
+        </p:style>
+        <p:txBody>
+          <a:bodyPr rtlCol="0" anchor="ctr"/>
+          <a:lstStyle/>
+          <a:p>
+            <a:pPr algn="ctr"/>
+          </a:p>
+        </p:txBody>
+      </p:sp>
+      <p:sp>
+        <p:nvSpPr>
+          <p:cNvPr id="3" name="TextBox 2"/>
+          <p:cNvSpPr txBox="1"/>
+          <p:nvPr/>
+        </p:nvSpPr>
+        <p:spPr>
+          <a:xfrm>
+            <a:off x="228600" y="182880"/>
+            <a:ext cx="11430000" cy="320040"/>
+          </a:xfrm>
+          <a:prstGeom prst="rect">
+            <a:avLst/>
+          </a:prstGeom>
+          <a:noFill/>
+        </p:spPr>
+        <p:txBody>
+          <a:bodyPr wrap="square">
+            <a:spAutoFit/>
+          </a:bodyPr>
+          <a:lstStyle/>
+          <a:p>
+            <a:pPr algn="l"/>
+            <a:r>
+              <a:rPr sz="900" b="0" i="0">
+                <a:solidFill>
+                  <a:srgbClr val="556575"/>
+                </a:solidFill>
+                <a:latin typeface="Arial"/>
+              </a:rPr>
+              <a:t>M10 · Modulinhalte</a:t>
+            </a:r>
+          </a:p>
+        </p:txBody>
+      </p:sp>
+      <p:sp>
+        <p:nvSpPr>
+          <p:cNvPr id="4" name="TextBox 3"/>
+          <p:cNvSpPr txBox="1"/>
+          <p:nvPr/>
+        </p:nvSpPr>
+        <p:spPr>
+          <a:xfrm>
+            <a:off x="365760" y="274320"/>
+            <a:ext cx="11430000" cy="777240"/>
+          </a:xfrm>
+          <a:prstGeom prst="rect">
+            <a:avLst/>
+          </a:prstGeom>
+          <a:noFill/>
+        </p:spPr>
+        <p:txBody>
+          <a:bodyPr wrap="square">
+            <a:spAutoFit/>
+          </a:bodyPr>
+          <a:lstStyle/>
+          <a:p>
+            <a:pPr algn="l"/>
+            <a:r>
+              <a:rPr sz="2200" b="1" i="0">
+                <a:solidFill>
+                  <a:srgbClr val="003DA5"/>
+                </a:solidFill>
+                <a:latin typeface="Arial"/>
+              </a:rPr>
+              <a:t>4.2 Theorie-Input: Das SPIN-Fragenmodell</a:t>
+            </a:r>
+          </a:p>
+        </p:txBody>
+      </p:sp>
+      <p:sp>
+        <p:nvSpPr>
+          <p:cNvPr id="5" name="Rectangle 4"/>
+          <p:cNvSpPr/>
+          <p:nvPr/>
+        </p:nvSpPr>
+        <p:spPr>
+          <a:xfrm>
+            <a:off x="365760" y="1005840"/>
+            <a:ext cx="11430000" cy="27432"/>
+          </a:xfrm>
+          <a:prstGeom prst="rect">
+            <a:avLst/>
+          </a:prstGeom>
+          <a:solidFill>
+            <a:srgbClr val="D1D5DB"/>
+          </a:solidFill>
+          <a:ln>
+            <a:noFill/>
+          </a:ln>
+        </p:spPr>
+        <p:style>
+          <a:lnRef idx="1">
+            <a:schemeClr val="accent1"/>
+          </a:lnRef>
+          <a:fillRef idx="3">
+            <a:schemeClr val="accent1"/>
+          </a:fillRef>
+          <a:effectRef idx="2">
+            <a:schemeClr val="accent1"/>
+          </a:effectRef>
+          <a:fontRef idx="minor">
+            <a:schemeClr val="lt1"/>
+          </a:fontRef>
+        </p:style>
+        <p:txBody>
+          <a:bodyPr rtlCol="0" anchor="ctr"/>
+          <a:lstStyle/>
+          <a:p>
+            <a:pPr algn="ctr"/>
+          </a:p>
+        </p:txBody>
+      </p:sp>
+      <p:graphicFrame>
+        <p:nvGraphicFramePr>
+          <p:cNvPr id="6" name="Table 5"/>
+          <p:cNvGraphicFramePr>
+            <a:graphicFrameLocks noGrp="1"/>
+          </p:cNvGraphicFramePr>
+          <p:nvPr/>
+        </p:nvGraphicFramePr>
+        <p:xfrm>
+          <a:off x="365760" y="1143000"/>
+          <a:ext cx="11430000" cy="2377440"/>
+        </p:xfrm>
+        <a:graphic>
+          <a:graphicData uri="http://schemas.openxmlformats.org/drawingml/2006/table">
+            <a:tbl>
+              <a:tblPr firstRow="1" bandRow="1">
+                <a:tableStyleId>{5C22544A-7EE6-4342-B048-85BDC9FD1C3A}</a:tableStyleId>
+              </a:tblPr>
+              <a:tblGrid>
+                <a:gridCol w="2857500"/>
+                <a:gridCol w="2857500"/>
+                <a:gridCol w="2857500"/>
+                <a:gridCol w="2857500"/>
+              </a:tblGrid>
+              <a:tr h="475488">
+                <a:tc>
+                  <a:txBody>
+                    <a:bodyPr wrap="square"/>
+                    <a:lstStyle/>
+                    <a:p>
+                      <a:r>
+                        <a:rPr sz="1100" b="1">
+                          <a:solidFill>
+                            <a:srgbClr val="FFFFFF"/>
+                          </a:solidFill>
+                          <a:latin typeface="Arial"/>
+                        </a:rPr>
+                        <a:t>Fragetyp</a:t>
+                      </a:r>
+                    </a:p>
+                  </a:txBody>
+                  <a:tcPr>
+                    <a:solidFill>
+                      <a:srgbClr val="003DA5"/>
+                    </a:solidFill>
+                  </a:tcPr>
+                </a:tc>
+                <a:tc>
+                  <a:txBody>
+                    <a:bodyPr wrap="square"/>
+                    <a:lstStyle/>
+                    <a:p>
+                      <a:r>
+                        <a:rPr sz="1100" b="1">
+                          <a:solidFill>
+                            <a:srgbClr val="FFFFFF"/>
+                          </a:solidFill>
+                          <a:latin typeface="Arial"/>
+                        </a:rPr>
+                        <a:t>Zweck</a:t>
+                      </a:r>
+                    </a:p>
+                  </a:txBody>
+                  <a:tcPr>
+                    <a:solidFill>
+                      <a:srgbClr val="003DA5"/>
+                    </a:solidFill>
+                  </a:tcPr>
+                </a:tc>
+                <a:tc>
+                  <a:txBody>
+                    <a:bodyPr wrap="square"/>
+                    <a:lstStyle/>
+                    <a:p>
+                      <a:r>
+                        <a:rPr sz="1100" b="1">
+                          <a:solidFill>
+                            <a:srgbClr val="FFFFFF"/>
+                          </a:solidFill>
+                          <a:latin typeface="Arial"/>
+                        </a:rPr>
+                        <a:t>Wann einsetzen?</a:t>
+                      </a:r>
+                    </a:p>
+                  </a:txBody>
+                  <a:tcPr>
+                    <a:solidFill>
+                      <a:srgbClr val="003DA5"/>
+                    </a:solidFill>
+                  </a:tcPr>
+                </a:tc>
+                <a:tc>
+                  <a:txBody>
+                    <a:bodyPr wrap="square"/>
+                    <a:lstStyle/>
+                    <a:p>
+                      <a:r>
+                        <a:rPr sz="1100" b="1">
+                          <a:solidFill>
+                            <a:srgbClr val="FFFFFF"/>
+                          </a:solidFill>
+                          <a:latin typeface="Arial"/>
+                        </a:rPr>
+                        <a:t>Beispiele im Firmenkunden-Jahresgespräch</a:t>
+                      </a:r>
+                    </a:p>
+                  </a:txBody>
+                  <a:tcPr>
+                    <a:solidFill>
+                      <a:srgbClr val="003DA5"/>
+                    </a:solidFill>
+                  </a:tcPr>
+                </a:tc>
+              </a:tr>
+              <a:tr h="475488">
+                <a:tc>
+                  <a:txBody>
+                    <a:bodyPr wrap="square"/>
+                    <a:lstStyle/>
+                    <a:p>
+                      <a:r>
+                        <a:rPr sz="1100" b="0">
+                          <a:solidFill>
+                            <a:srgbClr val="1A1A1A"/>
+                          </a:solidFill>
+                          <a:latin typeface="Arial"/>
+                        </a:rPr>
+                        <a:t>S – Situation</a:t>
+                      </a:r>
+                    </a:p>
+                  </a:txBody>
+                  <a:tcPr>
+                    <a:solidFill>
+                      <a:srgbClr val="FFFFFF"/>
+                    </a:solidFill>
+                  </a:tcPr>
+                </a:tc>
+                <a:tc>
+                  <a:txBody>
+                    <a:bodyPr wrap="square"/>
+                    <a:lstStyle/>
+                    <a:p>
+                      <a:r>
+                        <a:rPr sz="1100" b="0">
+                          <a:solidFill>
+                            <a:srgbClr val="1A1A1A"/>
+                          </a:solidFill>
+                          <a:latin typeface="Arial"/>
+                        </a:rPr>
+                        <a:t>IST-Stand erheben; Kontext verstehen</a:t>
+                      </a:r>
+                    </a:p>
+                  </a:txBody>
+                  <a:tcPr>
+                    <a:solidFill>
+                      <a:srgbClr val="FFFFFF"/>
+                    </a:solidFill>
+                  </a:tcPr>
+                </a:tc>
+                <a:tc>
+                  <a:txBody>
+                    <a:bodyPr wrap="square"/>
+                    <a:lstStyle/>
+                    <a:p>
+                      <a:r>
+                        <a:rPr sz="1100" b="0">
+                          <a:solidFill>
+                            <a:srgbClr val="1A1A1A"/>
+                          </a:solidFill>
+                          <a:latin typeface="Arial"/>
+                        </a:rPr>
+                        <a:t>Zu Beginn; sparsam – bekannte Fakten nicht abfragen, sondern kommentieren und ergänzen</a:t>
+                      </a:r>
+                    </a:p>
+                  </a:txBody>
+                  <a:tcPr>
+                    <a:solidFill>
+                      <a:srgbClr val="FFFFFF"/>
+                    </a:solidFill>
+                  </a:tcPr>
+                </a:tc>
+                <a:tc>
+                  <a:txBody>
+                    <a:bodyPr wrap="square"/>
+                    <a:lstStyle/>
+                    <a:p>
+                      <a:r>
+                        <a:rPr sz="1100" b="0">
+                          <a:solidFill>
+                            <a:srgbClr val="1A1A1A"/>
+                          </a:solidFill>
+                          <a:latin typeface="Arial"/>
+                        </a:rPr>
+                        <a:t>Richtig: „Sie hatten letztes Jahr +10 % Umsatz – was war der Haupttreiber?" (zeigt Vorbereitung, öffnet Gespräch) · „Welche Märkte haben Sie seitdem neu erschlossen?" · Falsch im Jahresgespräch: „Wie hat sich Ihr Umsatz im letzten Jahr entwickelt?" (der Berater hat die Bilanz vor sich – wirkt unvorbereitet)</a:t>
+                      </a:r>
+                    </a:p>
+                  </a:txBody>
+                  <a:tcPr>
+                    <a:solidFill>
+                      <a:srgbClr val="FFFFFF"/>
+                    </a:solidFill>
+                  </a:tcPr>
+                </a:tc>
+              </a:tr>
+              <a:tr h="475488">
+                <a:tc>
+                  <a:txBody>
+                    <a:bodyPr wrap="square"/>
+                    <a:lstStyle/>
+                    <a:p>
+                      <a:r>
+                        <a:rPr sz="1100" b="0">
+                          <a:solidFill>
+                            <a:srgbClr val="1A1A1A"/>
+                          </a:solidFill>
+                          <a:latin typeface="Arial"/>
+                        </a:rPr>
+                        <a:t>P – Problem</a:t>
+                      </a:r>
+                    </a:p>
+                  </a:txBody>
+                  <a:tcPr>
+                    <a:solidFill>
+                      <a:srgbClr val="F4F6FA"/>
+                    </a:solidFill>
+                  </a:tcPr>
+                </a:tc>
+                <a:tc>
+                  <a:txBody>
+                    <a:bodyPr wrap="square"/>
+                    <a:lstStyle/>
+                    <a:p>
+                      <a:r>
+                        <a:rPr sz="1100" b="0">
+                          <a:solidFill>
+                            <a:srgbClr val="1A1A1A"/>
+                          </a:solidFill>
+                          <a:latin typeface="Arial"/>
+                        </a:rPr>
+                        <a:t>Herausforderungen identifizieren; Schmerzen sichtbar machen</a:t>
+                      </a:r>
+                    </a:p>
+                  </a:txBody>
+                  <a:tcPr>
+                    <a:solidFill>
+                      <a:srgbClr val="F4F6FA"/>
+                    </a:solidFill>
+                  </a:tcPr>
+                </a:tc>
+                <a:tc>
+                  <a:txBody>
+                    <a:bodyPr wrap="square"/>
+                    <a:lstStyle/>
+                    <a:p>
+                      <a:r>
+                        <a:rPr sz="1100" b="0">
+                          <a:solidFill>
+                            <a:srgbClr val="1A1A1A"/>
+                          </a:solidFill>
+                          <a:latin typeface="Arial"/>
+                        </a:rPr>
+                        <a:t>Nach dem IST-Stand; aktiv suchen</a:t>
+                      </a:r>
+                    </a:p>
+                  </a:txBody>
+                  <a:tcPr>
+                    <a:solidFill>
+                      <a:srgbClr val="F4F6FA"/>
+                    </a:solidFill>
+                  </a:tcPr>
+                </a:tc>
+                <a:tc>
+                  <a:txBody>
+                    <a:bodyPr wrap="square"/>
+                    <a:lstStyle/>
+                    <a:p>
+                      <a:r>
+                        <a:rPr sz="1100" b="0">
+                          <a:solidFill>
+                            <a:srgbClr val="1A1A1A"/>
+                          </a:solidFill>
+                          <a:latin typeface="Arial"/>
+                        </a:rPr>
+                        <a:t>„Wo haben Sie die größten Planungsunsicherheiten?" „Was bereitet Ihnen im Tagesgeschäft am meisten Sorgen?"</a:t>
+                      </a:r>
+                    </a:p>
+                  </a:txBody>
+                  <a:tcPr>
+                    <a:solidFill>
+                      <a:srgbClr val="F4F6FA"/>
+                    </a:solidFill>
+                  </a:tcPr>
+                </a:tc>
+              </a:tr>
+              <a:tr h="475488">
+                <a:tc>
+                  <a:txBody>
+                    <a:bodyPr wrap="square"/>
+                    <a:lstStyle/>
+                    <a:p>
+                      <a:r>
+                        <a:rPr sz="1100" b="0">
+                          <a:solidFill>
+                            <a:srgbClr val="1A1A1A"/>
+                          </a:solidFill>
+                          <a:latin typeface="Arial"/>
+                        </a:rPr>
+                        <a:t>I – Implication</a:t>
+                      </a:r>
+                    </a:p>
+                  </a:txBody>
+                  <a:tcPr>
+                    <a:solidFill>
+                      <a:srgbClr val="FFFFFF"/>
+                    </a:solidFill>
+                  </a:tcPr>
+                </a:tc>
+                <a:tc>
+                  <a:txBody>
+                    <a:bodyPr wrap="square"/>
+                    <a:lstStyle/>
+                    <a:p>
+                      <a:r>
+                        <a:rPr sz="1100" b="0">
+                          <a:solidFill>
+                            <a:srgbClr val="1A1A1A"/>
+                          </a:solidFill>
+                          <a:latin typeface="Arial"/>
+                        </a:rPr>
+                        <a:t>Konsequenzen und Bedeutung der Probleme verdeutlichen; Problemdruck erhöhen</a:t>
+                      </a:r>
+                    </a:p>
+                  </a:txBody>
+                  <a:tcPr>
+                    <a:solidFill>
+                      <a:srgbClr val="FFFFFF"/>
+                    </a:solidFill>
+                  </a:tcPr>
+                </a:tc>
+                <a:tc>
+                  <a:txBody>
+                    <a:bodyPr wrap="square"/>
+                    <a:lstStyle/>
+                    <a:p>
+                      <a:r>
+                        <a:rPr sz="1100" b="0">
+                          <a:solidFill>
+                            <a:srgbClr val="1A1A1A"/>
+                          </a:solidFill>
+                          <a:latin typeface="Arial"/>
+                        </a:rPr>
+                        <a:t>Wenn Problem benannt; vor Lösungspräsentation</a:t>
+                      </a:r>
+                    </a:p>
+                  </a:txBody>
+                  <a:tcPr>
+                    <a:solidFill>
+                      <a:srgbClr val="FFFFFF"/>
+                    </a:solidFill>
+                  </a:tcPr>
+                </a:tc>
+                <a:tc>
+                  <a:txBody>
+                    <a:bodyPr wrap="square"/>
+                    <a:lstStyle/>
+                    <a:p>
+                      <a:r>
+                        <a:rPr sz="1100" b="0">
+                          <a:solidFill>
+                            <a:srgbClr val="1A1A1A"/>
+                          </a:solidFill>
+                          <a:latin typeface="Arial"/>
+                        </a:rPr>
+                        <a:t>„Was würde das für Ihre Mitarbeiter bedeuten, wenn …?" „Welche Auswirkungen hat das auf Ihre Investitionspläne?"</a:t>
+                      </a:r>
+                    </a:p>
+                  </a:txBody>
+                  <a:tcPr>
+                    <a:solidFill>
+                      <a:srgbClr val="FFFFFF"/>
+                    </a:solidFill>
+                  </a:tcPr>
+                </a:tc>
+              </a:tr>
+              <a:tr h="475488">
+                <a:tc>
+                  <a:txBody>
+                    <a:bodyPr wrap="square"/>
+                    <a:lstStyle/>
+                    <a:p>
+                      <a:r>
+                        <a:rPr sz="1100" b="0">
+                          <a:solidFill>
+                            <a:srgbClr val="1A1A1A"/>
+                          </a:solidFill>
+                          <a:latin typeface="Arial"/>
+                        </a:rPr>
+                        <a:t>N – Need-Payoff</a:t>
+                      </a:r>
+                    </a:p>
+                  </a:txBody>
+                  <a:tcPr>
+                    <a:solidFill>
+                      <a:srgbClr val="F4F6FA"/>
+                    </a:solidFill>
+                  </a:tcPr>
+                </a:tc>
+                <a:tc>
+                  <a:txBody>
+                    <a:bodyPr wrap="square"/>
+                    <a:lstStyle/>
+                    <a:p>
+                      <a:r>
+                        <a:rPr sz="1100" b="0">
+                          <a:solidFill>
+                            <a:srgbClr val="1A1A1A"/>
+                          </a:solidFill>
+                          <a:latin typeface="Arial"/>
+                        </a:rPr>
+                        <a:t>Nutzenwunsch des Kunden aktivieren; er formuliert die Lösung selbst</a:t>
+                      </a:r>
+                    </a:p>
+                  </a:txBody>
+                  <a:tcPr>
+                    <a:solidFill>
+                      <a:srgbClr val="F4F6FA"/>
+                    </a:solidFill>
+                  </a:tcPr>
+                </a:tc>
+                <a:tc>
+                  <a:txBody>
+                    <a:bodyPr wrap="square"/>
+                    <a:lstStyle/>
+                    <a:p>
+                      <a:r>
+                        <a:rPr sz="1100" b="0">
+                          <a:solidFill>
+                            <a:srgbClr val="1A1A1A"/>
+                          </a:solidFill>
+                          <a:latin typeface="Arial"/>
+                        </a:rPr>
+                        <a:t>Wenn Problemdruck spürbar ist</a:t>
+                      </a:r>
+                    </a:p>
+                  </a:txBody>
+                  <a:tcPr>
+                    <a:solidFill>
+                      <a:srgbClr val="F4F6FA"/>
+                    </a:solidFill>
+                  </a:tcPr>
+                </a:tc>
+                <a:tc>
+                  <a:txBody>
+                    <a:bodyPr wrap="square"/>
+                    <a:lstStyle/>
+                    <a:p>
+                      <a:r>
+                        <a:rPr sz="1100" b="0">
+                          <a:solidFill>
+                            <a:srgbClr val="1A1A1A"/>
+                          </a:solidFill>
+                          <a:latin typeface="Arial"/>
+                        </a:rPr>
+                        <a:t>„Was wäre für Sie der Wert einer verbindlichen Liquiditätslinie?" „Wie wichtig wäre es, das bis Jahresende geregelt zu haben?"</a:t>
+                      </a:r>
+                    </a:p>
+                  </a:txBody>
+                  <a:tcPr>
+                    <a:solidFill>
+                      <a:srgbClr val="F4F6FA"/>
+                    </a:solidFill>
+                  </a:tcPr>
+                </a:tc>
+              </a:tr>
+            </a:tbl>
+          </a:graphicData>
+        </a:graphic>
+      </p:graphicFrame>
+    </p:spTree>
+  </p:cSld>
+  <p:clrMapOvr>
+    <a:masterClrMapping/>
+  </p:clrMapOvr>
+</p:sld>
+</file>
+
+<file path=ppt/slides/slide7.xml><?xml version="1.0" encoding="utf-8"?>
 <p:sld xmlns:a="http://schemas.openxmlformats.org/drawingml/2006/main" xmlns:p="http://schemas.openxmlformats.org/presentationml/2006/main" xmlns:r="http://schemas.openxmlformats.org/officeDocument/2006/relationships">
   <p:cSld>
     <p:bg>
@@ -3829,8 +7358,8 @@
         </p:nvSpPr>
         <p:spPr>
           <a:xfrm>
-            <a:off x="365760" y="2286000"/>
-            <a:ext cx="11430000" cy="1828800"/>
+            <a:off x="365760" y="2011680"/>
+            <a:ext cx="11430000" cy="2011680"/>
           </a:xfrm>
           <a:prstGeom prst="rect">
             <a:avLst/>
@@ -3845,13 +7374,13 @@
           <a:p>
             <a:pPr algn="l"/>
             <a:r>
-              <a:rPr sz="3600" b="1">
+              <a:rPr sz="3600" b="1" i="0">
                 <a:solidFill>
                   <a:srgbClr val="FFFFFF"/>
                 </a:solidFill>
                 <a:latin typeface="Arial"/>
               </a:rPr>
-              <a:t>Didaktik &amp; Kompetenzmodell</a:t>
+              <a:t>4.3 Praxiscase: Florian Maurer, Metallbau GmbH &amp; Co. KG</a:t>
             </a:r>
           </a:p>
         </p:txBody>
@@ -3864,303 +7393,13 @@
 </p:sld>
 </file>
 
-<file path=ppt/slides/slide15.xml><?xml version="1.0" encoding="utf-8"?>
+<file path=ppt/slides/slide8.xml><?xml version="1.0" encoding="utf-8"?>
 <p:sld xmlns:a="http://schemas.openxmlformats.org/drawingml/2006/main" xmlns:p="http://schemas.openxmlformats.org/presentationml/2006/main" xmlns:r="http://schemas.openxmlformats.org/officeDocument/2006/relationships">
   <p:cSld>
     <p:bg>
       <p:bgPr>
         <a:solidFill>
-          <a:srgbClr val="003DA5"/>
-        </a:solidFill>
-        <a:effectLst/>
-      </p:bgPr>
-    </p:bg>
-    <p:spTree>
-      <p:nvGrpSpPr>
-        <p:cNvPr id="1" name=""/>
-        <p:cNvGrpSpPr/>
-        <p:nvPr/>
-      </p:nvGrpSpPr>
-      <p:grpSpPr/>
-      <p:sp>
-        <p:nvSpPr>
-          <p:cNvPr id="2" name="Rectangle 1"/>
-          <p:cNvSpPr/>
-          <p:nvPr/>
-        </p:nvSpPr>
-        <p:spPr>
-          <a:xfrm>
-            <a:off x="0" y="0"/>
-            <a:ext cx="73152" cy="6858000"/>
-          </a:xfrm>
-          <a:prstGeom prst="rect">
-            <a:avLst/>
-          </a:prstGeom>
-          <a:solidFill>
-            <a:srgbClr val="E05B00"/>
-          </a:solidFill>
-          <a:ln>
-            <a:noFill/>
-          </a:ln>
-        </p:spPr>
-        <p:style>
-          <a:lnRef idx="1">
-            <a:schemeClr val="accent1"/>
-          </a:lnRef>
-          <a:fillRef idx="3">
-            <a:schemeClr val="accent1"/>
-          </a:fillRef>
-          <a:effectRef idx="2">
-            <a:schemeClr val="accent1"/>
-          </a:effectRef>
-          <a:fontRef idx="minor">
-            <a:schemeClr val="lt1"/>
-          </a:fontRef>
-        </p:style>
-        <p:txBody>
-          <a:bodyPr rtlCol="0" anchor="ctr"/>
-          <a:lstStyle/>
-          <a:p>
-            <a:pPr algn="ctr"/>
-          </a:p>
-        </p:txBody>
-      </p:sp>
-      <p:sp>
-        <p:nvSpPr>
-          <p:cNvPr id="3" name="TextBox 2"/>
-          <p:cNvSpPr txBox="1"/>
-          <p:nvPr/>
-        </p:nvSpPr>
-        <p:spPr>
-          <a:xfrm>
-            <a:off x="365760" y="365760"/>
-            <a:ext cx="5486400" cy="365760"/>
-          </a:xfrm>
-          <a:prstGeom prst="rect">
-            <a:avLst/>
-          </a:prstGeom>
-          <a:noFill/>
-        </p:spPr>
-        <p:txBody>
-          <a:bodyPr wrap="square">
-            <a:spAutoFit/>
-          </a:bodyPr>
-          <a:lstStyle/>
-          <a:p>
-            <a:pPr algn="l"/>
-            <a:r>
-              <a:rPr sz="1000" b="1">
-                <a:solidFill>
-                  <a:srgbClr val="CCD6F0"/>
-                </a:solidFill>
-                <a:latin typeface="Arial"/>
-              </a:rPr>
-              <a:t>PRAXISTRANSFER</a:t>
-            </a:r>
-          </a:p>
-        </p:txBody>
-      </p:sp>
-      <p:sp>
-        <p:nvSpPr>
-          <p:cNvPr id="4" name="TextBox 3"/>
-          <p:cNvSpPr txBox="1"/>
-          <p:nvPr/>
-        </p:nvSpPr>
-        <p:spPr>
-          <a:xfrm>
-            <a:off x="365760" y="640080"/>
-            <a:ext cx="9144000" cy="914400"/>
-          </a:xfrm>
-          <a:prstGeom prst="rect">
-            <a:avLst/>
-          </a:prstGeom>
-          <a:noFill/>
-        </p:spPr>
-        <p:txBody>
-          <a:bodyPr wrap="square">
-            <a:spAutoFit/>
-          </a:bodyPr>
-          <a:lstStyle/>
-          <a:p>
-            <a:pPr algn="l"/>
-            <a:r>
-              <a:rPr sz="2800" b="1">
-                <a:solidFill>
-                  <a:srgbClr val="FFFFFF"/>
-                </a:solidFill>
-                <a:latin typeface="Arial"/>
-              </a:rPr>
-              <a:t>Was nehmen Sie mit?</a:t>
-            </a:r>
-          </a:p>
-        </p:txBody>
-      </p:sp>
-      <p:sp>
-        <p:nvSpPr>
-          <p:cNvPr id="5" name="Rectangle 4"/>
-          <p:cNvSpPr/>
-          <p:nvPr/>
-        </p:nvSpPr>
-        <p:spPr>
-          <a:xfrm>
-            <a:off x="365760" y="1463040"/>
-            <a:ext cx="7315200" cy="27432"/>
-          </a:xfrm>
-          <a:prstGeom prst="rect">
-            <a:avLst/>
-          </a:prstGeom>
-          <a:solidFill>
-            <a:srgbClr val="335CC0"/>
-          </a:solidFill>
-          <a:ln>
-            <a:noFill/>
-          </a:ln>
-        </p:spPr>
-        <p:style>
-          <a:lnRef idx="1">
-            <a:schemeClr val="accent1"/>
-          </a:lnRef>
-          <a:fillRef idx="3">
-            <a:schemeClr val="accent1"/>
-          </a:fillRef>
-          <a:effectRef idx="2">
-            <a:schemeClr val="accent1"/>
-          </a:effectRef>
-          <a:fontRef idx="minor">
-            <a:schemeClr val="lt1"/>
-          </a:fontRef>
-        </p:style>
-        <p:txBody>
-          <a:bodyPr rtlCol="0" anchor="ctr"/>
-          <a:lstStyle/>
-          <a:p>
-            <a:pPr algn="ctr"/>
-          </a:p>
-        </p:txBody>
-      </p:sp>
-      <p:sp>
-        <p:nvSpPr>
-          <p:cNvPr id="6" name="TextBox 5"/>
-          <p:cNvSpPr txBox="1"/>
-          <p:nvPr/>
-        </p:nvSpPr>
-        <p:spPr>
-          <a:xfrm>
-            <a:off x="365760" y="1645920"/>
-            <a:ext cx="11430000" cy="4114800"/>
-          </a:xfrm>
-          <a:prstGeom prst="rect">
-            <a:avLst/>
-          </a:prstGeom>
-          <a:noFill/>
-        </p:spPr>
-        <p:txBody>
-          <a:bodyPr wrap="square">
-            <a:spAutoFit/>
-          </a:bodyPr>
-          <a:lstStyle/>
-          <a:p>
-            <a:pPr>
-              <a:spcBef>
-                <a:spcPts val="400"/>
-              </a:spcBef>
-            </a:pPr>
-            <a:r>
-              <a:rPr sz="1600">
-                <a:solidFill>
-                  <a:srgbClr val="E05B00"/>
-                </a:solidFill>
-                <a:latin typeface="Arial"/>
-              </a:rPr>
-              <a:t>▪  </a:t>
-            </a:r>
-            <a:r>
-              <a:rPr sz="1800">
-                <a:solidFill>
-                  <a:srgbClr val="FFFFFF"/>
-                </a:solidFill>
-                <a:latin typeface="Arial"/>
-              </a:rPr>
-              <a:t>Transferaufgabe: Wenden Sie das Gelernte in den nächsten 14 Tagen bei einem konkreten Kunden an.</a:t>
-            </a:r>
-          </a:p>
-          <a:p>
-            <a:pPr>
-              <a:spcBef>
-                <a:spcPts val="400"/>
-              </a:spcBef>
-            </a:pPr>
-            <a:r>
-              <a:rPr sz="1600">
-                <a:solidFill>
-                  <a:srgbClr val="E05B00"/>
-                </a:solidFill>
-                <a:latin typeface="Arial"/>
-              </a:rPr>
-              <a:t>▪  </a:t>
-            </a:r>
-            <a:r>
-              <a:rPr sz="1800">
-                <a:solidFill>
-                  <a:srgbClr val="FFFFFF"/>
-                </a:solidFill>
-                <a:latin typeface="Arial"/>
-              </a:rPr>
-              <a:t>Selbstcheck nach 4 Wochen: Was hat sich verändert?</a:t>
-            </a:r>
-          </a:p>
-        </p:txBody>
-      </p:sp>
-      <p:sp>
-        <p:nvSpPr>
-          <p:cNvPr id="7" name="TextBox 6"/>
-          <p:cNvSpPr txBox="1"/>
-          <p:nvPr/>
-        </p:nvSpPr>
-        <p:spPr>
-          <a:xfrm>
-            <a:off x="365760" y="6309360"/>
-            <a:ext cx="11430000" cy="365760"/>
-          </a:xfrm>
-          <a:prstGeom prst="rect">
-            <a:avLst/>
-          </a:prstGeom>
-          <a:noFill/>
-        </p:spPr>
-        <p:txBody>
-          <a:bodyPr wrap="square">
-            <a:spAutoFit/>
-          </a:bodyPr>
-          <a:lstStyle/>
-          <a:p>
-            <a:pPr algn="l"/>
-            <a:r>
-              <a:rPr sz="900" b="0">
-                <a:solidFill>
-                  <a:srgbClr val="99AACC"/>
-                </a:solidFill>
-                <a:latin typeface="Arial"/>
-              </a:rPr>
-              <a:t>M10 · Strukturierte Bedarfsanalyse  ·  v1.0  ·  Benedikt Zoller Coaching</a:t>
-            </a:r>
-          </a:p>
-        </p:txBody>
-      </p:sp>
-    </p:spTree>
-  </p:cSld>
-  <p:clrMapOvr>
-    <a:masterClrMapping/>
-  </p:clrMapOvr>
-</p:sld>
-</file>
-
-<file path=ppt/slides/slide2.xml><?xml version="1.0" encoding="utf-8"?>
-<p:sld xmlns:a="http://schemas.openxmlformats.org/drawingml/2006/main" xmlns:p="http://schemas.openxmlformats.org/presentationml/2006/main" xmlns:r="http://schemas.openxmlformats.org/officeDocument/2006/relationships">
-  <p:cSld>
-    <p:bg>
-      <p:bgPr>
-        <a:solidFill>
-          <a:srgbClr val="F5F7FA"/>
+          <a:srgbClr val="FFFFFF"/>
         </a:solidFill>
         <a:effectLst/>
       </p:bgPr>
@@ -4217,20 +7456,90 @@
       </p:sp>
       <p:sp>
         <p:nvSpPr>
-          <p:cNvPr id="3" name="Rectangle 2"/>
+          <p:cNvPr id="3" name="TextBox 2"/>
+          <p:cNvSpPr txBox="1"/>
+          <p:nvPr/>
+        </p:nvSpPr>
+        <p:spPr>
+          <a:xfrm>
+            <a:off x="228600" y="182880"/>
+            <a:ext cx="11430000" cy="320040"/>
+          </a:xfrm>
+          <a:prstGeom prst="rect">
+            <a:avLst/>
+          </a:prstGeom>
+          <a:noFill/>
+        </p:spPr>
+        <p:txBody>
+          <a:bodyPr wrap="square">
+            <a:spAutoFit/>
+          </a:bodyPr>
+          <a:lstStyle/>
+          <a:p>
+            <a:pPr algn="l"/>
+            <a:r>
+              <a:rPr sz="900" b="0" i="0">
+                <a:solidFill>
+                  <a:srgbClr val="556575"/>
+                </a:solidFill>
+                <a:latin typeface="Arial"/>
+              </a:rPr>
+              <a:t>M10 · Modulinhalte</a:t>
+            </a:r>
+          </a:p>
+        </p:txBody>
+      </p:sp>
+      <p:sp>
+        <p:nvSpPr>
+          <p:cNvPr id="4" name="TextBox 3"/>
+          <p:cNvSpPr txBox="1"/>
+          <p:nvPr/>
+        </p:nvSpPr>
+        <p:spPr>
+          <a:xfrm>
+            <a:off x="365760" y="274320"/>
+            <a:ext cx="11430000" cy="777240"/>
+          </a:xfrm>
+          <a:prstGeom prst="rect">
+            <a:avLst/>
+          </a:prstGeom>
+          <a:noFill/>
+        </p:spPr>
+        <p:txBody>
+          <a:bodyPr wrap="square">
+            <a:spAutoFit/>
+          </a:bodyPr>
+          <a:lstStyle/>
+          <a:p>
+            <a:pPr algn="l"/>
+            <a:r>
+              <a:rPr sz="2200" b="1" i="0">
+                <a:solidFill>
+                  <a:srgbClr val="003DA5"/>
+                </a:solidFill>
+                <a:latin typeface="Arial"/>
+              </a:rPr>
+              <a:t>Unternehmensprofil (Berater-Information)</a:t>
+            </a:r>
+          </a:p>
+        </p:txBody>
+      </p:sp>
+      <p:sp>
+        <p:nvSpPr>
+          <p:cNvPr id="5" name="Rectangle 4"/>
           <p:cNvSpPr/>
           <p:nvPr/>
         </p:nvSpPr>
         <p:spPr>
           <a:xfrm>
-            <a:off x="365760" y="868680"/>
-            <a:ext cx="7315200" cy="27432"/>
+            <a:off x="365760" y="1005840"/>
+            <a:ext cx="11430000" cy="27432"/>
           </a:xfrm>
           <a:prstGeom prst="rect">
             <a:avLst/>
           </a:prstGeom>
           <a:solidFill>
-            <a:srgbClr val="E5E7EB"/>
+            <a:srgbClr val="D1D5DB"/>
           </a:solidFill>
           <a:ln>
             <a:noFill/>
@@ -4258,174 +7567,400 @@
           </a:p>
         </p:txBody>
       </p:sp>
-      <p:sp>
-        <p:nvSpPr>
-          <p:cNvPr id="4" name="TextBox 3"/>
-          <p:cNvSpPr txBox="1"/>
+      <p:graphicFrame>
+        <p:nvGraphicFramePr>
+          <p:cNvPr id="6" name="Table 5"/>
+          <p:cNvGraphicFramePr>
+            <a:graphicFrameLocks noGrp="1"/>
+          </p:cNvGraphicFramePr>
           <p:nvPr/>
-        </p:nvSpPr>
-        <p:spPr>
-          <a:xfrm>
-            <a:off x="365760" y="320040"/>
-            <a:ext cx="3657600" cy="365760"/>
-          </a:xfrm>
-          <a:prstGeom prst="rect">
-            <a:avLst/>
-          </a:prstGeom>
-          <a:noFill/>
-        </p:spPr>
-        <p:txBody>
-          <a:bodyPr wrap="square">
-            <a:spAutoFit/>
-          </a:bodyPr>
-          <a:lstStyle/>
-          <a:p>
-            <a:pPr algn="l"/>
-            <a:r>
-              <a:rPr sz="1000" b="1">
-                <a:solidFill>
-                  <a:srgbClr val="003DA5"/>
-                </a:solidFill>
-                <a:latin typeface="Arial"/>
-              </a:rPr>
-              <a:t>LERNZIELE</a:t>
-            </a:r>
-          </a:p>
-        </p:txBody>
-      </p:sp>
-      <p:sp>
-        <p:nvSpPr>
-          <p:cNvPr id="5" name="TextBox 4"/>
-          <p:cNvSpPr txBox="1"/>
-          <p:nvPr/>
-        </p:nvSpPr>
-        <p:spPr>
-          <a:xfrm>
-            <a:off x="365760" y="502920"/>
-            <a:ext cx="9144000" cy="548640"/>
-          </a:xfrm>
-          <a:prstGeom prst="rect">
-            <a:avLst/>
-          </a:prstGeom>
-          <a:noFill/>
-        </p:spPr>
-        <p:txBody>
-          <a:bodyPr wrap="square">
-            <a:spAutoFit/>
-          </a:bodyPr>
-          <a:lstStyle/>
-          <a:p>
-            <a:pPr algn="l"/>
-            <a:r>
-              <a:rPr sz="2200" b="1">
-                <a:solidFill>
-                  <a:srgbClr val="1A1A1A"/>
-                </a:solidFill>
-                <a:latin typeface="Arial"/>
-              </a:rPr>
-              <a:t>Was Sie nach diesem Modul können.</a:t>
-            </a:r>
-          </a:p>
-        </p:txBody>
-      </p:sp>
-      <p:sp>
-        <p:nvSpPr>
-          <p:cNvPr id="6" name="TextBox 5"/>
-          <p:cNvSpPr txBox="1"/>
-          <p:nvPr/>
-        </p:nvSpPr>
-        <p:spPr>
-          <a:xfrm>
-            <a:off x="365760" y="1188720"/>
-            <a:ext cx="11430000" cy="5303520"/>
-          </a:xfrm>
-          <a:prstGeom prst="rect">
-            <a:avLst/>
-          </a:prstGeom>
-          <a:noFill/>
-        </p:spPr>
-        <p:txBody>
-          <a:bodyPr wrap="square">
-            <a:spAutoFit/>
-          </a:bodyPr>
-          <a:lstStyle/>
-          <a:p>
-            <a:pPr>
-              <a:spcBef>
-                <a:spcPts val="400"/>
-              </a:spcBef>
-            </a:pPr>
-            <a:r>
-              <a:rPr sz="1400">
-                <a:solidFill>
-                  <a:srgbClr val="003DA5"/>
-                </a:solidFill>
-                <a:latin typeface="Arial"/>
-              </a:rPr>
-              <a:t>▪  </a:t>
-            </a:r>
-            <a:r>
-              <a:rPr sz="1600">
-                <a:solidFill>
-                  <a:srgbClr val="1A1A1A"/>
-                </a:solidFill>
-                <a:latin typeface="Arial"/>
-              </a:rPr>
-              <a:t>Den UnternehmerDialog als strukturiertes Gesprächsführungsinstrument situationsgerecht einsetzen und alle relevanten Bedarfsdimensionen systematisch erschließen</a:t>
-            </a:r>
-          </a:p>
-          <a:p>
-            <a:pPr>
-              <a:spcBef>
-                <a:spcPts val="400"/>
-              </a:spcBef>
-            </a:pPr>
-            <a:r>
-              <a:rPr sz="1400">
-                <a:solidFill>
-                  <a:srgbClr val="003DA5"/>
-                </a:solidFill>
-                <a:latin typeface="Arial"/>
-              </a:rPr>
-              <a:t>▪  </a:t>
-            </a:r>
-            <a:r>
-              <a:rPr sz="1600">
-                <a:solidFill>
-                  <a:srgbClr val="1A1A1A"/>
-                </a:solidFill>
-                <a:latin typeface="Arial"/>
-              </a:rPr>
-              <a:t>Kundensignale auf den vier Kommunikationsebenen nach Schulz von Thun differenziert erkennen und den Bedeutungsrahmen hinter sachlichen Aussagen entschlüsseln</a:t>
-            </a:r>
-          </a:p>
-          <a:p>
-            <a:pPr>
-              <a:spcBef>
-                <a:spcPts val="400"/>
-              </a:spcBef>
-            </a:pPr>
-            <a:r>
-              <a:rPr sz="1400">
-                <a:solidFill>
-                  <a:srgbClr val="003DA5"/>
-                </a:solidFill>
-                <a:latin typeface="Arial"/>
-              </a:rPr>
-              <a:t>▪  </a:t>
-            </a:r>
-            <a:r>
-              <a:rPr sz="1600">
-                <a:solidFill>
-                  <a:srgbClr val="1A1A1A"/>
-                </a:solidFill>
-                <a:latin typeface="Arial"/>
-              </a:rPr>
-              <a:t>Den Vollständigkeitsgrad einer Bedarfsanalyse bewerten, offene Dimensionen benennen und die nächsten Gesprächsschritte priorisieren</a:t>
-            </a:r>
-          </a:p>
-        </p:txBody>
-      </p:sp>
+        </p:nvGraphicFramePr>
+        <p:xfrm>
+          <a:off x="365760" y="1143000"/>
+          <a:ext cx="11430000" cy="3803904"/>
+        </p:xfrm>
+        <a:graphic>
+          <a:graphicData uri="http://schemas.openxmlformats.org/drawingml/2006/table">
+            <a:tbl>
+              <a:tblPr firstRow="1" bandRow="1">
+                <a:tableStyleId>{5C22544A-7EE6-4342-B048-85BDC9FD1C3A}</a:tableStyleId>
+              </a:tblPr>
+              <a:tblGrid>
+                <a:gridCol w="5715000"/>
+                <a:gridCol w="5715000"/>
+              </a:tblGrid>
+              <a:tr h="475488">
+                <a:tc>
+                  <a:txBody>
+                    <a:bodyPr wrap="square"/>
+                    <a:lstStyle/>
+                    <a:p>
+                      <a:r>
+                        <a:rPr sz="1100" b="1">
+                          <a:solidFill>
+                            <a:srgbClr val="FFFFFF"/>
+                          </a:solidFill>
+                          <a:latin typeface="Arial"/>
+                        </a:rPr>
+                        <a:t>Merkmal</a:t>
+                      </a:r>
+                    </a:p>
+                  </a:txBody>
+                  <a:tcPr>
+                    <a:solidFill>
+                      <a:srgbClr val="003DA5"/>
+                    </a:solidFill>
+                  </a:tcPr>
+                </a:tc>
+                <a:tc>
+                  <a:txBody>
+                    <a:bodyPr wrap="square"/>
+                    <a:lstStyle/>
+                    <a:p>
+                      <a:r>
+                        <a:rPr sz="1100" b="1">
+                          <a:solidFill>
+                            <a:srgbClr val="FFFFFF"/>
+                          </a:solidFill>
+                          <a:latin typeface="Arial"/>
+                        </a:rPr>
+                        <a:t>Detail</a:t>
+                      </a:r>
+                    </a:p>
+                  </a:txBody>
+                  <a:tcPr>
+                    <a:solidFill>
+                      <a:srgbClr val="003DA5"/>
+                    </a:solidFill>
+                  </a:tcPr>
+                </a:tc>
+              </a:tr>
+              <a:tr h="475488">
+                <a:tc>
+                  <a:txBody>
+                    <a:bodyPr wrap="square"/>
+                    <a:lstStyle/>
+                    <a:p>
+                      <a:r>
+                        <a:rPr sz="1100" b="0">
+                          <a:solidFill>
+                            <a:srgbClr val="1A1A1A"/>
+                          </a:solidFill>
+                          <a:latin typeface="Arial"/>
+                        </a:rPr>
+                        <a:t>Unternehmen</a:t>
+                      </a:r>
+                    </a:p>
+                  </a:txBody>
+                  <a:tcPr>
+                    <a:solidFill>
+                      <a:srgbClr val="FFFFFF"/>
+                    </a:solidFill>
+                  </a:tcPr>
+                </a:tc>
+                <a:tc>
+                  <a:txBody>
+                    <a:bodyPr wrap="square"/>
+                    <a:lstStyle/>
+                    <a:p>
+                      <a:r>
+                        <a:rPr sz="1100" b="0">
+                          <a:solidFill>
+                            <a:srgbClr val="1A1A1A"/>
+                          </a:solidFill>
+                          <a:latin typeface="Arial"/>
+                        </a:rPr>
+                        <a:t>Maurer Metallbau GmbH &amp; Co. KG, Süddeutschland</a:t>
+                      </a:r>
+                    </a:p>
+                  </a:txBody>
+                  <a:tcPr>
+                    <a:solidFill>
+                      <a:srgbClr val="FFFFFF"/>
+                    </a:solidFill>
+                  </a:tcPr>
+                </a:tc>
+              </a:tr>
+              <a:tr h="475488">
+                <a:tc>
+                  <a:txBody>
+                    <a:bodyPr wrap="square"/>
+                    <a:lstStyle/>
+                    <a:p>
+                      <a:r>
+                        <a:rPr sz="1100" b="0">
+                          <a:solidFill>
+                            <a:srgbClr val="1A1A1A"/>
+                          </a:solidFill>
+                          <a:latin typeface="Arial"/>
+                        </a:rPr>
+                        <a:t>Branche</a:t>
+                      </a:r>
+                    </a:p>
+                  </a:txBody>
+                  <a:tcPr>
+                    <a:solidFill>
+                      <a:srgbClr val="F4F6FA"/>
+                    </a:solidFill>
+                  </a:tcPr>
+                </a:tc>
+                <a:tc>
+                  <a:txBody>
+                    <a:bodyPr wrap="square"/>
+                    <a:lstStyle/>
+                    <a:p>
+                      <a:r>
+                        <a:rPr sz="1100" b="0">
+                          <a:solidFill>
+                            <a:srgbClr val="1A1A1A"/>
+                          </a:solidFill>
+                          <a:latin typeface="Arial"/>
+                        </a:rPr>
+                        <a:t>Metallverarbeitung / Lohnfertigung</a:t>
+                      </a:r>
+                    </a:p>
+                  </a:txBody>
+                  <a:tcPr>
+                    <a:solidFill>
+                      <a:srgbClr val="F4F6FA"/>
+                    </a:solidFill>
+                  </a:tcPr>
+                </a:tc>
+              </a:tr>
+              <a:tr h="475488">
+                <a:tc>
+                  <a:txBody>
+                    <a:bodyPr wrap="square"/>
+                    <a:lstStyle/>
+                    <a:p>
+                      <a:r>
+                        <a:rPr sz="1100" b="0">
+                          <a:solidFill>
+                            <a:srgbClr val="1A1A1A"/>
+                          </a:solidFill>
+                          <a:latin typeface="Arial"/>
+                        </a:rPr>
+                        <a:t>Umsatz</a:t>
+                      </a:r>
+                    </a:p>
+                  </a:txBody>
+                  <a:tcPr>
+                    <a:solidFill>
+                      <a:srgbClr val="FFFFFF"/>
+                    </a:solidFill>
+                  </a:tcPr>
+                </a:tc>
+                <a:tc>
+                  <a:txBody>
+                    <a:bodyPr wrap="square"/>
+                    <a:lstStyle/>
+                    <a:p>
+                      <a:r>
+                        <a:rPr sz="1100" b="0">
+                          <a:solidFill>
+                            <a:srgbClr val="1A1A1A"/>
+                          </a:solidFill>
+                          <a:latin typeface="Arial"/>
+                        </a:rPr>
+                        <a:t>3,2 Mio. EUR (Vorjahr 2,9 Mio. EUR)</a:t>
+                      </a:r>
+                    </a:p>
+                  </a:txBody>
+                  <a:tcPr>
+                    <a:solidFill>
+                      <a:srgbClr val="FFFFFF"/>
+                    </a:solidFill>
+                  </a:tcPr>
+                </a:tc>
+              </a:tr>
+              <a:tr h="475488">
+                <a:tc>
+                  <a:txBody>
+                    <a:bodyPr wrap="square"/>
+                    <a:lstStyle/>
+                    <a:p>
+                      <a:r>
+                        <a:rPr sz="1100" b="0">
+                          <a:solidFill>
+                            <a:srgbClr val="1A1A1A"/>
+                          </a:solidFill>
+                          <a:latin typeface="Arial"/>
+                        </a:rPr>
+                        <a:t>Mitarbeiter</a:t>
+                      </a:r>
+                    </a:p>
+                  </a:txBody>
+                  <a:tcPr>
+                    <a:solidFill>
+                      <a:srgbClr val="F4F6FA"/>
+                    </a:solidFill>
+                  </a:tcPr>
+                </a:tc>
+                <a:tc>
+                  <a:txBody>
+                    <a:bodyPr wrap="square"/>
+                    <a:lstStyle/>
+                    <a:p>
+                      <a:r>
+                        <a:rPr sz="1100" b="0">
+                          <a:solidFill>
+                            <a:srgbClr val="1A1A1A"/>
+                          </a:solidFill>
+                          <a:latin typeface="Arial"/>
+                        </a:rPr>
+                        <a:t>14 Personen (davon 10 gewerblich)</a:t>
+                      </a:r>
+                    </a:p>
+                  </a:txBody>
+                  <a:tcPr>
+                    <a:solidFill>
+                      <a:srgbClr val="F4F6FA"/>
+                    </a:solidFill>
+                  </a:tcPr>
+                </a:tc>
+              </a:tr>
+              <a:tr h="475488">
+                <a:tc>
+                  <a:txBody>
+                    <a:bodyPr wrap="square"/>
+                    <a:lstStyle/>
+                    <a:p>
+                      <a:r>
+                        <a:rPr sz="1100" b="0">
+                          <a:solidFill>
+                            <a:srgbClr val="1A1A1A"/>
+                          </a:solidFill>
+                          <a:latin typeface="Arial"/>
+                        </a:rPr>
+                        <a:t>Geschäftsführer</a:t>
+                      </a:r>
+                    </a:p>
+                  </a:txBody>
+                  <a:tcPr>
+                    <a:solidFill>
+                      <a:srgbClr val="FFFFFF"/>
+                    </a:solidFill>
+                  </a:tcPr>
+                </a:tc>
+                <a:tc>
+                  <a:txBody>
+                    <a:bodyPr wrap="square"/>
+                    <a:lstStyle/>
+                    <a:p>
+                      <a:r>
+                        <a:rPr sz="1100" b="0">
+                          <a:solidFill>
+                            <a:srgbClr val="1A1A1A"/>
+                          </a:solidFill>
+                          <a:latin typeface="Arial"/>
+                        </a:rPr>
+                        <a:t>Florian Maurer, 54 Jahre</a:t>
+                      </a:r>
+                    </a:p>
+                  </a:txBody>
+                  <a:tcPr>
+                    <a:solidFill>
+                      <a:srgbClr val="FFFFFF"/>
+                    </a:solidFill>
+                  </a:tcPr>
+                </a:tc>
+              </a:tr>
+              <a:tr h="475488">
+                <a:tc>
+                  <a:txBody>
+                    <a:bodyPr wrap="square"/>
+                    <a:lstStyle/>
+                    <a:p>
+                      <a:r>
+                        <a:rPr sz="1100" b="0">
+                          <a:solidFill>
+                            <a:srgbClr val="1A1A1A"/>
+                          </a:solidFill>
+                          <a:latin typeface="Arial"/>
+                        </a:rPr>
+                        <a:t>Bankverbindung</a:t>
+                      </a:r>
+                    </a:p>
+                  </a:txBody>
+                  <a:tcPr>
+                    <a:solidFill>
+                      <a:srgbClr val="F4F6FA"/>
+                    </a:solidFill>
+                  </a:tcPr>
+                </a:tc>
+                <a:tc>
+                  <a:txBody>
+                    <a:bodyPr wrap="square"/>
+                    <a:lstStyle/>
+                    <a:p>
+                      <a:r>
+                        <a:rPr sz="1100" b="0">
+                          <a:solidFill>
+                            <a:srgbClr val="1A1A1A"/>
+                          </a:solidFill>
+                          <a:latin typeface="Arial"/>
+                        </a:rPr>
+                        <a:t>VR-Bank Musterregion eG, Kontokorrentlinie 250 TEUR</a:t>
+                      </a:r>
+                    </a:p>
+                  </a:txBody>
+                  <a:tcPr>
+                    <a:solidFill>
+                      <a:srgbClr val="F4F6FA"/>
+                    </a:solidFill>
+                  </a:tcPr>
+                </a:tc>
+              </a:tr>
+              <a:tr h="475488">
+                <a:tc>
+                  <a:txBody>
+                    <a:bodyPr wrap="square"/>
+                    <a:lstStyle/>
+                    <a:p>
+                      <a:r>
+                        <a:rPr sz="1100" b="0">
+                          <a:solidFill>
+                            <a:srgbClr val="1A1A1A"/>
+                          </a:solidFill>
+                          <a:latin typeface="Arial"/>
+                        </a:rPr>
+                        <a:t>Aktuelle Situation</a:t>
+                      </a:r>
+                    </a:p>
+                  </a:txBody>
+                  <a:tcPr>
+                    <a:solidFill>
+                      <a:srgbClr val="FFFFFF"/>
+                    </a:solidFill>
+                  </a:tcPr>
+                </a:tc>
+                <a:tc>
+                  <a:txBody>
+                    <a:bodyPr wrap="square"/>
+                    <a:lstStyle/>
+                    <a:p>
+                      <a:r>
+                        <a:rPr sz="1100" b="0">
+                          <a:solidFill>
+                            <a:srgbClr val="1A1A1A"/>
+                          </a:solidFill>
+                          <a:latin typeface="Arial"/>
+                        </a:rPr>
+                        <a:t>Jahresgespräch nach Bilanzeinreichung 2024. Eigenkapitalquote 24 %. Umsatzanstieg +10 % durch neuen Großkunden (Automotive Tier 2).</a:t>
+                      </a:r>
+                    </a:p>
+                  </a:txBody>
+                  <a:tcPr>
+                    <a:solidFill>
+                      <a:srgbClr val="FFFFFF"/>
+                    </a:solidFill>
+                  </a:tcPr>
+                </a:tc>
+              </a:tr>
+            </a:tbl>
+          </a:graphicData>
+        </a:graphic>
+      </p:graphicFrame>
     </p:spTree>
   </p:cSld>
   <p:clrMapOvr>
@@ -4434,215 +7969,7 @@
 </p:sld>
 </file>
 
-<file path=ppt/slides/slide3.xml><?xml version="1.0" encoding="utf-8"?>
-<p:sld xmlns:a="http://schemas.openxmlformats.org/drawingml/2006/main" xmlns:p="http://schemas.openxmlformats.org/presentationml/2006/main" xmlns:r="http://schemas.openxmlformats.org/officeDocument/2006/relationships">
-  <p:cSld>
-    <p:bg>
-      <p:bgPr>
-        <a:solidFill>
-          <a:srgbClr val="1A1A1A"/>
-        </a:solidFill>
-        <a:effectLst/>
-      </p:bgPr>
-    </p:bg>
-    <p:spTree>
-      <p:nvGrpSpPr>
-        <p:cNvPr id="1" name=""/>
-        <p:cNvGrpSpPr/>
-        <p:nvPr/>
-      </p:nvGrpSpPr>
-      <p:grpSpPr/>
-      <p:sp>
-        <p:nvSpPr>
-          <p:cNvPr id="2" name="Rectangle 1"/>
-          <p:cNvSpPr/>
-          <p:nvPr/>
-        </p:nvSpPr>
-        <p:spPr>
-          <a:xfrm>
-            <a:off x="0" y="0"/>
-            <a:ext cx="73152" cy="6858000"/>
-          </a:xfrm>
-          <a:prstGeom prst="rect">
-            <a:avLst/>
-          </a:prstGeom>
-          <a:solidFill>
-            <a:srgbClr val="E05B00"/>
-          </a:solidFill>
-          <a:ln>
-            <a:noFill/>
-          </a:ln>
-        </p:spPr>
-        <p:style>
-          <a:lnRef idx="1">
-            <a:schemeClr val="accent1"/>
-          </a:lnRef>
-          <a:fillRef idx="3">
-            <a:schemeClr val="accent1"/>
-          </a:fillRef>
-          <a:effectRef idx="2">
-            <a:schemeClr val="accent1"/>
-          </a:effectRef>
-          <a:fontRef idx="minor">
-            <a:schemeClr val="lt1"/>
-          </a:fontRef>
-        </p:style>
-        <p:txBody>
-          <a:bodyPr rtlCol="0" anchor="ctr"/>
-          <a:lstStyle/>
-          <a:p>
-            <a:pPr algn="ctr"/>
-          </a:p>
-        </p:txBody>
-      </p:sp>
-      <p:sp>
-        <p:nvSpPr>
-          <p:cNvPr id="3" name="TextBox 2"/>
-          <p:cNvSpPr txBox="1"/>
-          <p:nvPr/>
-        </p:nvSpPr>
-        <p:spPr>
-          <a:xfrm>
-            <a:off x="365760" y="2286000"/>
-            <a:ext cx="11430000" cy="1828800"/>
-          </a:xfrm>
-          <a:prstGeom prst="rect">
-            <a:avLst/>
-          </a:prstGeom>
-          <a:noFill/>
-        </p:spPr>
-        <p:txBody>
-          <a:bodyPr wrap="square">
-            <a:spAutoFit/>
-          </a:bodyPr>
-          <a:lstStyle/>
-          <a:p>
-            <a:pPr algn="l"/>
-            <a:r>
-              <a:rPr sz="3600" b="1">
-                <a:solidFill>
-                  <a:srgbClr val="FFFFFF"/>
-                </a:solidFill>
-                <a:latin typeface="Arial"/>
-              </a:rPr>
-              <a:t>4.1 Theorie-Input: Das Vier-Ohren-Modell</a:t>
-            </a:r>
-          </a:p>
-        </p:txBody>
-      </p:sp>
-    </p:spTree>
-  </p:cSld>
-  <p:clrMapOvr>
-    <a:masterClrMapping/>
-  </p:clrMapOvr>
-</p:sld>
-</file>
-
-<file path=ppt/slides/slide4.xml><?xml version="1.0" encoding="utf-8"?>
-<p:sld xmlns:a="http://schemas.openxmlformats.org/drawingml/2006/main" xmlns:p="http://schemas.openxmlformats.org/presentationml/2006/main" xmlns:r="http://schemas.openxmlformats.org/officeDocument/2006/relationships">
-  <p:cSld>
-    <p:bg>
-      <p:bgPr>
-        <a:solidFill>
-          <a:srgbClr val="1A1A1A"/>
-        </a:solidFill>
-        <a:effectLst/>
-      </p:bgPr>
-    </p:bg>
-    <p:spTree>
-      <p:nvGrpSpPr>
-        <p:cNvPr id="1" name=""/>
-        <p:cNvGrpSpPr/>
-        <p:nvPr/>
-      </p:nvGrpSpPr>
-      <p:grpSpPr/>
-      <p:sp>
-        <p:nvSpPr>
-          <p:cNvPr id="2" name="Rectangle 1"/>
-          <p:cNvSpPr/>
-          <p:nvPr/>
-        </p:nvSpPr>
-        <p:spPr>
-          <a:xfrm>
-            <a:off x="0" y="0"/>
-            <a:ext cx="73152" cy="6858000"/>
-          </a:xfrm>
-          <a:prstGeom prst="rect">
-            <a:avLst/>
-          </a:prstGeom>
-          <a:solidFill>
-            <a:srgbClr val="E05B00"/>
-          </a:solidFill>
-          <a:ln>
-            <a:noFill/>
-          </a:ln>
-        </p:spPr>
-        <p:style>
-          <a:lnRef idx="1">
-            <a:schemeClr val="accent1"/>
-          </a:lnRef>
-          <a:fillRef idx="3">
-            <a:schemeClr val="accent1"/>
-          </a:fillRef>
-          <a:effectRef idx="2">
-            <a:schemeClr val="accent1"/>
-          </a:effectRef>
-          <a:fontRef idx="minor">
-            <a:schemeClr val="lt1"/>
-          </a:fontRef>
-        </p:style>
-        <p:txBody>
-          <a:bodyPr rtlCol="0" anchor="ctr"/>
-          <a:lstStyle/>
-          <a:p>
-            <a:pPr algn="ctr"/>
-          </a:p>
-        </p:txBody>
-      </p:sp>
-      <p:sp>
-        <p:nvSpPr>
-          <p:cNvPr id="3" name="TextBox 2"/>
-          <p:cNvSpPr txBox="1"/>
-          <p:nvPr/>
-        </p:nvSpPr>
-        <p:spPr>
-          <a:xfrm>
-            <a:off x="365760" y="2286000"/>
-            <a:ext cx="11430000" cy="1828800"/>
-          </a:xfrm>
-          <a:prstGeom prst="rect">
-            <a:avLst/>
-          </a:prstGeom>
-          <a:noFill/>
-        </p:spPr>
-        <p:txBody>
-          <a:bodyPr wrap="square">
-            <a:spAutoFit/>
-          </a:bodyPr>
-          <a:lstStyle/>
-          <a:p>
-            <a:pPr algn="l"/>
-            <a:r>
-              <a:rPr sz="3600" b="1">
-                <a:solidFill>
-                  <a:srgbClr val="FFFFFF"/>
-                </a:solidFill>
-                <a:latin typeface="Arial"/>
-              </a:rPr>
-              <a:t>4.2 Theorie-Input: Das SPIN-Fragenmodell</a:t>
-            </a:r>
-          </a:p>
-        </p:txBody>
-      </p:sp>
-    </p:spTree>
-  </p:cSld>
-  <p:clrMapOvr>
-    <a:masterClrMapping/>
-  </p:clrMapOvr>
-</p:sld>
-</file>
-
-<file path=ppt/slides/slide5.xml><?xml version="1.0" encoding="utf-8"?>
+<file path=ppt/slides/slide9.xml><?xml version="1.0" encoding="utf-8"?>
 <p:sld xmlns:a="http://schemas.openxmlformats.org/drawingml/2006/main" xmlns:p="http://schemas.openxmlformats.org/presentationml/2006/main" xmlns:r="http://schemas.openxmlformats.org/officeDocument/2006/relationships">
   <p:cSld>
     <p:bg>
@@ -4711,8 +8038,8 @@
         </p:nvSpPr>
         <p:spPr>
           <a:xfrm>
-            <a:off x="365760" y="274320"/>
-            <a:ext cx="11430000" cy="822960"/>
+            <a:off x="228600" y="182880"/>
+            <a:ext cx="11430000" cy="320040"/>
           </a:xfrm>
           <a:prstGeom prst="rect">
             <a:avLst/>
@@ -4727,7 +8054,42 @@
           <a:p>
             <a:pPr algn="l"/>
             <a:r>
-              <a:rPr sz="2200" b="1">
+              <a:rPr sz="900" b="0" i="0">
+                <a:solidFill>
+                  <a:srgbClr val="556575"/>
+                </a:solidFill>
+                <a:latin typeface="Arial"/>
+              </a:rPr>
+              <a:t>M10 · Modulinhalte</a:t>
+            </a:r>
+          </a:p>
+        </p:txBody>
+      </p:sp>
+      <p:sp>
+        <p:nvSpPr>
+          <p:cNvPr id="4" name="TextBox 3"/>
+          <p:cNvSpPr txBox="1"/>
+          <p:nvPr/>
+        </p:nvSpPr>
+        <p:spPr>
+          <a:xfrm>
+            <a:off x="365760" y="274320"/>
+            <a:ext cx="11430000" cy="777240"/>
+          </a:xfrm>
+          <a:prstGeom prst="rect">
+            <a:avLst/>
+          </a:prstGeom>
+          <a:noFill/>
+        </p:spPr>
+        <p:txBody>
+          <a:bodyPr wrap="square">
+            <a:spAutoFit/>
+          </a:bodyPr>
+          <a:lstStyle/>
+          <a:p>
+            <a:pPr algn="l"/>
+            <a:r>
+              <a:rPr sz="2200" b="1" i="0">
                 <a:solidFill>
                   <a:srgbClr val="003DA5"/>
                 </a:solidFill>
@@ -4740,20 +8102,20 @@
       </p:sp>
       <p:sp>
         <p:nvSpPr>
-          <p:cNvPr id="4" name="Rectangle 3"/>
+          <p:cNvPr id="5" name="Rectangle 4"/>
           <p:cNvSpPr/>
           <p:nvPr/>
         </p:nvSpPr>
         <p:spPr>
           <a:xfrm>
-            <a:off x="365760" y="1051560"/>
+            <a:off x="365760" y="1005840"/>
             <a:ext cx="11430000" cy="27432"/>
           </a:xfrm>
           <a:prstGeom prst="rect">
             <a:avLst/>
           </a:prstGeom>
           <a:solidFill>
-            <a:srgbClr val="E5E7EB"/>
+            <a:srgbClr val="D1D5DB"/>
           </a:solidFill>
           <a:ln>
             <a:noFill/>
@@ -4783,13 +8145,13 @@
       </p:sp>
       <p:sp>
         <p:nvSpPr>
-          <p:cNvPr id="5" name="TextBox 4"/>
+          <p:cNvPr id="6" name="TextBox 5"/>
           <p:cNvSpPr txBox="1"/>
           <p:nvPr/>
         </p:nvSpPr>
         <p:spPr>
           <a:xfrm>
-            <a:off x="365760" y="1234440"/>
+            <a:off x="365760" y="1143000"/>
             <a:ext cx="11430000" cy="5212080"/>
           </a:xfrm>
           <a:prstGeom prst="rect">
@@ -4805,7 +8167,7 @@
           <a:p>
             <a:pPr>
               <a:spcBef>
-                <a:spcPts val="400"/>
+                <a:spcPts val="500"/>
               </a:spcBef>
             </a:pPr>
             <a:r>
@@ -4824,1061 +8186,7 @@
                 </a:solidFill>
                 <a:latin typeface="Arial"/>
               </a:rPr>
-              <a:t>Maschinenerneuerung: Zwei Drehmaschinen (Investitionsvolumen ca. 180 TEUR) geplant</a:t>
-            </a:r>
-          </a:p>
-          <a:p>
-            <a:pPr>
-              <a:spcBef>
-                <a:spcPts val="400"/>
-              </a:spcBef>
-            </a:pPr>
-            <a:r>
-              <a:rPr sz="1500">
-                <a:solidFill>
-                  <a:srgbClr val="003DA5"/>
-                </a:solidFill>
-                <a:latin typeface="Arial"/>
-              </a:rPr>
-              <a:t>▪  </a:t>
-            </a:r>
-            <a:r>
-              <a:rPr sz="1700">
-                <a:solidFill>
-                  <a:srgbClr val="1A1A1A"/>
-                </a:solidFill>
-                <a:latin typeface="Arial"/>
-              </a:rPr>
-              <a:t>Erweiterung der Kontokorrentlinie auf 400 TEUR für Auftragsvorfinanzierung</a:t>
-            </a:r>
-          </a:p>
-        </p:txBody>
-      </p:sp>
-      <p:sp>
-        <p:nvSpPr>
-          <p:cNvPr id="6" name="TextBox 5"/>
-          <p:cNvSpPr txBox="1"/>
-          <p:nvPr/>
-        </p:nvSpPr>
-        <p:spPr>
-          <a:xfrm>
-            <a:off x="11704320" y="6492240"/>
-            <a:ext cx="365760" cy="274320"/>
-          </a:xfrm>
-          <a:prstGeom prst="rect">
-            <a:avLst/>
-          </a:prstGeom>
-          <a:noFill/>
-        </p:spPr>
-        <p:txBody>
-          <a:bodyPr wrap="square">
-            <a:spAutoFit/>
-          </a:bodyPr>
-          <a:lstStyle/>
-          <a:p>
-            <a:pPr algn="r"/>
-            <a:r>
-              <a:rPr sz="1000" b="0">
-                <a:solidFill>
-                  <a:srgbClr val="6B7280"/>
-                </a:solidFill>
-                <a:latin typeface="Arial"/>
-              </a:rPr>
-              <a:t>1</a:t>
-            </a:r>
-          </a:p>
-        </p:txBody>
-      </p:sp>
-    </p:spTree>
-  </p:cSld>
-  <p:clrMapOvr>
-    <a:masterClrMapping/>
-  </p:clrMapOvr>
-</p:sld>
-</file>
-
-<file path=ppt/slides/slide6.xml><?xml version="1.0" encoding="utf-8"?>
-<p:sld xmlns:a="http://schemas.openxmlformats.org/drawingml/2006/main" xmlns:p="http://schemas.openxmlformats.org/presentationml/2006/main" xmlns:r="http://schemas.openxmlformats.org/officeDocument/2006/relationships">
-  <p:cSld>
-    <p:bg>
-      <p:bgPr>
-        <a:solidFill>
-          <a:srgbClr val="FFFFFF"/>
-        </a:solidFill>
-        <a:effectLst/>
-      </p:bgPr>
-    </p:bg>
-    <p:spTree>
-      <p:nvGrpSpPr>
-        <p:cNvPr id="1" name=""/>
-        <p:cNvGrpSpPr/>
-        <p:nvPr/>
-      </p:nvGrpSpPr>
-      <p:grpSpPr/>
-      <p:sp>
-        <p:nvSpPr>
-          <p:cNvPr id="2" name="Rectangle 1"/>
-          <p:cNvSpPr/>
-          <p:nvPr/>
-        </p:nvSpPr>
-        <p:spPr>
-          <a:xfrm>
-            <a:off x="0" y="0"/>
-            <a:ext cx="73152" cy="6858000"/>
-          </a:xfrm>
-          <a:prstGeom prst="rect">
-            <a:avLst/>
-          </a:prstGeom>
-          <a:solidFill>
-            <a:srgbClr val="003DA5"/>
-          </a:solidFill>
-          <a:ln>
-            <a:noFill/>
-          </a:ln>
-        </p:spPr>
-        <p:style>
-          <a:lnRef idx="1">
-            <a:schemeClr val="accent1"/>
-          </a:lnRef>
-          <a:fillRef idx="3">
-            <a:schemeClr val="accent1"/>
-          </a:fillRef>
-          <a:effectRef idx="2">
-            <a:schemeClr val="accent1"/>
-          </a:effectRef>
-          <a:fontRef idx="minor">
-            <a:schemeClr val="lt1"/>
-          </a:fontRef>
-        </p:style>
-        <p:txBody>
-          <a:bodyPr rtlCol="0" anchor="ctr"/>
-          <a:lstStyle/>
-          <a:p>
-            <a:pPr algn="ctr"/>
-          </a:p>
-        </p:txBody>
-      </p:sp>
-      <p:sp>
-        <p:nvSpPr>
-          <p:cNvPr id="3" name="TextBox 2"/>
-          <p:cNvSpPr txBox="1"/>
-          <p:nvPr/>
-        </p:nvSpPr>
-        <p:spPr>
-          <a:xfrm>
-            <a:off x="365760" y="274320"/>
-            <a:ext cx="11430000" cy="822960"/>
-          </a:xfrm>
-          <a:prstGeom prst="rect">
-            <a:avLst/>
-          </a:prstGeom>
-          <a:noFill/>
-        </p:spPr>
-        <p:txBody>
-          <a:bodyPr wrap="square">
-            <a:spAutoFit/>
-          </a:bodyPr>
-          <a:lstStyle/>
-          <a:p>
-            <a:pPr algn="l"/>
-            <a:r>
-              <a:rPr sz="2200" b="1">
-                <a:solidFill>
-                  <a:srgbClr val="003DA5"/>
-                </a:solidFill>
-                <a:latin typeface="Arial"/>
-              </a:rPr>
-              <a:t>Latente Bedarfe (nur dem Unternehmer bekannt – für Rollenspieler)</a:t>
-            </a:r>
-          </a:p>
-        </p:txBody>
-      </p:sp>
-      <p:sp>
-        <p:nvSpPr>
-          <p:cNvPr id="4" name="Rectangle 3"/>
-          <p:cNvSpPr/>
-          <p:nvPr/>
-        </p:nvSpPr>
-        <p:spPr>
-          <a:xfrm>
-            <a:off x="365760" y="1051560"/>
-            <a:ext cx="11430000" cy="27432"/>
-          </a:xfrm>
-          <a:prstGeom prst="rect">
-            <a:avLst/>
-          </a:prstGeom>
-          <a:solidFill>
-            <a:srgbClr val="E5E7EB"/>
-          </a:solidFill>
-          <a:ln>
-            <a:noFill/>
-          </a:ln>
-        </p:spPr>
-        <p:style>
-          <a:lnRef idx="1">
-            <a:schemeClr val="accent1"/>
-          </a:lnRef>
-          <a:fillRef idx="3">
-            <a:schemeClr val="accent1"/>
-          </a:fillRef>
-          <a:effectRef idx="2">
-            <a:schemeClr val="accent1"/>
-          </a:effectRef>
-          <a:fontRef idx="minor">
-            <a:schemeClr val="lt1"/>
-          </a:fontRef>
-        </p:style>
-        <p:txBody>
-          <a:bodyPr rtlCol="0" anchor="ctr"/>
-          <a:lstStyle/>
-          <a:p>
-            <a:pPr algn="ctr"/>
-          </a:p>
-        </p:txBody>
-      </p:sp>
-      <p:sp>
-        <p:nvSpPr>
-          <p:cNvPr id="5" name="TextBox 4"/>
-          <p:cNvSpPr txBox="1"/>
-          <p:nvPr/>
-        </p:nvSpPr>
-        <p:spPr>
-          <a:xfrm>
-            <a:off x="365760" y="1234440"/>
-            <a:ext cx="11430000" cy="5212080"/>
-          </a:xfrm>
-          <a:prstGeom prst="rect">
-            <a:avLst/>
-          </a:prstGeom>
-          <a:noFill/>
-        </p:spPr>
-        <p:txBody>
-          <a:bodyPr wrap="square">
-            <a:spAutoFit/>
-          </a:bodyPr>
-          <a:lstStyle/>
-          <a:p>
-            <a:pPr>
-              <a:spcBef>
-                <a:spcPts val="400"/>
-              </a:spcBef>
-            </a:pPr>
-            <a:r>
-              <a:rPr sz="1500">
-                <a:solidFill>
-                  <a:srgbClr val="003DA5"/>
-                </a:solidFill>
-                <a:latin typeface="Arial"/>
-              </a:rPr>
-              <a:t>▪  </a:t>
-            </a:r>
-            <a:r>
-              <a:rPr sz="1700">
-                <a:solidFill>
-                  <a:srgbClr val="1A1A1A"/>
-                </a:solidFill>
-                <a:latin typeface="Arial"/>
-              </a:rPr>
-              <a:t>Nachfolge ungeklärt (echter latenter Bedarf): Sohn (26) zeigt kein Interesse; Maurer hat kein Testament, keinen Gesellschaftervertrag für den Todesfall. Maurer spricht nicht darüber, weil er das Thema mit sich selbst noch nicht geklärt hat – er hofft, der Sohn ändert noch seine Meinung.</a:t>
-            </a:r>
-          </a:p>
-          <a:p>
-            <a:pPr>
-              <a:spcBef>
-                <a:spcPts val="400"/>
-              </a:spcBef>
-            </a:pPr>
-            <a:r>
-              <a:rPr sz="1500">
-                <a:solidFill>
-                  <a:srgbClr val="003DA5"/>
-                </a:solidFill>
-                <a:latin typeface="Arial"/>
-              </a:rPr>
-              <a:t>▪  </a:t>
-            </a:r>
-            <a:r>
-              <a:rPr sz="1700">
-                <a:solidFill>
-                  <a:srgbClr val="1A1A1A"/>
-                </a:solidFill>
-                <a:latin typeface="Arial"/>
-              </a:rPr>
-              <a:t>Stille Beteiligung läuft aus (echter latenter Bedarf): Ein Schwager ist seit 2012 stiller Gesellschafter (80 TEUR). Die Beteiligung hat eine Kündigungsfrist bis Ende 2025; Maurer hat noch keine Anschlussfinanzierung. Er spricht nicht darüber, weil er befürchtet, die Bank könnte das als Risiko werten.</a:t>
-            </a:r>
-          </a:p>
-          <a:p>
-            <a:pPr>
-              <a:spcBef>
-                <a:spcPts val="400"/>
-              </a:spcBef>
-            </a:pPr>
-            <a:r>
-              <a:rPr sz="1500">
-                <a:solidFill>
-                  <a:srgbClr val="003DA5"/>
-                </a:solidFill>
-                <a:latin typeface="Arial"/>
-              </a:rPr>
-              <a:t>▪  </a:t>
-            </a:r>
-            <a:r>
-              <a:rPr sz="1700">
-                <a:solidFill>
-                  <a:srgbClr val="1A1A1A"/>
-                </a:solidFill>
-                <a:latin typeface="Arial"/>
-              </a:rPr>
-              <a:t>Liquiditätsengpass (bekannt, aber nicht priorisiert): Der neue Großkunde zahlt mit 60 Tagen Ziel; bei Großaufträgen (&gt; 80 TEUR) entsteht Vorlauffinanzierungsbedarf. Maurer hält das für ein temporäres Problem und hat KK bisher ausreichend gefunden.</a:t>
-            </a:r>
-          </a:p>
-          <a:p>
-            <a:pPr>
-              <a:spcBef>
-                <a:spcPts val="400"/>
-              </a:spcBef>
-            </a:pPr>
-            <a:r>
-              <a:rPr sz="1500">
-                <a:solidFill>
-                  <a:srgbClr val="003DA5"/>
-                </a:solidFill>
-                <a:latin typeface="Arial"/>
-              </a:rPr>
-              <a:t>▪  </a:t>
-            </a:r>
-            <a:r>
-              <a:rPr sz="1700">
-                <a:solidFill>
-                  <a:srgbClr val="1A1A1A"/>
-                </a:solidFill>
-                <a:latin typeface="Arial"/>
-              </a:rPr>
-              <a:t>Private Absicherung (latent): Florian Maurer hat seit Jahren keine BU-Versicherung mehr; private Krankenversicherung läuft als Einzelvertrag ohne Unternehmensbezug.</a:t>
-            </a:r>
-          </a:p>
-        </p:txBody>
-      </p:sp>
-      <p:sp>
-        <p:nvSpPr>
-          <p:cNvPr id="6" name="TextBox 5"/>
-          <p:cNvSpPr txBox="1"/>
-          <p:nvPr/>
-        </p:nvSpPr>
-        <p:spPr>
-          <a:xfrm>
-            <a:off x="11704320" y="6492240"/>
-            <a:ext cx="365760" cy="274320"/>
-          </a:xfrm>
-          <a:prstGeom prst="rect">
-            <a:avLst/>
-          </a:prstGeom>
-          <a:noFill/>
-        </p:spPr>
-        <p:txBody>
-          <a:bodyPr wrap="square">
-            <a:spAutoFit/>
-          </a:bodyPr>
-          <a:lstStyle/>
-          <a:p>
-            <a:pPr algn="r"/>
-            <a:r>
-              <a:rPr sz="1000" b="0">
-                <a:solidFill>
-                  <a:srgbClr val="6B7280"/>
-                </a:solidFill>
-                <a:latin typeface="Arial"/>
-              </a:rPr>
-              <a:t>2</a:t>
-            </a:r>
-          </a:p>
-        </p:txBody>
-      </p:sp>
-    </p:spTree>
-  </p:cSld>
-  <p:clrMapOvr>
-    <a:masterClrMapping/>
-  </p:clrMapOvr>
-</p:sld>
-</file>
-
-<file path=ppt/slides/slide7.xml><?xml version="1.0" encoding="utf-8"?>
-<p:sld xmlns:a="http://schemas.openxmlformats.org/drawingml/2006/main" xmlns:p="http://schemas.openxmlformats.org/presentationml/2006/main" xmlns:r="http://schemas.openxmlformats.org/officeDocument/2006/relationships">
-  <p:cSld>
-    <p:bg>
-      <p:bgPr>
-        <a:solidFill>
-          <a:srgbClr val="FFFFFF"/>
-        </a:solidFill>
-        <a:effectLst/>
-      </p:bgPr>
-    </p:bg>
-    <p:spTree>
-      <p:nvGrpSpPr>
-        <p:cNvPr id="1" name=""/>
-        <p:cNvGrpSpPr/>
-        <p:nvPr/>
-      </p:nvGrpSpPr>
-      <p:grpSpPr/>
-      <p:sp>
-        <p:nvSpPr>
-          <p:cNvPr id="2" name="Rectangle 1"/>
-          <p:cNvSpPr/>
-          <p:nvPr/>
-        </p:nvSpPr>
-        <p:spPr>
-          <a:xfrm>
-            <a:off x="0" y="0"/>
-            <a:ext cx="73152" cy="6858000"/>
-          </a:xfrm>
-          <a:prstGeom prst="rect">
-            <a:avLst/>
-          </a:prstGeom>
-          <a:solidFill>
-            <a:srgbClr val="003DA5"/>
-          </a:solidFill>
-          <a:ln>
-            <a:noFill/>
-          </a:ln>
-        </p:spPr>
-        <p:style>
-          <a:lnRef idx="1">
-            <a:schemeClr val="accent1"/>
-          </a:lnRef>
-          <a:fillRef idx="3">
-            <a:schemeClr val="accent1"/>
-          </a:fillRef>
-          <a:effectRef idx="2">
-            <a:schemeClr val="accent1"/>
-          </a:effectRef>
-          <a:fontRef idx="minor">
-            <a:schemeClr val="lt1"/>
-          </a:fontRef>
-        </p:style>
-        <p:txBody>
-          <a:bodyPr rtlCol="0" anchor="ctr"/>
-          <a:lstStyle/>
-          <a:p>
-            <a:pPr algn="ctr"/>
-          </a:p>
-        </p:txBody>
-      </p:sp>
-      <p:sp>
-        <p:nvSpPr>
-          <p:cNvPr id="3" name="TextBox 2"/>
-          <p:cNvSpPr txBox="1"/>
-          <p:nvPr/>
-        </p:nvSpPr>
-        <p:spPr>
-          <a:xfrm>
-            <a:off x="365760" y="274320"/>
-            <a:ext cx="11430000" cy="822960"/>
-          </a:xfrm>
-          <a:prstGeom prst="rect">
-            <a:avLst/>
-          </a:prstGeom>
-          <a:noFill/>
-        </p:spPr>
-        <p:txBody>
-          <a:bodyPr wrap="square">
-            <a:spAutoFit/>
-          </a:bodyPr>
-          <a:lstStyle/>
-          <a:p>
-            <a:pPr algn="l"/>
-            <a:r>
-              <a:rPr sz="2200" b="1">
-                <a:solidFill>
-                  <a:srgbClr val="003DA5"/>
-                </a:solidFill>
-                <a:latin typeface="Arial"/>
-              </a:rPr>
-              <a:t>Optionale Rollenspielvarianten (für erfahrene Gruppen oder zweite Runde)</a:t>
-            </a:r>
-          </a:p>
-        </p:txBody>
-      </p:sp>
-      <p:sp>
-        <p:nvSpPr>
-          <p:cNvPr id="4" name="Rectangle 3"/>
-          <p:cNvSpPr/>
-          <p:nvPr/>
-        </p:nvSpPr>
-        <p:spPr>
-          <a:xfrm>
-            <a:off x="365760" y="1051560"/>
-            <a:ext cx="11430000" cy="27432"/>
-          </a:xfrm>
-          <a:prstGeom prst="rect">
-            <a:avLst/>
-          </a:prstGeom>
-          <a:solidFill>
-            <a:srgbClr val="E5E7EB"/>
-          </a:solidFill>
-          <a:ln>
-            <a:noFill/>
-          </a:ln>
-        </p:spPr>
-        <p:style>
-          <a:lnRef idx="1">
-            <a:schemeClr val="accent1"/>
-          </a:lnRef>
-          <a:fillRef idx="3">
-            <a:schemeClr val="accent1"/>
-          </a:fillRef>
-          <a:effectRef idx="2">
-            <a:schemeClr val="accent1"/>
-          </a:effectRef>
-          <a:fontRef idx="minor">
-            <a:schemeClr val="lt1"/>
-          </a:fontRef>
-        </p:style>
-        <p:txBody>
-          <a:bodyPr rtlCol="0" anchor="ctr"/>
-          <a:lstStyle/>
-          <a:p>
-            <a:pPr algn="ctr"/>
-          </a:p>
-        </p:txBody>
-      </p:sp>
-      <p:sp>
-        <p:nvSpPr>
-          <p:cNvPr id="5" name="TextBox 4"/>
-          <p:cNvSpPr txBox="1"/>
-          <p:nvPr/>
-        </p:nvSpPr>
-        <p:spPr>
-          <a:xfrm>
-            <a:off x="365760" y="1234440"/>
-            <a:ext cx="11430000" cy="5212080"/>
-          </a:xfrm>
-          <a:prstGeom prst="rect">
-            <a:avLst/>
-          </a:prstGeom>
-          <a:noFill/>
-        </p:spPr>
-        <p:txBody>
-          <a:bodyPr wrap="square">
-            <a:spAutoFit/>
-          </a:bodyPr>
-          <a:lstStyle/>
-          <a:p>
-            <a:pPr>
-              <a:spcBef>
-                <a:spcPts val="400"/>
-              </a:spcBef>
-            </a:pPr>
-            <a:r>
-              <a:rPr sz="1500">
-                <a:solidFill>
-                  <a:srgbClr val="003DA5"/>
-                </a:solidFill>
-                <a:latin typeface="Arial"/>
-              </a:rPr>
-              <a:t>▪  </a:t>
-            </a:r>
-            <a:r>
-              <a:rPr sz="1700">
-                <a:solidFill>
-                  <a:srgbClr val="1A1A1A"/>
-                </a:solidFill>
-                <a:latin typeface="Arial"/>
-              </a:rPr>
-              <a:t>Variante A – Der wortkarger Unternehmer Rollenkarte für Unternehmer-Spieler: Sie sind grundsätzlich zufrieden mit Ihrer…</a:t>
-            </a:r>
-          </a:p>
-          <a:p>
-            <a:pPr>
-              <a:spcBef>
-                <a:spcPts val="400"/>
-              </a:spcBef>
-            </a:pPr>
-            <a:r>
-              <a:rPr sz="1500">
-                <a:solidFill>
-                  <a:srgbClr val="003DA5"/>
-                </a:solidFill>
-                <a:latin typeface="Arial"/>
-              </a:rPr>
-              <a:t>▪  </a:t>
-            </a:r>
-            <a:r>
-              <a:rPr sz="1700">
-                <a:solidFill>
-                  <a:srgbClr val="1A1A1A"/>
-                </a:solidFill>
-                <a:latin typeface="Arial"/>
-              </a:rPr>
-              <a:t>Variante B – Zwei Gesellschafter am Tisch (GbR-Situation) Rollenkarten für zwei Unternehmer-Spieler: Sie sind gemeinsam…</a:t>
-            </a:r>
-          </a:p>
-        </p:txBody>
-      </p:sp>
-      <p:sp>
-        <p:nvSpPr>
-          <p:cNvPr id="6" name="TextBox 5"/>
-          <p:cNvSpPr txBox="1"/>
-          <p:nvPr/>
-        </p:nvSpPr>
-        <p:spPr>
-          <a:xfrm>
-            <a:off x="11704320" y="6492240"/>
-            <a:ext cx="365760" cy="274320"/>
-          </a:xfrm>
-          <a:prstGeom prst="rect">
-            <a:avLst/>
-          </a:prstGeom>
-          <a:noFill/>
-        </p:spPr>
-        <p:txBody>
-          <a:bodyPr wrap="square">
-            <a:spAutoFit/>
-          </a:bodyPr>
-          <a:lstStyle/>
-          <a:p>
-            <a:pPr algn="r"/>
-            <a:r>
-              <a:rPr sz="1000" b="0">
-                <a:solidFill>
-                  <a:srgbClr val="6B7280"/>
-                </a:solidFill>
-                <a:latin typeface="Arial"/>
-              </a:rPr>
-              <a:t>3</a:t>
-            </a:r>
-          </a:p>
-        </p:txBody>
-      </p:sp>
-    </p:spTree>
-  </p:cSld>
-  <p:clrMapOvr>
-    <a:masterClrMapping/>
-  </p:clrMapOvr>
-</p:sld>
-</file>
-
-<file path=ppt/slides/slide8.xml><?xml version="1.0" encoding="utf-8"?>
-<p:sld xmlns:a="http://schemas.openxmlformats.org/drawingml/2006/main" xmlns:p="http://schemas.openxmlformats.org/presentationml/2006/main" xmlns:r="http://schemas.openxmlformats.org/officeDocument/2006/relationships">
-  <p:cSld>
-    <p:bg>
-      <p:bgPr>
-        <a:solidFill>
-          <a:srgbClr val="1A1A1A"/>
-        </a:solidFill>
-        <a:effectLst/>
-      </p:bgPr>
-    </p:bg>
-    <p:spTree>
-      <p:nvGrpSpPr>
-        <p:cNvPr id="1" name=""/>
-        <p:cNvGrpSpPr/>
-        <p:nvPr/>
-      </p:nvGrpSpPr>
-      <p:grpSpPr/>
-      <p:sp>
-        <p:nvSpPr>
-          <p:cNvPr id="2" name="Rectangle 1"/>
-          <p:cNvSpPr/>
-          <p:nvPr/>
-        </p:nvSpPr>
-        <p:spPr>
-          <a:xfrm>
-            <a:off x="0" y="0"/>
-            <a:ext cx="73152" cy="6858000"/>
-          </a:xfrm>
-          <a:prstGeom prst="rect">
-            <a:avLst/>
-          </a:prstGeom>
-          <a:solidFill>
-            <a:srgbClr val="E05B00"/>
-          </a:solidFill>
-          <a:ln>
-            <a:noFill/>
-          </a:ln>
-        </p:spPr>
-        <p:style>
-          <a:lnRef idx="1">
-            <a:schemeClr val="accent1"/>
-          </a:lnRef>
-          <a:fillRef idx="3">
-            <a:schemeClr val="accent1"/>
-          </a:fillRef>
-          <a:effectRef idx="2">
-            <a:schemeClr val="accent1"/>
-          </a:effectRef>
-          <a:fontRef idx="minor">
-            <a:schemeClr val="lt1"/>
-          </a:fontRef>
-        </p:style>
-        <p:txBody>
-          <a:bodyPr rtlCol="0" anchor="ctr"/>
-          <a:lstStyle/>
-          <a:p>
-            <a:pPr algn="ctr"/>
-          </a:p>
-        </p:txBody>
-      </p:sp>
-      <p:sp>
-        <p:nvSpPr>
-          <p:cNvPr id="3" name="TextBox 2"/>
-          <p:cNvSpPr txBox="1"/>
-          <p:nvPr/>
-        </p:nvSpPr>
-        <p:spPr>
-          <a:xfrm>
-            <a:off x="365760" y="2286000"/>
-            <a:ext cx="11430000" cy="1828800"/>
-          </a:xfrm>
-          <a:prstGeom prst="rect">
-            <a:avLst/>
-          </a:prstGeom>
-          <a:noFill/>
-        </p:spPr>
-        <p:txBody>
-          <a:bodyPr wrap="square">
-            <a:spAutoFit/>
-          </a:bodyPr>
-          <a:lstStyle/>
-          <a:p>
-            <a:pPr algn="l"/>
-            <a:r>
-              <a:rPr sz="3600" b="1">
-                <a:solidFill>
-                  <a:srgbClr val="FFFFFF"/>
-                </a:solidFill>
-                <a:latin typeface="Arial"/>
-              </a:rPr>
-              <a:t>4.4 Beobachtungsbogen (für den dritten Rollenspieler)</a:t>
-            </a:r>
-          </a:p>
-        </p:txBody>
-      </p:sp>
-    </p:spTree>
-  </p:cSld>
-  <p:clrMapOvr>
-    <a:masterClrMapping/>
-  </p:clrMapOvr>
-</p:sld>
-</file>
-
-<file path=ppt/slides/slide9.xml><?xml version="1.0" encoding="utf-8"?>
-<p:sld xmlns:a="http://schemas.openxmlformats.org/drawingml/2006/main" xmlns:p="http://schemas.openxmlformats.org/presentationml/2006/main" xmlns:r="http://schemas.openxmlformats.org/officeDocument/2006/relationships">
-  <p:cSld>
-    <p:bg>
-      <p:bgPr>
-        <a:solidFill>
-          <a:srgbClr val="FFFFFF"/>
-        </a:solidFill>
-        <a:effectLst/>
-      </p:bgPr>
-    </p:bg>
-    <p:spTree>
-      <p:nvGrpSpPr>
-        <p:cNvPr id="1" name=""/>
-        <p:cNvGrpSpPr/>
-        <p:nvPr/>
-      </p:nvGrpSpPr>
-      <p:grpSpPr/>
-      <p:sp>
-        <p:nvSpPr>
-          <p:cNvPr id="2" name="Rectangle 1"/>
-          <p:cNvSpPr/>
-          <p:nvPr/>
-        </p:nvSpPr>
-        <p:spPr>
-          <a:xfrm>
-            <a:off x="0" y="0"/>
-            <a:ext cx="73152" cy="6858000"/>
-          </a:xfrm>
-          <a:prstGeom prst="rect">
-            <a:avLst/>
-          </a:prstGeom>
-          <a:solidFill>
-            <a:srgbClr val="003DA5"/>
-          </a:solidFill>
-          <a:ln>
-            <a:noFill/>
-          </a:ln>
-        </p:spPr>
-        <p:style>
-          <a:lnRef idx="1">
-            <a:schemeClr val="accent1"/>
-          </a:lnRef>
-          <a:fillRef idx="3">
-            <a:schemeClr val="accent1"/>
-          </a:fillRef>
-          <a:effectRef idx="2">
-            <a:schemeClr val="accent1"/>
-          </a:effectRef>
-          <a:fontRef idx="minor">
-            <a:schemeClr val="lt1"/>
-          </a:fontRef>
-        </p:style>
-        <p:txBody>
-          <a:bodyPr rtlCol="0" anchor="ctr"/>
-          <a:lstStyle/>
-          <a:p>
-            <a:pPr algn="ctr"/>
-          </a:p>
-        </p:txBody>
-      </p:sp>
-      <p:sp>
-        <p:nvSpPr>
-          <p:cNvPr id="3" name="TextBox 2"/>
-          <p:cNvSpPr txBox="1"/>
-          <p:nvPr/>
-        </p:nvSpPr>
-        <p:spPr>
-          <a:xfrm>
-            <a:off x="365760" y="274320"/>
-            <a:ext cx="11430000" cy="822960"/>
-          </a:xfrm>
-          <a:prstGeom prst="rect">
-            <a:avLst/>
-          </a:prstGeom>
-          <a:noFill/>
-        </p:spPr>
-        <p:txBody>
-          <a:bodyPr wrap="square">
-            <a:spAutoFit/>
-          </a:bodyPr>
-          <a:lstStyle/>
-          <a:p>
-            <a:pPr algn="l"/>
-            <a:r>
-              <a:rPr sz="2200" b="1">
-                <a:solidFill>
-                  <a:srgbClr val="003DA5"/>
-                </a:solidFill>
-                <a:latin typeface="Arial"/>
-              </a:rPr>
-              <a:t>Reflexionsfragen nach jedem Gespräch</a:t>
-            </a:r>
-          </a:p>
-        </p:txBody>
-      </p:sp>
-      <p:sp>
-        <p:nvSpPr>
-          <p:cNvPr id="4" name="Rectangle 3"/>
-          <p:cNvSpPr/>
-          <p:nvPr/>
-        </p:nvSpPr>
-        <p:spPr>
-          <a:xfrm>
-            <a:off x="365760" y="1051560"/>
-            <a:ext cx="11430000" cy="27432"/>
-          </a:xfrm>
-          <a:prstGeom prst="rect">
-            <a:avLst/>
-          </a:prstGeom>
-          <a:solidFill>
-            <a:srgbClr val="E5E7EB"/>
-          </a:solidFill>
-          <a:ln>
-            <a:noFill/>
-          </a:ln>
-        </p:spPr>
-        <p:style>
-          <a:lnRef idx="1">
-            <a:schemeClr val="accent1"/>
-          </a:lnRef>
-          <a:fillRef idx="3">
-            <a:schemeClr val="accent1"/>
-          </a:fillRef>
-          <a:effectRef idx="2">
-            <a:schemeClr val="accent1"/>
-          </a:effectRef>
-          <a:fontRef idx="minor">
-            <a:schemeClr val="lt1"/>
-          </a:fontRef>
-        </p:style>
-        <p:txBody>
-          <a:bodyPr rtlCol="0" anchor="ctr"/>
-          <a:lstStyle/>
-          <a:p>
-            <a:pPr algn="ctr"/>
-          </a:p>
-        </p:txBody>
-      </p:sp>
-      <p:sp>
-        <p:nvSpPr>
-          <p:cNvPr id="5" name="TextBox 4"/>
-          <p:cNvSpPr txBox="1"/>
-          <p:nvPr/>
-        </p:nvSpPr>
-        <p:spPr>
-          <a:xfrm>
-            <a:off x="365760" y="1234440"/>
-            <a:ext cx="11430000" cy="5212080"/>
-          </a:xfrm>
-          <a:prstGeom prst="rect">
-            <a:avLst/>
-          </a:prstGeom>
-          <a:noFill/>
-        </p:spPr>
-        <p:txBody>
-          <a:bodyPr wrap="square">
-            <a:spAutoFit/>
-          </a:bodyPr>
-          <a:lstStyle/>
-          <a:p>
-            <a:pPr>
-              <a:spcBef>
-                <a:spcPts val="400"/>
-              </a:spcBef>
-            </a:pPr>
-            <a:r>
-              <a:rPr sz="1500">
-                <a:solidFill>
-                  <a:srgbClr val="003DA5"/>
-                </a:solidFill>
-                <a:latin typeface="Arial"/>
-              </a:rPr>
-              <a:t>▪  </a:t>
-            </a:r>
-            <a:r>
-              <a:rPr sz="1700">
-                <a:solidFill>
-                  <a:srgbClr val="1A1A1A"/>
-                </a:solidFill>
-                <a:latin typeface="Arial"/>
-              </a:rPr>
-              <a:t>Wie viele Implikationsfragen habe ich gestellt? (Schätzen Sie die Anzahl.)</a:t>
-            </a:r>
-          </a:p>
-          <a:p>
-            <a:pPr>
-              <a:spcBef>
-                <a:spcPts val="400"/>
-              </a:spcBef>
-            </a:pPr>
-            <a:r>
-              <a:rPr sz="1500">
-                <a:solidFill>
-                  <a:srgbClr val="003DA5"/>
-                </a:solidFill>
-                <a:latin typeface="Arial"/>
-              </a:rPr>
-              <a:t>▪  </a:t>
-            </a:r>
-            <a:r>
-              <a:rPr sz="1700">
-                <a:solidFill>
-                  <a:srgbClr val="1A1A1A"/>
-                </a:solidFill>
-                <a:latin typeface="Arial"/>
-              </a:rPr>
-              <a:t>Welchen Bedarf hat der Unternehmer selbst formuliert – ohne dass ich ihn präsentiert habe?</a:t>
-            </a:r>
-          </a:p>
-          <a:p>
-            <a:pPr>
-              <a:spcBef>
-                <a:spcPts val="400"/>
-              </a:spcBef>
-            </a:pPr>
-            <a:r>
-              <a:rPr sz="1500">
-                <a:solidFill>
-                  <a:srgbClr val="003DA5"/>
-                </a:solidFill>
-                <a:latin typeface="Arial"/>
-              </a:rPr>
-              <a:t>▪  </a:t>
-            </a:r>
-            <a:r>
-              <a:rPr sz="1700">
-                <a:solidFill>
-                  <a:srgbClr val="1A1A1A"/>
-                </a:solidFill>
-                <a:latin typeface="Arial"/>
-              </a:rPr>
-              <a:t>Auf welchem der vier Ohren habe ich primär gehört? Was habe ich möglicherweise verpasst?</a:t>
-            </a:r>
-          </a:p>
-          <a:p>
-            <a:pPr>
-              <a:spcBef>
-                <a:spcPts val="400"/>
-              </a:spcBef>
-            </a:pPr>
-            <a:r>
-              <a:rPr sz="1500">
-                <a:solidFill>
-                  <a:srgbClr val="003DA5"/>
-                </a:solidFill>
-                <a:latin typeface="Arial"/>
-              </a:rPr>
-              <a:t>▪  </a:t>
-            </a:r>
-            <a:r>
-              <a:rPr sz="1700">
-                <a:solidFill>
-                  <a:srgbClr val="1A1A1A"/>
-                </a:solidFill>
-                <a:latin typeface="Arial"/>
-              </a:rPr>
-              <a:t>Welcher Bereich des UnternehmerDialogs blieb offen? Warum?</a:t>
-            </a:r>
-          </a:p>
-          <a:p>
-            <a:pPr>
-              <a:spcBef>
-                <a:spcPts val="400"/>
-              </a:spcBef>
-            </a:pPr>
-            <a:r>
-              <a:rPr sz="1500">
-                <a:solidFill>
-                  <a:srgbClr val="003DA5"/>
-                </a:solidFill>
-                <a:latin typeface="Arial"/>
-              </a:rPr>
-              <a:t>▪  </a:t>
-            </a:r>
-            <a:r>
-              <a:rPr sz="1700">
-                <a:solidFill>
-                  <a:srgbClr val="1A1A1A"/>
-                </a:solidFill>
-                <a:latin typeface="Arial"/>
-              </a:rPr>
-              <a:t>Was nehme ich mir für das nächste Gespräch mit diesem Kunden konkret vor?</a:t>
-            </a:r>
-          </a:p>
-        </p:txBody>
-      </p:sp>
-      <p:sp>
-        <p:nvSpPr>
-          <p:cNvPr id="6" name="TextBox 5"/>
-          <p:cNvSpPr txBox="1"/>
-          <p:nvPr/>
-        </p:nvSpPr>
-        <p:spPr>
-          <a:xfrm>
-            <a:off x="11704320" y="6492240"/>
-            <a:ext cx="365760" cy="274320"/>
-          </a:xfrm>
-          <a:prstGeom prst="rect">
-            <a:avLst/>
-          </a:prstGeom>
-          <a:noFill/>
-        </p:spPr>
-        <p:txBody>
-          <a:bodyPr wrap="square">
-            <a:spAutoFit/>
-          </a:bodyPr>
-          <a:lstStyle/>
-          <a:p>
-            <a:pPr algn="r"/>
-            <a:r>
-              <a:rPr sz="1000" b="0">
-                <a:solidFill>
-                  <a:srgbClr val="6B7280"/>
-                </a:solidFill>
-                <a:latin typeface="Arial"/>
-              </a:rPr>
-              <a:t>4</a:t>
+              <a:t>- Maschinenerneuerung: Zwei Drehmaschinen (Investitionsvolumen ca. 180 TEUR) geplant - Erweiterung der Kontokorrentlinie auf 400 TEUR für…</a:t>
             </a:r>
           </a:p>
         </p:txBody>

--- a/public/downloads/praesentation/M10.pptx
+++ b/public/downloads/praesentation/M10.pptx
@@ -19,8 +19,10 @@
     <p:sldId id="267" r:id="rId18"/>
     <p:sldId id="268" r:id="rId19"/>
     <p:sldId id="269" r:id="rId20"/>
+    <p:sldId id="270" r:id="rId21"/>
+    <p:sldId id="271" r:id="rId22"/>
   </p:sldIdLst>
-  <p:sldSz cx="12188952" cy="6858000" type="screen4x3"/>
+  <p:sldSz cx="12191695" cy="6858000" type="screen4x3"/>
   <p:notesSz cx="6858000" cy="9144000"/>
   <p:defaultTextStyle>
     <a:defPPr>
@@ -3097,7 +3099,7 @@
     <p:bg>
       <p:bgPr>
         <a:solidFill>
-          <a:srgbClr val="003DA5"/>
+          <a:srgbClr val="F8F8FA"/>
         </a:solidFill>
         <a:effectLst/>
       </p:bgPr>
@@ -3111,20 +3113,125 @@
       <p:grpSpPr/>
       <p:sp>
         <p:nvSpPr>
-          <p:cNvPr id="2" name="Rectangle 1"/>
+          <p:cNvPr id="2" name="TextBox 1"/>
+          <p:cNvSpPr txBox="1"/>
+          <p:nvPr/>
+        </p:nvSpPr>
+        <p:spPr>
+          <a:xfrm>
+            <a:off x="609600" y="304800"/>
+            <a:ext cx="3175000" cy="279400"/>
+          </a:xfrm>
+          <a:prstGeom prst="rect">
+            <a:avLst/>
+          </a:prstGeom>
+          <a:noFill/>
+        </p:spPr>
+        <p:txBody>
+          <a:bodyPr wrap="square">
+            <a:spAutoFit/>
+          </a:bodyPr>
+          <a:lstStyle/>
+          <a:p>
+            <a:pPr algn="l"/>
+            <a:r>
+              <a:rPr sz="1600" b="1" i="0">
+                <a:solidFill>
+                  <a:srgbClr val="191D2E"/>
+                </a:solidFill>
+                <a:latin typeface="Arial"/>
+              </a:rPr>
+              <a:t>FKB  Campus</a:t>
+            </a:r>
+          </a:p>
+        </p:txBody>
+      </p:sp>
+      <p:sp>
+        <p:nvSpPr>
+          <p:cNvPr id="3" name="TextBox 2"/>
+          <p:cNvSpPr txBox="1"/>
+          <p:nvPr/>
+        </p:nvSpPr>
+        <p:spPr>
+          <a:xfrm>
+            <a:off x="0" y="304800"/>
+            <a:ext cx="11582400" cy="279400"/>
+          </a:xfrm>
+          <a:prstGeom prst="rect">
+            <a:avLst/>
+          </a:prstGeom>
+          <a:noFill/>
+        </p:spPr>
+        <p:txBody>
+          <a:bodyPr wrap="square">
+            <a:spAutoFit/>
+          </a:bodyPr>
+          <a:lstStyle/>
+          <a:p>
+            <a:pPr algn="r"/>
+            <a:r>
+              <a:rPr sz="1400" b="0" i="0">
+                <a:solidFill>
+                  <a:srgbClr val="7B7FA0"/>
+                </a:solidFill>
+                <a:latin typeface="Courier New"/>
+              </a:rPr>
+              <a:t>M10  ·  v1.0</a:t>
+            </a:r>
+          </a:p>
+        </p:txBody>
+      </p:sp>
+      <p:sp>
+        <p:nvSpPr>
+          <p:cNvPr id="4" name="TextBox 3"/>
+          <p:cNvSpPr txBox="1"/>
+          <p:nvPr/>
+        </p:nvSpPr>
+        <p:spPr>
+          <a:xfrm>
+            <a:off x="609600" y="3048000"/>
+            <a:ext cx="10972800" cy="2159000"/>
+          </a:xfrm>
+          <a:prstGeom prst="rect">
+            <a:avLst/>
+          </a:prstGeom>
+          <a:noFill/>
+        </p:spPr>
+        <p:txBody>
+          <a:bodyPr wrap="square">
+            <a:spAutoFit/>
+          </a:bodyPr>
+          <a:lstStyle/>
+          <a:p>
+            <a:pPr algn="l"/>
+            <a:r>
+              <a:rPr sz="9600" b="0" i="0">
+                <a:solidFill>
+                  <a:srgbClr val="191D2E"/>
+                </a:solidFill>
+                <a:latin typeface="Georgia"/>
+              </a:rPr>
+              <a:t>Strukturierte Bedarfsanalyse</a:t>
+            </a:r>
+          </a:p>
+        </p:txBody>
+      </p:sp>
+      <p:sp>
+        <p:nvSpPr>
+          <p:cNvPr id="5" name="Rectangle 4"/>
           <p:cNvSpPr/>
           <p:nvPr/>
         </p:nvSpPr>
         <p:spPr>
           <a:xfrm>
-            <a:off x="0" y="0"/>
-            <a:ext cx="73152" cy="6858000"/>
+            <a:off x="609600" y="5334000"/>
+            <a:ext cx="10972800" cy="6350"/>
           </a:xfrm>
           <a:prstGeom prst="rect">
             <a:avLst/>
           </a:prstGeom>
           <a:solidFill>
-            <a:srgbClr val="E05B00"/>
+            <a:srgbClr val="191D2E"/>
           </a:solidFill>
           <a:ln>
             <a:noFill/>
@@ -3154,14 +3261,320 @@
       </p:sp>
       <p:sp>
         <p:nvSpPr>
+          <p:cNvPr id="6" name="TextBox 5"/>
+          <p:cNvSpPr txBox="1"/>
+          <p:nvPr/>
+        </p:nvSpPr>
+        <p:spPr>
+          <a:xfrm>
+            <a:off x="609600" y="5461000"/>
+            <a:ext cx="5207000" cy="889000"/>
+          </a:xfrm>
+          <a:prstGeom prst="rect">
+            <a:avLst/>
+          </a:prstGeom>
+          <a:noFill/>
+        </p:spPr>
+        <p:txBody>
+          <a:bodyPr wrap="square">
+            <a:spAutoFit/>
+          </a:bodyPr>
+          <a:lstStyle/>
+          <a:p>
+            <a:pPr algn="l"/>
+            <a:r>
+              <a:rPr sz="2200" b="0" i="1">
+                <a:solidFill>
+                  <a:srgbClr val="4D5270"/>
+                </a:solidFill>
+                <a:latin typeface="Georgia"/>
+              </a:rPr>
+              <a:t>Vom Jahresgespräch zum echten Bedarf</a:t>
+            </a:r>
+          </a:p>
+        </p:txBody>
+      </p:sp>
+      <p:sp>
+        <p:nvSpPr>
+          <p:cNvPr id="7" name="TextBox 6"/>
+          <p:cNvSpPr txBox="1"/>
+          <p:nvPr/>
+        </p:nvSpPr>
+        <p:spPr>
+          <a:xfrm>
+            <a:off x="6032500" y="5461000"/>
+            <a:ext cx="2286000" cy="177800"/>
+          </a:xfrm>
+          <a:prstGeom prst="rect">
+            <a:avLst/>
+          </a:prstGeom>
+          <a:noFill/>
+        </p:spPr>
+        <p:txBody>
+          <a:bodyPr wrap="square">
+            <a:spAutoFit/>
+          </a:bodyPr>
+          <a:lstStyle/>
+          <a:p>
+            <a:pPr algn="l"/>
+            <a:r>
+              <a:rPr sz="1200" b="0" i="0" spc="100">
+                <a:solidFill>
+                  <a:srgbClr val="7B7FA0"/>
+                </a:solidFill>
+                <a:latin typeface="Courier New"/>
+              </a:rPr>
+              <a:t>ZIELSTUFE</a:t>
+            </a:r>
+          </a:p>
+        </p:txBody>
+      </p:sp>
+      <p:sp>
+        <p:nvSpPr>
+          <p:cNvPr id="8" name="TextBox 7"/>
+          <p:cNvSpPr txBox="1"/>
+          <p:nvPr/>
+        </p:nvSpPr>
+        <p:spPr>
+          <a:xfrm>
+            <a:off x="6032500" y="5664200"/>
+            <a:ext cx="2286000" cy="508000"/>
+          </a:xfrm>
+          <a:prstGeom prst="rect">
+            <a:avLst/>
+          </a:prstGeom>
+          <a:noFill/>
+        </p:spPr>
+        <p:txBody>
+          <a:bodyPr wrap="square">
+            <a:spAutoFit/>
+          </a:bodyPr>
+          <a:lstStyle/>
+          <a:p>
+            <a:pPr algn="l"/>
+            <a:r>
+              <a:rPr sz="2200" b="0" i="0">
+                <a:solidFill>
+                  <a:srgbClr val="191D2E"/>
+                </a:solidFill>
+                <a:latin typeface="Georgia"/>
+              </a:rPr>
+              <a:t>Sparring</a:t>
+            </a:r>
+          </a:p>
+        </p:txBody>
+      </p:sp>
+      <p:sp>
+        <p:nvSpPr>
+          <p:cNvPr id="9" name="TextBox 8"/>
+          <p:cNvSpPr txBox="1"/>
+          <p:nvPr/>
+        </p:nvSpPr>
+        <p:spPr>
+          <a:xfrm>
+            <a:off x="8763000" y="5461000"/>
+            <a:ext cx="2540000" cy="177800"/>
+          </a:xfrm>
+          <a:prstGeom prst="rect">
+            <a:avLst/>
+          </a:prstGeom>
+          <a:noFill/>
+        </p:spPr>
+        <p:txBody>
+          <a:bodyPr wrap="square">
+            <a:spAutoFit/>
+          </a:bodyPr>
+          <a:lstStyle/>
+          <a:p>
+            <a:pPr algn="l"/>
+            <a:r>
+              <a:rPr sz="1200" b="0" i="0" spc="100">
+                <a:solidFill>
+                  <a:srgbClr val="7B7FA0"/>
+                </a:solidFill>
+                <a:latin typeface="Courier New"/>
+              </a:rPr>
+              <a:t>DAUER</a:t>
+            </a:r>
+          </a:p>
+        </p:txBody>
+      </p:sp>
+      <p:sp>
+        <p:nvSpPr>
+          <p:cNvPr id="10" name="TextBox 9"/>
+          <p:cNvSpPr txBox="1"/>
+          <p:nvPr/>
+        </p:nvSpPr>
+        <p:spPr>
+          <a:xfrm>
+            <a:off x="8763000" y="5664200"/>
+            <a:ext cx="2540000" cy="508000"/>
+          </a:xfrm>
+          <a:prstGeom prst="rect">
+            <a:avLst/>
+          </a:prstGeom>
+          <a:noFill/>
+        </p:spPr>
+        <p:txBody>
+          <a:bodyPr wrap="square">
+            <a:spAutoFit/>
+          </a:bodyPr>
+          <a:lstStyle/>
+          <a:p>
+            <a:pPr algn="l"/>
+            <a:r>
+              <a:rPr sz="2200" b="0" i="0">
+                <a:solidFill>
+                  <a:srgbClr val="191D2E"/>
+                </a:solidFill>
+                <a:latin typeface="Georgia"/>
+              </a:rPr>
+              <a:t>90 Min.</a:t>
+            </a:r>
+          </a:p>
+        </p:txBody>
+      </p:sp>
+    </p:spTree>
+  </p:cSld>
+  <p:clrMapOvr>
+    <a:masterClrMapping/>
+  </p:clrMapOvr>
+</p:sld>
+</file>
+
+<file path=ppt/slides/slide10.xml><?xml version="1.0" encoding="utf-8"?>
+<p:sld xmlns:a="http://schemas.openxmlformats.org/drawingml/2006/main" xmlns:p="http://schemas.openxmlformats.org/presentationml/2006/main" xmlns:r="http://schemas.openxmlformats.org/officeDocument/2006/relationships">
+  <p:cSld>
+    <p:bg>
+      <p:bgPr>
+        <a:solidFill>
+          <a:srgbClr val="191D2E"/>
+        </a:solidFill>
+        <a:effectLst/>
+      </p:bgPr>
+    </p:bg>
+    <p:spTree>
+      <p:nvGrpSpPr>
+        <p:cNvPr id="1" name=""/>
+        <p:cNvGrpSpPr/>
+        <p:nvPr/>
+      </p:nvGrpSpPr>
+      <p:grpSpPr/>
+      <p:sp>
+        <p:nvSpPr>
+          <p:cNvPr id="2" name="TextBox 1"/>
+          <p:cNvSpPr txBox="1"/>
+          <p:nvPr/>
+        </p:nvSpPr>
+        <p:spPr>
+          <a:xfrm>
+            <a:off x="609600" y="304800"/>
+            <a:ext cx="2540000" cy="279400"/>
+          </a:xfrm>
+          <a:prstGeom prst="rect">
+            <a:avLst/>
+          </a:prstGeom>
+          <a:noFill/>
+        </p:spPr>
+        <p:txBody>
+          <a:bodyPr wrap="square">
+            <a:spAutoFit/>
+          </a:bodyPr>
+          <a:lstStyle/>
+          <a:p>
+            <a:pPr algn="l"/>
+            <a:r>
+              <a:rPr sz="1600" b="1" i="0">
+                <a:solidFill>
+                  <a:srgbClr val="F8F8FA"/>
+                </a:solidFill>
+                <a:latin typeface="Arial"/>
+              </a:rPr>
+              <a:t>FKB  Campus</a:t>
+            </a:r>
+          </a:p>
+        </p:txBody>
+      </p:sp>
+      <p:sp>
+        <p:nvSpPr>
           <p:cNvPr id="3" name="TextBox 2"/>
           <p:cNvSpPr txBox="1"/>
           <p:nvPr/>
         </p:nvSpPr>
         <p:spPr>
           <a:xfrm>
-            <a:off x="365760" y="320040"/>
-            <a:ext cx="11430000" cy="411480"/>
+            <a:off x="0" y="304800"/>
+            <a:ext cx="11582400" cy="279400"/>
+          </a:xfrm>
+          <a:prstGeom prst="rect">
+            <a:avLst/>
+          </a:prstGeom>
+          <a:noFill/>
+        </p:spPr>
+        <p:txBody>
+          <a:bodyPr wrap="square">
+            <a:spAutoFit/>
+          </a:bodyPr>
+          <a:lstStyle/>
+          <a:p>
+            <a:pPr algn="r"/>
+            <a:r>
+              <a:rPr sz="1300" b="0" i="0" spc="100">
+                <a:solidFill>
+                  <a:srgbClr val="F8F8FA"/>
+                </a:solidFill>
+                <a:latin typeface="Courier New"/>
+              </a:rPr>
+              <a:t>PRAXISTRANSFER</a:t>
+            </a:r>
+          </a:p>
+        </p:txBody>
+      </p:sp>
+      <p:sp>
+        <p:nvSpPr>
+          <p:cNvPr id="4" name="TextBox 3"/>
+          <p:cNvSpPr txBox="1"/>
+          <p:nvPr/>
+        </p:nvSpPr>
+        <p:spPr>
+          <a:xfrm>
+            <a:off x="0" y="6350000"/>
+            <a:ext cx="11582400" cy="228600"/>
+          </a:xfrm>
+          <a:prstGeom prst="rect">
+            <a:avLst/>
+          </a:prstGeom>
+          <a:noFill/>
+        </p:spPr>
+        <p:txBody>
+          <a:bodyPr wrap="square">
+            <a:spAutoFit/>
+          </a:bodyPr>
+          <a:lstStyle/>
+          <a:p>
+            <a:pPr algn="r"/>
+            <a:r>
+              <a:rPr sz="1300" b="0" i="0">
+                <a:solidFill>
+                  <a:srgbClr val="606070"/>
+                </a:solidFill>
+                <a:latin typeface="Courier New"/>
+              </a:rPr>
+              <a:t>10 / 12</a:t>
+            </a:r>
+          </a:p>
+        </p:txBody>
+      </p:sp>
+      <p:sp>
+        <p:nvSpPr>
+          <p:cNvPr id="5" name="TextBox 4"/>
+          <p:cNvSpPr txBox="1"/>
+          <p:nvPr/>
+        </p:nvSpPr>
+        <p:spPr>
+          <a:xfrm>
+            <a:off x="609600" y="825500"/>
+            <a:ext cx="5715000" cy="4953000"/>
           </a:xfrm>
           <a:prstGeom prst="rect">
             <a:avLst/>
@@ -3176,33 +3589,339 @@
           <a:p>
             <a:pPr algn="l"/>
             <a:r>
-              <a:rPr sz="1100" b="0" i="0">
-                <a:solidFill>
-                  <a:srgbClr val="BBCCEE"/>
+              <a:rPr sz="40000" b="0" i="1">
+                <a:solidFill>
+                  <a:srgbClr val="D9BF7A"/>
+                </a:solidFill>
+                <a:latin typeface="Georgia"/>
+              </a:rPr>
+              <a:t>II.</a:t>
+            </a:r>
+          </a:p>
+        </p:txBody>
+      </p:sp>
+      <p:sp>
+        <p:nvSpPr>
+          <p:cNvPr id="6" name="TextBox 5"/>
+          <p:cNvSpPr txBox="1"/>
+          <p:nvPr/>
+        </p:nvSpPr>
+        <p:spPr>
+          <a:xfrm>
+            <a:off x="6985000" y="3683000"/>
+            <a:ext cx="4597400" cy="228600"/>
+          </a:xfrm>
+          <a:prstGeom prst="rect">
+            <a:avLst/>
+          </a:prstGeom>
+          <a:noFill/>
+        </p:spPr>
+        <p:txBody>
+          <a:bodyPr wrap="square">
+            <a:spAutoFit/>
+          </a:bodyPr>
+          <a:lstStyle/>
+          <a:p>
+            <a:pPr algn="r"/>
+            <a:r>
+              <a:rPr sz="1400" b="0" i="0">
+                <a:solidFill>
+                  <a:srgbClr val="7B7FA0"/>
+                </a:solidFill>
+                <a:latin typeface="Courier New"/>
+              </a:rPr>
+              <a:t>PRAXISTRANSFER</a:t>
+            </a:r>
+          </a:p>
+        </p:txBody>
+      </p:sp>
+      <p:sp>
+        <p:nvSpPr>
+          <p:cNvPr id="7" name="TextBox 6"/>
+          <p:cNvSpPr txBox="1"/>
+          <p:nvPr/>
+        </p:nvSpPr>
+        <p:spPr>
+          <a:xfrm>
+            <a:off x="6985000" y="4000500"/>
+            <a:ext cx="4597400" cy="1524000"/>
+          </a:xfrm>
+          <a:prstGeom prst="rect">
+            <a:avLst/>
+          </a:prstGeom>
+          <a:noFill/>
+        </p:spPr>
+        <p:txBody>
+          <a:bodyPr wrap="square">
+            <a:spAutoFit/>
+          </a:bodyPr>
+          <a:lstStyle/>
+          <a:p>
+            <a:pPr algn="r"/>
+            <a:r>
+              <a:rPr sz="7600" b="0" i="0">
+                <a:solidFill>
+                  <a:srgbClr val="F8F8FA"/>
+                </a:solidFill>
+                <a:latin typeface="Georgia"/>
+              </a:rPr>
+              <a:t>Praxistransfer</a:t>
+            </a:r>
+          </a:p>
+        </p:txBody>
+      </p:sp>
+      <p:sp>
+        <p:nvSpPr>
+          <p:cNvPr id="8" name="TextBox 7"/>
+          <p:cNvSpPr txBox="1"/>
+          <p:nvPr/>
+        </p:nvSpPr>
+        <p:spPr>
+          <a:xfrm>
+            <a:off x="6985000" y="5524500"/>
+            <a:ext cx="4597400" cy="635000"/>
+          </a:xfrm>
+          <a:prstGeom prst="rect">
+            <a:avLst/>
+          </a:prstGeom>
+          <a:noFill/>
+        </p:spPr>
+        <p:txBody>
+          <a:bodyPr wrap="square">
+            <a:spAutoFit/>
+          </a:bodyPr>
+          <a:lstStyle/>
+          <a:p>
+            <a:pPr algn="r"/>
+            <a:r>
+              <a:rPr sz="2000" b="0" i="1">
+                <a:solidFill>
+                  <a:srgbClr val="7B7FA0"/>
+                </a:solidFill>
+                <a:latin typeface="Georgia"/>
+              </a:rPr>
+              <a:t>Transferaufgabe (bis zum nächsten Termin in 4 Wochen)</a:t>
+            </a:r>
+          </a:p>
+        </p:txBody>
+      </p:sp>
+    </p:spTree>
+  </p:cSld>
+  <p:clrMapOvr>
+    <a:masterClrMapping/>
+  </p:clrMapOvr>
+</p:sld>
+</file>
+
+<file path=ppt/slides/slide11.xml><?xml version="1.0" encoding="utf-8"?>
+<p:sld xmlns:a="http://schemas.openxmlformats.org/drawingml/2006/main" xmlns:p="http://schemas.openxmlformats.org/presentationml/2006/main" xmlns:r="http://schemas.openxmlformats.org/officeDocument/2006/relationships">
+  <p:cSld>
+    <p:bg>
+      <p:bgPr>
+        <a:solidFill>
+          <a:srgbClr val="F8F8FA"/>
+        </a:solidFill>
+        <a:effectLst/>
+      </p:bgPr>
+    </p:bg>
+    <p:spTree>
+      <p:nvGrpSpPr>
+        <p:cNvPr id="1" name=""/>
+        <p:cNvGrpSpPr/>
+        <p:nvPr/>
+      </p:nvGrpSpPr>
+      <p:grpSpPr/>
+      <p:sp>
+        <p:nvSpPr>
+          <p:cNvPr id="2" name="TextBox 1"/>
+          <p:cNvSpPr txBox="1"/>
+          <p:nvPr/>
+        </p:nvSpPr>
+        <p:spPr>
+          <a:xfrm>
+            <a:off x="609600" y="304800"/>
+            <a:ext cx="2540000" cy="279400"/>
+          </a:xfrm>
+          <a:prstGeom prst="rect">
+            <a:avLst/>
+          </a:prstGeom>
+          <a:noFill/>
+        </p:spPr>
+        <p:txBody>
+          <a:bodyPr wrap="square">
+            <a:spAutoFit/>
+          </a:bodyPr>
+          <a:lstStyle/>
+          <a:p>
+            <a:pPr algn="l"/>
+            <a:r>
+              <a:rPr sz="1600" b="1" i="0">
+                <a:solidFill>
+                  <a:srgbClr val="191D2E"/>
                 </a:solidFill>
                 <a:latin typeface="Arial"/>
               </a:rPr>
-              <a:t>M10  ·  K-03 Gesprächsführung &amp; Beratung  ·  Zielstufe: Sparring  ·  90 Min.</a:t>
-            </a:r>
-          </a:p>
-        </p:txBody>
-      </p:sp>
-      <p:sp>
-        <p:nvSpPr>
-          <p:cNvPr id="4" name="Rectangle 3"/>
+              <a:t>FKB  Campus</a:t>
+            </a:r>
+          </a:p>
+        </p:txBody>
+      </p:sp>
+      <p:sp>
+        <p:nvSpPr>
+          <p:cNvPr id="3" name="TextBox 2"/>
+          <p:cNvSpPr txBox="1"/>
+          <p:nvPr/>
+        </p:nvSpPr>
+        <p:spPr>
+          <a:xfrm>
+            <a:off x="0" y="304800"/>
+            <a:ext cx="11582400" cy="279400"/>
+          </a:xfrm>
+          <a:prstGeom prst="rect">
+            <a:avLst/>
+          </a:prstGeom>
+          <a:noFill/>
+        </p:spPr>
+        <p:txBody>
+          <a:bodyPr wrap="square">
+            <a:spAutoFit/>
+          </a:bodyPr>
+          <a:lstStyle/>
+          <a:p>
+            <a:pPr algn="r"/>
+            <a:r>
+              <a:rPr sz="1300" b="0" i="0" spc="100">
+                <a:solidFill>
+                  <a:srgbClr val="7B7FA0"/>
+                </a:solidFill>
+                <a:latin typeface="Courier New"/>
+              </a:rPr>
+              <a:t>§ II · PRAXISTRANSFER</a:t>
+            </a:r>
+          </a:p>
+        </p:txBody>
+      </p:sp>
+      <p:sp>
+        <p:nvSpPr>
+          <p:cNvPr id="4" name="TextBox 3"/>
+          <p:cNvSpPr txBox="1"/>
+          <p:nvPr/>
+        </p:nvSpPr>
+        <p:spPr>
+          <a:xfrm>
+            <a:off x="0" y="6350000"/>
+            <a:ext cx="11582400" cy="228600"/>
+          </a:xfrm>
+          <a:prstGeom prst="rect">
+            <a:avLst/>
+          </a:prstGeom>
+          <a:noFill/>
+        </p:spPr>
+        <p:txBody>
+          <a:bodyPr wrap="square">
+            <a:spAutoFit/>
+          </a:bodyPr>
+          <a:lstStyle/>
+          <a:p>
+            <a:pPr algn="r"/>
+            <a:r>
+              <a:rPr sz="1300" b="0" i="0">
+                <a:solidFill>
+                  <a:srgbClr val="7B7FA0"/>
+                </a:solidFill>
+                <a:latin typeface="Courier New"/>
+              </a:rPr>
+              <a:t>11 / 12</a:t>
+            </a:r>
+          </a:p>
+        </p:txBody>
+      </p:sp>
+      <p:sp>
+        <p:nvSpPr>
+          <p:cNvPr id="5" name="TextBox 4"/>
+          <p:cNvSpPr txBox="1"/>
+          <p:nvPr/>
+        </p:nvSpPr>
+        <p:spPr>
+          <a:xfrm>
+            <a:off x="609600" y="889000"/>
+            <a:ext cx="3810000" cy="203200"/>
+          </a:xfrm>
+          <a:prstGeom prst="rect">
+            <a:avLst/>
+          </a:prstGeom>
+          <a:noFill/>
+        </p:spPr>
+        <p:txBody>
+          <a:bodyPr wrap="square">
+            <a:spAutoFit/>
+          </a:bodyPr>
+          <a:lstStyle/>
+          <a:p>
+            <a:pPr algn="l"/>
+            <a:r>
+              <a:rPr sz="1300" b="0" i="0" spc="100">
+                <a:solidFill>
+                  <a:srgbClr val="7B7FA0"/>
+                </a:solidFill>
+                <a:latin typeface="Courier New"/>
+              </a:rPr>
+              <a:t>KERNAUSSAGE</a:t>
+            </a:r>
+          </a:p>
+        </p:txBody>
+      </p:sp>
+      <p:sp>
+        <p:nvSpPr>
+          <p:cNvPr id="6" name="TextBox 5"/>
+          <p:cNvSpPr txBox="1"/>
+          <p:nvPr/>
+        </p:nvSpPr>
+        <p:spPr>
+          <a:xfrm>
+            <a:off x="609600" y="1143000"/>
+            <a:ext cx="10972800" cy="2286000"/>
+          </a:xfrm>
+          <a:prstGeom prst="rect">
+            <a:avLst/>
+          </a:prstGeom>
+          <a:noFill/>
+        </p:spPr>
+        <p:txBody>
+          <a:bodyPr wrap="square">
+            <a:spAutoFit/>
+          </a:bodyPr>
+          <a:lstStyle/>
+          <a:p>
+            <a:pPr algn="l"/>
+            <a:r>
+              <a:rPr sz="8800" b="0" i="0">
+                <a:solidFill>
+                  <a:srgbClr val="191D2E"/>
+                </a:solidFill>
+                <a:latin typeface="Georgia"/>
+              </a:rPr>
+              <a:t>Transferaufgabe (bis zum nächsten Termin in 4 Wochen)</a:t>
+            </a:r>
+          </a:p>
+        </p:txBody>
+      </p:sp>
+      <p:sp>
+        <p:nvSpPr>
+          <p:cNvPr id="7" name="Rectangle 6"/>
           <p:cNvSpPr/>
           <p:nvPr/>
         </p:nvSpPr>
         <p:spPr>
           <a:xfrm>
-            <a:off x="365760" y="804672"/>
-            <a:ext cx="8229600" cy="22860"/>
+            <a:off x="609600" y="3556000"/>
+            <a:ext cx="10972800" cy="6350"/>
           </a:xfrm>
           <a:prstGeom prst="rect">
             <a:avLst/>
           </a:prstGeom>
           <a:solidFill>
-            <a:srgbClr val="335CC0"/>
+            <a:srgbClr val="191D2E"/>
           </a:solidFill>
           <a:ln>
             <a:noFill/>
@@ -3232,14 +3951,14 @@
       </p:sp>
       <p:sp>
         <p:nvSpPr>
-          <p:cNvPr id="5" name="TextBox 4"/>
-          <p:cNvSpPr txBox="1"/>
-          <p:nvPr/>
-        </p:nvSpPr>
-        <p:spPr>
-          <a:xfrm>
-            <a:off x="365760" y="1005840"/>
-            <a:ext cx="11430000" cy="2560320"/>
+          <p:cNvPr id="8" name="TextBox 7"/>
+          <p:cNvSpPr txBox="1"/>
+          <p:nvPr/>
+        </p:nvSpPr>
+        <p:spPr>
+          <a:xfrm>
+            <a:off x="609600" y="3683000"/>
+            <a:ext cx="5207000" cy="2159000"/>
           </a:xfrm>
           <a:prstGeom prst="rect">
             <a:avLst/>
@@ -3254,83 +3973,13 @@
           <a:p>
             <a:pPr algn="l"/>
             <a:r>
-              <a:rPr sz="4200" b="1" i="0">
-                <a:solidFill>
-                  <a:srgbClr val="FFFFFF"/>
-                </a:solidFill>
-                <a:latin typeface="Arial"/>
-              </a:rPr>
-              <a:t>Strukturierte Bedarfsanalyse</a:t>
-            </a:r>
-          </a:p>
-        </p:txBody>
-      </p:sp>
-      <p:sp>
-        <p:nvSpPr>
-          <p:cNvPr id="6" name="TextBox 5"/>
-          <p:cNvSpPr txBox="1"/>
-          <p:nvPr/>
-        </p:nvSpPr>
-        <p:spPr>
-          <a:xfrm>
-            <a:off x="365760" y="3383280"/>
-            <a:ext cx="10058400" cy="822960"/>
-          </a:xfrm>
-          <a:prstGeom prst="rect">
-            <a:avLst/>
-          </a:prstGeom>
-          <a:noFill/>
-        </p:spPr>
-        <p:txBody>
-          <a:bodyPr wrap="square">
-            <a:spAutoFit/>
-          </a:bodyPr>
-          <a:lstStyle/>
-          <a:p>
-            <a:pPr algn="l"/>
-            <a:r>
-              <a:rPr sz="2000" b="0" i="1">
-                <a:solidFill>
-                  <a:srgbClr val="CCD6F0"/>
-                </a:solidFill>
-                <a:latin typeface="Arial"/>
-              </a:rPr>
-              <a:t>Vom Jahresgespräch zum echten Bedarf</a:t>
-            </a:r>
-          </a:p>
-        </p:txBody>
-      </p:sp>
-      <p:sp>
-        <p:nvSpPr>
-          <p:cNvPr id="7" name="TextBox 6"/>
-          <p:cNvSpPr txBox="1"/>
-          <p:nvPr/>
-        </p:nvSpPr>
-        <p:spPr>
-          <a:xfrm>
-            <a:off x="365760" y="6309360"/>
-            <a:ext cx="11430000" cy="365760"/>
-          </a:xfrm>
-          <a:prstGeom prst="rect">
-            <a:avLst/>
-          </a:prstGeom>
-          <a:noFill/>
-        </p:spPr>
-        <p:txBody>
-          <a:bodyPr wrap="square">
-            <a:spAutoFit/>
-          </a:bodyPr>
-          <a:lstStyle/>
-          <a:p>
-            <a:pPr algn="l"/>
-            <a:r>
-              <a:rPr sz="900" b="0" i="0">
-                <a:solidFill>
-                  <a:srgbClr val="889ACC"/>
-                </a:solidFill>
-                <a:latin typeface="Arial"/>
-              </a:rPr>
-              <a:t>Trainer-Präsentation  ·  v1.0  ·  Benedikt Zoller Coaching</a:t>
+              <a:rPr sz="2200" b="0" i="0">
+                <a:solidFill>
+                  <a:srgbClr val="191D2E"/>
+                </a:solidFill>
+                <a:latin typeface="Georgia"/>
+              </a:rPr>
+              <a:t>Führen Sie in den nächsten 4 Wochen mindestens zwei strukturierte Kundengespräche (Jahresgespräch oder gleichwertiger Gesprächsanlass: Investitionsfinanzierung, Kreditverlängerung, Erstgespräch…</a:t>
             </a:r>
           </a:p>
         </p:txBody>
@@ -3343,13 +3992,13 @@
 </p:sld>
 </file>
 
-<file path=ppt/slides/slide10.xml><?xml version="1.0" encoding="utf-8"?>
+<file path=ppt/slides/slide12.xml><?xml version="1.0" encoding="utf-8"?>
 <p:sld xmlns:a="http://schemas.openxmlformats.org/drawingml/2006/main" xmlns:p="http://schemas.openxmlformats.org/presentationml/2006/main" xmlns:r="http://schemas.openxmlformats.org/officeDocument/2006/relationships">
   <p:cSld>
     <p:bg>
       <p:bgPr>
         <a:solidFill>
-          <a:srgbClr val="FFFFFF"/>
+          <a:srgbClr val="F8F8FA"/>
         </a:solidFill>
         <a:effectLst/>
       </p:bgPr>
@@ -3363,20 +4012,160 @@
       <p:grpSpPr/>
       <p:sp>
         <p:nvSpPr>
-          <p:cNvPr id="2" name="Rectangle 1"/>
+          <p:cNvPr id="2" name="TextBox 1"/>
+          <p:cNvSpPr txBox="1"/>
+          <p:nvPr/>
+        </p:nvSpPr>
+        <p:spPr>
+          <a:xfrm>
+            <a:off x="609600" y="304800"/>
+            <a:ext cx="2540000" cy="279400"/>
+          </a:xfrm>
+          <a:prstGeom prst="rect">
+            <a:avLst/>
+          </a:prstGeom>
+          <a:noFill/>
+        </p:spPr>
+        <p:txBody>
+          <a:bodyPr wrap="square">
+            <a:spAutoFit/>
+          </a:bodyPr>
+          <a:lstStyle/>
+          <a:p>
+            <a:pPr algn="l"/>
+            <a:r>
+              <a:rPr sz="1600" b="1" i="0">
+                <a:solidFill>
+                  <a:srgbClr val="191D2E"/>
+                </a:solidFill>
+                <a:latin typeface="Arial"/>
+              </a:rPr>
+              <a:t>FKB  Campus</a:t>
+            </a:r>
+          </a:p>
+        </p:txBody>
+      </p:sp>
+      <p:sp>
+        <p:nvSpPr>
+          <p:cNvPr id="3" name="TextBox 2"/>
+          <p:cNvSpPr txBox="1"/>
+          <p:nvPr/>
+        </p:nvSpPr>
+        <p:spPr>
+          <a:xfrm>
+            <a:off x="0" y="304800"/>
+            <a:ext cx="11582400" cy="279400"/>
+          </a:xfrm>
+          <a:prstGeom prst="rect">
+            <a:avLst/>
+          </a:prstGeom>
+          <a:noFill/>
+        </p:spPr>
+        <p:txBody>
+          <a:bodyPr wrap="square">
+            <a:spAutoFit/>
+          </a:bodyPr>
+          <a:lstStyle/>
+          <a:p>
+            <a:pPr algn="r"/>
+            <a:r>
+              <a:rPr sz="1300" b="0" i="0" spc="100">
+                <a:solidFill>
+                  <a:srgbClr val="7B7FA0"/>
+                </a:solidFill>
+                <a:latin typeface="Courier New"/>
+              </a:rPr>
+              <a:t>§ II · PRAXISTRANSFER</a:t>
+            </a:r>
+          </a:p>
+        </p:txBody>
+      </p:sp>
+      <p:sp>
+        <p:nvSpPr>
+          <p:cNvPr id="4" name="TextBox 3"/>
+          <p:cNvSpPr txBox="1"/>
+          <p:nvPr/>
+        </p:nvSpPr>
+        <p:spPr>
+          <a:xfrm>
+            <a:off x="0" y="6350000"/>
+            <a:ext cx="11582400" cy="228600"/>
+          </a:xfrm>
+          <a:prstGeom prst="rect">
+            <a:avLst/>
+          </a:prstGeom>
+          <a:noFill/>
+        </p:spPr>
+        <p:txBody>
+          <a:bodyPr wrap="square">
+            <a:spAutoFit/>
+          </a:bodyPr>
+          <a:lstStyle/>
+          <a:p>
+            <a:pPr algn="r"/>
+            <a:r>
+              <a:rPr sz="1300" b="0" i="0">
+                <a:solidFill>
+                  <a:srgbClr val="7B7FA0"/>
+                </a:solidFill>
+                <a:latin typeface="Courier New"/>
+              </a:rPr>
+              <a:t>12 / 12</a:t>
+            </a:r>
+          </a:p>
+        </p:txBody>
+      </p:sp>
+      <p:sp>
+        <p:nvSpPr>
+          <p:cNvPr id="5" name="TextBox 4"/>
+          <p:cNvSpPr txBox="1"/>
+          <p:nvPr/>
+        </p:nvSpPr>
+        <p:spPr>
+          <a:xfrm>
+            <a:off x="609600" y="889000"/>
+            <a:ext cx="10972800" cy="1397000"/>
+          </a:xfrm>
+          <a:prstGeom prst="rect">
+            <a:avLst/>
+          </a:prstGeom>
+          <a:noFill/>
+        </p:spPr>
+        <p:txBody>
+          <a:bodyPr wrap="square">
+            <a:spAutoFit/>
+          </a:bodyPr>
+          <a:lstStyle/>
+          <a:p>
+            <a:pPr algn="l"/>
+            <a:r>
+              <a:rPr sz="7200" b="0" i="0">
+                <a:solidFill>
+                  <a:srgbClr val="191D2E"/>
+                </a:solidFill>
+                <a:latin typeface="Georgia"/>
+              </a:rPr>
+              <a:t>Reflexionsfragen nach jedem Gespräch</a:t>
+            </a:r>
+          </a:p>
+        </p:txBody>
+      </p:sp>
+      <p:sp>
+        <p:nvSpPr>
+          <p:cNvPr id="6" name="Rectangle 5"/>
           <p:cNvSpPr/>
           <p:nvPr/>
         </p:nvSpPr>
         <p:spPr>
           <a:xfrm>
-            <a:off x="0" y="0"/>
-            <a:ext cx="73152" cy="6858000"/>
+            <a:off x="609600" y="2286000"/>
+            <a:ext cx="10972800" cy="6350"/>
           </a:xfrm>
           <a:prstGeom prst="rect">
             <a:avLst/>
           </a:prstGeom>
           <a:solidFill>
-            <a:srgbClr val="003DA5"/>
+            <a:srgbClr val="191D2E"/>
           </a:solidFill>
           <a:ln>
             <a:noFill/>
@@ -3406,14 +4195,14 @@
       </p:sp>
       <p:sp>
         <p:nvSpPr>
-          <p:cNvPr id="3" name="TextBox 2"/>
-          <p:cNvSpPr txBox="1"/>
-          <p:nvPr/>
-        </p:nvSpPr>
-        <p:spPr>
-          <a:xfrm>
-            <a:off x="228600" y="182880"/>
-            <a:ext cx="11430000" cy="320040"/>
+          <p:cNvPr id="7" name="TextBox 6"/>
+          <p:cNvSpPr txBox="1"/>
+          <p:nvPr/>
+        </p:nvSpPr>
+        <p:spPr>
+          <a:xfrm>
+            <a:off x="609600" y="2438400"/>
+            <a:ext cx="304800" cy="355600"/>
           </a:xfrm>
           <a:prstGeom prst="rect">
             <a:avLst/>
@@ -3428,27 +4217,27 @@
           <a:p>
             <a:pPr algn="l"/>
             <a:r>
-              <a:rPr sz="900" b="0" i="0">
-                <a:solidFill>
-                  <a:srgbClr val="556575"/>
-                </a:solidFill>
-                <a:latin typeface="Arial"/>
-              </a:rPr>
-              <a:t>M10 · Modulinhalte</a:t>
-            </a:r>
-          </a:p>
-        </p:txBody>
-      </p:sp>
-      <p:sp>
-        <p:nvSpPr>
-          <p:cNvPr id="4" name="TextBox 3"/>
-          <p:cNvSpPr txBox="1"/>
-          <p:nvPr/>
-        </p:nvSpPr>
-        <p:spPr>
-          <a:xfrm>
-            <a:off x="365760" y="274320"/>
-            <a:ext cx="11430000" cy="777240"/>
+              <a:rPr sz="2800" b="0" i="0">
+                <a:solidFill>
+                  <a:srgbClr val="1F2B56"/>
+                </a:solidFill>
+                <a:latin typeface="Georgia"/>
+              </a:rPr>
+              <a:t>–</a:t>
+            </a:r>
+          </a:p>
+        </p:txBody>
+      </p:sp>
+      <p:sp>
+        <p:nvSpPr>
+          <p:cNvPr id="8" name="TextBox 7"/>
+          <p:cNvSpPr txBox="1"/>
+          <p:nvPr/>
+        </p:nvSpPr>
+        <p:spPr>
+          <a:xfrm>
+            <a:off x="1016000" y="2413000"/>
+            <a:ext cx="9906000" cy="571500"/>
           </a:xfrm>
           <a:prstGeom prst="rect">
             <a:avLst/>
@@ -3463,332 +4252,27 @@
           <a:p>
             <a:pPr algn="l"/>
             <a:r>
-              <a:rPr sz="2200" b="1" i="0">
-                <a:solidFill>
-                  <a:srgbClr val="003DA5"/>
-                </a:solidFill>
-                <a:latin typeface="Arial"/>
-              </a:rPr>
-              <a:t>Latente Bedarfe (nur dem Unternehmer bekannt – für Rollenspieler)</a:t>
-            </a:r>
-          </a:p>
-        </p:txBody>
-      </p:sp>
-      <p:sp>
-        <p:nvSpPr>
-          <p:cNvPr id="5" name="Rectangle 4"/>
-          <p:cNvSpPr/>
-          <p:nvPr/>
-        </p:nvSpPr>
-        <p:spPr>
-          <a:xfrm>
-            <a:off x="365760" y="1005840"/>
-            <a:ext cx="11430000" cy="27432"/>
-          </a:xfrm>
-          <a:prstGeom prst="rect">
-            <a:avLst/>
-          </a:prstGeom>
-          <a:solidFill>
-            <a:srgbClr val="D1D5DB"/>
-          </a:solidFill>
-          <a:ln>
-            <a:noFill/>
-          </a:ln>
-        </p:spPr>
-        <p:style>
-          <a:lnRef idx="1">
-            <a:schemeClr val="accent1"/>
-          </a:lnRef>
-          <a:fillRef idx="3">
-            <a:schemeClr val="accent1"/>
-          </a:fillRef>
-          <a:effectRef idx="2">
-            <a:schemeClr val="accent1"/>
-          </a:effectRef>
-          <a:fontRef idx="minor">
-            <a:schemeClr val="lt1"/>
-          </a:fontRef>
-        </p:style>
-        <p:txBody>
-          <a:bodyPr rtlCol="0" anchor="ctr"/>
-          <a:lstStyle/>
-          <a:p>
-            <a:pPr algn="ctr"/>
-          </a:p>
-        </p:txBody>
-      </p:sp>
-      <p:sp>
-        <p:nvSpPr>
-          <p:cNvPr id="6" name="TextBox 5"/>
-          <p:cNvSpPr txBox="1"/>
-          <p:nvPr/>
-        </p:nvSpPr>
-        <p:spPr>
-          <a:xfrm>
-            <a:off x="365760" y="1143000"/>
-            <a:ext cx="11430000" cy="5212080"/>
-          </a:xfrm>
-          <a:prstGeom prst="rect">
-            <a:avLst/>
-          </a:prstGeom>
-          <a:noFill/>
-        </p:spPr>
-        <p:txBody>
-          <a:bodyPr wrap="square">
-            <a:spAutoFit/>
-          </a:bodyPr>
-          <a:lstStyle/>
-          <a:p>
-            <a:pPr>
-              <a:spcBef>
-                <a:spcPts val="500"/>
-              </a:spcBef>
-            </a:pPr>
-            <a:r>
-              <a:rPr sz="1500">
-                <a:solidFill>
-                  <a:srgbClr val="003DA5"/>
-                </a:solidFill>
-                <a:latin typeface="Arial"/>
-              </a:rPr>
-              <a:t>▪  </a:t>
-            </a:r>
-            <a:r>
-              <a:rPr sz="1700" b="1">
-                <a:solidFill>
-                  <a:srgbClr val="003DA5"/>
-                </a:solidFill>
-                <a:latin typeface="Arial"/>
-              </a:rPr>
-              <a:t>Nachfolge ungeklärt: </a:t>
-            </a:r>
-            <a:r>
-              <a:rPr sz="1700">
-                <a:solidFill>
-                  <a:srgbClr val="1A1A1A"/>
-                </a:solidFill>
-                <a:latin typeface="Arial"/>
-              </a:rPr>
-              <a:t>(echter latenter Bedarf): Sohn (26) zeigt kein Interesse; Maurer hat kein Testament, keinen Gesellschaftervertrag für den Todesfall. Maurer spricht nicht darüber, weil er das…</a:t>
-            </a:r>
-          </a:p>
-          <a:p>
-            <a:pPr>
-              <a:spcBef>
-                <a:spcPts val="500"/>
-              </a:spcBef>
-            </a:pPr>
-            <a:r>
-              <a:rPr sz="1500">
-                <a:solidFill>
-                  <a:srgbClr val="003DA5"/>
-                </a:solidFill>
-                <a:latin typeface="Arial"/>
-              </a:rPr>
-              <a:t>▪  </a:t>
-            </a:r>
-            <a:r>
-              <a:rPr sz="1700" b="1">
-                <a:solidFill>
-                  <a:srgbClr val="003DA5"/>
-                </a:solidFill>
-                <a:latin typeface="Arial"/>
-              </a:rPr>
-              <a:t>Stille Beteiligung läuft aus: </a:t>
-            </a:r>
-            <a:r>
-              <a:rPr sz="1700">
-                <a:solidFill>
-                  <a:srgbClr val="1A1A1A"/>
-                </a:solidFill>
-                <a:latin typeface="Arial"/>
-              </a:rPr>
-              <a:t>(echter latenter Bedarf): Ein Schwager ist seit 2012 stiller Gesellschafter (80 TEUR). Die Beteiligung hat eine Kündigungsfrist bis Ende 2025; Maurer hat noch keine…</a:t>
-            </a:r>
-          </a:p>
-          <a:p>
-            <a:pPr>
-              <a:spcBef>
-                <a:spcPts val="500"/>
-              </a:spcBef>
-            </a:pPr>
-            <a:r>
-              <a:rPr sz="1500">
-                <a:solidFill>
-                  <a:srgbClr val="003DA5"/>
-                </a:solidFill>
-                <a:latin typeface="Arial"/>
-              </a:rPr>
-              <a:t>▪  </a:t>
-            </a:r>
-            <a:r>
-              <a:rPr sz="1700" b="1">
-                <a:solidFill>
-                  <a:srgbClr val="003DA5"/>
-                </a:solidFill>
-                <a:latin typeface="Arial"/>
-              </a:rPr>
-              <a:t>Liquiditätsengpass: </a:t>
-            </a:r>
-            <a:r>
-              <a:rPr sz="1700">
-                <a:solidFill>
-                  <a:srgbClr val="1A1A1A"/>
-                </a:solidFill>
-                <a:latin typeface="Arial"/>
-              </a:rPr>
-              <a:t>(bekannt, aber nicht priorisiert): Der neue Großkunde zahlt mit 60 Tagen Ziel; bei Großaufträgen (&gt; 80 TEUR) entsteht Vorlauffinanzierungsbedarf. Maurer hält das für ein…</a:t>
-            </a:r>
-          </a:p>
-          <a:p>
-            <a:pPr>
-              <a:spcBef>
-                <a:spcPts val="500"/>
-              </a:spcBef>
-            </a:pPr>
-            <a:r>
-              <a:rPr sz="1500">
-                <a:solidFill>
-                  <a:srgbClr val="003DA5"/>
-                </a:solidFill>
-                <a:latin typeface="Arial"/>
-              </a:rPr>
-              <a:t>▪  </a:t>
-            </a:r>
-            <a:r>
-              <a:rPr sz="1700" b="1">
-                <a:solidFill>
-                  <a:srgbClr val="003DA5"/>
-                </a:solidFill>
-                <a:latin typeface="Arial"/>
-              </a:rPr>
-              <a:t>Private Absicherung: </a:t>
-            </a:r>
-            <a:r>
-              <a:rPr sz="1700">
-                <a:solidFill>
-                  <a:srgbClr val="1A1A1A"/>
-                </a:solidFill>
-                <a:latin typeface="Arial"/>
-              </a:rPr>
-              <a:t>(latent): Florian Maurer hat seit Jahren keine BU-Versicherung mehr; private Krankenversicherung läuft als Einzelvertrag ohne Unternehmensbezug.</a:t>
-            </a:r>
-          </a:p>
-          <a:p>
-            <a:pPr>
-              <a:spcBef>
-                <a:spcPts val="500"/>
-              </a:spcBef>
-            </a:pPr>
-            <a:r>
-              <a:rPr sz="1500">
-                <a:solidFill>
-                  <a:srgbClr val="003DA5"/>
-                </a:solidFill>
-                <a:latin typeface="Arial"/>
-              </a:rPr>
-              <a:t>▪  </a:t>
-            </a:r>
-            <a:r>
-              <a:rPr sz="1700" b="1">
-                <a:solidFill>
-                  <a:srgbClr val="003DA5"/>
-                </a:solidFill>
-                <a:latin typeface="Arial"/>
-              </a:rPr>
-              <a:t>Gesprächsziel für den Berater: </a:t>
-            </a:r>
-            <a:r>
-              <a:rPr sz="1700">
-                <a:solidFill>
-                  <a:srgbClr val="1A1A1A"/>
-                </a:solidFill>
-                <a:latin typeface="Arial"/>
-              </a:rPr>
-              <a:t>Den UnternehmerDialog systematisch durcharbeiten. Mindestens 2 latente Bedarfe sollen durch gezielte SPIN-Fragen sichtbar werden. Bewertungsmaßstab: Wie viele Implikationsfragen…</a:t>
-            </a:r>
-          </a:p>
-        </p:txBody>
-      </p:sp>
-    </p:spTree>
-  </p:cSld>
-  <p:clrMapOvr>
-    <a:masterClrMapping/>
-  </p:clrMapOvr>
-</p:sld>
-</file>
-
-<file path=ppt/slides/slide11.xml><?xml version="1.0" encoding="utf-8"?>
-<p:sld xmlns:a="http://schemas.openxmlformats.org/drawingml/2006/main" xmlns:p="http://schemas.openxmlformats.org/presentationml/2006/main" xmlns:r="http://schemas.openxmlformats.org/officeDocument/2006/relationships">
-  <p:cSld>
-    <p:bg>
-      <p:bgPr>
-        <a:solidFill>
-          <a:srgbClr val="FFFFFF"/>
-        </a:solidFill>
-        <a:effectLst/>
-      </p:bgPr>
-    </p:bg>
-    <p:spTree>
-      <p:nvGrpSpPr>
-        <p:cNvPr id="1" name=""/>
-        <p:cNvGrpSpPr/>
-        <p:nvPr/>
-      </p:nvGrpSpPr>
-      <p:grpSpPr/>
-      <p:sp>
-        <p:nvSpPr>
-          <p:cNvPr id="2" name="Rectangle 1"/>
-          <p:cNvSpPr/>
-          <p:nvPr/>
-        </p:nvSpPr>
-        <p:spPr>
-          <a:xfrm>
-            <a:off x="0" y="0"/>
-            <a:ext cx="73152" cy="6858000"/>
-          </a:xfrm>
-          <a:prstGeom prst="rect">
-            <a:avLst/>
-          </a:prstGeom>
-          <a:solidFill>
-            <a:srgbClr val="003DA5"/>
-          </a:solidFill>
-          <a:ln>
-            <a:noFill/>
-          </a:ln>
-        </p:spPr>
-        <p:style>
-          <a:lnRef idx="1">
-            <a:schemeClr val="accent1"/>
-          </a:lnRef>
-          <a:fillRef idx="3">
-            <a:schemeClr val="accent1"/>
-          </a:fillRef>
-          <a:effectRef idx="2">
-            <a:schemeClr val="accent1"/>
-          </a:effectRef>
-          <a:fontRef idx="minor">
-            <a:schemeClr val="lt1"/>
-          </a:fontRef>
-        </p:style>
-        <p:txBody>
-          <a:bodyPr rtlCol="0" anchor="ctr"/>
-          <a:lstStyle/>
-          <a:p>
-            <a:pPr algn="ctr"/>
-          </a:p>
-        </p:txBody>
-      </p:sp>
-      <p:sp>
-        <p:nvSpPr>
-          <p:cNvPr id="3" name="TextBox 2"/>
-          <p:cNvSpPr txBox="1"/>
-          <p:nvPr/>
-        </p:nvSpPr>
-        <p:spPr>
-          <a:xfrm>
-            <a:off x="228600" y="182880"/>
-            <a:ext cx="11430000" cy="320040"/>
+              <a:rPr sz="2600" b="0" i="0">
+                <a:solidFill>
+                  <a:srgbClr val="191D2E"/>
+                </a:solidFill>
+                <a:latin typeface="Georgia"/>
+              </a:rPr>
+              <a:t>Wie viele Implikationsfragen habe ich gestellt? (Schätzen Sie die Anzahl.)</a:t>
+            </a:r>
+          </a:p>
+        </p:txBody>
+      </p:sp>
+      <p:sp>
+        <p:nvSpPr>
+          <p:cNvPr id="9" name="TextBox 8"/>
+          <p:cNvSpPr txBox="1"/>
+          <p:nvPr/>
+        </p:nvSpPr>
+        <p:spPr>
+          <a:xfrm>
+            <a:off x="609600" y="3073400"/>
+            <a:ext cx="304800" cy="355600"/>
           </a:xfrm>
           <a:prstGeom prst="rect">
             <a:avLst/>
@@ -3803,27 +4287,27 @@
           <a:p>
             <a:pPr algn="l"/>
             <a:r>
-              <a:rPr sz="900" b="0" i="0">
-                <a:solidFill>
-                  <a:srgbClr val="556575"/>
-                </a:solidFill>
-                <a:latin typeface="Arial"/>
-              </a:rPr>
-              <a:t>M10 · Modulinhalte</a:t>
-            </a:r>
-          </a:p>
-        </p:txBody>
-      </p:sp>
-      <p:sp>
-        <p:nvSpPr>
-          <p:cNvPr id="4" name="TextBox 3"/>
-          <p:cNvSpPr txBox="1"/>
-          <p:nvPr/>
-        </p:nvSpPr>
-        <p:spPr>
-          <a:xfrm>
-            <a:off x="365760" y="274320"/>
-            <a:ext cx="11430000" cy="777240"/>
+              <a:rPr sz="2800" b="0" i="0">
+                <a:solidFill>
+                  <a:srgbClr val="1F2B56"/>
+                </a:solidFill>
+                <a:latin typeface="Georgia"/>
+              </a:rPr>
+              <a:t>–</a:t>
+            </a:r>
+          </a:p>
+        </p:txBody>
+      </p:sp>
+      <p:sp>
+        <p:nvSpPr>
+          <p:cNvPr id="10" name="TextBox 9"/>
+          <p:cNvSpPr txBox="1"/>
+          <p:nvPr/>
+        </p:nvSpPr>
+        <p:spPr>
+          <a:xfrm>
+            <a:off x="1016000" y="3048000"/>
+            <a:ext cx="9906000" cy="571500"/>
           </a:xfrm>
           <a:prstGeom prst="rect">
             <a:avLst/>
@@ -3838,212 +4322,27 @@
           <a:p>
             <a:pPr algn="l"/>
             <a:r>
-              <a:rPr sz="2200" b="1" i="0">
-                <a:solidFill>
-                  <a:srgbClr val="003DA5"/>
-                </a:solidFill>
-                <a:latin typeface="Arial"/>
-              </a:rPr>
-              <a:t>Optionale Rollenspielvarianten (für erfahrene Gruppen oder zweite Runde)</a:t>
-            </a:r>
-          </a:p>
-        </p:txBody>
-      </p:sp>
-      <p:sp>
-        <p:nvSpPr>
-          <p:cNvPr id="5" name="Rectangle 4"/>
-          <p:cNvSpPr/>
-          <p:nvPr/>
-        </p:nvSpPr>
-        <p:spPr>
-          <a:xfrm>
-            <a:off x="365760" y="1005840"/>
-            <a:ext cx="11430000" cy="27432"/>
-          </a:xfrm>
-          <a:prstGeom prst="rect">
-            <a:avLst/>
-          </a:prstGeom>
-          <a:solidFill>
-            <a:srgbClr val="D1D5DB"/>
-          </a:solidFill>
-          <a:ln>
-            <a:noFill/>
-          </a:ln>
-        </p:spPr>
-        <p:style>
-          <a:lnRef idx="1">
-            <a:schemeClr val="accent1"/>
-          </a:lnRef>
-          <a:fillRef idx="3">
-            <a:schemeClr val="accent1"/>
-          </a:fillRef>
-          <a:effectRef idx="2">
-            <a:schemeClr val="accent1"/>
-          </a:effectRef>
-          <a:fontRef idx="minor">
-            <a:schemeClr val="lt1"/>
-          </a:fontRef>
-        </p:style>
-        <p:txBody>
-          <a:bodyPr rtlCol="0" anchor="ctr"/>
-          <a:lstStyle/>
-          <a:p>
-            <a:pPr algn="ctr"/>
-          </a:p>
-        </p:txBody>
-      </p:sp>
-      <p:sp>
-        <p:nvSpPr>
-          <p:cNvPr id="6" name="TextBox 5"/>
-          <p:cNvSpPr txBox="1"/>
-          <p:nvPr/>
-        </p:nvSpPr>
-        <p:spPr>
-          <a:xfrm>
-            <a:off x="365760" y="1143000"/>
-            <a:ext cx="11430000" cy="5212080"/>
-          </a:xfrm>
-          <a:prstGeom prst="rect">
-            <a:avLst/>
-          </a:prstGeom>
-          <a:noFill/>
-        </p:spPr>
-        <p:txBody>
-          <a:bodyPr wrap="square">
-            <a:spAutoFit/>
-          </a:bodyPr>
-          <a:lstStyle/>
-          <a:p>
-            <a:pPr>
-              <a:spcBef>
-                <a:spcPts val="500"/>
-              </a:spcBef>
-            </a:pPr>
-            <a:r>
-              <a:rPr sz="1500">
-                <a:solidFill>
-                  <a:srgbClr val="003DA5"/>
-                </a:solidFill>
-                <a:latin typeface="Arial"/>
-              </a:rPr>
-              <a:t>▪  </a:t>
-            </a:r>
-            <a:r>
-              <a:rPr sz="1700">
-                <a:solidFill>
-                  <a:srgbClr val="1A1A1A"/>
-                </a:solidFill>
-                <a:latin typeface="Arial"/>
-              </a:rPr>
-              <a:t>Variante A – Der wortkarger Unternehmer Rollenkarte für Unternehmer-Spieler: Sie sind grundsätzlich zufrieden mit Ihrer Bank und sehen keinen Handlungsbedarf.…</a:t>
-            </a:r>
-          </a:p>
-          <a:p>
-            <a:pPr>
-              <a:spcBef>
-                <a:spcPts val="500"/>
-              </a:spcBef>
-            </a:pPr>
-            <a:r>
-              <a:rPr sz="1500">
-                <a:solidFill>
-                  <a:srgbClr val="003DA5"/>
-                </a:solidFill>
-                <a:latin typeface="Arial"/>
-              </a:rPr>
-              <a:t>▪  </a:t>
-            </a:r>
-            <a:r>
-              <a:rPr sz="1700">
-                <a:solidFill>
-                  <a:srgbClr val="1A1A1A"/>
-                </a:solidFill>
-                <a:latin typeface="Arial"/>
-              </a:rPr>
-              <a:t>Variante B – Zwei Gesellschafter am Tisch (GbR-Situation) Rollenkarten für zwei Unternehmer-Spieler: Sie sind gemeinsam GF einer GmbH &amp; Co. KG. Gesellschafter…</a:t>
-            </a:r>
-          </a:p>
-        </p:txBody>
-      </p:sp>
-    </p:spTree>
-  </p:cSld>
-  <p:clrMapOvr>
-    <a:masterClrMapping/>
-  </p:clrMapOvr>
-</p:sld>
-</file>
-
-<file path=ppt/slides/slide12.xml><?xml version="1.0" encoding="utf-8"?>
-<p:sld xmlns:a="http://schemas.openxmlformats.org/drawingml/2006/main" xmlns:p="http://schemas.openxmlformats.org/presentationml/2006/main" xmlns:r="http://schemas.openxmlformats.org/officeDocument/2006/relationships">
-  <p:cSld>
-    <p:bg>
-      <p:bgPr>
-        <a:solidFill>
-          <a:srgbClr val="1A1A1A"/>
-        </a:solidFill>
-        <a:effectLst/>
-      </p:bgPr>
-    </p:bg>
-    <p:spTree>
-      <p:nvGrpSpPr>
-        <p:cNvPr id="1" name=""/>
-        <p:cNvGrpSpPr/>
-        <p:nvPr/>
-      </p:nvGrpSpPr>
-      <p:grpSpPr/>
-      <p:sp>
-        <p:nvSpPr>
-          <p:cNvPr id="2" name="Rectangle 1"/>
-          <p:cNvSpPr/>
-          <p:nvPr/>
-        </p:nvSpPr>
-        <p:spPr>
-          <a:xfrm>
-            <a:off x="0" y="0"/>
-            <a:ext cx="73152" cy="6858000"/>
-          </a:xfrm>
-          <a:prstGeom prst="rect">
-            <a:avLst/>
-          </a:prstGeom>
-          <a:solidFill>
-            <a:srgbClr val="E05B00"/>
-          </a:solidFill>
-          <a:ln>
-            <a:noFill/>
-          </a:ln>
-        </p:spPr>
-        <p:style>
-          <a:lnRef idx="1">
-            <a:schemeClr val="accent1"/>
-          </a:lnRef>
-          <a:fillRef idx="3">
-            <a:schemeClr val="accent1"/>
-          </a:fillRef>
-          <a:effectRef idx="2">
-            <a:schemeClr val="accent1"/>
-          </a:effectRef>
-          <a:fontRef idx="minor">
-            <a:schemeClr val="lt1"/>
-          </a:fontRef>
-        </p:style>
-        <p:txBody>
-          <a:bodyPr rtlCol="0" anchor="ctr"/>
-          <a:lstStyle/>
-          <a:p>
-            <a:pPr algn="ctr"/>
-          </a:p>
-        </p:txBody>
-      </p:sp>
-      <p:sp>
-        <p:nvSpPr>
-          <p:cNvPr id="3" name="TextBox 2"/>
-          <p:cNvSpPr txBox="1"/>
-          <p:nvPr/>
-        </p:nvSpPr>
-        <p:spPr>
-          <a:xfrm>
-            <a:off x="365760" y="2011680"/>
-            <a:ext cx="11430000" cy="2011680"/>
+              <a:rPr sz="2600" b="0" i="0">
+                <a:solidFill>
+                  <a:srgbClr val="191D2E"/>
+                </a:solidFill>
+                <a:latin typeface="Georgia"/>
+              </a:rPr>
+              <a:t>Welchen Bedarf hat der Unternehmer selbst formuliert – ohne dass ich ihn präsentiert habe?</a:t>
+            </a:r>
+          </a:p>
+        </p:txBody>
+      </p:sp>
+      <p:sp>
+        <p:nvSpPr>
+          <p:cNvPr id="11" name="TextBox 10"/>
+          <p:cNvSpPr txBox="1"/>
+          <p:nvPr/>
+        </p:nvSpPr>
+        <p:spPr>
+          <a:xfrm>
+            <a:off x="609600" y="3708400"/>
+            <a:ext cx="304800" cy="355600"/>
           </a:xfrm>
           <a:prstGeom prst="rect">
             <a:avLst/>
@@ -4058,13 +4357,188 @@
           <a:p>
             <a:pPr algn="l"/>
             <a:r>
-              <a:rPr sz="3600" b="1" i="0">
-                <a:solidFill>
-                  <a:srgbClr val="FFFFFF"/>
-                </a:solidFill>
-                <a:latin typeface="Arial"/>
-              </a:rPr>
-              <a:t>4.4 Beobachtungsbogen (für den dritten Rollenspieler)</a:t>
+              <a:rPr sz="2800" b="0" i="0">
+                <a:solidFill>
+                  <a:srgbClr val="1F2B56"/>
+                </a:solidFill>
+                <a:latin typeface="Georgia"/>
+              </a:rPr>
+              <a:t>–</a:t>
+            </a:r>
+          </a:p>
+        </p:txBody>
+      </p:sp>
+      <p:sp>
+        <p:nvSpPr>
+          <p:cNvPr id="12" name="TextBox 11"/>
+          <p:cNvSpPr txBox="1"/>
+          <p:nvPr/>
+        </p:nvSpPr>
+        <p:spPr>
+          <a:xfrm>
+            <a:off x="1016000" y="3683000"/>
+            <a:ext cx="9906000" cy="571500"/>
+          </a:xfrm>
+          <a:prstGeom prst="rect">
+            <a:avLst/>
+          </a:prstGeom>
+          <a:noFill/>
+        </p:spPr>
+        <p:txBody>
+          <a:bodyPr wrap="square">
+            <a:spAutoFit/>
+          </a:bodyPr>
+          <a:lstStyle/>
+          <a:p>
+            <a:pPr algn="l"/>
+            <a:r>
+              <a:rPr sz="2600" b="0" i="0">
+                <a:solidFill>
+                  <a:srgbClr val="191D2E"/>
+                </a:solidFill>
+                <a:latin typeface="Georgia"/>
+              </a:rPr>
+              <a:t>Auf welchem der vier Ohren habe ich primär gehört? Was habe ich möglicherweise verpasst?</a:t>
+            </a:r>
+          </a:p>
+        </p:txBody>
+      </p:sp>
+      <p:sp>
+        <p:nvSpPr>
+          <p:cNvPr id="13" name="TextBox 12"/>
+          <p:cNvSpPr txBox="1"/>
+          <p:nvPr/>
+        </p:nvSpPr>
+        <p:spPr>
+          <a:xfrm>
+            <a:off x="609600" y="4343400"/>
+            <a:ext cx="304800" cy="355600"/>
+          </a:xfrm>
+          <a:prstGeom prst="rect">
+            <a:avLst/>
+          </a:prstGeom>
+          <a:noFill/>
+        </p:spPr>
+        <p:txBody>
+          <a:bodyPr wrap="square">
+            <a:spAutoFit/>
+          </a:bodyPr>
+          <a:lstStyle/>
+          <a:p>
+            <a:pPr algn="l"/>
+            <a:r>
+              <a:rPr sz="2800" b="0" i="0">
+                <a:solidFill>
+                  <a:srgbClr val="1F2B56"/>
+                </a:solidFill>
+                <a:latin typeface="Georgia"/>
+              </a:rPr>
+              <a:t>–</a:t>
+            </a:r>
+          </a:p>
+        </p:txBody>
+      </p:sp>
+      <p:sp>
+        <p:nvSpPr>
+          <p:cNvPr id="14" name="TextBox 13"/>
+          <p:cNvSpPr txBox="1"/>
+          <p:nvPr/>
+        </p:nvSpPr>
+        <p:spPr>
+          <a:xfrm>
+            <a:off x="1016000" y="4318000"/>
+            <a:ext cx="9906000" cy="571500"/>
+          </a:xfrm>
+          <a:prstGeom prst="rect">
+            <a:avLst/>
+          </a:prstGeom>
+          <a:noFill/>
+        </p:spPr>
+        <p:txBody>
+          <a:bodyPr wrap="square">
+            <a:spAutoFit/>
+          </a:bodyPr>
+          <a:lstStyle/>
+          <a:p>
+            <a:pPr algn="l"/>
+            <a:r>
+              <a:rPr sz="2600" b="0" i="0">
+                <a:solidFill>
+                  <a:srgbClr val="191D2E"/>
+                </a:solidFill>
+                <a:latin typeface="Georgia"/>
+              </a:rPr>
+              <a:t>Welcher Bereich des UnternehmerDialogs blieb offen? Warum?</a:t>
+            </a:r>
+          </a:p>
+        </p:txBody>
+      </p:sp>
+      <p:sp>
+        <p:nvSpPr>
+          <p:cNvPr id="15" name="TextBox 14"/>
+          <p:cNvSpPr txBox="1"/>
+          <p:nvPr/>
+        </p:nvSpPr>
+        <p:spPr>
+          <a:xfrm>
+            <a:off x="609600" y="4978400"/>
+            <a:ext cx="304800" cy="355600"/>
+          </a:xfrm>
+          <a:prstGeom prst="rect">
+            <a:avLst/>
+          </a:prstGeom>
+          <a:noFill/>
+        </p:spPr>
+        <p:txBody>
+          <a:bodyPr wrap="square">
+            <a:spAutoFit/>
+          </a:bodyPr>
+          <a:lstStyle/>
+          <a:p>
+            <a:pPr algn="l"/>
+            <a:r>
+              <a:rPr sz="2800" b="0" i="0">
+                <a:solidFill>
+                  <a:srgbClr val="1F2B56"/>
+                </a:solidFill>
+                <a:latin typeface="Georgia"/>
+              </a:rPr>
+              <a:t>–</a:t>
+            </a:r>
+          </a:p>
+        </p:txBody>
+      </p:sp>
+      <p:sp>
+        <p:nvSpPr>
+          <p:cNvPr id="16" name="TextBox 15"/>
+          <p:cNvSpPr txBox="1"/>
+          <p:nvPr/>
+        </p:nvSpPr>
+        <p:spPr>
+          <a:xfrm>
+            <a:off x="1016000" y="4953000"/>
+            <a:ext cx="9906000" cy="571500"/>
+          </a:xfrm>
+          <a:prstGeom prst="rect">
+            <a:avLst/>
+          </a:prstGeom>
+          <a:noFill/>
+        </p:spPr>
+        <p:txBody>
+          <a:bodyPr wrap="square">
+            <a:spAutoFit/>
+          </a:bodyPr>
+          <a:lstStyle/>
+          <a:p>
+            <a:pPr algn="l"/>
+            <a:r>
+              <a:rPr sz="2600" b="0" i="0">
+                <a:solidFill>
+                  <a:srgbClr val="191D2E"/>
+                </a:solidFill>
+                <a:latin typeface="Georgia"/>
+              </a:rPr>
+              <a:t>Was nehme ich mir für das nächste Gespräch mit diesem Kunden konkret vor?</a:t>
             </a:r>
           </a:p>
         </p:txBody>
@@ -4083,7 +4557,7 @@
     <p:bg>
       <p:bgPr>
         <a:solidFill>
-          <a:srgbClr val="FFFFFF"/>
+          <a:srgbClr val="F8F8FA"/>
         </a:solidFill>
         <a:effectLst/>
       </p:bgPr>
@@ -4097,44 +4571,36 @@
       <p:grpSpPr/>
       <p:sp>
         <p:nvSpPr>
-          <p:cNvPr id="2" name="Rectangle 1"/>
-          <p:cNvSpPr/>
-          <p:nvPr/>
-        </p:nvSpPr>
-        <p:spPr>
-          <a:xfrm>
-            <a:off x="0" y="0"/>
-            <a:ext cx="73152" cy="6858000"/>
-          </a:xfrm>
-          <a:prstGeom prst="rect">
-            <a:avLst/>
-          </a:prstGeom>
-          <a:solidFill>
-            <a:srgbClr val="003DA5"/>
-          </a:solidFill>
-          <a:ln>
-            <a:noFill/>
-          </a:ln>
-        </p:spPr>
-        <p:style>
-          <a:lnRef idx="1">
-            <a:schemeClr val="accent1"/>
-          </a:lnRef>
-          <a:fillRef idx="3">
-            <a:schemeClr val="accent1"/>
-          </a:fillRef>
-          <a:effectRef idx="2">
-            <a:schemeClr val="accent1"/>
-          </a:effectRef>
-          <a:fontRef idx="minor">
-            <a:schemeClr val="lt1"/>
-          </a:fontRef>
-        </p:style>
-        <p:txBody>
-          <a:bodyPr rtlCol="0" anchor="ctr"/>
-          <a:lstStyle/>
-          <a:p>
-            <a:pPr algn="ctr"/>
+          <p:cNvPr id="2" name="TextBox 1"/>
+          <p:cNvSpPr txBox="1"/>
+          <p:nvPr/>
+        </p:nvSpPr>
+        <p:spPr>
+          <a:xfrm>
+            <a:off x="609600" y="304800"/>
+            <a:ext cx="2540000" cy="279400"/>
+          </a:xfrm>
+          <a:prstGeom prst="rect">
+            <a:avLst/>
+          </a:prstGeom>
+          <a:noFill/>
+        </p:spPr>
+        <p:txBody>
+          <a:bodyPr wrap="square">
+            <a:spAutoFit/>
+          </a:bodyPr>
+          <a:lstStyle/>
+          <a:p>
+            <a:pPr algn="l"/>
+            <a:r>
+              <a:rPr sz="1600" b="1" i="0">
+                <a:solidFill>
+                  <a:srgbClr val="191D2E"/>
+                </a:solidFill>
+                <a:latin typeface="Arial"/>
+              </a:rPr>
+              <a:t>FKB  Campus</a:t>
+            </a:r>
           </a:p>
         </p:txBody>
       </p:sp>
@@ -4146,8 +4612,78 @@
         </p:nvSpPr>
         <p:spPr>
           <a:xfrm>
-            <a:off x="228600" y="182880"/>
-            <a:ext cx="11430000" cy="320040"/>
+            <a:off x="0" y="304800"/>
+            <a:ext cx="11582400" cy="279400"/>
+          </a:xfrm>
+          <a:prstGeom prst="rect">
+            <a:avLst/>
+          </a:prstGeom>
+          <a:noFill/>
+        </p:spPr>
+        <p:txBody>
+          <a:bodyPr wrap="square">
+            <a:spAutoFit/>
+          </a:bodyPr>
+          <a:lstStyle/>
+          <a:p>
+            <a:pPr algn="r"/>
+            <a:r>
+              <a:rPr sz="1300" b="0" i="0" spc="100">
+                <a:solidFill>
+                  <a:srgbClr val="7B7FA0"/>
+                </a:solidFill>
+                <a:latin typeface="Courier New"/>
+              </a:rPr>
+              <a:t>§ II · PRAXISTRANSFER</a:t>
+            </a:r>
+          </a:p>
+        </p:txBody>
+      </p:sp>
+      <p:sp>
+        <p:nvSpPr>
+          <p:cNvPr id="4" name="TextBox 3"/>
+          <p:cNvSpPr txBox="1"/>
+          <p:nvPr/>
+        </p:nvSpPr>
+        <p:spPr>
+          <a:xfrm>
+            <a:off x="0" y="6350000"/>
+            <a:ext cx="11582400" cy="228600"/>
+          </a:xfrm>
+          <a:prstGeom prst="rect">
+            <a:avLst/>
+          </a:prstGeom>
+          <a:noFill/>
+        </p:spPr>
+        <p:txBody>
+          <a:bodyPr wrap="square">
+            <a:spAutoFit/>
+          </a:bodyPr>
+          <a:lstStyle/>
+          <a:p>
+            <a:pPr algn="r"/>
+            <a:r>
+              <a:rPr sz="1300" b="0" i="0">
+                <a:solidFill>
+                  <a:srgbClr val="7B7FA0"/>
+                </a:solidFill>
+                <a:latin typeface="Courier New"/>
+              </a:rPr>
+              <a:t>13 / 12</a:t>
+            </a:r>
+          </a:p>
+        </p:txBody>
+      </p:sp>
+      <p:sp>
+        <p:nvSpPr>
+          <p:cNvPr id="5" name="TextBox 4"/>
+          <p:cNvSpPr txBox="1"/>
+          <p:nvPr/>
+        </p:nvSpPr>
+        <p:spPr>
+          <a:xfrm>
+            <a:off x="609600" y="1016000"/>
+            <a:ext cx="4953000" cy="2032000"/>
           </a:xfrm>
           <a:prstGeom prst="rect">
             <a:avLst/>
@@ -4162,92 +4698,14 @@
           <a:p>
             <a:pPr algn="l"/>
             <a:r>
-              <a:rPr sz="900" b="0" i="0">
-                <a:solidFill>
-                  <a:srgbClr val="556575"/>
-                </a:solidFill>
-                <a:latin typeface="Arial"/>
-              </a:rPr>
-              <a:t>M10 · Modulinhalte</a:t>
-            </a:r>
-          </a:p>
-        </p:txBody>
-      </p:sp>
-      <p:sp>
-        <p:nvSpPr>
-          <p:cNvPr id="4" name="TextBox 3"/>
-          <p:cNvSpPr txBox="1"/>
-          <p:nvPr/>
-        </p:nvSpPr>
-        <p:spPr>
-          <a:xfrm>
-            <a:off x="365760" y="274320"/>
-            <a:ext cx="11430000" cy="777240"/>
-          </a:xfrm>
-          <a:prstGeom prst="rect">
-            <a:avLst/>
-          </a:prstGeom>
-          <a:noFill/>
-        </p:spPr>
-        <p:txBody>
-          <a:bodyPr wrap="square">
-            <a:spAutoFit/>
-          </a:bodyPr>
-          <a:lstStyle/>
-          <a:p>
-            <a:pPr algn="l"/>
-            <a:r>
-              <a:rPr sz="2200" b="1" i="0">
-                <a:solidFill>
-                  <a:srgbClr val="003DA5"/>
-                </a:solidFill>
-                <a:latin typeface="Arial"/>
-              </a:rPr>
-              <a:t>4.4 Beobachtungsbogen (für den dritten Rollenspieler)</a:t>
-            </a:r>
-          </a:p>
-        </p:txBody>
-      </p:sp>
-      <p:sp>
-        <p:nvSpPr>
-          <p:cNvPr id="5" name="Rectangle 4"/>
-          <p:cNvSpPr/>
-          <p:nvPr/>
-        </p:nvSpPr>
-        <p:spPr>
-          <a:xfrm>
-            <a:off x="365760" y="1005840"/>
-            <a:ext cx="11430000" cy="27432"/>
-          </a:xfrm>
-          <a:prstGeom prst="rect">
-            <a:avLst/>
-          </a:prstGeom>
-          <a:solidFill>
-            <a:srgbClr val="D1D5DB"/>
-          </a:solidFill>
-          <a:ln>
-            <a:noFill/>
-          </a:ln>
-        </p:spPr>
-        <p:style>
-          <a:lnRef idx="1">
-            <a:schemeClr val="accent1"/>
-          </a:lnRef>
-          <a:fillRef idx="3">
-            <a:schemeClr val="accent1"/>
-          </a:fillRef>
-          <a:effectRef idx="2">
-            <a:schemeClr val="accent1"/>
-          </a:effectRef>
-          <a:fontRef idx="minor">
-            <a:schemeClr val="lt1"/>
-          </a:fontRef>
-        </p:style>
-        <p:txBody>
-          <a:bodyPr rtlCol="0" anchor="ctr"/>
-          <a:lstStyle/>
-          <a:p>
-            <a:pPr algn="ctr"/>
+              <a:rPr sz="6000" b="0" i="0">
+                <a:solidFill>
+                  <a:srgbClr val="191D2E"/>
+                </a:solidFill>
+                <a:latin typeface="Georgia"/>
+              </a:rPr>
+              <a:t>Selbstcheck nach 4 Wochen</a:t>
+            </a:r>
           </a:p>
         </p:txBody>
       </p:sp>
@@ -4260,8 +4718,8 @@
           <p:nvPr/>
         </p:nvGraphicFramePr>
         <p:xfrm>
-          <a:off x="365760" y="1143000"/>
-          <a:ext cx="11430000" cy="5029200"/>
+          <a:off x="6096000" y="1016000"/>
+          <a:ext cx="6502400" cy="3111500"/>
         </p:xfrm>
         <a:graphic>
           <a:graphicData uri="http://schemas.openxmlformats.org/drawingml/2006/table">
@@ -4270,31 +4728,30 @@
                 <a:tableStyleId>{5C22544A-7EE6-4342-B048-85BDC9FD1C3A}</a:tableStyleId>
               </a:tblPr>
               <a:tblGrid>
-                <a:gridCol w="2857500"/>
-                <a:gridCol w="2857500"/>
-                <a:gridCol w="2857500"/>
-                <a:gridCol w="2857500"/>
+                <a:gridCol w="2167466"/>
+                <a:gridCol w="2167466"/>
+                <a:gridCol w="2167468"/>
               </a:tblGrid>
-              <a:tr h="457200">
+              <a:tr h="444500">
                 <a:tc>
                   <a:txBody>
                     <a:bodyPr wrap="square"/>
                     <a:lstStyle/>
                     <a:p>
                       <a:r>
-                        <a:rPr sz="1100" b="1">
+                        <a:rPr sz="1400" b="1">
                           <a:solidFill>
-                            <a:srgbClr val="FFFFFF"/>
+                            <a:srgbClr val="F8F8FA"/>
                           </a:solidFill>
-                          <a:latin typeface="Arial"/>
+                          <a:latin typeface="Courier New"/>
                         </a:rPr>
-                        <a:t>Beobachtungskriterium</a:t>
+                        <a:t>Aussage</a:t>
                       </a:r>
                     </a:p>
                   </a:txBody>
                   <a:tcPr>
                     <a:solidFill>
-                      <a:srgbClr val="003DA5"/>
+                      <a:srgbClr val="191D2E"/>
                     </a:solidFill>
                   </a:tcPr>
                 </a:tc>
@@ -4304,19 +4761,19 @@
                     <a:lstStyle/>
                     <a:p>
                       <a:r>
-                        <a:rPr sz="1100" b="1">
+                        <a:rPr sz="1400" b="1">
                           <a:solidFill>
-                            <a:srgbClr val="FFFFFF"/>
+                            <a:srgbClr val="F8F8FA"/>
                           </a:solidFill>
-                          <a:latin typeface="Arial"/>
+                          <a:latin typeface="Courier New"/>
                         </a:rPr>
-                        <a:t>Klar erfüllt</a:t>
+                        <a:t>Stimmt</a:t>
                       </a:r>
                     </a:p>
                   </a:txBody>
                   <a:tcPr>
                     <a:solidFill>
-                      <a:srgbClr val="003DA5"/>
+                      <a:srgbClr val="191D2E"/>
                     </a:solidFill>
                   </a:tcPr>
                 </a:tc>
@@ -4326,19 +4783,43 @@
                     <a:lstStyle/>
                     <a:p>
                       <a:r>
-                        <a:rPr sz="1100" b="1">
+                        <a:rPr sz="1400" b="1">
                           <a:solidFill>
-                            <a:srgbClr val="FFFFFF"/>
+                            <a:srgbClr val="F8F8FA"/>
                           </a:solidFill>
-                          <a:latin typeface="Arial"/>
+                          <a:latin typeface="Courier New"/>
                         </a:rPr>
-                        <a:t>Teilweise</a:t>
+                        <a:t>Noch nicht</a:t>
                       </a:r>
                     </a:p>
                   </a:txBody>
                   <a:tcPr>
                     <a:solidFill>
-                      <a:srgbClr val="003DA5"/>
+                      <a:srgbClr val="191D2E"/>
+                    </a:solidFill>
+                  </a:tcPr>
+                </a:tc>
+              </a:tr>
+              <a:tr h="444500">
+                <a:tc>
+                  <a:txBody>
+                    <a:bodyPr wrap="square"/>
+                    <a:lstStyle/>
+                    <a:p>
+                      <a:r>
+                        <a:rPr sz="1600" b="0">
+                          <a:solidFill>
+                            <a:srgbClr val="191D2E"/>
+                          </a:solidFill>
+                          <a:latin typeface="Courier New"/>
+                        </a:rPr>
+                        <a:t>Ich setze Situationsfragen gezielt ein, ohne sie zu übergewichten</a:t>
+                      </a:r>
+                    </a:p>
+                  </a:txBody>
+                  <a:tcPr>
+                    <a:solidFill>
+                      <a:srgbClr val="F8F8FA"/>
                     </a:solidFill>
                   </a:tcPr>
                 </a:tc>
@@ -4348,43 +4829,19 @@
                     <a:lstStyle/>
                     <a:p>
                       <a:r>
-                        <a:rPr sz="1100" b="1">
+                        <a:rPr sz="1600" b="0">
                           <a:solidFill>
-                            <a:srgbClr val="FFFFFF"/>
+                            <a:srgbClr val="191D2E"/>
                           </a:solidFill>
-                          <a:latin typeface="Arial"/>
+                          <a:latin typeface="Courier New"/>
                         </a:rPr>
-                        <a:t>Nicht erfüllt</a:t>
+                        <a:t>☐</a:t>
                       </a:r>
                     </a:p>
                   </a:txBody>
                   <a:tcPr>
                     <a:solidFill>
-                      <a:srgbClr val="003DA5"/>
-                    </a:solidFill>
-                  </a:tcPr>
-                </a:tc>
-              </a:tr>
-              <a:tr h="457200">
-                <a:tc>
-                  <a:txBody>
-                    <a:bodyPr wrap="square"/>
-                    <a:lstStyle/>
-                    <a:p>
-                      <a:r>
-                        <a:rPr sz="1100" b="0">
-                          <a:solidFill>
-                            <a:srgbClr val="1A1A1A"/>
-                          </a:solidFill>
-                          <a:latin typeface="Arial"/>
-                        </a:rPr>
-                        <a:t>Begrüßung und Erwartungsklärung zu Beginn</a:t>
-                      </a:r>
-                    </a:p>
-                  </a:txBody>
-                  <a:tcPr>
-                    <a:solidFill>
-                      <a:srgbClr val="FFFFFF"/>
+                      <a:srgbClr val="F8F8FA"/>
                     </a:solidFill>
                   </a:tcPr>
                 </a:tc>
@@ -4394,11 +4851,11 @@
                     <a:lstStyle/>
                     <a:p>
                       <a:r>
-                        <a:rPr sz="1100" b="0">
+                        <a:rPr sz="1600" b="0">
                           <a:solidFill>
-                            <a:srgbClr val="1A1A1A"/>
+                            <a:srgbClr val="191D2E"/>
                           </a:solidFill>
-                          <a:latin typeface="Arial"/>
+                          <a:latin typeface="Courier New"/>
                         </a:rPr>
                         <a:t>☐</a:t>
                       </a:r>
@@ -4406,7 +4863,31 @@
                   </a:txBody>
                   <a:tcPr>
                     <a:solidFill>
-                      <a:srgbClr val="FFFFFF"/>
+                      <a:srgbClr val="F8F8FA"/>
+                    </a:solidFill>
+                  </a:tcPr>
+                </a:tc>
+              </a:tr>
+              <a:tr h="444500">
+                <a:tc>
+                  <a:txBody>
+                    <a:bodyPr wrap="square"/>
+                    <a:lstStyle/>
+                    <a:p>
+                      <a:r>
+                        <a:rPr sz="1600" b="0">
+                          <a:solidFill>
+                            <a:srgbClr val="191D2E"/>
+                          </a:solidFill>
+                          <a:latin typeface="Courier New"/>
+                        </a:rPr>
+                        <a:t>Ich stelle mindestens 2 Implikationsfragen pro Gespräch</a:t>
+                      </a:r>
+                    </a:p>
+                  </a:txBody>
+                  <a:tcPr>
+                    <a:solidFill>
+                      <a:srgbClr val="F0F0F5"/>
                     </a:solidFill>
                   </a:tcPr>
                 </a:tc>
@@ -4416,11 +4897,11 @@
                     <a:lstStyle/>
                     <a:p>
                       <a:r>
-                        <a:rPr sz="1100" b="0">
+                        <a:rPr sz="1600" b="0">
                           <a:solidFill>
-                            <a:srgbClr val="1A1A1A"/>
+                            <a:srgbClr val="191D2E"/>
                           </a:solidFill>
-                          <a:latin typeface="Arial"/>
+                          <a:latin typeface="Courier New"/>
                         </a:rPr>
                         <a:t>☐</a:t>
                       </a:r>
@@ -4428,7 +4909,7 @@
                   </a:txBody>
                   <a:tcPr>
                     <a:solidFill>
-                      <a:srgbClr val="FFFFFF"/>
+                      <a:srgbClr val="F0F0F5"/>
                     </a:solidFill>
                   </a:tcPr>
                 </a:tc>
@@ -4438,11 +4919,11 @@
                     <a:lstStyle/>
                     <a:p>
                       <a:r>
-                        <a:rPr sz="1100" b="0">
+                        <a:rPr sz="1600" b="0">
                           <a:solidFill>
-                            <a:srgbClr val="1A1A1A"/>
+                            <a:srgbClr val="191D2E"/>
                           </a:solidFill>
-                          <a:latin typeface="Arial"/>
+                          <a:latin typeface="Courier New"/>
                         </a:rPr>
                         <a:t>☐</a:t>
                       </a:r>
@@ -4450,31 +4931,31 @@
                   </a:txBody>
                   <a:tcPr>
                     <a:solidFill>
-                      <a:srgbClr val="FFFFFF"/>
+                      <a:srgbClr val="F0F0F5"/>
                     </a:solidFill>
                   </a:tcPr>
                 </a:tc>
               </a:tr>
-              <a:tr h="457200">
+              <a:tr h="444500">
                 <a:tc>
                   <a:txBody>
                     <a:bodyPr wrap="square"/>
                     <a:lstStyle/>
                     <a:p>
                       <a:r>
-                        <a:rPr sz="1100" b="0">
+                        <a:rPr sz="1600" b="0">
                           <a:solidFill>
-                            <a:srgbClr val="1A1A1A"/>
+                            <a:srgbClr val="191D2E"/>
                           </a:solidFill>
-                          <a:latin typeface="Arial"/>
+                          <a:latin typeface="Courier New"/>
                         </a:rPr>
-                        <a:t>Situationsfragen: Fakten systematisch erhoben</a:t>
+                        <a:t>Ich lasse den Kunden Bedarf selbst formulieren</a:t>
                       </a:r>
                     </a:p>
                   </a:txBody>
                   <a:tcPr>
                     <a:solidFill>
-                      <a:srgbClr val="F4F6FA"/>
+                      <a:srgbClr val="F8F8FA"/>
                     </a:solidFill>
                   </a:tcPr>
                 </a:tc>
@@ -4484,11 +4965,11 @@
                     <a:lstStyle/>
                     <a:p>
                       <a:r>
-                        <a:rPr sz="1100" b="0">
+                        <a:rPr sz="1600" b="0">
                           <a:solidFill>
-                            <a:srgbClr val="1A1A1A"/>
+                            <a:srgbClr val="191D2E"/>
                           </a:solidFill>
-                          <a:latin typeface="Arial"/>
+                          <a:latin typeface="Courier New"/>
                         </a:rPr>
                         <a:t>☐</a:t>
                       </a:r>
@@ -4496,7 +4977,7 @@
                   </a:txBody>
                   <a:tcPr>
                     <a:solidFill>
-                      <a:srgbClr val="F4F6FA"/>
+                      <a:srgbClr val="F8F8FA"/>
                     </a:solidFill>
                   </a:tcPr>
                 </a:tc>
@@ -4506,11 +4987,11 @@
                     <a:lstStyle/>
                     <a:p>
                       <a:r>
-                        <a:rPr sz="1100" b="0">
+                        <a:rPr sz="1600" b="0">
                           <a:solidFill>
-                            <a:srgbClr val="1A1A1A"/>
+                            <a:srgbClr val="191D2E"/>
                           </a:solidFill>
-                          <a:latin typeface="Arial"/>
+                          <a:latin typeface="Courier New"/>
                         </a:rPr>
                         <a:t>☐</a:t>
                       </a:r>
@@ -4518,7 +4999,31 @@
                   </a:txBody>
                   <a:tcPr>
                     <a:solidFill>
-                      <a:srgbClr val="F4F6FA"/>
+                      <a:srgbClr val="F8F8FA"/>
+                    </a:solidFill>
+                  </a:tcPr>
+                </a:tc>
+              </a:tr>
+              <a:tr h="444500">
+                <a:tc>
+                  <a:txBody>
+                    <a:bodyPr wrap="square"/>
+                    <a:lstStyle/>
+                    <a:p>
+                      <a:r>
+                        <a:rPr sz="1600" b="0">
+                          <a:solidFill>
+                            <a:srgbClr val="191D2E"/>
+                          </a:solidFill>
+                          <a:latin typeface="Courier New"/>
+                        </a:rPr>
+                        <a:t>Ich erkenne non-verbale Signale und spreche sie an</a:t>
+                      </a:r>
+                    </a:p>
+                  </a:txBody>
+                  <a:tcPr>
+                    <a:solidFill>
+                      <a:srgbClr val="F0F0F5"/>
                     </a:solidFill>
                   </a:tcPr>
                 </a:tc>
@@ -4528,11 +5033,11 @@
                     <a:lstStyle/>
                     <a:p>
                       <a:r>
-                        <a:rPr sz="1100" b="0">
+                        <a:rPr sz="1600" b="0">
                           <a:solidFill>
-                            <a:srgbClr val="1A1A1A"/>
+                            <a:srgbClr val="191D2E"/>
                           </a:solidFill>
-                          <a:latin typeface="Arial"/>
+                          <a:latin typeface="Courier New"/>
                         </a:rPr>
                         <a:t>☐</a:t>
                       </a:r>
@@ -4540,31 +5045,7 @@
                   </a:txBody>
                   <a:tcPr>
                     <a:solidFill>
-                      <a:srgbClr val="F4F6FA"/>
-                    </a:solidFill>
-                  </a:tcPr>
-                </a:tc>
-              </a:tr>
-              <a:tr h="457200">
-                <a:tc>
-                  <a:txBody>
-                    <a:bodyPr wrap="square"/>
-                    <a:lstStyle/>
-                    <a:p>
-                      <a:r>
-                        <a:rPr sz="1100" b="0">
-                          <a:solidFill>
-                            <a:srgbClr val="1A1A1A"/>
-                          </a:solidFill>
-                          <a:latin typeface="Arial"/>
-                        </a:rPr>
-                        <a:t>Problemfragen: mindestens 2 Herausforderungen thematisiert</a:t>
-                      </a:r>
-                    </a:p>
-                  </a:txBody>
-                  <a:tcPr>
-                    <a:solidFill>
-                      <a:srgbClr val="FFFFFF"/>
+                      <a:srgbClr val="F0F0F5"/>
                     </a:solidFill>
                   </a:tcPr>
                 </a:tc>
@@ -4574,11 +5055,11 @@
                     <a:lstStyle/>
                     <a:p>
                       <a:r>
-                        <a:rPr sz="1100" b="0">
+                        <a:rPr sz="1600" b="0">
                           <a:solidFill>
-                            <a:srgbClr val="1A1A1A"/>
+                            <a:srgbClr val="191D2E"/>
                           </a:solidFill>
-                          <a:latin typeface="Arial"/>
+                          <a:latin typeface="Courier New"/>
                         </a:rPr>
                         <a:t>☐</a:t>
                       </a:r>
@@ -4586,7 +5067,31 @@
                   </a:txBody>
                   <a:tcPr>
                     <a:solidFill>
-                      <a:srgbClr val="FFFFFF"/>
+                      <a:srgbClr val="F0F0F5"/>
+                    </a:solidFill>
+                  </a:tcPr>
+                </a:tc>
+              </a:tr>
+              <a:tr h="444500">
+                <a:tc>
+                  <a:txBody>
+                    <a:bodyPr wrap="square"/>
+                    <a:lstStyle/>
+                    <a:p>
+                      <a:r>
+                        <a:rPr sz="1600" b="0">
+                          <a:solidFill>
+                            <a:srgbClr val="191D2E"/>
+                          </a:solidFill>
+                          <a:latin typeface="Courier New"/>
+                        </a:rPr>
+                        <a:t>Ich schließe jedes Gespräch mit schriftlichen Vereinbarungen ab</a:t>
+                      </a:r>
+                    </a:p>
+                  </a:txBody>
+                  <a:tcPr>
+                    <a:solidFill>
+                      <a:srgbClr val="F8F8FA"/>
                     </a:solidFill>
                   </a:tcPr>
                 </a:tc>
@@ -4596,11 +5101,11 @@
                     <a:lstStyle/>
                     <a:p>
                       <a:r>
-                        <a:rPr sz="1100" b="0">
+                        <a:rPr sz="1600" b="0">
                           <a:solidFill>
-                            <a:srgbClr val="1A1A1A"/>
+                            <a:srgbClr val="191D2E"/>
                           </a:solidFill>
-                          <a:latin typeface="Arial"/>
+                          <a:latin typeface="Courier New"/>
                         </a:rPr>
                         <a:t>☐</a:t>
                       </a:r>
@@ -4608,7 +5113,7 @@
                   </a:txBody>
                   <a:tcPr>
                     <a:solidFill>
-                      <a:srgbClr val="FFFFFF"/>
+                      <a:srgbClr val="F8F8FA"/>
                     </a:solidFill>
                   </a:tcPr>
                 </a:tc>
@@ -4618,11 +5123,11 @@
                     <a:lstStyle/>
                     <a:p>
                       <a:r>
-                        <a:rPr sz="1100" b="0">
+                        <a:rPr sz="1600" b="0">
                           <a:solidFill>
-                            <a:srgbClr val="1A1A1A"/>
+                            <a:srgbClr val="191D2E"/>
                           </a:solidFill>
-                          <a:latin typeface="Arial"/>
+                          <a:latin typeface="Courier New"/>
                         </a:rPr>
                         <a:t>☐</a:t>
                       </a:r>
@@ -4630,31 +5135,31 @@
                   </a:txBody>
                   <a:tcPr>
                     <a:solidFill>
-                      <a:srgbClr val="FFFFFF"/>
+                      <a:srgbClr val="F8F8FA"/>
                     </a:solidFill>
                   </a:tcPr>
                 </a:tc>
               </a:tr>
-              <a:tr h="457200">
+              <a:tr h="444500">
                 <a:tc>
                   <a:txBody>
                     <a:bodyPr wrap="square"/>
                     <a:lstStyle/>
                     <a:p>
                       <a:r>
-                        <a:rPr sz="1100" b="0">
+                        <a:rPr sz="1600" b="0">
                           <a:solidFill>
-                            <a:srgbClr val="1A1A1A"/>
+                            <a:srgbClr val="191D2E"/>
                           </a:solidFill>
-                          <a:latin typeface="Arial"/>
+                          <a:latin typeface="Courier New"/>
                         </a:rPr>
-                        <a:t>Implikationsfragen: Konsequenzen von Problemen vertieft</a:t>
+                        <a:t>Ich nutze alle relevanten Abschnitte des UnternehmerDialogs aktiv</a:t>
                       </a:r>
                     </a:p>
                   </a:txBody>
                   <a:tcPr>
                     <a:solidFill>
-                      <a:srgbClr val="F4F6FA"/>
+                      <a:srgbClr val="F0F0F5"/>
                     </a:solidFill>
                   </a:tcPr>
                 </a:tc>
@@ -4664,11 +5169,11 @@
                     <a:lstStyle/>
                     <a:p>
                       <a:r>
-                        <a:rPr sz="1100" b="0">
+                        <a:rPr sz="1600" b="0">
                           <a:solidFill>
-                            <a:srgbClr val="1A1A1A"/>
+                            <a:srgbClr val="191D2E"/>
                           </a:solidFill>
-                          <a:latin typeface="Arial"/>
+                          <a:latin typeface="Courier New"/>
                         </a:rPr>
                         <a:t>☐</a:t>
                       </a:r>
@@ -4676,7 +5181,7 @@
                   </a:txBody>
                   <a:tcPr>
                     <a:solidFill>
-                      <a:srgbClr val="F4F6FA"/>
+                      <a:srgbClr val="F0F0F5"/>
                     </a:solidFill>
                   </a:tcPr>
                 </a:tc>
@@ -4686,11 +5191,11 @@
                     <a:lstStyle/>
                     <a:p>
                       <a:r>
-                        <a:rPr sz="1100" b="0">
+                        <a:rPr sz="1600" b="0">
                           <a:solidFill>
-                            <a:srgbClr val="1A1A1A"/>
+                            <a:srgbClr val="191D2E"/>
                           </a:solidFill>
-                          <a:latin typeface="Arial"/>
+                          <a:latin typeface="Courier New"/>
                         </a:rPr>
                         <a:t>☐</a:t>
                       </a:r>
@@ -4698,569 +5203,7 @@
                   </a:txBody>
                   <a:tcPr>
                     <a:solidFill>
-                      <a:srgbClr val="F4F6FA"/>
-                    </a:solidFill>
-                  </a:tcPr>
-                </a:tc>
-                <a:tc>
-                  <a:txBody>
-                    <a:bodyPr wrap="square"/>
-                    <a:lstStyle/>
-                    <a:p>
-                      <a:r>
-                        <a:rPr sz="1100" b="0">
-                          <a:solidFill>
-                            <a:srgbClr val="1A1A1A"/>
-                          </a:solidFill>
-                          <a:latin typeface="Arial"/>
-                        </a:rPr>
-                        <a:t>☐</a:t>
-                      </a:r>
-                    </a:p>
-                  </a:txBody>
-                  <a:tcPr>
-                    <a:solidFill>
-                      <a:srgbClr val="F4F6FA"/>
-                    </a:solidFill>
-                  </a:tcPr>
-                </a:tc>
-              </a:tr>
-              <a:tr h="457200">
-                <a:tc>
-                  <a:txBody>
-                    <a:bodyPr wrap="square"/>
-                    <a:lstStyle/>
-                    <a:p>
-                      <a:r>
-                        <a:rPr sz="1100" b="0">
-                          <a:solidFill>
-                            <a:srgbClr val="1A1A1A"/>
-                          </a:solidFill>
-                          <a:latin typeface="Arial"/>
-                        </a:rPr>
-                        <a:t>Nutzenfragen: Mehrwert durch Kunden formulieren lassen</a:t>
-                      </a:r>
-                    </a:p>
-                  </a:txBody>
-                  <a:tcPr>
-                    <a:solidFill>
-                      <a:srgbClr val="FFFFFF"/>
-                    </a:solidFill>
-                  </a:tcPr>
-                </a:tc>
-                <a:tc>
-                  <a:txBody>
-                    <a:bodyPr wrap="square"/>
-                    <a:lstStyle/>
-                    <a:p>
-                      <a:r>
-                        <a:rPr sz="1100" b="0">
-                          <a:solidFill>
-                            <a:srgbClr val="1A1A1A"/>
-                          </a:solidFill>
-                          <a:latin typeface="Arial"/>
-                        </a:rPr>
-                        <a:t>☐</a:t>
-                      </a:r>
-                    </a:p>
-                  </a:txBody>
-                  <a:tcPr>
-                    <a:solidFill>
-                      <a:srgbClr val="FFFFFF"/>
-                    </a:solidFill>
-                  </a:tcPr>
-                </a:tc>
-                <a:tc>
-                  <a:txBody>
-                    <a:bodyPr wrap="square"/>
-                    <a:lstStyle/>
-                    <a:p>
-                      <a:r>
-                        <a:rPr sz="1100" b="0">
-                          <a:solidFill>
-                            <a:srgbClr val="1A1A1A"/>
-                          </a:solidFill>
-                          <a:latin typeface="Arial"/>
-                        </a:rPr>
-                        <a:t>☐</a:t>
-                      </a:r>
-                    </a:p>
-                  </a:txBody>
-                  <a:tcPr>
-                    <a:solidFill>
-                      <a:srgbClr val="FFFFFF"/>
-                    </a:solidFill>
-                  </a:tcPr>
-                </a:tc>
-                <a:tc>
-                  <a:txBody>
-                    <a:bodyPr wrap="square"/>
-                    <a:lstStyle/>
-                    <a:p>
-                      <a:r>
-                        <a:rPr sz="1100" b="0">
-                          <a:solidFill>
-                            <a:srgbClr val="1A1A1A"/>
-                          </a:solidFill>
-                          <a:latin typeface="Arial"/>
-                        </a:rPr>
-                        <a:t>☐</a:t>
-                      </a:r>
-                    </a:p>
-                  </a:txBody>
-                  <a:tcPr>
-                    <a:solidFill>
-                      <a:srgbClr val="FFFFFF"/>
-                    </a:solidFill>
-                  </a:tcPr>
-                </a:tc>
-              </a:tr>
-              <a:tr h="457200">
-                <a:tc>
-                  <a:txBody>
-                    <a:bodyPr wrap="square"/>
-                    <a:lstStyle/>
-                    <a:p>
-                      <a:r>
-                        <a:rPr sz="1100" b="0">
-                          <a:solidFill>
-                            <a:srgbClr val="1A1A1A"/>
-                          </a:solidFill>
-                          <a:latin typeface="Arial"/>
-                        </a:rPr>
-                        <a:t>Aktives Zuhören (Paraphrasieren, kein sofortiges Gegenschlagen)</a:t>
-                      </a:r>
-                    </a:p>
-                  </a:txBody>
-                  <a:tcPr>
-                    <a:solidFill>
-                      <a:srgbClr val="F4F6FA"/>
-                    </a:solidFill>
-                  </a:tcPr>
-                </a:tc>
-                <a:tc>
-                  <a:txBody>
-                    <a:bodyPr wrap="square"/>
-                    <a:lstStyle/>
-                    <a:p>
-                      <a:r>
-                        <a:rPr sz="1100" b="0">
-                          <a:solidFill>
-                            <a:srgbClr val="1A1A1A"/>
-                          </a:solidFill>
-                          <a:latin typeface="Arial"/>
-                        </a:rPr>
-                        <a:t>☐</a:t>
-                      </a:r>
-                    </a:p>
-                  </a:txBody>
-                  <a:tcPr>
-                    <a:solidFill>
-                      <a:srgbClr val="F4F6FA"/>
-                    </a:solidFill>
-                  </a:tcPr>
-                </a:tc>
-                <a:tc>
-                  <a:txBody>
-                    <a:bodyPr wrap="square"/>
-                    <a:lstStyle/>
-                    <a:p>
-                      <a:r>
-                        <a:rPr sz="1100" b="0">
-                          <a:solidFill>
-                            <a:srgbClr val="1A1A1A"/>
-                          </a:solidFill>
-                          <a:latin typeface="Arial"/>
-                        </a:rPr>
-                        <a:t>☐</a:t>
-                      </a:r>
-                    </a:p>
-                  </a:txBody>
-                  <a:tcPr>
-                    <a:solidFill>
-                      <a:srgbClr val="F4F6FA"/>
-                    </a:solidFill>
-                  </a:tcPr>
-                </a:tc>
-                <a:tc>
-                  <a:txBody>
-                    <a:bodyPr wrap="square"/>
-                    <a:lstStyle/>
-                    <a:p>
-                      <a:r>
-                        <a:rPr sz="1100" b="0">
-                          <a:solidFill>
-                            <a:srgbClr val="1A1A1A"/>
-                          </a:solidFill>
-                          <a:latin typeface="Arial"/>
-                        </a:rPr>
-                        <a:t>☐</a:t>
-                      </a:r>
-                    </a:p>
-                  </a:txBody>
-                  <a:tcPr>
-                    <a:solidFill>
-                      <a:srgbClr val="F4F6FA"/>
-                    </a:solidFill>
-                  </a:tcPr>
-                </a:tc>
-              </a:tr>
-              <a:tr h="457200">
-                <a:tc>
-                  <a:txBody>
-                    <a:bodyPr wrap="square"/>
-                    <a:lstStyle/>
-                    <a:p>
-                      <a:r>
-                        <a:rPr sz="1100" b="0">
-                          <a:solidFill>
-                            <a:srgbClr val="1A1A1A"/>
-                          </a:solidFill>
-                          <a:latin typeface="Arial"/>
-                        </a:rPr>
-                        <a:t>Vier-Ohren: Signale jenseits des Sachinhalts aufgegriffen</a:t>
-                      </a:r>
-                    </a:p>
-                  </a:txBody>
-                  <a:tcPr>
-                    <a:solidFill>
-                      <a:srgbClr val="FFFFFF"/>
-                    </a:solidFill>
-                  </a:tcPr>
-                </a:tc>
-                <a:tc>
-                  <a:txBody>
-                    <a:bodyPr wrap="square"/>
-                    <a:lstStyle/>
-                    <a:p>
-                      <a:r>
-                        <a:rPr sz="1100" b="0">
-                          <a:solidFill>
-                            <a:srgbClr val="1A1A1A"/>
-                          </a:solidFill>
-                          <a:latin typeface="Arial"/>
-                        </a:rPr>
-                        <a:t>☐</a:t>
-                      </a:r>
-                    </a:p>
-                  </a:txBody>
-                  <a:tcPr>
-                    <a:solidFill>
-                      <a:srgbClr val="FFFFFF"/>
-                    </a:solidFill>
-                  </a:tcPr>
-                </a:tc>
-                <a:tc>
-                  <a:txBody>
-                    <a:bodyPr wrap="square"/>
-                    <a:lstStyle/>
-                    <a:p>
-                      <a:r>
-                        <a:rPr sz="1100" b="0">
-                          <a:solidFill>
-                            <a:srgbClr val="1A1A1A"/>
-                          </a:solidFill>
-                          <a:latin typeface="Arial"/>
-                        </a:rPr>
-                        <a:t>☐</a:t>
-                      </a:r>
-                    </a:p>
-                  </a:txBody>
-                  <a:tcPr>
-                    <a:solidFill>
-                      <a:srgbClr val="FFFFFF"/>
-                    </a:solidFill>
-                  </a:tcPr>
-                </a:tc>
-                <a:tc>
-                  <a:txBody>
-                    <a:bodyPr wrap="square"/>
-                    <a:lstStyle/>
-                    <a:p>
-                      <a:r>
-                        <a:rPr sz="1100" b="0">
-                          <a:solidFill>
-                            <a:srgbClr val="1A1A1A"/>
-                          </a:solidFill>
-                          <a:latin typeface="Arial"/>
-                        </a:rPr>
-                        <a:t>☐</a:t>
-                      </a:r>
-                    </a:p>
-                  </a:txBody>
-                  <a:tcPr>
-                    <a:solidFill>
-                      <a:srgbClr val="FFFFFF"/>
-                    </a:solidFill>
-                  </a:tcPr>
-                </a:tc>
-              </a:tr>
-              <a:tr h="457200">
-                <a:tc>
-                  <a:txBody>
-                    <a:bodyPr wrap="square"/>
-                    <a:lstStyle/>
-                    <a:p>
-                      <a:r>
-                        <a:rPr sz="1100" b="0">
-                          <a:solidFill>
-                            <a:srgbClr val="1A1A1A"/>
-                          </a:solidFill>
-                          <a:latin typeface="Arial"/>
-                        </a:rPr>
-                        <a:t>Themenübergänge im UnternehmerDialog strukturiert gestaltet</a:t>
-                      </a:r>
-                    </a:p>
-                  </a:txBody>
-                  <a:tcPr>
-                    <a:solidFill>
-                      <a:srgbClr val="F4F6FA"/>
-                    </a:solidFill>
-                  </a:tcPr>
-                </a:tc>
-                <a:tc>
-                  <a:txBody>
-                    <a:bodyPr wrap="square"/>
-                    <a:lstStyle/>
-                    <a:p>
-                      <a:r>
-                        <a:rPr sz="1100" b="0">
-                          <a:solidFill>
-                            <a:srgbClr val="1A1A1A"/>
-                          </a:solidFill>
-                          <a:latin typeface="Arial"/>
-                        </a:rPr>
-                        <a:t>☐</a:t>
-                      </a:r>
-                    </a:p>
-                  </a:txBody>
-                  <a:tcPr>
-                    <a:solidFill>
-                      <a:srgbClr val="F4F6FA"/>
-                    </a:solidFill>
-                  </a:tcPr>
-                </a:tc>
-                <a:tc>
-                  <a:txBody>
-                    <a:bodyPr wrap="square"/>
-                    <a:lstStyle/>
-                    <a:p>
-                      <a:r>
-                        <a:rPr sz="1100" b="0">
-                          <a:solidFill>
-                            <a:srgbClr val="1A1A1A"/>
-                          </a:solidFill>
-                          <a:latin typeface="Arial"/>
-                        </a:rPr>
-                        <a:t>☐</a:t>
-                      </a:r>
-                    </a:p>
-                  </a:txBody>
-                  <a:tcPr>
-                    <a:solidFill>
-                      <a:srgbClr val="F4F6FA"/>
-                    </a:solidFill>
-                  </a:tcPr>
-                </a:tc>
-                <a:tc>
-                  <a:txBody>
-                    <a:bodyPr wrap="square"/>
-                    <a:lstStyle/>
-                    <a:p>
-                      <a:r>
-                        <a:rPr sz="1100" b="0">
-                          <a:solidFill>
-                            <a:srgbClr val="1A1A1A"/>
-                          </a:solidFill>
-                          <a:latin typeface="Arial"/>
-                        </a:rPr>
-                        <a:t>☐</a:t>
-                      </a:r>
-                    </a:p>
-                  </a:txBody>
-                  <a:tcPr>
-                    <a:solidFill>
-                      <a:srgbClr val="F4F6FA"/>
-                    </a:solidFill>
-                  </a:tcPr>
-                </a:tc>
-              </a:tr>
-              <a:tr h="457200">
-                <a:tc>
-                  <a:txBody>
-                    <a:bodyPr wrap="square"/>
-                    <a:lstStyle/>
-                    <a:p>
-                      <a:r>
-                        <a:rPr sz="1100" b="0">
-                          <a:solidFill>
-                            <a:srgbClr val="1A1A1A"/>
-                          </a:solidFill>
-                          <a:latin typeface="Arial"/>
-                        </a:rPr>
-                        <a:t>Latenter Bedarf identifiziert (min. 1)</a:t>
-                      </a:r>
-                    </a:p>
-                  </a:txBody>
-                  <a:tcPr>
-                    <a:solidFill>
-                      <a:srgbClr val="FFFFFF"/>
-                    </a:solidFill>
-                  </a:tcPr>
-                </a:tc>
-                <a:tc>
-                  <a:txBody>
-                    <a:bodyPr wrap="square"/>
-                    <a:lstStyle/>
-                    <a:p>
-                      <a:r>
-                        <a:rPr sz="1100" b="0">
-                          <a:solidFill>
-                            <a:srgbClr val="1A1A1A"/>
-                          </a:solidFill>
-                          <a:latin typeface="Arial"/>
-                        </a:rPr>
-                        <a:t>☐</a:t>
-                      </a:r>
-                    </a:p>
-                  </a:txBody>
-                  <a:tcPr>
-                    <a:solidFill>
-                      <a:srgbClr val="FFFFFF"/>
-                    </a:solidFill>
-                  </a:tcPr>
-                </a:tc>
-                <a:tc>
-                  <a:txBody>
-                    <a:bodyPr wrap="square"/>
-                    <a:lstStyle/>
-                    <a:p>
-                      <a:r>
-                        <a:rPr sz="1100" b="0">
-                          <a:solidFill>
-                            <a:srgbClr val="1A1A1A"/>
-                          </a:solidFill>
-                          <a:latin typeface="Arial"/>
-                        </a:rPr>
-                        <a:t>☐</a:t>
-                      </a:r>
-                    </a:p>
-                  </a:txBody>
-                  <a:tcPr>
-                    <a:solidFill>
-                      <a:srgbClr val="FFFFFF"/>
-                    </a:solidFill>
-                  </a:tcPr>
-                </a:tc>
-                <a:tc>
-                  <a:txBody>
-                    <a:bodyPr wrap="square"/>
-                    <a:lstStyle/>
-                    <a:p>
-                      <a:r>
-                        <a:rPr sz="1100" b="0">
-                          <a:solidFill>
-                            <a:srgbClr val="1A1A1A"/>
-                          </a:solidFill>
-                          <a:latin typeface="Arial"/>
-                        </a:rPr>
-                        <a:t>☐</a:t>
-                      </a:r>
-                    </a:p>
-                  </a:txBody>
-                  <a:tcPr>
-                    <a:solidFill>
-                      <a:srgbClr val="FFFFFF"/>
-                    </a:solidFill>
-                  </a:tcPr>
-                </a:tc>
-              </a:tr>
-              <a:tr h="457200">
-                <a:tc>
-                  <a:txBody>
-                    <a:bodyPr wrap="square"/>
-                    <a:lstStyle/>
-                    <a:p>
-                      <a:r>
-                        <a:rPr sz="1100" b="0">
-                          <a:solidFill>
-                            <a:srgbClr val="1A1A1A"/>
-                          </a:solidFill>
-                          <a:latin typeface="Arial"/>
-                        </a:rPr>
-                        <a:t>Vereinbarungen / Maßnahmen am Ende festgehalten</a:t>
-                      </a:r>
-                    </a:p>
-                  </a:txBody>
-                  <a:tcPr>
-                    <a:solidFill>
-                      <a:srgbClr val="F4F6FA"/>
-                    </a:solidFill>
-                  </a:tcPr>
-                </a:tc>
-                <a:tc>
-                  <a:txBody>
-                    <a:bodyPr wrap="square"/>
-                    <a:lstStyle/>
-                    <a:p>
-                      <a:r>
-                        <a:rPr sz="1100" b="0">
-                          <a:solidFill>
-                            <a:srgbClr val="1A1A1A"/>
-                          </a:solidFill>
-                          <a:latin typeface="Arial"/>
-                        </a:rPr>
-                        <a:t>☐</a:t>
-                      </a:r>
-                    </a:p>
-                  </a:txBody>
-                  <a:tcPr>
-                    <a:solidFill>
-                      <a:srgbClr val="F4F6FA"/>
-                    </a:solidFill>
-                  </a:tcPr>
-                </a:tc>
-                <a:tc>
-                  <a:txBody>
-                    <a:bodyPr wrap="square"/>
-                    <a:lstStyle/>
-                    <a:p>
-                      <a:r>
-                        <a:rPr sz="1100" b="0">
-                          <a:solidFill>
-                            <a:srgbClr val="1A1A1A"/>
-                          </a:solidFill>
-                          <a:latin typeface="Arial"/>
-                        </a:rPr>
-                        <a:t>☐</a:t>
-                      </a:r>
-                    </a:p>
-                  </a:txBody>
-                  <a:tcPr>
-                    <a:solidFill>
-                      <a:srgbClr val="F4F6FA"/>
-                    </a:solidFill>
-                  </a:tcPr>
-                </a:tc>
-                <a:tc>
-                  <a:txBody>
-                    <a:bodyPr wrap="square"/>
-                    <a:lstStyle/>
-                    <a:p>
-                      <a:r>
-                        <a:rPr sz="1100" b="0">
-                          <a:solidFill>
-                            <a:srgbClr val="1A1A1A"/>
-                          </a:solidFill>
-                          <a:latin typeface="Arial"/>
-                        </a:rPr>
-                        <a:t>☐</a:t>
-                      </a:r>
-                    </a:p>
-                  </a:txBody>
-                  <a:tcPr>
-                    <a:solidFill>
-                      <a:srgbClr val="F4F6FA"/>
+                      <a:srgbClr val="F0F0F5"/>
                     </a:solidFill>
                   </a:tcPr>
                 </a:tc>
@@ -5283,7 +5226,7 @@
     <p:bg>
       <p:bgPr>
         <a:solidFill>
-          <a:srgbClr val="003DA5"/>
+          <a:srgbClr val="F8F8FA"/>
         </a:solidFill>
         <a:effectLst/>
       </p:bgPr>
@@ -5297,20 +5240,160 @@
       <p:grpSpPr/>
       <p:sp>
         <p:nvSpPr>
-          <p:cNvPr id="2" name="Rectangle 1"/>
+          <p:cNvPr id="2" name="TextBox 1"/>
+          <p:cNvSpPr txBox="1"/>
+          <p:nvPr/>
+        </p:nvSpPr>
+        <p:spPr>
+          <a:xfrm>
+            <a:off x="609600" y="304800"/>
+            <a:ext cx="2540000" cy="279400"/>
+          </a:xfrm>
+          <a:prstGeom prst="rect">
+            <a:avLst/>
+          </a:prstGeom>
+          <a:noFill/>
+        </p:spPr>
+        <p:txBody>
+          <a:bodyPr wrap="square">
+            <a:spAutoFit/>
+          </a:bodyPr>
+          <a:lstStyle/>
+          <a:p>
+            <a:pPr algn="l"/>
+            <a:r>
+              <a:rPr sz="1600" b="1" i="0">
+                <a:solidFill>
+                  <a:srgbClr val="191D2E"/>
+                </a:solidFill>
+                <a:latin typeface="Arial"/>
+              </a:rPr>
+              <a:t>FKB  Campus</a:t>
+            </a:r>
+          </a:p>
+        </p:txBody>
+      </p:sp>
+      <p:sp>
+        <p:nvSpPr>
+          <p:cNvPr id="3" name="TextBox 2"/>
+          <p:cNvSpPr txBox="1"/>
+          <p:nvPr/>
+        </p:nvSpPr>
+        <p:spPr>
+          <a:xfrm>
+            <a:off x="0" y="304800"/>
+            <a:ext cx="11582400" cy="279400"/>
+          </a:xfrm>
+          <a:prstGeom prst="rect">
+            <a:avLst/>
+          </a:prstGeom>
+          <a:noFill/>
+        </p:spPr>
+        <p:txBody>
+          <a:bodyPr wrap="square">
+            <a:spAutoFit/>
+          </a:bodyPr>
+          <a:lstStyle/>
+          <a:p>
+            <a:pPr algn="r"/>
+            <a:r>
+              <a:rPr sz="1300" b="0" i="0" spc="100">
+                <a:solidFill>
+                  <a:srgbClr val="7B7FA0"/>
+                </a:solidFill>
+                <a:latin typeface="Courier New"/>
+              </a:rPr>
+              <a:t>§ II · PRAXISTRANSFER</a:t>
+            </a:r>
+          </a:p>
+        </p:txBody>
+      </p:sp>
+      <p:sp>
+        <p:nvSpPr>
+          <p:cNvPr id="4" name="TextBox 3"/>
+          <p:cNvSpPr txBox="1"/>
+          <p:nvPr/>
+        </p:nvSpPr>
+        <p:spPr>
+          <a:xfrm>
+            <a:off x="0" y="6350000"/>
+            <a:ext cx="11582400" cy="228600"/>
+          </a:xfrm>
+          <a:prstGeom prst="rect">
+            <a:avLst/>
+          </a:prstGeom>
+          <a:noFill/>
+        </p:spPr>
+        <p:txBody>
+          <a:bodyPr wrap="square">
+            <a:spAutoFit/>
+          </a:bodyPr>
+          <a:lstStyle/>
+          <a:p>
+            <a:pPr algn="r"/>
+            <a:r>
+              <a:rPr sz="1300" b="0" i="0">
+                <a:solidFill>
+                  <a:srgbClr val="7B7FA0"/>
+                </a:solidFill>
+                <a:latin typeface="Courier New"/>
+              </a:rPr>
+              <a:t>14 / 12</a:t>
+            </a:r>
+          </a:p>
+        </p:txBody>
+      </p:sp>
+      <p:sp>
+        <p:nvSpPr>
+          <p:cNvPr id="5" name="TextBox 4"/>
+          <p:cNvSpPr txBox="1"/>
+          <p:nvPr/>
+        </p:nvSpPr>
+        <p:spPr>
+          <a:xfrm>
+            <a:off x="609600" y="889000"/>
+            <a:ext cx="10972800" cy="1397000"/>
+          </a:xfrm>
+          <a:prstGeom prst="rect">
+            <a:avLst/>
+          </a:prstGeom>
+          <a:noFill/>
+        </p:spPr>
+        <p:txBody>
+          <a:bodyPr wrap="square">
+            <a:spAutoFit/>
+          </a:bodyPr>
+          <a:lstStyle/>
+          <a:p>
+            <a:pPr algn="l"/>
+            <a:r>
+              <a:rPr sz="7200" b="0" i="0">
+                <a:solidFill>
+                  <a:srgbClr val="191D2E"/>
+                </a:solidFill>
+                <a:latin typeface="Georgia"/>
+              </a:rPr>
+              <a:t>Empfohlene Vertiefungsliteratur</a:t>
+            </a:r>
+          </a:p>
+        </p:txBody>
+      </p:sp>
+      <p:sp>
+        <p:nvSpPr>
+          <p:cNvPr id="6" name="Rectangle 5"/>
           <p:cNvSpPr/>
           <p:nvPr/>
         </p:nvSpPr>
         <p:spPr>
           <a:xfrm>
-            <a:off x="0" y="0"/>
-            <a:ext cx="73152" cy="6858000"/>
+            <a:off x="609600" y="2286000"/>
+            <a:ext cx="10972800" cy="6350"/>
           </a:xfrm>
           <a:prstGeom prst="rect">
             <a:avLst/>
           </a:prstGeom>
           <a:solidFill>
-            <a:srgbClr val="E05B00"/>
+            <a:srgbClr val="191D2E"/>
           </a:solidFill>
           <a:ln>
             <a:noFill/>
@@ -5340,14 +5423,355 @@
       </p:sp>
       <p:sp>
         <p:nvSpPr>
+          <p:cNvPr id="7" name="TextBox 6"/>
+          <p:cNvSpPr txBox="1"/>
+          <p:nvPr/>
+        </p:nvSpPr>
+        <p:spPr>
+          <a:xfrm>
+            <a:off x="609600" y="2438400"/>
+            <a:ext cx="304800" cy="355600"/>
+          </a:xfrm>
+          <a:prstGeom prst="rect">
+            <a:avLst/>
+          </a:prstGeom>
+          <a:noFill/>
+        </p:spPr>
+        <p:txBody>
+          <a:bodyPr wrap="square">
+            <a:spAutoFit/>
+          </a:bodyPr>
+          <a:lstStyle/>
+          <a:p>
+            <a:pPr algn="l"/>
+            <a:r>
+              <a:rPr sz="2800" b="0" i="0">
+                <a:solidFill>
+                  <a:srgbClr val="1F2B56"/>
+                </a:solidFill>
+                <a:latin typeface="Georgia"/>
+              </a:rPr>
+              <a:t>–</a:t>
+            </a:r>
+          </a:p>
+        </p:txBody>
+      </p:sp>
+      <p:sp>
+        <p:nvSpPr>
+          <p:cNvPr id="8" name="TextBox 7"/>
+          <p:cNvSpPr txBox="1"/>
+          <p:nvPr/>
+        </p:nvSpPr>
+        <p:spPr>
+          <a:xfrm>
+            <a:off x="1016000" y="2413000"/>
+            <a:ext cx="9906000" cy="571500"/>
+          </a:xfrm>
+          <a:prstGeom prst="rect">
+            <a:avLst/>
+          </a:prstGeom>
+          <a:noFill/>
+        </p:spPr>
+        <p:txBody>
+          <a:bodyPr wrap="square">
+            <a:spAutoFit/>
+          </a:bodyPr>
+          <a:lstStyle/>
+          <a:p>
+            <a:pPr algn="l"/>
+            <a:r>
+              <a:rPr sz="2600" b="0" i="0">
+                <a:solidFill>
+                  <a:srgbClr val="191D2E"/>
+                </a:solidFill>
+                <a:latin typeface="Georgia"/>
+              </a:rPr>
+              <a:t>Rackham, N. (1988). SPIN Selling. McGraw-Hill. [Klassiker der Beratungsgesprächsforschung]</a:t>
+            </a:r>
+          </a:p>
+        </p:txBody>
+      </p:sp>
+      <p:sp>
+        <p:nvSpPr>
+          <p:cNvPr id="9" name="TextBox 8"/>
+          <p:cNvSpPr txBox="1"/>
+          <p:nvPr/>
+        </p:nvSpPr>
+        <p:spPr>
+          <a:xfrm>
+            <a:off x="609600" y="3073400"/>
+            <a:ext cx="304800" cy="355600"/>
+          </a:xfrm>
+          <a:prstGeom prst="rect">
+            <a:avLst/>
+          </a:prstGeom>
+          <a:noFill/>
+        </p:spPr>
+        <p:txBody>
+          <a:bodyPr wrap="square">
+            <a:spAutoFit/>
+          </a:bodyPr>
+          <a:lstStyle/>
+          <a:p>
+            <a:pPr algn="l"/>
+            <a:r>
+              <a:rPr sz="2800" b="0" i="0">
+                <a:solidFill>
+                  <a:srgbClr val="1F2B56"/>
+                </a:solidFill>
+                <a:latin typeface="Georgia"/>
+              </a:rPr>
+              <a:t>–</a:t>
+            </a:r>
+          </a:p>
+        </p:txBody>
+      </p:sp>
+      <p:sp>
+        <p:nvSpPr>
+          <p:cNvPr id="10" name="TextBox 9"/>
+          <p:cNvSpPr txBox="1"/>
+          <p:nvPr/>
+        </p:nvSpPr>
+        <p:spPr>
+          <a:xfrm>
+            <a:off x="1016000" y="3048000"/>
+            <a:ext cx="9906000" cy="571500"/>
+          </a:xfrm>
+          <a:prstGeom prst="rect">
+            <a:avLst/>
+          </a:prstGeom>
+          <a:noFill/>
+        </p:spPr>
+        <p:txBody>
+          <a:bodyPr wrap="square">
+            <a:spAutoFit/>
+          </a:bodyPr>
+          <a:lstStyle/>
+          <a:p>
+            <a:pPr algn="l"/>
+            <a:r>
+              <a:rPr sz="2600" b="0" i="0">
+                <a:solidFill>
+                  <a:srgbClr val="191D2E"/>
+                </a:solidFill>
+                <a:latin typeface="Georgia"/>
+              </a:rPr>
+              <a:t>Schulz von Thun, F. (1981). Miteinander Reden: Störungen und Klärungen. Rowohlt. [Vier-Ohren-Modell, leicht zugänglich]</a:t>
+            </a:r>
+          </a:p>
+        </p:txBody>
+      </p:sp>
+      <p:sp>
+        <p:nvSpPr>
+          <p:cNvPr id="11" name="TextBox 10"/>
+          <p:cNvSpPr txBox="1"/>
+          <p:nvPr/>
+        </p:nvSpPr>
+        <p:spPr>
+          <a:xfrm>
+            <a:off x="609600" y="3708400"/>
+            <a:ext cx="304800" cy="355600"/>
+          </a:xfrm>
+          <a:prstGeom prst="rect">
+            <a:avLst/>
+          </a:prstGeom>
+          <a:noFill/>
+        </p:spPr>
+        <p:txBody>
+          <a:bodyPr wrap="square">
+            <a:spAutoFit/>
+          </a:bodyPr>
+          <a:lstStyle/>
+          <a:p>
+            <a:pPr algn="l"/>
+            <a:r>
+              <a:rPr sz="2800" b="0" i="0">
+                <a:solidFill>
+                  <a:srgbClr val="1F2B56"/>
+                </a:solidFill>
+                <a:latin typeface="Georgia"/>
+              </a:rPr>
+              <a:t>–</a:t>
+            </a:r>
+          </a:p>
+        </p:txBody>
+      </p:sp>
+      <p:sp>
+        <p:nvSpPr>
+          <p:cNvPr id="12" name="TextBox 11"/>
+          <p:cNvSpPr txBox="1"/>
+          <p:nvPr/>
+        </p:nvSpPr>
+        <p:spPr>
+          <a:xfrm>
+            <a:off x="1016000" y="3683000"/>
+            <a:ext cx="9906000" cy="571500"/>
+          </a:xfrm>
+          <a:prstGeom prst="rect">
+            <a:avLst/>
+          </a:prstGeom>
+          <a:noFill/>
+        </p:spPr>
+        <p:txBody>
+          <a:bodyPr wrap="square">
+            <a:spAutoFit/>
+          </a:bodyPr>
+          <a:lstStyle/>
+          <a:p>
+            <a:pPr algn="l"/>
+            <a:r>
+              <a:rPr sz="2600" b="0" i="0">
+                <a:solidFill>
+                  <a:srgbClr val="191D2E"/>
+                </a:solidFill>
+                <a:latin typeface="Georgia"/>
+              </a:rPr>
+              <a:t>Cialdini, R. B. (2001). Influence: The Psychology of Persuasion. HarperCollins. [Psychologie des Überzeugens]</a:t>
+            </a:r>
+          </a:p>
+        </p:txBody>
+      </p:sp>
+    </p:spTree>
+  </p:cSld>
+  <p:clrMapOvr>
+    <a:masterClrMapping/>
+  </p:clrMapOvr>
+</p:sld>
+</file>
+
+<file path=ppt/slides/slide15.xml><?xml version="1.0" encoding="utf-8"?>
+<p:sld xmlns:a="http://schemas.openxmlformats.org/drawingml/2006/main" xmlns:p="http://schemas.openxmlformats.org/presentationml/2006/main" xmlns:r="http://schemas.openxmlformats.org/officeDocument/2006/relationships">
+  <p:cSld>
+    <p:bg>
+      <p:bgPr>
+        <a:solidFill>
+          <a:srgbClr val="191D2E"/>
+        </a:solidFill>
+        <a:effectLst/>
+      </p:bgPr>
+    </p:bg>
+    <p:spTree>
+      <p:nvGrpSpPr>
+        <p:cNvPr id="1" name=""/>
+        <p:cNvGrpSpPr/>
+        <p:nvPr/>
+      </p:nvGrpSpPr>
+      <p:grpSpPr/>
+      <p:sp>
+        <p:nvSpPr>
+          <p:cNvPr id="2" name="TextBox 1"/>
+          <p:cNvSpPr txBox="1"/>
+          <p:nvPr/>
+        </p:nvSpPr>
+        <p:spPr>
+          <a:xfrm>
+            <a:off x="609600" y="304800"/>
+            <a:ext cx="2540000" cy="279400"/>
+          </a:xfrm>
+          <a:prstGeom prst="rect">
+            <a:avLst/>
+          </a:prstGeom>
+          <a:noFill/>
+        </p:spPr>
+        <p:txBody>
+          <a:bodyPr wrap="square">
+            <a:spAutoFit/>
+          </a:bodyPr>
+          <a:lstStyle/>
+          <a:p>
+            <a:pPr algn="l"/>
+            <a:r>
+              <a:rPr sz="1600" b="1" i="0">
+                <a:solidFill>
+                  <a:srgbClr val="F8F8FA"/>
+                </a:solidFill>
+                <a:latin typeface="Arial"/>
+              </a:rPr>
+              <a:t>FKB  Campus</a:t>
+            </a:r>
+          </a:p>
+        </p:txBody>
+      </p:sp>
+      <p:sp>
+        <p:nvSpPr>
           <p:cNvPr id="3" name="TextBox 2"/>
           <p:cNvSpPr txBox="1"/>
           <p:nvPr/>
         </p:nvSpPr>
         <p:spPr>
           <a:xfrm>
-            <a:off x="365760" y="347472"/>
-            <a:ext cx="7315200" cy="384048"/>
+            <a:off x="0" y="304800"/>
+            <a:ext cx="11582400" cy="279400"/>
+          </a:xfrm>
+          <a:prstGeom prst="rect">
+            <a:avLst/>
+          </a:prstGeom>
+          <a:noFill/>
+        </p:spPr>
+        <p:txBody>
+          <a:bodyPr wrap="square">
+            <a:spAutoFit/>
+          </a:bodyPr>
+          <a:lstStyle/>
+          <a:p>
+            <a:pPr algn="r"/>
+            <a:r>
+              <a:rPr sz="1300" b="0" i="0" spc="100">
+                <a:solidFill>
+                  <a:srgbClr val="F8F8FA"/>
+                </a:solidFill>
+                <a:latin typeface="Courier New"/>
+              </a:rPr>
+              <a:t>QUELLENAPPARAT</a:t>
+            </a:r>
+          </a:p>
+        </p:txBody>
+      </p:sp>
+      <p:sp>
+        <p:nvSpPr>
+          <p:cNvPr id="4" name="TextBox 3"/>
+          <p:cNvSpPr txBox="1"/>
+          <p:nvPr/>
+        </p:nvSpPr>
+        <p:spPr>
+          <a:xfrm>
+            <a:off x="0" y="6350000"/>
+            <a:ext cx="11582400" cy="228600"/>
+          </a:xfrm>
+          <a:prstGeom prst="rect">
+            <a:avLst/>
+          </a:prstGeom>
+          <a:noFill/>
+        </p:spPr>
+        <p:txBody>
+          <a:bodyPr wrap="square">
+            <a:spAutoFit/>
+          </a:bodyPr>
+          <a:lstStyle/>
+          <a:p>
+            <a:pPr algn="r"/>
+            <a:r>
+              <a:rPr sz="1300" b="0" i="0">
+                <a:solidFill>
+                  <a:srgbClr val="606070"/>
+                </a:solidFill>
+                <a:latin typeface="Courier New"/>
+              </a:rPr>
+              <a:t>15 / 12</a:t>
+            </a:r>
+          </a:p>
+        </p:txBody>
+      </p:sp>
+      <p:sp>
+        <p:nvSpPr>
+          <p:cNvPr id="5" name="TextBox 4"/>
+          <p:cNvSpPr txBox="1"/>
+          <p:nvPr/>
+        </p:nvSpPr>
+        <p:spPr>
+          <a:xfrm>
+            <a:off x="609600" y="889000"/>
+            <a:ext cx="5080000" cy="228600"/>
           </a:xfrm>
           <a:prstGeom prst="rect">
             <a:avLst/>
@@ -5362,33 +5786,68 @@
           <a:p>
             <a:pPr algn="l"/>
             <a:r>
-              <a:rPr sz="900" b="1" i="0">
-                <a:solidFill>
-                  <a:srgbClr val="CCD6F0"/>
-                </a:solidFill>
-                <a:latin typeface="Arial"/>
-              </a:rPr>
-              <a:t>PRAXISTRANSFER &amp; NÄCHSTE SCHRITTE</a:t>
-            </a:r>
-          </a:p>
-        </p:txBody>
-      </p:sp>
-      <p:sp>
-        <p:nvSpPr>
-          <p:cNvPr id="4" name="Rectangle 3"/>
+              <a:rPr sz="1400" b="0" i="0" spc="100">
+                <a:solidFill>
+                  <a:srgbClr val="7B7FA0"/>
+                </a:solidFill>
+                <a:latin typeface="Courier New"/>
+              </a:rPr>
+              <a:t>QUELLENAPPARAT</a:t>
+            </a:r>
+          </a:p>
+        </p:txBody>
+      </p:sp>
+      <p:sp>
+        <p:nvSpPr>
+          <p:cNvPr id="6" name="TextBox 5"/>
+          <p:cNvSpPr txBox="1"/>
+          <p:nvPr/>
+        </p:nvSpPr>
+        <p:spPr>
+          <a:xfrm>
+            <a:off x="609600" y="1174750"/>
+            <a:ext cx="10972800" cy="1016000"/>
+          </a:xfrm>
+          <a:prstGeom prst="rect">
+            <a:avLst/>
+          </a:prstGeom>
+          <a:noFill/>
+        </p:spPr>
+        <p:txBody>
+          <a:bodyPr wrap="square">
+            <a:spAutoFit/>
+          </a:bodyPr>
+          <a:lstStyle/>
+          <a:p>
+            <a:pPr algn="l"/>
+            <a:r>
+              <a:rPr sz="7200" b="0" i="0">
+                <a:solidFill>
+                  <a:srgbClr val="F8F8FA"/>
+                </a:solidFill>
+                <a:latin typeface="Georgia"/>
+              </a:rPr>
+              <a:t>Quellen­apparat.</a:t>
+            </a:r>
+          </a:p>
+        </p:txBody>
+      </p:sp>
+      <p:sp>
+        <p:nvSpPr>
+          <p:cNvPr id="7" name="Rectangle 6"/>
           <p:cNvSpPr/>
           <p:nvPr/>
         </p:nvSpPr>
         <p:spPr>
           <a:xfrm>
-            <a:off x="365760" y="804672"/>
-            <a:ext cx="8229600" cy="22860"/>
+            <a:off x="609600" y="2286000"/>
+            <a:ext cx="10972800" cy="6350"/>
           </a:xfrm>
           <a:prstGeom prst="rect">
             <a:avLst/>
           </a:prstGeom>
           <a:solidFill>
-            <a:srgbClr val="335CC0"/>
+            <a:srgbClr val="404870"/>
           </a:solidFill>
           <a:ln>
             <a:noFill/>
@@ -5418,14 +5877,14 @@
       </p:sp>
       <p:sp>
         <p:nvSpPr>
-          <p:cNvPr id="5" name="TextBox 4"/>
-          <p:cNvSpPr txBox="1"/>
-          <p:nvPr/>
-        </p:nvSpPr>
-        <p:spPr>
-          <a:xfrm>
-            <a:off x="365760" y="960120"/>
-            <a:ext cx="9144000" cy="914400"/>
+          <p:cNvPr id="8" name="TextBox 7"/>
+          <p:cNvSpPr txBox="1"/>
+          <p:nvPr/>
+        </p:nvSpPr>
+        <p:spPr>
+          <a:xfrm>
+            <a:off x="609600" y="2413000"/>
+            <a:ext cx="5080000" cy="457200"/>
           </a:xfrm>
           <a:prstGeom prst="rect">
             <a:avLst/>
@@ -5440,14 +5899,609 @@
           <a:p>
             <a:pPr algn="l"/>
             <a:r>
-              <a:rPr sz="3000" b="1" i="0">
-                <a:solidFill>
-                  <a:srgbClr val="FFFFFF"/>
+              <a:rPr sz="1400" b="0" i="0">
+                <a:solidFill>
+                  <a:srgbClr val="C0C4D8"/>
+                </a:solidFill>
+                <a:latin typeface="Courier New"/>
+              </a:rPr>
+              <a:t>Alle Quellen sind im zentralen Quellenverzeichnis (quellen/Quellenverzeichnis.md) unter den angegebenen IDs vollständig im APA-7-Format hinterlegt.</a:t>
+            </a:r>
+          </a:p>
+        </p:txBody>
+      </p:sp>
+      <p:sp>
+        <p:nvSpPr>
+          <p:cNvPr id="9" name="TextBox 8"/>
+          <p:cNvSpPr txBox="1"/>
+          <p:nvPr/>
+        </p:nvSpPr>
+        <p:spPr>
+          <a:xfrm>
+            <a:off x="609600" y="2921000"/>
+            <a:ext cx="5080000" cy="457200"/>
+          </a:xfrm>
+          <a:prstGeom prst="rect">
+            <a:avLst/>
+          </a:prstGeom>
+          <a:noFill/>
+        </p:spPr>
+        <p:txBody>
+          <a:bodyPr wrap="square">
+            <a:spAutoFit/>
+          </a:bodyPr>
+          <a:lstStyle/>
+          <a:p>
+            <a:pPr algn="l"/>
+            <a:r>
+              <a:rPr sz="1400" b="0" i="0">
+                <a:solidFill>
+                  <a:srgbClr val="C0C4D8"/>
+                </a:solidFill>
+                <a:latin typeface="Courier New"/>
+              </a:rPr>
+              <a:t>Schulz von Thun, F. (1981). Miteinander Reden: Störungen und Klärungen – Allgemeine Psychologie der Kommunikation. Rowohlt.</a:t>
+            </a:r>
+          </a:p>
+        </p:txBody>
+      </p:sp>
+      <p:sp>
+        <p:nvSpPr>
+          <p:cNvPr id="10" name="TextBox 9"/>
+          <p:cNvSpPr txBox="1"/>
+          <p:nvPr/>
+        </p:nvSpPr>
+        <p:spPr>
+          <a:xfrm>
+            <a:off x="609600" y="3429000"/>
+            <a:ext cx="5080000" cy="457200"/>
+          </a:xfrm>
+          <a:prstGeom prst="rect">
+            <a:avLst/>
+          </a:prstGeom>
+          <a:noFill/>
+        </p:spPr>
+        <p:txBody>
+          <a:bodyPr wrap="square">
+            <a:spAutoFit/>
+          </a:bodyPr>
+          <a:lstStyle/>
+          <a:p>
+            <a:pPr algn="l"/>
+            <a:r>
+              <a:rPr sz="1400" b="0" i="0">
+                <a:solidFill>
+                  <a:srgbClr val="C0C4D8"/>
+                </a:solidFill>
+                <a:latin typeface="Courier New"/>
+              </a:rPr>
+              <a:t>Schulz von Thun, F., Ruppel, J. &amp; Stratmann, R. (2000). Miteinander Reden: Kommunikationspsychologie für Führungskräfte. Rowohlt.</a:t>
+            </a:r>
+          </a:p>
+        </p:txBody>
+      </p:sp>
+      <p:sp>
+        <p:nvSpPr>
+          <p:cNvPr id="11" name="TextBox 10"/>
+          <p:cNvSpPr txBox="1"/>
+          <p:nvPr/>
+        </p:nvSpPr>
+        <p:spPr>
+          <a:xfrm>
+            <a:off x="609600" y="3937000"/>
+            <a:ext cx="5080000" cy="457200"/>
+          </a:xfrm>
+          <a:prstGeom prst="rect">
+            <a:avLst/>
+          </a:prstGeom>
+          <a:noFill/>
+        </p:spPr>
+        <p:txBody>
+          <a:bodyPr wrap="square">
+            <a:spAutoFit/>
+          </a:bodyPr>
+          <a:lstStyle/>
+          <a:p>
+            <a:pPr algn="l"/>
+            <a:r>
+              <a:rPr sz="1400" b="0" i="0">
+                <a:solidFill>
+                  <a:srgbClr val="C0C4D8"/>
+                </a:solidFill>
+                <a:latin typeface="Courier New"/>
+              </a:rPr>
+              <a:t>Watzlawick, P., Beavin, J. H. &amp; Jackson, D. D. (1967). Pragmatics of Human Communication: A Study of Interactional Patterns, Pathologies and Paradoxes. Norton. (Dt.: Menschliche Kommunikation. Huber, 2017.)</a:t>
+            </a:r>
+          </a:p>
+        </p:txBody>
+      </p:sp>
+      <p:sp>
+        <p:nvSpPr>
+          <p:cNvPr id="12" name="TextBox 11"/>
+          <p:cNvSpPr txBox="1"/>
+          <p:nvPr/>
+        </p:nvSpPr>
+        <p:spPr>
+          <a:xfrm>
+            <a:off x="609600" y="4445000"/>
+            <a:ext cx="5080000" cy="457200"/>
+          </a:xfrm>
+          <a:prstGeom prst="rect">
+            <a:avLst/>
+          </a:prstGeom>
+          <a:noFill/>
+        </p:spPr>
+        <p:txBody>
+          <a:bodyPr wrap="square">
+            <a:spAutoFit/>
+          </a:bodyPr>
+          <a:lstStyle/>
+          <a:p>
+            <a:pPr algn="l"/>
+            <a:r>
+              <a:rPr sz="1400" b="0" i="0">
+                <a:solidFill>
+                  <a:srgbClr val="C0C4D8"/>
+                </a:solidFill>
+                <a:latin typeface="Courier New"/>
+              </a:rPr>
+              <a:t>Rackham, N. (1988). SPIN Selling. McGraw-Hill.</a:t>
+            </a:r>
+          </a:p>
+        </p:txBody>
+      </p:sp>
+      <p:sp>
+        <p:nvSpPr>
+          <p:cNvPr id="13" name="TextBox 12"/>
+          <p:cNvSpPr txBox="1"/>
+          <p:nvPr/>
+        </p:nvSpPr>
+        <p:spPr>
+          <a:xfrm>
+            <a:off x="609600" y="4953000"/>
+            <a:ext cx="5080000" cy="457200"/>
+          </a:xfrm>
+          <a:prstGeom prst="rect">
+            <a:avLst/>
+          </a:prstGeom>
+          <a:noFill/>
+        </p:spPr>
+        <p:txBody>
+          <a:bodyPr wrap="square">
+            <a:spAutoFit/>
+          </a:bodyPr>
+          <a:lstStyle/>
+          <a:p>
+            <a:pPr algn="l"/>
+            <a:r>
+              <a:rPr sz="1400" b="0" i="0">
+                <a:solidFill>
+                  <a:srgbClr val="C0C4D8"/>
+                </a:solidFill>
+                <a:latin typeface="Courier New"/>
+              </a:rPr>
+              <a:t>Hanan, M. (1970). Consultative Selling. AMACOM.</a:t>
+            </a:r>
+          </a:p>
+        </p:txBody>
+      </p:sp>
+      <p:sp>
+        <p:nvSpPr>
+          <p:cNvPr id="14" name="TextBox 13"/>
+          <p:cNvSpPr txBox="1"/>
+          <p:nvPr/>
+        </p:nvSpPr>
+        <p:spPr>
+          <a:xfrm>
+            <a:off x="609600" y="5461000"/>
+            <a:ext cx="5080000" cy="457200"/>
+          </a:xfrm>
+          <a:prstGeom prst="rect">
+            <a:avLst/>
+          </a:prstGeom>
+          <a:noFill/>
+        </p:spPr>
+        <p:txBody>
+          <a:bodyPr wrap="square">
+            <a:spAutoFit/>
+          </a:bodyPr>
+          <a:lstStyle/>
+          <a:p>
+            <a:pPr algn="l"/>
+            <a:r>
+              <a:rPr sz="1400" b="0" i="0">
+                <a:solidFill>
+                  <a:srgbClr val="C0C4D8"/>
+                </a:solidFill>
+                <a:latin typeface="Courier New"/>
+              </a:rPr>
+              <a:t>Cialdini, R. B. (2001). Influence: The Psychology of Persuasion (Rev. ed.). HarperCollins.</a:t>
+            </a:r>
+          </a:p>
+        </p:txBody>
+      </p:sp>
+      <p:sp>
+        <p:nvSpPr>
+          <p:cNvPr id="15" name="TextBox 14"/>
+          <p:cNvSpPr txBox="1"/>
+          <p:nvPr/>
+        </p:nvSpPr>
+        <p:spPr>
+          <a:xfrm>
+            <a:off x="6096000" y="2413000"/>
+            <a:ext cx="5080000" cy="457200"/>
+          </a:xfrm>
+          <a:prstGeom prst="rect">
+            <a:avLst/>
+          </a:prstGeom>
+          <a:noFill/>
+        </p:spPr>
+        <p:txBody>
+          <a:bodyPr wrap="square">
+            <a:spAutoFit/>
+          </a:bodyPr>
+          <a:lstStyle/>
+          <a:p>
+            <a:pPr algn="l"/>
+            <a:r>
+              <a:rPr sz="1400" b="0" i="0">
+                <a:solidFill>
+                  <a:srgbClr val="C0C4D8"/>
+                </a:solidFill>
+                <a:latin typeface="Courier New"/>
+              </a:rPr>
+              <a:t>zeb consulting. (2020). Firmenkundenstudie 8.0.</a:t>
+            </a:r>
+          </a:p>
+        </p:txBody>
+      </p:sp>
+      <p:sp>
+        <p:nvSpPr>
+          <p:cNvPr id="16" name="TextBox 15"/>
+          <p:cNvSpPr txBox="1"/>
+          <p:nvPr/>
+        </p:nvSpPr>
+        <p:spPr>
+          <a:xfrm>
+            <a:off x="6096000" y="2921000"/>
+            <a:ext cx="5080000" cy="457200"/>
+          </a:xfrm>
+          <a:prstGeom prst="rect">
+            <a:avLst/>
+          </a:prstGeom>
+          <a:noFill/>
+        </p:spPr>
+        <p:txBody>
+          <a:bodyPr wrap="square">
+            <a:spAutoFit/>
+          </a:bodyPr>
+          <a:lstStyle/>
+          <a:p>
+            <a:pPr algn="l"/>
+            <a:r>
+              <a:rPr sz="1400" b="0" i="0">
+                <a:solidFill>
+                  <a:srgbClr val="C0C4D8"/>
+                </a:solidFill>
+                <a:latin typeface="Courier New"/>
+              </a:rPr>
+              <a:t>Roland Berger. (2024). KMU-Banking: Firmenkundenberater 2.0.</a:t>
+            </a:r>
+          </a:p>
+        </p:txBody>
+      </p:sp>
+      <p:sp>
+        <p:nvSpPr>
+          <p:cNvPr id="17" name="TextBox 16"/>
+          <p:cNvSpPr txBox="1"/>
+          <p:nvPr/>
+        </p:nvSpPr>
+        <p:spPr>
+          <a:xfrm>
+            <a:off x="6096000" y="3429000"/>
+            <a:ext cx="5080000" cy="457200"/>
+          </a:xfrm>
+          <a:prstGeom prst="rect">
+            <a:avLst/>
+          </a:prstGeom>
+          <a:noFill/>
+        </p:spPr>
+        <p:txBody>
+          <a:bodyPr wrap="square">
+            <a:spAutoFit/>
+          </a:bodyPr>
+          <a:lstStyle/>
+          <a:p>
+            <a:pPr algn="l"/>
+            <a:r>
+              <a:rPr sz="1400" b="0" i="0">
+                <a:solidFill>
+                  <a:srgbClr val="C0C4D8"/>
+                </a:solidFill>
+                <a:latin typeface="Courier New"/>
+              </a:rPr>
+              <a:t>Anderson, L. W. &amp; Krathwohl, D. R. (Hrsg.). (2001). A Taxonomy for Learning, Teaching, and Assessing. Addison Wesley Longman.</a:t>
+            </a:r>
+          </a:p>
+        </p:txBody>
+      </p:sp>
+      <p:sp>
+        <p:nvSpPr>
+          <p:cNvPr id="18" name="TextBox 17"/>
+          <p:cNvSpPr txBox="1"/>
+          <p:nvPr/>
+        </p:nvSpPr>
+        <p:spPr>
+          <a:xfrm>
+            <a:off x="6096000" y="3937000"/>
+            <a:ext cx="5080000" cy="457200"/>
+          </a:xfrm>
+          <a:prstGeom prst="rect">
+            <a:avLst/>
+          </a:prstGeom>
+          <a:noFill/>
+        </p:spPr>
+        <p:txBody>
+          <a:bodyPr wrap="square">
+            <a:spAutoFit/>
+          </a:bodyPr>
+          <a:lstStyle/>
+          <a:p>
+            <a:pPr algn="l"/>
+            <a:r>
+              <a:rPr sz="1400" b="0" i="0">
+                <a:solidFill>
+                  <a:srgbClr val="C0C4D8"/>
+                </a:solidFill>
+                <a:latin typeface="Courier New"/>
+              </a:rPr>
+              <a:t>Dreyfus, H. L. &amp; Dreyfus, S. E. (1980). A Five-Stage Model of the Mental Activities Involved in Directed Skill Acquisition.</a:t>
+            </a:r>
+          </a:p>
+        </p:txBody>
+      </p:sp>
+      <p:sp>
+        <p:nvSpPr>
+          <p:cNvPr id="19" name="TextBox 18"/>
+          <p:cNvSpPr txBox="1"/>
+          <p:nvPr/>
+        </p:nvSpPr>
+        <p:spPr>
+          <a:xfrm>
+            <a:off x="6096000" y="4445000"/>
+            <a:ext cx="5080000" cy="457200"/>
+          </a:xfrm>
+          <a:prstGeom prst="rect">
+            <a:avLst/>
+          </a:prstGeom>
+          <a:noFill/>
+        </p:spPr>
+        <p:txBody>
+          <a:bodyPr wrap="square">
+            <a:spAutoFit/>
+          </a:bodyPr>
+          <a:lstStyle/>
+          <a:p>
+            <a:pPr algn="l"/>
+            <a:r>
+              <a:rPr sz="1400" b="0" i="0">
+                <a:solidFill>
+                  <a:srgbClr val="C0C4D8"/>
+                </a:solidFill>
+                <a:latin typeface="Courier New"/>
+              </a:rPr>
+              <a:t>Kirkpatrick, D. L. (1994). Evaluating Training Programs: The Four Levels. Berrett-Koehler.</a:t>
+            </a:r>
+          </a:p>
+        </p:txBody>
+      </p:sp>
+      <p:sp>
+        <p:nvSpPr>
+          <p:cNvPr id="20" name="TextBox 19"/>
+          <p:cNvSpPr txBox="1"/>
+          <p:nvPr/>
+        </p:nvSpPr>
+        <p:spPr>
+          <a:xfrm>
+            <a:off x="6096000" y="4953000"/>
+            <a:ext cx="5080000" cy="457200"/>
+          </a:xfrm>
+          <a:prstGeom prst="rect">
+            <a:avLst/>
+          </a:prstGeom>
+          <a:noFill/>
+        </p:spPr>
+        <p:txBody>
+          <a:bodyPr wrap="square">
+            <a:spAutoFit/>
+          </a:bodyPr>
+          <a:lstStyle/>
+          <a:p>
+            <a:pPr algn="l"/>
+            <a:r>
+              <a:rPr sz="1400" b="0" i="0">
+                <a:solidFill>
+                  <a:srgbClr val="C0C4D8"/>
+                </a:solidFill>
+                <a:latin typeface="Courier New"/>
+              </a:rPr>
+              <a:t>Kolb, D. A. (1984). Experiential Learning: Experience as the Source of Learning and Development. Prentice Hall.</a:t>
+            </a:r>
+          </a:p>
+        </p:txBody>
+      </p:sp>
+    </p:spTree>
+  </p:cSld>
+  <p:clrMapOvr>
+    <a:masterClrMapping/>
+  </p:clrMapOvr>
+</p:sld>
+</file>
+
+<file path=ppt/slides/slide16.xml><?xml version="1.0" encoding="utf-8"?>
+<p:sld xmlns:a="http://schemas.openxmlformats.org/drawingml/2006/main" xmlns:p="http://schemas.openxmlformats.org/presentationml/2006/main" xmlns:r="http://schemas.openxmlformats.org/officeDocument/2006/relationships">
+  <p:cSld>
+    <p:bg>
+      <p:bgPr>
+        <a:solidFill>
+          <a:srgbClr val="F8F8FA"/>
+        </a:solidFill>
+        <a:effectLst/>
+      </p:bgPr>
+    </p:bg>
+    <p:spTree>
+      <p:nvGrpSpPr>
+        <p:cNvPr id="1" name=""/>
+        <p:cNvGrpSpPr/>
+        <p:nvPr/>
+      </p:nvGrpSpPr>
+      <p:grpSpPr/>
+      <p:sp>
+        <p:nvSpPr>
+          <p:cNvPr id="2" name="TextBox 1"/>
+          <p:cNvSpPr txBox="1"/>
+          <p:nvPr/>
+        </p:nvSpPr>
+        <p:spPr>
+          <a:xfrm>
+            <a:off x="609600" y="508000"/>
+            <a:ext cx="3175000" cy="304800"/>
+          </a:xfrm>
+          <a:prstGeom prst="rect">
+            <a:avLst/>
+          </a:prstGeom>
+          <a:noFill/>
+        </p:spPr>
+        <p:txBody>
+          <a:bodyPr wrap="square">
+            <a:spAutoFit/>
+          </a:bodyPr>
+          <a:lstStyle/>
+          <a:p>
+            <a:pPr algn="l"/>
+            <a:r>
+              <a:rPr sz="1800" b="1" i="0">
+                <a:solidFill>
+                  <a:srgbClr val="191D2E"/>
                 </a:solidFill>
                 <a:latin typeface="Arial"/>
               </a:rPr>
-              <a:t>Was nehmen Sie mit?</a:t>
-            </a:r>
+              <a:t>FKB  Campus</a:t>
+            </a:r>
+          </a:p>
+        </p:txBody>
+      </p:sp>
+      <p:sp>
+        <p:nvSpPr>
+          <p:cNvPr id="3" name="TextBox 2"/>
+          <p:cNvSpPr txBox="1"/>
+          <p:nvPr/>
+        </p:nvSpPr>
+        <p:spPr>
+          <a:xfrm>
+            <a:off x="0" y="546100"/>
+            <a:ext cx="11582400" cy="254000"/>
+          </a:xfrm>
+          <a:prstGeom prst="rect">
+            <a:avLst/>
+          </a:prstGeom>
+          <a:noFill/>
+        </p:spPr>
+        <p:txBody>
+          <a:bodyPr wrap="square">
+            <a:spAutoFit/>
+          </a:bodyPr>
+          <a:lstStyle/>
+          <a:p>
+            <a:pPr algn="r"/>
+            <a:r>
+              <a:rPr sz="1400" b="0" i="0">
+                <a:solidFill>
+                  <a:srgbClr val="7B7FA0"/>
+                </a:solidFill>
+                <a:latin typeface="Courier New"/>
+              </a:rPr>
+              <a:t>Ende · v1.0</a:t>
+            </a:r>
+          </a:p>
+        </p:txBody>
+      </p:sp>
+      <p:sp>
+        <p:nvSpPr>
+          <p:cNvPr id="4" name="TextBox 3"/>
+          <p:cNvSpPr txBox="1"/>
+          <p:nvPr/>
+        </p:nvSpPr>
+        <p:spPr>
+          <a:xfrm>
+            <a:off x="609600" y="1143000"/>
+            <a:ext cx="10972800" cy="3683000"/>
+          </a:xfrm>
+          <a:prstGeom prst="rect">
+            <a:avLst/>
+          </a:prstGeom>
+          <a:noFill/>
+        </p:spPr>
+        <p:txBody>
+          <a:bodyPr wrap="square">
+            <a:spAutoFit/>
+          </a:bodyPr>
+          <a:lstStyle/>
+          <a:p>
+            <a:pPr algn="l"/>
+            <a:r>
+              <a:rPr sz="18000" b="0" i="0">
+                <a:solidFill>
+                  <a:srgbClr val="191D2E"/>
+                </a:solidFill>
+                <a:latin typeface="Georgia"/>
+              </a:rPr>
+              <a:t>Danke.
+Fragen?</a:t>
+            </a:r>
+          </a:p>
+        </p:txBody>
+      </p:sp>
+      <p:sp>
+        <p:nvSpPr>
+          <p:cNvPr id="5" name="Rectangle 4"/>
+          <p:cNvSpPr/>
+          <p:nvPr/>
+        </p:nvSpPr>
+        <p:spPr>
+          <a:xfrm>
+            <a:off x="609600" y="5143500"/>
+            <a:ext cx="10972800" cy="6350"/>
+          </a:xfrm>
+          <a:prstGeom prst="rect">
+            <a:avLst/>
+          </a:prstGeom>
+          <a:solidFill>
+            <a:srgbClr val="191D2E"/>
+          </a:solidFill>
+          <a:ln>
+            <a:noFill/>
+          </a:ln>
+        </p:spPr>
+        <p:style>
+          <a:lnRef idx="1">
+            <a:schemeClr val="accent1"/>
+          </a:lnRef>
+          <a:fillRef idx="3">
+            <a:schemeClr val="accent1"/>
+          </a:fillRef>
+          <a:effectRef idx="2">
+            <a:schemeClr val="accent1"/>
+          </a:effectRef>
+          <a:fontRef idx="minor">
+            <a:schemeClr val="lt1"/>
+          </a:fontRef>
+        </p:style>
+        <p:txBody>
+          <a:bodyPr rtlCol="0" anchor="ctr"/>
+          <a:lstStyle/>
+          <a:p>
+            <a:pPr algn="ctr"/>
           </a:p>
         </p:txBody>
       </p:sp>
@@ -5459,92 +6513,29 @@
         </p:nvSpPr>
         <p:spPr>
           <a:xfrm>
-            <a:off x="365760" y="2103120"/>
-            <a:ext cx="11430000" cy="4114800"/>
-          </a:xfrm>
-          <a:prstGeom prst="rect">
-            <a:avLst/>
-          </a:prstGeom>
-          <a:noFill/>
-        </p:spPr>
-        <p:txBody>
-          <a:bodyPr wrap="square">
-            <a:spAutoFit/>
-          </a:bodyPr>
-          <a:lstStyle/>
-          <a:p>
-            <a:pPr>
-              <a:spcBef>
-                <a:spcPts val="500"/>
-              </a:spcBef>
-            </a:pPr>
-            <a:r>
-              <a:rPr sz="1600">
-                <a:solidFill>
-                  <a:srgbClr val="E05B00"/>
-                </a:solidFill>
-                <a:latin typeface="Arial"/>
-              </a:rPr>
-              <a:t>▪  </a:t>
-            </a:r>
-            <a:r>
-              <a:rPr sz="1800">
-                <a:solidFill>
-                  <a:srgbClr val="FFFFFF"/>
-                </a:solidFill>
-                <a:latin typeface="Arial"/>
-              </a:rPr>
-              <a:t>Transferaufgabe: Wenden Sie das Gelernte in den nächsten 14 Tagen bei einem konkreten Kunden an.</a:t>
-            </a:r>
-          </a:p>
-          <a:p>
-            <a:pPr>
-              <a:spcBef>
-                <a:spcPts val="500"/>
-              </a:spcBef>
-            </a:pPr>
-            <a:r>
-              <a:rPr sz="1600">
-                <a:solidFill>
-                  <a:srgbClr val="E05B00"/>
-                </a:solidFill>
-                <a:latin typeface="Arial"/>
-              </a:rPr>
-              <a:t>▪  </a:t>
-            </a:r>
-            <a:r>
-              <a:rPr sz="1800">
-                <a:solidFill>
-                  <a:srgbClr val="FFFFFF"/>
-                </a:solidFill>
-                <a:latin typeface="Arial"/>
-              </a:rPr>
-              <a:t>Selbstcheck nach 4 Wochen: Bewerten Sie Ihre Fortschritte ehrlich.</a:t>
-            </a:r>
-          </a:p>
-          <a:p>
-            <a:pPr>
-              <a:spcBef>
-                <a:spcPts val="500"/>
-              </a:spcBef>
-            </a:pPr>
-            <a:r>
-              <a:rPr sz="1600">
-                <a:solidFill>
-                  <a:srgbClr val="E05B00"/>
-                </a:solidFill>
-                <a:latin typeface="Arial"/>
-              </a:rPr>
-              <a:t>▪  </a:t>
-            </a:r>
-            <a:r>
-              <a:rPr sz="1800">
-                <a:solidFill>
-                  <a:srgbClr val="FFFFFF"/>
-                </a:solidFill>
-                <a:latin typeface="Arial"/>
-              </a:rPr>
-              <a:t>Nächste Module: M11, M12</a:t>
+            <a:off x="609600" y="5270500"/>
+            <a:ext cx="5715000" cy="1016000"/>
+          </a:xfrm>
+          <a:prstGeom prst="rect">
+            <a:avLst/>
+          </a:prstGeom>
+          <a:noFill/>
+        </p:spPr>
+        <p:txBody>
+          <a:bodyPr wrap="square">
+            <a:spAutoFit/>
+          </a:bodyPr>
+          <a:lstStyle/>
+          <a:p>
+            <a:pPr algn="l"/>
+            <a:r>
+              <a:rPr sz="2200" b="0" i="1">
+                <a:solidFill>
+                  <a:srgbClr val="191D2E"/>
+                </a:solidFill>
+                <a:latin typeface="Georgia"/>
+              </a:rPr>
+              <a:t>Das vollständige Modul «Strukturierte Bedarfsanalyse» ist auf FKB Campus verfügbar — 3 Lernziele, Praxisfall und Quellenapparat.</a:t>
             </a:r>
           </a:p>
         </p:txBody>
@@ -5557,8 +6548,8 @@
         </p:nvSpPr>
         <p:spPr>
           <a:xfrm>
-            <a:off x="365760" y="6309360"/>
-            <a:ext cx="11430000" cy="365760"/>
+            <a:off x="6667500" y="5270500"/>
+            <a:ext cx="2413000" cy="203200"/>
           </a:xfrm>
           <a:prstGeom prst="rect">
             <a:avLst/>
@@ -5573,13 +6564,118 @@
           <a:p>
             <a:pPr algn="l"/>
             <a:r>
-              <a:rPr sz="900" b="0" i="0">
-                <a:solidFill>
-                  <a:srgbClr val="889ACC"/>
-                </a:solidFill>
-                <a:latin typeface="Arial"/>
-              </a:rPr>
-              <a:t>M10 · Strukturierte Bedarfsanalyse  ·  v1.0  ·  Benedikt Zoller Coaching</a:t>
+              <a:rPr sz="1300" b="0" i="0" spc="100">
+                <a:solidFill>
+                  <a:srgbClr val="7B7FA0"/>
+                </a:solidFill>
+                <a:latin typeface="Courier New"/>
+              </a:rPr>
+              <a:t>Kontakt</a:t>
+            </a:r>
+          </a:p>
+        </p:txBody>
+      </p:sp>
+      <p:sp>
+        <p:nvSpPr>
+          <p:cNvPr id="8" name="TextBox 7"/>
+          <p:cNvSpPr txBox="1"/>
+          <p:nvPr/>
+        </p:nvSpPr>
+        <p:spPr>
+          <a:xfrm>
+            <a:off x="6667500" y="5499100"/>
+            <a:ext cx="2413000" cy="381000"/>
+          </a:xfrm>
+          <a:prstGeom prst="rect">
+            <a:avLst/>
+          </a:prstGeom>
+          <a:noFill/>
+        </p:spPr>
+        <p:txBody>
+          <a:bodyPr wrap="square">
+            <a:spAutoFit/>
+          </a:bodyPr>
+          <a:lstStyle/>
+          <a:p>
+            <a:pPr algn="l"/>
+            <a:r>
+              <a:rPr sz="2000" b="0" i="0">
+                <a:solidFill>
+                  <a:srgbClr val="191D2E"/>
+                </a:solidFill>
+                <a:latin typeface="Georgia"/>
+              </a:rPr>
+              <a:t>info@benedikt-zoller.de</a:t>
+            </a:r>
+          </a:p>
+        </p:txBody>
+      </p:sp>
+      <p:sp>
+        <p:nvSpPr>
+          <p:cNvPr id="9" name="TextBox 8"/>
+          <p:cNvSpPr txBox="1"/>
+          <p:nvPr/>
+        </p:nvSpPr>
+        <p:spPr>
+          <a:xfrm>
+            <a:off x="9398000" y="5270500"/>
+            <a:ext cx="2184400" cy="203200"/>
+          </a:xfrm>
+          <a:prstGeom prst="rect">
+            <a:avLst/>
+          </a:prstGeom>
+          <a:noFill/>
+        </p:spPr>
+        <p:txBody>
+          <a:bodyPr wrap="square">
+            <a:spAutoFit/>
+          </a:bodyPr>
+          <a:lstStyle/>
+          <a:p>
+            <a:pPr algn="l"/>
+            <a:r>
+              <a:rPr sz="1300" b="0" i="0" spc="100">
+                <a:solidFill>
+                  <a:srgbClr val="7B7FA0"/>
+                </a:solidFill>
+                <a:latin typeface="Courier New"/>
+              </a:rPr>
+              <a:t>Modul</a:t>
+            </a:r>
+          </a:p>
+        </p:txBody>
+      </p:sp>
+      <p:sp>
+        <p:nvSpPr>
+          <p:cNvPr id="10" name="TextBox 9"/>
+          <p:cNvSpPr txBox="1"/>
+          <p:nvPr/>
+        </p:nvSpPr>
+        <p:spPr>
+          <a:xfrm>
+            <a:off x="9398000" y="5499100"/>
+            <a:ext cx="2184400" cy="381000"/>
+          </a:xfrm>
+          <a:prstGeom prst="rect">
+            <a:avLst/>
+          </a:prstGeom>
+          <a:noFill/>
+        </p:spPr>
+        <p:txBody>
+          <a:bodyPr wrap="square">
+            <a:spAutoFit/>
+          </a:bodyPr>
+          <a:lstStyle/>
+          <a:p>
+            <a:pPr algn="l"/>
+            <a:r>
+              <a:rPr sz="2000" b="0" i="0">
+                <a:solidFill>
+                  <a:srgbClr val="191D2E"/>
+                </a:solidFill>
+                <a:latin typeface="Georgia"/>
+              </a:rPr>
+              <a:t>M10 · Sparring</a:t>
             </a:r>
           </a:p>
         </p:txBody>
@@ -5598,7 +6694,7 @@
     <p:bg>
       <p:bgPr>
         <a:solidFill>
-          <a:srgbClr val="F4F6FA"/>
+          <a:srgbClr val="F8F8FA"/>
         </a:solidFill>
         <a:effectLst/>
       </p:bgPr>
@@ -5612,20 +6708,195 @@
       <p:grpSpPr/>
       <p:sp>
         <p:nvSpPr>
-          <p:cNvPr id="2" name="Rectangle 1"/>
+          <p:cNvPr id="2" name="TextBox 1"/>
+          <p:cNvSpPr txBox="1"/>
+          <p:nvPr/>
+        </p:nvSpPr>
+        <p:spPr>
+          <a:xfrm>
+            <a:off x="609600" y="304800"/>
+            <a:ext cx="2540000" cy="279400"/>
+          </a:xfrm>
+          <a:prstGeom prst="rect">
+            <a:avLst/>
+          </a:prstGeom>
+          <a:noFill/>
+        </p:spPr>
+        <p:txBody>
+          <a:bodyPr wrap="square">
+            <a:spAutoFit/>
+          </a:bodyPr>
+          <a:lstStyle/>
+          <a:p>
+            <a:pPr algn="l"/>
+            <a:r>
+              <a:rPr sz="1600" b="1" i="0">
+                <a:solidFill>
+                  <a:srgbClr val="191D2E"/>
+                </a:solidFill>
+                <a:latin typeface="Arial"/>
+              </a:rPr>
+              <a:t>FKB  Campus</a:t>
+            </a:r>
+          </a:p>
+        </p:txBody>
+      </p:sp>
+      <p:sp>
+        <p:nvSpPr>
+          <p:cNvPr id="3" name="TextBox 2"/>
+          <p:cNvSpPr txBox="1"/>
+          <p:nvPr/>
+        </p:nvSpPr>
+        <p:spPr>
+          <a:xfrm>
+            <a:off x="0" y="304800"/>
+            <a:ext cx="11582400" cy="279400"/>
+          </a:xfrm>
+          <a:prstGeom prst="rect">
+            <a:avLst/>
+          </a:prstGeom>
+          <a:noFill/>
+        </p:spPr>
+        <p:txBody>
+          <a:bodyPr wrap="square">
+            <a:spAutoFit/>
+          </a:bodyPr>
+          <a:lstStyle/>
+          <a:p>
+            <a:pPr algn="r"/>
+            <a:r>
+              <a:rPr sz="1300" b="0" i="0" spc="100">
+                <a:solidFill>
+                  <a:srgbClr val="7B7FA0"/>
+                </a:solidFill>
+                <a:latin typeface="Courier New"/>
+              </a:rPr>
+              <a:t>§ 00 — LERNZIELE</a:t>
+            </a:r>
+          </a:p>
+        </p:txBody>
+      </p:sp>
+      <p:sp>
+        <p:nvSpPr>
+          <p:cNvPr id="4" name="TextBox 3"/>
+          <p:cNvSpPr txBox="1"/>
+          <p:nvPr/>
+        </p:nvSpPr>
+        <p:spPr>
+          <a:xfrm>
+            <a:off x="609600" y="6350000"/>
+            <a:ext cx="5080000" cy="228600"/>
+          </a:xfrm>
+          <a:prstGeom prst="rect">
+            <a:avLst/>
+          </a:prstGeom>
+          <a:noFill/>
+        </p:spPr>
+        <p:txBody>
+          <a:bodyPr wrap="square">
+            <a:spAutoFit/>
+          </a:bodyPr>
+          <a:lstStyle/>
+          <a:p>
+            <a:pPr algn="l"/>
+            <a:r>
+              <a:rPr sz="1300" b="0" i="0">
+                <a:solidFill>
+                  <a:srgbClr val="7B7FA0"/>
+                </a:solidFill>
+                <a:latin typeface="Courier New"/>
+              </a:rPr>
+              <a:t>v1.0</a:t>
+            </a:r>
+          </a:p>
+        </p:txBody>
+      </p:sp>
+      <p:sp>
+        <p:nvSpPr>
+          <p:cNvPr id="5" name="TextBox 4"/>
+          <p:cNvSpPr txBox="1"/>
+          <p:nvPr/>
+        </p:nvSpPr>
+        <p:spPr>
+          <a:xfrm>
+            <a:off x="0" y="6350000"/>
+            <a:ext cx="11582400" cy="228600"/>
+          </a:xfrm>
+          <a:prstGeom prst="rect">
+            <a:avLst/>
+          </a:prstGeom>
+          <a:noFill/>
+        </p:spPr>
+        <p:txBody>
+          <a:bodyPr wrap="square">
+            <a:spAutoFit/>
+          </a:bodyPr>
+          <a:lstStyle/>
+          <a:p>
+            <a:pPr algn="r"/>
+            <a:r>
+              <a:rPr sz="1300" b="0" i="0">
+                <a:solidFill>
+                  <a:srgbClr val="7B7FA0"/>
+                </a:solidFill>
+                <a:latin typeface="Courier New"/>
+              </a:rPr>
+              <a:t>02 / 12</a:t>
+            </a:r>
+          </a:p>
+        </p:txBody>
+      </p:sp>
+      <p:sp>
+        <p:nvSpPr>
+          <p:cNvPr id="6" name="TextBox 5"/>
+          <p:cNvSpPr txBox="1"/>
+          <p:nvPr/>
+        </p:nvSpPr>
+        <p:spPr>
+          <a:xfrm>
+            <a:off x="609600" y="1270000"/>
+            <a:ext cx="3683000" cy="1270000"/>
+          </a:xfrm>
+          <a:prstGeom prst="rect">
+            <a:avLst/>
+          </a:prstGeom>
+          <a:noFill/>
+        </p:spPr>
+        <p:txBody>
+          <a:bodyPr wrap="square">
+            <a:spAutoFit/>
+          </a:bodyPr>
+          <a:lstStyle/>
+          <a:p>
+            <a:pPr algn="l"/>
+            <a:r>
+              <a:rPr sz="8800" b="0" i="1">
+                <a:solidFill>
+                  <a:srgbClr val="1F2B56"/>
+                </a:solidFill>
+                <a:latin typeface="Georgia"/>
+              </a:rPr>
+              <a:t>Inhalt.</a:t>
+            </a:r>
+          </a:p>
+        </p:txBody>
+      </p:sp>
+      <p:sp>
+        <p:nvSpPr>
+          <p:cNvPr id="7" name="Rectangle 6"/>
           <p:cNvSpPr/>
           <p:nvPr/>
         </p:nvSpPr>
         <p:spPr>
           <a:xfrm>
-            <a:off x="0" y="0"/>
-            <a:ext cx="73152" cy="6858000"/>
+            <a:off x="609600" y="1333500"/>
+            <a:ext cx="10972800" cy="6350"/>
           </a:xfrm>
           <a:prstGeom prst="rect">
             <a:avLst/>
           </a:prstGeom>
           <a:solidFill>
-            <a:srgbClr val="003DA5"/>
+            <a:srgbClr val="191D2E"/>
           </a:solidFill>
           <a:ln>
             <a:noFill/>
@@ -5655,20 +6926,20 @@
       </p:sp>
       <p:sp>
         <p:nvSpPr>
-          <p:cNvPr id="3" name="Rectangle 2"/>
+          <p:cNvPr id="8" name="Rectangle 7"/>
           <p:cNvSpPr/>
           <p:nvPr/>
         </p:nvSpPr>
         <p:spPr>
           <a:xfrm>
-            <a:off x="228600" y="804672"/>
-            <a:ext cx="11612880" cy="22860"/>
+            <a:off x="4572000" y="1333500"/>
+            <a:ext cx="7010400" cy="6350"/>
           </a:xfrm>
           <a:prstGeom prst="rect">
             <a:avLst/>
           </a:prstGeom>
           <a:solidFill>
-            <a:srgbClr val="D1D5DB"/>
+            <a:srgbClr val="E0E0E8"/>
           </a:solidFill>
           <a:ln>
             <a:noFill/>
@@ -5698,14 +6969,14 @@
       </p:sp>
       <p:sp>
         <p:nvSpPr>
-          <p:cNvPr id="4" name="TextBox 3"/>
-          <p:cNvSpPr txBox="1"/>
-          <p:nvPr/>
-        </p:nvSpPr>
-        <p:spPr>
-          <a:xfrm>
-            <a:off x="365760" y="320040"/>
-            <a:ext cx="4572000" cy="347472"/>
+          <p:cNvPr id="9" name="TextBox 8"/>
+          <p:cNvSpPr txBox="1"/>
+          <p:nvPr/>
+        </p:nvSpPr>
+        <p:spPr>
+          <a:xfrm>
+            <a:off x="4572000" y="1384300"/>
+            <a:ext cx="571500" cy="711200"/>
           </a:xfrm>
           <a:prstGeom prst="rect">
             <a:avLst/>
@@ -5720,27 +6991,27 @@
           <a:p>
             <a:pPr algn="l"/>
             <a:r>
-              <a:rPr sz="900" b="1" i="0">
-                <a:solidFill>
-                  <a:srgbClr val="003DA5"/>
-                </a:solidFill>
-                <a:latin typeface="Arial"/>
-              </a:rPr>
-              <a:t>LERNZIELE</a:t>
-            </a:r>
-          </a:p>
-        </p:txBody>
-      </p:sp>
-      <p:sp>
-        <p:nvSpPr>
-          <p:cNvPr id="5" name="TextBox 4"/>
-          <p:cNvSpPr txBox="1"/>
-          <p:nvPr/>
-        </p:nvSpPr>
-        <p:spPr>
-          <a:xfrm>
-            <a:off x="365760" y="502920"/>
-            <a:ext cx="10058400" cy="640080"/>
+              <a:rPr sz="4000" b="0" i="1">
+                <a:solidFill>
+                  <a:srgbClr val="1F2B56"/>
+                </a:solidFill>
+                <a:latin typeface="Georgia"/>
+              </a:rPr>
+              <a:t>I.</a:t>
+            </a:r>
+          </a:p>
+        </p:txBody>
+      </p:sp>
+      <p:sp>
+        <p:nvSpPr>
+          <p:cNvPr id="10" name="TextBox 9"/>
+          <p:cNvSpPr txBox="1"/>
+          <p:nvPr/>
+        </p:nvSpPr>
+        <p:spPr>
+          <a:xfrm>
+            <a:off x="5270500" y="1409700"/>
+            <a:ext cx="6223000" cy="711200"/>
           </a:xfrm>
           <a:prstGeom prst="rect">
             <a:avLst/>
@@ -5755,109 +7026,237 @@
           <a:p>
             <a:pPr algn="l"/>
             <a:r>
-              <a:rPr sz="2400" b="1" i="0">
-                <a:solidFill>
-                  <a:srgbClr val="1A1A1A"/>
-                </a:solidFill>
-                <a:latin typeface="Arial"/>
-              </a:rPr>
-              <a:t>Was Sie nach diesem Modul können.</a:t>
-            </a:r>
-          </a:p>
-        </p:txBody>
-      </p:sp>
-      <p:sp>
-        <p:nvSpPr>
-          <p:cNvPr id="6" name="TextBox 5"/>
-          <p:cNvSpPr txBox="1"/>
-          <p:nvPr/>
-        </p:nvSpPr>
-        <p:spPr>
-          <a:xfrm>
-            <a:off x="365760" y="1234440"/>
-            <a:ext cx="11430000" cy="5303520"/>
-          </a:xfrm>
-          <a:prstGeom prst="rect">
-            <a:avLst/>
-          </a:prstGeom>
-          <a:noFill/>
-        </p:spPr>
-        <p:txBody>
-          <a:bodyPr wrap="square">
-            <a:spAutoFit/>
-          </a:bodyPr>
-          <a:lstStyle/>
-          <a:p>
-            <a:pPr>
-              <a:spcBef>
-                <a:spcPts val="500"/>
-              </a:spcBef>
-            </a:pPr>
-            <a:r>
-              <a:rPr sz="1500">
-                <a:solidFill>
-                  <a:srgbClr val="003DA5"/>
-                </a:solidFill>
-                <a:latin typeface="Arial"/>
-              </a:rPr>
-              <a:t>▪  </a:t>
-            </a:r>
-            <a:r>
-              <a:rPr sz="1700">
-                <a:solidFill>
-                  <a:srgbClr val="1A1A1A"/>
-                </a:solidFill>
-                <a:latin typeface="Arial"/>
+              <a:rPr sz="2200" b="0" i="0">
+                <a:solidFill>
+                  <a:srgbClr val="191D2E"/>
+                </a:solidFill>
+                <a:latin typeface="Georgia"/>
               </a:rPr>
               <a:t>Den UnternehmerDialog als strukturiertes Gesprächsführungsinstrument situationsgerecht einsetzen und alle relevanten Bedarfsdimensionen systematisch erschließen</a:t>
             </a:r>
           </a:p>
-          <a:p>
-            <a:pPr>
-              <a:spcBef>
-                <a:spcPts val="500"/>
-              </a:spcBef>
-            </a:pPr>
-            <a:r>
-              <a:rPr sz="1500">
-                <a:solidFill>
-                  <a:srgbClr val="003DA5"/>
-                </a:solidFill>
-                <a:latin typeface="Arial"/>
-              </a:rPr>
-              <a:t>▪  </a:t>
-            </a:r>
-            <a:r>
-              <a:rPr sz="1700">
-                <a:solidFill>
-                  <a:srgbClr val="1A1A1A"/>
-                </a:solidFill>
-                <a:latin typeface="Arial"/>
+        </p:txBody>
+      </p:sp>
+      <p:sp>
+        <p:nvSpPr>
+          <p:cNvPr id="11" name="Rectangle 10"/>
+          <p:cNvSpPr/>
+          <p:nvPr/>
+        </p:nvSpPr>
+        <p:spPr>
+          <a:xfrm>
+            <a:off x="4572000" y="2095499"/>
+            <a:ext cx="7010400" cy="6350"/>
+          </a:xfrm>
+          <a:prstGeom prst="rect">
+            <a:avLst/>
+          </a:prstGeom>
+          <a:solidFill>
+            <a:srgbClr val="E0E0E8"/>
+          </a:solidFill>
+          <a:ln>
+            <a:noFill/>
+          </a:ln>
+        </p:spPr>
+        <p:style>
+          <a:lnRef idx="1">
+            <a:schemeClr val="accent1"/>
+          </a:lnRef>
+          <a:fillRef idx="3">
+            <a:schemeClr val="accent1"/>
+          </a:fillRef>
+          <a:effectRef idx="2">
+            <a:schemeClr val="accent1"/>
+          </a:effectRef>
+          <a:fontRef idx="minor">
+            <a:schemeClr val="lt1"/>
+          </a:fontRef>
+        </p:style>
+        <p:txBody>
+          <a:bodyPr rtlCol="0" anchor="ctr"/>
+          <a:lstStyle/>
+          <a:p>
+            <a:pPr algn="ctr"/>
+          </a:p>
+        </p:txBody>
+      </p:sp>
+      <p:sp>
+        <p:nvSpPr>
+          <p:cNvPr id="12" name="TextBox 11"/>
+          <p:cNvSpPr txBox="1"/>
+          <p:nvPr/>
+        </p:nvSpPr>
+        <p:spPr>
+          <a:xfrm>
+            <a:off x="4572000" y="2146300"/>
+            <a:ext cx="571500" cy="711200"/>
+          </a:xfrm>
+          <a:prstGeom prst="rect">
+            <a:avLst/>
+          </a:prstGeom>
+          <a:noFill/>
+        </p:spPr>
+        <p:txBody>
+          <a:bodyPr wrap="square">
+            <a:spAutoFit/>
+          </a:bodyPr>
+          <a:lstStyle/>
+          <a:p>
+            <a:pPr algn="l"/>
+            <a:r>
+              <a:rPr sz="4000" b="0" i="1">
+                <a:solidFill>
+                  <a:srgbClr val="1F2B56"/>
+                </a:solidFill>
+                <a:latin typeface="Georgia"/>
+              </a:rPr>
+              <a:t>II.</a:t>
+            </a:r>
+          </a:p>
+        </p:txBody>
+      </p:sp>
+      <p:sp>
+        <p:nvSpPr>
+          <p:cNvPr id="13" name="TextBox 12"/>
+          <p:cNvSpPr txBox="1"/>
+          <p:nvPr/>
+        </p:nvSpPr>
+        <p:spPr>
+          <a:xfrm>
+            <a:off x="5270500" y="2171700"/>
+            <a:ext cx="6223000" cy="711200"/>
+          </a:xfrm>
+          <a:prstGeom prst="rect">
+            <a:avLst/>
+          </a:prstGeom>
+          <a:noFill/>
+        </p:spPr>
+        <p:txBody>
+          <a:bodyPr wrap="square">
+            <a:spAutoFit/>
+          </a:bodyPr>
+          <a:lstStyle/>
+          <a:p>
+            <a:pPr algn="l"/>
+            <a:r>
+              <a:rPr sz="2200" b="0" i="0">
+                <a:solidFill>
+                  <a:srgbClr val="191D2E"/>
+                </a:solidFill>
+                <a:latin typeface="Georgia"/>
               </a:rPr>
               <a:t>Kundensignale auf den vier Kommunikationsebenen nach Schulz von Thun differenziert erkennen und den Bedeutungsrahmen hinter sachlichen Aussagen entschlüsseln</a:t>
             </a:r>
           </a:p>
-          <a:p>
-            <a:pPr>
-              <a:spcBef>
-                <a:spcPts val="500"/>
-              </a:spcBef>
-            </a:pPr>
-            <a:r>
-              <a:rPr sz="1500">
-                <a:solidFill>
-                  <a:srgbClr val="003DA5"/>
-                </a:solidFill>
-                <a:latin typeface="Arial"/>
-              </a:rPr>
-              <a:t>▪  </a:t>
-            </a:r>
-            <a:r>
-              <a:rPr sz="1700">
-                <a:solidFill>
-                  <a:srgbClr val="1A1A1A"/>
-                </a:solidFill>
-                <a:latin typeface="Arial"/>
+        </p:txBody>
+      </p:sp>
+      <p:sp>
+        <p:nvSpPr>
+          <p:cNvPr id="14" name="Rectangle 13"/>
+          <p:cNvSpPr/>
+          <p:nvPr/>
+        </p:nvSpPr>
+        <p:spPr>
+          <a:xfrm>
+            <a:off x="4572000" y="2857500"/>
+            <a:ext cx="7010400" cy="6350"/>
+          </a:xfrm>
+          <a:prstGeom prst="rect">
+            <a:avLst/>
+          </a:prstGeom>
+          <a:solidFill>
+            <a:srgbClr val="E0E0E8"/>
+          </a:solidFill>
+          <a:ln>
+            <a:noFill/>
+          </a:ln>
+        </p:spPr>
+        <p:style>
+          <a:lnRef idx="1">
+            <a:schemeClr val="accent1"/>
+          </a:lnRef>
+          <a:fillRef idx="3">
+            <a:schemeClr val="accent1"/>
+          </a:fillRef>
+          <a:effectRef idx="2">
+            <a:schemeClr val="accent1"/>
+          </a:effectRef>
+          <a:fontRef idx="minor">
+            <a:schemeClr val="lt1"/>
+          </a:fontRef>
+        </p:style>
+        <p:txBody>
+          <a:bodyPr rtlCol="0" anchor="ctr"/>
+          <a:lstStyle/>
+          <a:p>
+            <a:pPr algn="ctr"/>
+          </a:p>
+        </p:txBody>
+      </p:sp>
+      <p:sp>
+        <p:nvSpPr>
+          <p:cNvPr id="15" name="TextBox 14"/>
+          <p:cNvSpPr txBox="1"/>
+          <p:nvPr/>
+        </p:nvSpPr>
+        <p:spPr>
+          <a:xfrm>
+            <a:off x="4572000" y="2908300"/>
+            <a:ext cx="571500" cy="711200"/>
+          </a:xfrm>
+          <a:prstGeom prst="rect">
+            <a:avLst/>
+          </a:prstGeom>
+          <a:noFill/>
+        </p:spPr>
+        <p:txBody>
+          <a:bodyPr wrap="square">
+            <a:spAutoFit/>
+          </a:bodyPr>
+          <a:lstStyle/>
+          <a:p>
+            <a:pPr algn="l"/>
+            <a:r>
+              <a:rPr sz="4000" b="0" i="1">
+                <a:solidFill>
+                  <a:srgbClr val="1F2B56"/>
+                </a:solidFill>
+                <a:latin typeface="Georgia"/>
+              </a:rPr>
+              <a:t>III.</a:t>
+            </a:r>
+          </a:p>
+        </p:txBody>
+      </p:sp>
+      <p:sp>
+        <p:nvSpPr>
+          <p:cNvPr id="16" name="TextBox 15"/>
+          <p:cNvSpPr txBox="1"/>
+          <p:nvPr/>
+        </p:nvSpPr>
+        <p:spPr>
+          <a:xfrm>
+            <a:off x="5270500" y="2933700"/>
+            <a:ext cx="6223000" cy="711200"/>
+          </a:xfrm>
+          <a:prstGeom prst="rect">
+            <a:avLst/>
+          </a:prstGeom>
+          <a:noFill/>
+        </p:spPr>
+        <p:txBody>
+          <a:bodyPr wrap="square">
+            <a:spAutoFit/>
+          </a:bodyPr>
+          <a:lstStyle/>
+          <a:p>
+            <a:pPr algn="l"/>
+            <a:r>
+              <a:rPr sz="2200" b="0" i="0">
+                <a:solidFill>
+                  <a:srgbClr val="191D2E"/>
+                </a:solidFill>
+                <a:latin typeface="Georgia"/>
               </a:rPr>
               <a:t>Den Vollständigkeitsgrad einer Bedarfsanalyse bewerten, offene Dimensionen benennen und die nächsten Gesprächsschritte priorisieren</a:t>
             </a:r>
@@ -5878,7 +7277,7 @@
     <p:bg>
       <p:bgPr>
         <a:solidFill>
-          <a:srgbClr val="1A1A1A"/>
+          <a:srgbClr val="191D2E"/>
         </a:solidFill>
         <a:effectLst/>
       </p:bgPr>
@@ -5892,44 +7291,36 @@
       <p:grpSpPr/>
       <p:sp>
         <p:nvSpPr>
-          <p:cNvPr id="2" name="Rectangle 1"/>
-          <p:cNvSpPr/>
-          <p:nvPr/>
-        </p:nvSpPr>
-        <p:spPr>
-          <a:xfrm>
-            <a:off x="0" y="0"/>
-            <a:ext cx="73152" cy="6858000"/>
-          </a:xfrm>
-          <a:prstGeom prst="rect">
-            <a:avLst/>
-          </a:prstGeom>
-          <a:solidFill>
-            <a:srgbClr val="E05B00"/>
-          </a:solidFill>
-          <a:ln>
-            <a:noFill/>
-          </a:ln>
-        </p:spPr>
-        <p:style>
-          <a:lnRef idx="1">
-            <a:schemeClr val="accent1"/>
-          </a:lnRef>
-          <a:fillRef idx="3">
-            <a:schemeClr val="accent1"/>
-          </a:fillRef>
-          <a:effectRef idx="2">
-            <a:schemeClr val="accent1"/>
-          </a:effectRef>
-          <a:fontRef idx="minor">
-            <a:schemeClr val="lt1"/>
-          </a:fontRef>
-        </p:style>
-        <p:txBody>
-          <a:bodyPr rtlCol="0" anchor="ctr"/>
-          <a:lstStyle/>
-          <a:p>
-            <a:pPr algn="ctr"/>
+          <p:cNvPr id="2" name="TextBox 1"/>
+          <p:cNvSpPr txBox="1"/>
+          <p:nvPr/>
+        </p:nvSpPr>
+        <p:spPr>
+          <a:xfrm>
+            <a:off x="609600" y="304800"/>
+            <a:ext cx="2540000" cy="279400"/>
+          </a:xfrm>
+          <a:prstGeom prst="rect">
+            <a:avLst/>
+          </a:prstGeom>
+          <a:noFill/>
+        </p:spPr>
+        <p:txBody>
+          <a:bodyPr wrap="square">
+            <a:spAutoFit/>
+          </a:bodyPr>
+          <a:lstStyle/>
+          <a:p>
+            <a:pPr algn="l"/>
+            <a:r>
+              <a:rPr sz="1600" b="1" i="0">
+                <a:solidFill>
+                  <a:srgbClr val="F8F8FA"/>
+                </a:solidFill>
+                <a:latin typeface="Arial"/>
+              </a:rPr>
+              <a:t>FKB  Campus</a:t>
+            </a:r>
           </a:p>
         </p:txBody>
       </p:sp>
@@ -5941,8 +7332,78 @@
         </p:nvSpPr>
         <p:spPr>
           <a:xfrm>
-            <a:off x="365760" y="2011680"/>
-            <a:ext cx="11430000" cy="2011680"/>
+            <a:off x="0" y="304800"/>
+            <a:ext cx="11582400" cy="279400"/>
+          </a:xfrm>
+          <a:prstGeom prst="rect">
+            <a:avLst/>
+          </a:prstGeom>
+          <a:noFill/>
+        </p:spPr>
+        <p:txBody>
+          <a:bodyPr wrap="square">
+            <a:spAutoFit/>
+          </a:bodyPr>
+          <a:lstStyle/>
+          <a:p>
+            <a:pPr algn="r"/>
+            <a:r>
+              <a:rPr sz="1300" b="0" i="0" spc="100">
+                <a:solidFill>
+                  <a:srgbClr val="F8F8FA"/>
+                </a:solidFill>
+                <a:latin typeface="Courier New"/>
+              </a:rPr>
+              <a:t>MODULINHALTE</a:t>
+            </a:r>
+          </a:p>
+        </p:txBody>
+      </p:sp>
+      <p:sp>
+        <p:nvSpPr>
+          <p:cNvPr id="4" name="TextBox 3"/>
+          <p:cNvSpPr txBox="1"/>
+          <p:nvPr/>
+        </p:nvSpPr>
+        <p:spPr>
+          <a:xfrm>
+            <a:off x="0" y="6350000"/>
+            <a:ext cx="11582400" cy="228600"/>
+          </a:xfrm>
+          <a:prstGeom prst="rect">
+            <a:avLst/>
+          </a:prstGeom>
+          <a:noFill/>
+        </p:spPr>
+        <p:txBody>
+          <a:bodyPr wrap="square">
+            <a:spAutoFit/>
+          </a:bodyPr>
+          <a:lstStyle/>
+          <a:p>
+            <a:pPr algn="r"/>
+            <a:r>
+              <a:rPr sz="1300" b="0" i="0">
+                <a:solidFill>
+                  <a:srgbClr val="606070"/>
+                </a:solidFill>
+                <a:latin typeface="Courier New"/>
+              </a:rPr>
+              <a:t>03 / 12</a:t>
+            </a:r>
+          </a:p>
+        </p:txBody>
+      </p:sp>
+      <p:sp>
+        <p:nvSpPr>
+          <p:cNvPr id="5" name="TextBox 4"/>
+          <p:cNvSpPr txBox="1"/>
+          <p:nvPr/>
+        </p:nvSpPr>
+        <p:spPr>
+          <a:xfrm>
+            <a:off x="609600" y="825500"/>
+            <a:ext cx="5715000" cy="4953000"/>
           </a:xfrm>
           <a:prstGeom prst="rect">
             <a:avLst/>
@@ -5957,11 +7418,116 @@
           <a:p>
             <a:pPr algn="l"/>
             <a:r>
-              <a:rPr sz="3600" b="1" i="0">
-                <a:solidFill>
-                  <a:srgbClr val="FFFFFF"/>
-                </a:solidFill>
-                <a:latin typeface="Arial"/>
+              <a:rPr sz="40000" b="0" i="1">
+                <a:solidFill>
+                  <a:srgbClr val="D9BF7A"/>
+                </a:solidFill>
+                <a:latin typeface="Georgia"/>
+              </a:rPr>
+              <a:t>I.</a:t>
+            </a:r>
+          </a:p>
+        </p:txBody>
+      </p:sp>
+      <p:sp>
+        <p:nvSpPr>
+          <p:cNvPr id="6" name="TextBox 5"/>
+          <p:cNvSpPr txBox="1"/>
+          <p:nvPr/>
+        </p:nvSpPr>
+        <p:spPr>
+          <a:xfrm>
+            <a:off x="6985000" y="3683000"/>
+            <a:ext cx="4597400" cy="228600"/>
+          </a:xfrm>
+          <a:prstGeom prst="rect">
+            <a:avLst/>
+          </a:prstGeom>
+          <a:noFill/>
+        </p:spPr>
+        <p:txBody>
+          <a:bodyPr wrap="square">
+            <a:spAutoFit/>
+          </a:bodyPr>
+          <a:lstStyle/>
+          <a:p>
+            <a:pPr algn="r"/>
+            <a:r>
+              <a:rPr sz="1400" b="0" i="0">
+                <a:solidFill>
+                  <a:srgbClr val="7B7FA0"/>
+                </a:solidFill>
+                <a:latin typeface="Courier New"/>
+              </a:rPr>
+              <a:t>MODULINHALTE</a:t>
+            </a:r>
+          </a:p>
+        </p:txBody>
+      </p:sp>
+      <p:sp>
+        <p:nvSpPr>
+          <p:cNvPr id="7" name="TextBox 6"/>
+          <p:cNvSpPr txBox="1"/>
+          <p:nvPr/>
+        </p:nvSpPr>
+        <p:spPr>
+          <a:xfrm>
+            <a:off x="6985000" y="4000500"/>
+            <a:ext cx="4597400" cy="1524000"/>
+          </a:xfrm>
+          <a:prstGeom prst="rect">
+            <a:avLst/>
+          </a:prstGeom>
+          <a:noFill/>
+        </p:spPr>
+        <p:txBody>
+          <a:bodyPr wrap="square">
+            <a:spAutoFit/>
+          </a:bodyPr>
+          <a:lstStyle/>
+          <a:p>
+            <a:pPr algn="r"/>
+            <a:r>
+              <a:rPr sz="7600" b="0" i="0">
+                <a:solidFill>
+                  <a:srgbClr val="F8F8FA"/>
+                </a:solidFill>
+                <a:latin typeface="Georgia"/>
+              </a:rPr>
+              <a:t>Modulinhalte</a:t>
+            </a:r>
+          </a:p>
+        </p:txBody>
+      </p:sp>
+      <p:sp>
+        <p:nvSpPr>
+          <p:cNvPr id="8" name="TextBox 7"/>
+          <p:cNvSpPr txBox="1"/>
+          <p:nvPr/>
+        </p:nvSpPr>
+        <p:spPr>
+          <a:xfrm>
+            <a:off x="6985000" y="5524500"/>
+            <a:ext cx="4597400" cy="635000"/>
+          </a:xfrm>
+          <a:prstGeom prst="rect">
+            <a:avLst/>
+          </a:prstGeom>
+          <a:noFill/>
+        </p:spPr>
+        <p:txBody>
+          <a:bodyPr wrap="square">
+            <a:spAutoFit/>
+          </a:bodyPr>
+          <a:lstStyle/>
+          <a:p>
+            <a:pPr algn="r"/>
+            <a:r>
+              <a:rPr sz="2000" b="0" i="1">
+                <a:solidFill>
+                  <a:srgbClr val="7B7FA0"/>
+                </a:solidFill>
+                <a:latin typeface="Georgia"/>
               </a:rPr>
               <a:t>4.1 Theorie-Input: Das Vier-Ohren-Modell</a:t>
             </a:r>
@@ -5982,7 +7548,7 @@
     <p:bg>
       <p:bgPr>
         <a:solidFill>
-          <a:srgbClr val="FFFFFF"/>
+          <a:srgbClr val="F8F8FA"/>
         </a:solidFill>
         <a:effectLst/>
       </p:bgPr>
@@ -5996,44 +7562,36 @@
       <p:grpSpPr/>
       <p:sp>
         <p:nvSpPr>
-          <p:cNvPr id="2" name="Rectangle 1"/>
-          <p:cNvSpPr/>
-          <p:nvPr/>
-        </p:nvSpPr>
-        <p:spPr>
-          <a:xfrm>
-            <a:off x="0" y="0"/>
-            <a:ext cx="73152" cy="6858000"/>
-          </a:xfrm>
-          <a:prstGeom prst="rect">
-            <a:avLst/>
-          </a:prstGeom>
-          <a:solidFill>
-            <a:srgbClr val="003DA5"/>
-          </a:solidFill>
-          <a:ln>
-            <a:noFill/>
-          </a:ln>
-        </p:spPr>
-        <p:style>
-          <a:lnRef idx="1">
-            <a:schemeClr val="accent1"/>
-          </a:lnRef>
-          <a:fillRef idx="3">
-            <a:schemeClr val="accent1"/>
-          </a:fillRef>
-          <a:effectRef idx="2">
-            <a:schemeClr val="accent1"/>
-          </a:effectRef>
-          <a:fontRef idx="minor">
-            <a:schemeClr val="lt1"/>
-          </a:fontRef>
-        </p:style>
-        <p:txBody>
-          <a:bodyPr rtlCol="0" anchor="ctr"/>
-          <a:lstStyle/>
-          <a:p>
-            <a:pPr algn="ctr"/>
+          <p:cNvPr id="2" name="TextBox 1"/>
+          <p:cNvSpPr txBox="1"/>
+          <p:nvPr/>
+        </p:nvSpPr>
+        <p:spPr>
+          <a:xfrm>
+            <a:off x="609600" y="304800"/>
+            <a:ext cx="2540000" cy="279400"/>
+          </a:xfrm>
+          <a:prstGeom prst="rect">
+            <a:avLst/>
+          </a:prstGeom>
+          <a:noFill/>
+        </p:spPr>
+        <p:txBody>
+          <a:bodyPr wrap="square">
+            <a:spAutoFit/>
+          </a:bodyPr>
+          <a:lstStyle/>
+          <a:p>
+            <a:pPr algn="l"/>
+            <a:r>
+              <a:rPr sz="1600" b="1" i="0">
+                <a:solidFill>
+                  <a:srgbClr val="191D2E"/>
+                </a:solidFill>
+                <a:latin typeface="Arial"/>
+              </a:rPr>
+              <a:t>FKB  Campus</a:t>
+            </a:r>
           </a:p>
         </p:txBody>
       </p:sp>
@@ -6045,8 +7603,78 @@
         </p:nvSpPr>
         <p:spPr>
           <a:xfrm>
-            <a:off x="228600" y="182880"/>
-            <a:ext cx="11430000" cy="320040"/>
+            <a:off x="0" y="304800"/>
+            <a:ext cx="11582400" cy="279400"/>
+          </a:xfrm>
+          <a:prstGeom prst="rect">
+            <a:avLst/>
+          </a:prstGeom>
+          <a:noFill/>
+        </p:spPr>
+        <p:txBody>
+          <a:bodyPr wrap="square">
+            <a:spAutoFit/>
+          </a:bodyPr>
+          <a:lstStyle/>
+          <a:p>
+            <a:pPr algn="r"/>
+            <a:r>
+              <a:rPr sz="1300" b="0" i="0" spc="100">
+                <a:solidFill>
+                  <a:srgbClr val="7B7FA0"/>
+                </a:solidFill>
+                <a:latin typeface="Courier New"/>
+              </a:rPr>
+              <a:t>§ I · MODULINHALTE</a:t>
+            </a:r>
+          </a:p>
+        </p:txBody>
+      </p:sp>
+      <p:sp>
+        <p:nvSpPr>
+          <p:cNvPr id="4" name="TextBox 3"/>
+          <p:cNvSpPr txBox="1"/>
+          <p:nvPr/>
+        </p:nvSpPr>
+        <p:spPr>
+          <a:xfrm>
+            <a:off x="0" y="6350000"/>
+            <a:ext cx="11582400" cy="228600"/>
+          </a:xfrm>
+          <a:prstGeom prst="rect">
+            <a:avLst/>
+          </a:prstGeom>
+          <a:noFill/>
+        </p:spPr>
+        <p:txBody>
+          <a:bodyPr wrap="square">
+            <a:spAutoFit/>
+          </a:bodyPr>
+          <a:lstStyle/>
+          <a:p>
+            <a:pPr algn="r"/>
+            <a:r>
+              <a:rPr sz="1300" b="0" i="0">
+                <a:solidFill>
+                  <a:srgbClr val="7B7FA0"/>
+                </a:solidFill>
+                <a:latin typeface="Courier New"/>
+              </a:rPr>
+              <a:t>04 / 12</a:t>
+            </a:r>
+          </a:p>
+        </p:txBody>
+      </p:sp>
+      <p:sp>
+        <p:nvSpPr>
+          <p:cNvPr id="5" name="TextBox 4"/>
+          <p:cNvSpPr txBox="1"/>
+          <p:nvPr/>
+        </p:nvSpPr>
+        <p:spPr>
+          <a:xfrm>
+            <a:off x="609600" y="1016000"/>
+            <a:ext cx="4953000" cy="2032000"/>
           </a:xfrm>
           <a:prstGeom prst="rect">
             <a:avLst/>
@@ -6061,27 +7689,27 @@
           <a:p>
             <a:pPr algn="l"/>
             <a:r>
-              <a:rPr sz="900" b="0" i="0">
-                <a:solidFill>
-                  <a:srgbClr val="556575"/>
-                </a:solidFill>
-                <a:latin typeface="Arial"/>
-              </a:rPr>
-              <a:t>M10 · Modulinhalte</a:t>
-            </a:r>
-          </a:p>
-        </p:txBody>
-      </p:sp>
-      <p:sp>
-        <p:nvSpPr>
-          <p:cNvPr id="4" name="TextBox 3"/>
-          <p:cNvSpPr txBox="1"/>
-          <p:nvPr/>
-        </p:nvSpPr>
-        <p:spPr>
-          <a:xfrm>
-            <a:off x="365760" y="274320"/>
-            <a:ext cx="11430000" cy="777240"/>
+              <a:rPr sz="6000" b="0" i="0">
+                <a:solidFill>
+                  <a:srgbClr val="191D2E"/>
+                </a:solidFill>
+                <a:latin typeface="Georgia"/>
+              </a:rPr>
+              <a:t>4.1 Theorie-Input: Das Vier-Ohren-Modell</a:t>
+            </a:r>
+          </a:p>
+        </p:txBody>
+      </p:sp>
+      <p:sp>
+        <p:nvSpPr>
+          <p:cNvPr id="6" name="TextBox 5"/>
+          <p:cNvSpPr txBox="1"/>
+          <p:nvPr/>
+        </p:nvSpPr>
+        <p:spPr>
+          <a:xfrm>
+            <a:off x="609600" y="3175000"/>
+            <a:ext cx="4953000" cy="1270000"/>
           </a:xfrm>
           <a:prstGeom prst="rect">
             <a:avLst/>
@@ -6096,71 +7724,28 @@
           <a:p>
             <a:pPr algn="l"/>
             <a:r>
-              <a:rPr sz="2200" b="1" i="0">
-                <a:solidFill>
-                  <a:srgbClr val="003DA5"/>
-                </a:solidFill>
-                <a:latin typeface="Arial"/>
-              </a:rPr>
-              <a:t>4.1 Theorie-Input: Das Vier-Ohren-Modell</a:t>
-            </a:r>
-          </a:p>
-        </p:txBody>
-      </p:sp>
-      <p:sp>
-        <p:nvSpPr>
-          <p:cNvPr id="5" name="Rectangle 4"/>
-          <p:cNvSpPr/>
-          <p:nvPr/>
-        </p:nvSpPr>
-        <p:spPr>
-          <a:xfrm>
-            <a:off x="365760" y="1005840"/>
-            <a:ext cx="11430000" cy="27432"/>
-          </a:xfrm>
-          <a:prstGeom prst="rect">
-            <a:avLst/>
-          </a:prstGeom>
-          <a:solidFill>
-            <a:srgbClr val="D1D5DB"/>
-          </a:solidFill>
-          <a:ln>
-            <a:noFill/>
-          </a:ln>
-        </p:spPr>
-        <p:style>
-          <a:lnRef idx="1">
-            <a:schemeClr val="accent1"/>
-          </a:lnRef>
-          <a:fillRef idx="3">
-            <a:schemeClr val="accent1"/>
-          </a:fillRef>
-          <a:effectRef idx="2">
-            <a:schemeClr val="accent1"/>
-          </a:effectRef>
-          <a:fontRef idx="minor">
-            <a:schemeClr val="lt1"/>
-          </a:fontRef>
-        </p:style>
-        <p:txBody>
-          <a:bodyPr rtlCol="0" anchor="ctr"/>
-          <a:lstStyle/>
-          <a:p>
-            <a:pPr algn="ctr"/>
+              <a:rPr sz="2000" b="0" i="0">
+                <a:solidFill>
+                  <a:srgbClr val="4D5270"/>
+                </a:solidFill>
+                <a:latin typeface="Georgia"/>
+              </a:rPr>
+              <a:t>Jede Aussage Ihres Unternehmerkunden enthält gleichzeitig vier Botschaften:</a:t>
+            </a:r>
           </a:p>
         </p:txBody>
       </p:sp>
       <p:graphicFrame>
         <p:nvGraphicFramePr>
-          <p:cNvPr id="6" name="Table 5"/>
+          <p:cNvPr id="7" name="Table 6"/>
           <p:cNvGraphicFramePr>
             <a:graphicFrameLocks noGrp="1"/>
           </p:cNvGraphicFramePr>
           <p:nvPr/>
         </p:nvGraphicFramePr>
         <p:xfrm>
-          <a:off x="365760" y="1143000"/>
-          <a:ext cx="11430000" cy="2377440"/>
+          <a:off x="6096000" y="1016000"/>
+          <a:ext cx="6502400" cy="2222500"/>
         </p:xfrm>
         <a:graphic>
           <a:graphicData uri="http://schemas.openxmlformats.org/drawingml/2006/table">
@@ -6169,22 +7754,22 @@
                 <a:tableStyleId>{5C22544A-7EE6-4342-B048-85BDC9FD1C3A}</a:tableStyleId>
               </a:tblPr>
               <a:tblGrid>
-                <a:gridCol w="3810000"/>
-                <a:gridCol w="3810000"/>
-                <a:gridCol w="3810000"/>
+                <a:gridCol w="2167466"/>
+                <a:gridCol w="2167466"/>
+                <a:gridCol w="2167468"/>
               </a:tblGrid>
-              <a:tr h="475488">
+              <a:tr h="444500">
                 <a:tc>
                   <a:txBody>
                     <a:bodyPr wrap="square"/>
                     <a:lstStyle/>
                     <a:p>
                       <a:r>
-                        <a:rPr sz="1100" b="1">
+                        <a:rPr sz="1400" b="1">
                           <a:solidFill>
-                            <a:srgbClr val="FFFFFF"/>
+                            <a:srgbClr val="F8F8FA"/>
                           </a:solidFill>
-                          <a:latin typeface="Arial"/>
+                          <a:latin typeface="Courier New"/>
                         </a:rPr>
                         <a:t>Kommunikationsebene</a:t>
                       </a:r>
@@ -6192,7 +7777,7 @@
                   </a:txBody>
                   <a:tcPr>
                     <a:solidFill>
-                      <a:srgbClr val="003DA5"/>
+                      <a:srgbClr val="191D2E"/>
                     </a:solidFill>
                   </a:tcPr>
                 </a:tc>
@@ -6202,11 +7787,11 @@
                     <a:lstStyle/>
                     <a:p>
                       <a:r>
-                        <a:rPr sz="1100" b="1">
+                        <a:rPr sz="1400" b="1">
                           <a:solidFill>
-                            <a:srgbClr val="FFFFFF"/>
+                            <a:srgbClr val="F8F8FA"/>
                           </a:solidFill>
-                          <a:latin typeface="Arial"/>
+                          <a:latin typeface="Courier New"/>
                         </a:rPr>
                         <a:t>Was der Unternehmer sagt/meint</a:t>
                       </a:r>
@@ -6214,7 +7799,7 @@
                   </a:txBody>
                   <a:tcPr>
                     <a:solidFill>
-                      <a:srgbClr val="003DA5"/>
+                      <a:srgbClr val="191D2E"/>
                     </a:solidFill>
                   </a:tcPr>
                 </a:tc>
@@ -6224,11 +7809,11 @@
                     <a:lstStyle/>
                     <a:p>
                       <a:r>
-                        <a:rPr sz="1100" b="1">
+                        <a:rPr sz="1400" b="1">
                           <a:solidFill>
-                            <a:srgbClr val="FFFFFF"/>
+                            <a:srgbClr val="F8F8FA"/>
                           </a:solidFill>
-                          <a:latin typeface="Arial"/>
+                          <a:latin typeface="Courier New"/>
                         </a:rPr>
                         <a:t>Was der Berater hören sollte</a:t>
                       </a:r>
@@ -6236,23 +7821,23 @@
                   </a:txBody>
                   <a:tcPr>
                     <a:solidFill>
-                      <a:srgbClr val="003DA5"/>
+                      <a:srgbClr val="191D2E"/>
                     </a:solidFill>
                   </a:tcPr>
                 </a:tc>
               </a:tr>
-              <a:tr h="475488">
+              <a:tr h="444500">
                 <a:tc>
                   <a:txBody>
                     <a:bodyPr wrap="square"/>
                     <a:lstStyle/>
                     <a:p>
                       <a:r>
-                        <a:rPr sz="1100" b="0">
+                        <a:rPr sz="1600" b="0">
                           <a:solidFill>
-                            <a:srgbClr val="1A1A1A"/>
+                            <a:srgbClr val="191D2E"/>
                           </a:solidFill>
-                          <a:latin typeface="Arial"/>
+                          <a:latin typeface="Courier New"/>
                         </a:rPr>
                         <a:t>① Sachinhalt</a:t>
                       </a:r>
@@ -6260,7 +7845,7 @@
                   </a:txBody>
                   <a:tcPr>
                     <a:solidFill>
-                      <a:srgbClr val="FFFFFF"/>
+                      <a:srgbClr val="F8F8FA"/>
                     </a:solidFill>
                   </a:tcPr>
                 </a:tc>
@@ -6270,11 +7855,11 @@
                     <a:lstStyle/>
                     <a:p>
                       <a:r>
-                        <a:rPr sz="1100" b="0">
+                        <a:rPr sz="1600" b="0">
                           <a:solidFill>
-                            <a:srgbClr val="1A1A1A"/>
+                            <a:srgbClr val="191D2E"/>
                           </a:solidFill>
-                          <a:latin typeface="Arial"/>
+                          <a:latin typeface="Courier New"/>
                         </a:rPr>
                         <a:t>Die explizite Information (Zahlen, Fakten, Daten)</a:t>
                       </a:r>
@@ -6282,7 +7867,7 @@
                   </a:txBody>
                   <a:tcPr>
                     <a:solidFill>
-                      <a:srgbClr val="FFFFFF"/>
+                      <a:srgbClr val="F8F8FA"/>
                     </a:solidFill>
                   </a:tcPr>
                 </a:tc>
@@ -6292,11 +7877,11 @@
                     <a:lstStyle/>
                     <a:p>
                       <a:r>
-                        <a:rPr sz="1100" b="0">
+                        <a:rPr sz="1600" b="0">
                           <a:solidFill>
-                            <a:srgbClr val="1A1A1A"/>
+                            <a:srgbClr val="191D2E"/>
                           </a:solidFill>
-                          <a:latin typeface="Arial"/>
+                          <a:latin typeface="Courier New"/>
                         </a:rPr>
                         <a:t>Korrekt aufnehmen, aber nicht stehenbleiben</a:t>
                       </a:r>
@@ -6304,23 +7889,23 @@
                   </a:txBody>
                   <a:tcPr>
                     <a:solidFill>
-                      <a:srgbClr val="FFFFFF"/>
+                      <a:srgbClr val="F8F8FA"/>
                     </a:solidFill>
                   </a:tcPr>
                 </a:tc>
               </a:tr>
-              <a:tr h="475488">
+              <a:tr h="444500">
                 <a:tc>
                   <a:txBody>
                     <a:bodyPr wrap="square"/>
                     <a:lstStyle/>
                     <a:p>
                       <a:r>
-                        <a:rPr sz="1100" b="0">
+                        <a:rPr sz="1600" b="0">
                           <a:solidFill>
-                            <a:srgbClr val="1A1A1A"/>
+                            <a:srgbClr val="191D2E"/>
                           </a:solidFill>
-                          <a:latin typeface="Arial"/>
+                          <a:latin typeface="Courier New"/>
                         </a:rPr>
                         <a:t>② Selbstoffenbarung</a:t>
                       </a:r>
@@ -6328,7 +7913,7 @@
                   </a:txBody>
                   <a:tcPr>
                     <a:solidFill>
-                      <a:srgbClr val="F4F6FA"/>
+                      <a:srgbClr val="F0F0F5"/>
                     </a:solidFill>
                   </a:tcPr>
                 </a:tc>
@@ -6338,11 +7923,11 @@
                     <a:lstStyle/>
                     <a:p>
                       <a:r>
-                        <a:rPr sz="1100" b="0">
+                        <a:rPr sz="1600" b="0">
                           <a:solidFill>
-                            <a:srgbClr val="1A1A1A"/>
+                            <a:srgbClr val="191D2E"/>
                           </a:solidFill>
-                          <a:latin typeface="Arial"/>
+                          <a:latin typeface="Courier New"/>
                         </a:rPr>
                         <a:t>Was er über sich, seine Situation, seine Sorgen preisgibt</a:t>
                       </a:r>
@@ -6350,7 +7935,7 @@
                   </a:txBody>
                   <a:tcPr>
                     <a:solidFill>
-                      <a:srgbClr val="F4F6FA"/>
+                      <a:srgbClr val="F0F0F5"/>
                     </a:solidFill>
                   </a:tcPr>
                 </a:tc>
@@ -6360,11 +7945,11 @@
                     <a:lstStyle/>
                     <a:p>
                       <a:r>
-                        <a:rPr sz="1100" b="0">
+                        <a:rPr sz="1600" b="0">
                           <a:solidFill>
-                            <a:srgbClr val="1A1A1A"/>
+                            <a:srgbClr val="191D2E"/>
                           </a:solidFill>
-                          <a:latin typeface="Arial"/>
+                          <a:latin typeface="Courier New"/>
                         </a:rPr>
                         <a:t>Zwischentöne, Zögern, Formulierungswahl beachten</a:t>
                       </a:r>
@@ -6372,23 +7957,23 @@
                   </a:txBody>
                   <a:tcPr>
                     <a:solidFill>
-                      <a:srgbClr val="F4F6FA"/>
+                      <a:srgbClr val="F0F0F5"/>
                     </a:solidFill>
                   </a:tcPr>
                 </a:tc>
               </a:tr>
-              <a:tr h="475488">
+              <a:tr h="444500">
                 <a:tc>
                   <a:txBody>
                     <a:bodyPr wrap="square"/>
                     <a:lstStyle/>
                     <a:p>
                       <a:r>
-                        <a:rPr sz="1100" b="0">
+                        <a:rPr sz="1600" b="0">
                           <a:solidFill>
-                            <a:srgbClr val="1A1A1A"/>
+                            <a:srgbClr val="191D2E"/>
                           </a:solidFill>
-                          <a:latin typeface="Arial"/>
+                          <a:latin typeface="Courier New"/>
                         </a:rPr>
                         <a:t>③ Beziehungsaspekt</a:t>
                       </a:r>
@@ -6396,7 +7981,7 @@
                   </a:txBody>
                   <a:tcPr>
                     <a:solidFill>
-                      <a:srgbClr val="FFFFFF"/>
+                      <a:srgbClr val="F8F8FA"/>
                     </a:solidFill>
                   </a:tcPr>
                 </a:tc>
@@ -6406,11 +7991,11 @@
                     <a:lstStyle/>
                     <a:p>
                       <a:r>
-                        <a:rPr sz="1100" b="0">
+                        <a:rPr sz="1600" b="0">
                           <a:solidFill>
-                            <a:srgbClr val="1A1A1A"/>
+                            <a:srgbClr val="191D2E"/>
                           </a:solidFill>
-                          <a:latin typeface="Arial"/>
+                          <a:latin typeface="Courier New"/>
                         </a:rPr>
                         <a:t>Wie er Sie als Berater wahrnimmt; Vertrauen oder Skepsis</a:t>
                       </a:r>
@@ -6418,7 +8003,7 @@
                   </a:txBody>
                   <a:tcPr>
                     <a:solidFill>
-                      <a:srgbClr val="FFFFFF"/>
+                      <a:srgbClr val="F8F8FA"/>
                     </a:solidFill>
                   </a:tcPr>
                 </a:tc>
@@ -6428,11 +8013,11 @@
                     <a:lstStyle/>
                     <a:p>
                       <a:r>
-                        <a:rPr sz="1100" b="0">
+                        <a:rPr sz="1600" b="0">
                           <a:solidFill>
-                            <a:srgbClr val="1A1A1A"/>
+                            <a:srgbClr val="191D2E"/>
                           </a:solidFill>
-                          <a:latin typeface="Arial"/>
+                          <a:latin typeface="Courier New"/>
                         </a:rPr>
                         <a:t>Gesprächsklima aktiv gestalten; Vertrauen voraussetzen</a:t>
                       </a:r>
@@ -6440,23 +8025,23 @@
                   </a:txBody>
                   <a:tcPr>
                     <a:solidFill>
-                      <a:srgbClr val="FFFFFF"/>
+                      <a:srgbClr val="F8F8FA"/>
                     </a:solidFill>
                   </a:tcPr>
                 </a:tc>
               </a:tr>
-              <a:tr h="475488">
+              <a:tr h="444500">
                 <a:tc>
                   <a:txBody>
                     <a:bodyPr wrap="square"/>
                     <a:lstStyle/>
                     <a:p>
                       <a:r>
-                        <a:rPr sz="1100" b="0">
+                        <a:rPr sz="1600" b="0">
                           <a:solidFill>
-                            <a:srgbClr val="1A1A1A"/>
+                            <a:srgbClr val="191D2E"/>
                           </a:solidFill>
-                          <a:latin typeface="Arial"/>
+                          <a:latin typeface="Courier New"/>
                         </a:rPr>
                         <a:t>④ Appell</a:t>
                       </a:r>
@@ -6464,7 +8049,7 @@
                   </a:txBody>
                   <a:tcPr>
                     <a:solidFill>
-                      <a:srgbClr val="F4F6FA"/>
+                      <a:srgbClr val="F0F0F5"/>
                     </a:solidFill>
                   </a:tcPr>
                 </a:tc>
@@ -6474,11 +8059,11 @@
                     <a:lstStyle/>
                     <a:p>
                       <a:r>
-                        <a:rPr sz="1100" b="0">
+                        <a:rPr sz="1600" b="0">
                           <a:solidFill>
-                            <a:srgbClr val="1A1A1A"/>
+                            <a:srgbClr val="191D2E"/>
                           </a:solidFill>
-                          <a:latin typeface="Arial"/>
+                          <a:latin typeface="Courier New"/>
                         </a:rPr>
                         <a:t>Was er von Ihnen erwartet oder erhofft</a:t>
                       </a:r>
@@ -6486,7 +8071,7 @@
                   </a:txBody>
                   <a:tcPr>
                     <a:solidFill>
-                      <a:srgbClr val="F4F6FA"/>
+                      <a:srgbClr val="F0F0F5"/>
                     </a:solidFill>
                   </a:tcPr>
                 </a:tc>
@@ -6496,11 +8081,11 @@
                     <a:lstStyle/>
                     <a:p>
                       <a:r>
-                        <a:rPr sz="1100" b="0">
+                        <a:rPr sz="1600" b="0">
                           <a:solidFill>
-                            <a:srgbClr val="1A1A1A"/>
+                            <a:srgbClr val="191D2E"/>
                           </a:solidFill>
-                          <a:latin typeface="Arial"/>
+                          <a:latin typeface="Courier New"/>
                         </a:rPr>
                         <a:t>Explizit nachfragen: „Was erwarten Sie von uns?"</a:t>
                       </a:r>
@@ -6508,7 +8093,7 @@
                   </a:txBody>
                   <a:tcPr>
                     <a:solidFill>
-                      <a:srgbClr val="F4F6FA"/>
+                      <a:srgbClr val="F0F0F5"/>
                     </a:solidFill>
                   </a:tcPr>
                 </a:tc>
@@ -6531,7 +8116,7 @@
     <p:bg>
       <p:bgPr>
         <a:solidFill>
-          <a:srgbClr val="1A1A1A"/>
+          <a:srgbClr val="F8F8FA"/>
         </a:solidFill>
         <a:effectLst/>
       </p:bgPr>
@@ -6545,20 +8130,160 @@
       <p:grpSpPr/>
       <p:sp>
         <p:nvSpPr>
-          <p:cNvPr id="2" name="Rectangle 1"/>
+          <p:cNvPr id="2" name="TextBox 1"/>
+          <p:cNvSpPr txBox="1"/>
+          <p:nvPr/>
+        </p:nvSpPr>
+        <p:spPr>
+          <a:xfrm>
+            <a:off x="609600" y="304800"/>
+            <a:ext cx="2540000" cy="279400"/>
+          </a:xfrm>
+          <a:prstGeom prst="rect">
+            <a:avLst/>
+          </a:prstGeom>
+          <a:noFill/>
+        </p:spPr>
+        <p:txBody>
+          <a:bodyPr wrap="square">
+            <a:spAutoFit/>
+          </a:bodyPr>
+          <a:lstStyle/>
+          <a:p>
+            <a:pPr algn="l"/>
+            <a:r>
+              <a:rPr sz="1600" b="1" i="0">
+                <a:solidFill>
+                  <a:srgbClr val="191D2E"/>
+                </a:solidFill>
+                <a:latin typeface="Arial"/>
+              </a:rPr>
+              <a:t>FKB  Campus</a:t>
+            </a:r>
+          </a:p>
+        </p:txBody>
+      </p:sp>
+      <p:sp>
+        <p:nvSpPr>
+          <p:cNvPr id="3" name="TextBox 2"/>
+          <p:cNvSpPr txBox="1"/>
+          <p:nvPr/>
+        </p:nvSpPr>
+        <p:spPr>
+          <a:xfrm>
+            <a:off x="0" y="304800"/>
+            <a:ext cx="11582400" cy="279400"/>
+          </a:xfrm>
+          <a:prstGeom prst="rect">
+            <a:avLst/>
+          </a:prstGeom>
+          <a:noFill/>
+        </p:spPr>
+        <p:txBody>
+          <a:bodyPr wrap="square">
+            <a:spAutoFit/>
+          </a:bodyPr>
+          <a:lstStyle/>
+          <a:p>
+            <a:pPr algn="r"/>
+            <a:r>
+              <a:rPr sz="1300" b="0" i="0" spc="100">
+                <a:solidFill>
+                  <a:srgbClr val="7B7FA0"/>
+                </a:solidFill>
+                <a:latin typeface="Courier New"/>
+              </a:rPr>
+              <a:t>§ I · MODULINHALTE</a:t>
+            </a:r>
+          </a:p>
+        </p:txBody>
+      </p:sp>
+      <p:sp>
+        <p:nvSpPr>
+          <p:cNvPr id="4" name="TextBox 3"/>
+          <p:cNvSpPr txBox="1"/>
+          <p:nvPr/>
+        </p:nvSpPr>
+        <p:spPr>
+          <a:xfrm>
+            <a:off x="0" y="6350000"/>
+            <a:ext cx="11582400" cy="228600"/>
+          </a:xfrm>
+          <a:prstGeom prst="rect">
+            <a:avLst/>
+          </a:prstGeom>
+          <a:noFill/>
+        </p:spPr>
+        <p:txBody>
+          <a:bodyPr wrap="square">
+            <a:spAutoFit/>
+          </a:bodyPr>
+          <a:lstStyle/>
+          <a:p>
+            <a:pPr algn="r"/>
+            <a:r>
+              <a:rPr sz="1300" b="0" i="0">
+                <a:solidFill>
+                  <a:srgbClr val="7B7FA0"/>
+                </a:solidFill>
+                <a:latin typeface="Courier New"/>
+              </a:rPr>
+              <a:t>05 / 12</a:t>
+            </a:r>
+          </a:p>
+        </p:txBody>
+      </p:sp>
+      <p:sp>
+        <p:nvSpPr>
+          <p:cNvPr id="5" name="TextBox 4"/>
+          <p:cNvSpPr txBox="1"/>
+          <p:nvPr/>
+        </p:nvSpPr>
+        <p:spPr>
+          <a:xfrm>
+            <a:off x="609600" y="889000"/>
+            <a:ext cx="10972800" cy="1397000"/>
+          </a:xfrm>
+          <a:prstGeom prst="rect">
+            <a:avLst/>
+          </a:prstGeom>
+          <a:noFill/>
+        </p:spPr>
+        <p:txBody>
+          <a:bodyPr wrap="square">
+            <a:spAutoFit/>
+          </a:bodyPr>
+          <a:lstStyle/>
+          <a:p>
+            <a:pPr algn="l"/>
+            <a:r>
+              <a:rPr sz="7200" b="0" i="0">
+                <a:solidFill>
+                  <a:srgbClr val="191D2E"/>
+                </a:solidFill>
+                <a:latin typeface="Georgia"/>
+              </a:rPr>
+              <a:t>4.2 Theorie-Input: Das SPIN-Fragenmodell</a:t>
+            </a:r>
+          </a:p>
+        </p:txBody>
+      </p:sp>
+      <p:sp>
+        <p:nvSpPr>
+          <p:cNvPr id="6" name="Rectangle 5"/>
           <p:cNvSpPr/>
           <p:nvPr/>
         </p:nvSpPr>
         <p:spPr>
           <a:xfrm>
-            <a:off x="0" y="0"/>
-            <a:ext cx="73152" cy="6858000"/>
+            <a:off x="609600" y="2286000"/>
+            <a:ext cx="10972800" cy="6350"/>
           </a:xfrm>
           <a:prstGeom prst="rect">
             <a:avLst/>
           </a:prstGeom>
           <a:solidFill>
-            <a:srgbClr val="E05B00"/>
+            <a:srgbClr val="191D2E"/>
           </a:solidFill>
           <a:ln>
             <a:noFill/>
@@ -6588,14 +8313,14 @@
       </p:sp>
       <p:sp>
         <p:nvSpPr>
-          <p:cNvPr id="3" name="TextBox 2"/>
-          <p:cNvSpPr txBox="1"/>
-          <p:nvPr/>
-        </p:nvSpPr>
-        <p:spPr>
-          <a:xfrm>
-            <a:off x="365760" y="2011680"/>
-            <a:ext cx="11430000" cy="2011680"/>
+          <p:cNvPr id="7" name="TextBox 6"/>
+          <p:cNvSpPr txBox="1"/>
+          <p:nvPr/>
+        </p:nvSpPr>
+        <p:spPr>
+          <a:xfrm>
+            <a:off x="609600" y="2438400"/>
+            <a:ext cx="304800" cy="355600"/>
           </a:xfrm>
           <a:prstGeom prst="rect">
             <a:avLst/>
@@ -6610,13 +8335,118 @@
           <a:p>
             <a:pPr algn="l"/>
             <a:r>
-              <a:rPr sz="3600" b="1" i="0">
-                <a:solidFill>
-                  <a:srgbClr val="FFFFFF"/>
-                </a:solidFill>
-                <a:latin typeface="Arial"/>
-              </a:rPr>
-              <a:t>4.2 Theorie-Input: Das SPIN-Fragenmodell</a:t>
+              <a:rPr sz="2800" b="0" i="0">
+                <a:solidFill>
+                  <a:srgbClr val="1F2B56"/>
+                </a:solidFill>
+                <a:latin typeface="Georgia"/>
+              </a:rPr>
+              <a:t>–</a:t>
+            </a:r>
+          </a:p>
+        </p:txBody>
+      </p:sp>
+      <p:sp>
+        <p:nvSpPr>
+          <p:cNvPr id="8" name="TextBox 7"/>
+          <p:cNvSpPr txBox="1"/>
+          <p:nvPr/>
+        </p:nvSpPr>
+        <p:spPr>
+          <a:xfrm>
+            <a:off x="1016000" y="2413000"/>
+            <a:ext cx="9906000" cy="571500"/>
+          </a:xfrm>
+          <a:prstGeom prst="rect">
+            <a:avLst/>
+          </a:prstGeom>
+          <a:noFill/>
+        </p:spPr>
+        <p:txBody>
+          <a:bodyPr wrap="square">
+            <a:spAutoFit/>
+          </a:bodyPr>
+          <a:lstStyle/>
+          <a:p>
+            <a:pPr algn="l"/>
+            <a:r>
+              <a:rPr sz="2600" b="0" i="0">
+                <a:solidFill>
+                  <a:srgbClr val="191D2E"/>
+                </a:solidFill>
+                <a:latin typeface="Georgia"/>
+              </a:rPr>
+              <a:t>&gt; Zusammenspiel der beiden Modelle: SPIN und das Vier-Ohren-Modell sind keine getrennten Werkzeuge – sie laufen im Gespräch parallel. SPIN ist die Gesprächsarchitektur (Was frage ich als nächstes?).…</a:t>
+            </a:r>
+          </a:p>
+        </p:txBody>
+      </p:sp>
+      <p:sp>
+        <p:nvSpPr>
+          <p:cNvPr id="9" name="TextBox 8"/>
+          <p:cNvSpPr txBox="1"/>
+          <p:nvPr/>
+        </p:nvSpPr>
+        <p:spPr>
+          <a:xfrm>
+            <a:off x="609600" y="3073400"/>
+            <a:ext cx="304800" cy="355600"/>
+          </a:xfrm>
+          <a:prstGeom prst="rect">
+            <a:avLst/>
+          </a:prstGeom>
+          <a:noFill/>
+        </p:spPr>
+        <p:txBody>
+          <a:bodyPr wrap="square">
+            <a:spAutoFit/>
+          </a:bodyPr>
+          <a:lstStyle/>
+          <a:p>
+            <a:pPr algn="l"/>
+            <a:r>
+              <a:rPr sz="2800" b="0" i="0">
+                <a:solidFill>
+                  <a:srgbClr val="1F2B56"/>
+                </a:solidFill>
+                <a:latin typeface="Georgia"/>
+              </a:rPr>
+              <a:t>–</a:t>
+            </a:r>
+          </a:p>
+        </p:txBody>
+      </p:sp>
+      <p:sp>
+        <p:nvSpPr>
+          <p:cNvPr id="10" name="TextBox 9"/>
+          <p:cNvSpPr txBox="1"/>
+          <p:nvPr/>
+        </p:nvSpPr>
+        <p:spPr>
+          <a:xfrm>
+            <a:off x="1016000" y="3048000"/>
+            <a:ext cx="9906000" cy="571500"/>
+          </a:xfrm>
+          <a:prstGeom prst="rect">
+            <a:avLst/>
+          </a:prstGeom>
+          <a:noFill/>
+        </p:spPr>
+        <p:txBody>
+          <a:bodyPr wrap="square">
+            <a:spAutoFit/>
+          </a:bodyPr>
+          <a:lstStyle/>
+          <a:p>
+            <a:pPr algn="l"/>
+            <a:r>
+              <a:rPr sz="2600" b="0" i="0">
+                <a:solidFill>
+                  <a:srgbClr val="191D2E"/>
+                </a:solidFill>
+                <a:latin typeface="Georgia"/>
+              </a:rPr>
+              <a:t>Rackham hat nachgewiesen, dass der Unterschied zwischen durchschnittlichen und herausragenden Beratern primär in der Qualität der Fragen liegt – nicht in der Qualität der Produktpräsentation.</a:t>
             </a:r>
           </a:p>
         </p:txBody>
@@ -6635,7 +8465,7 @@
     <p:bg>
       <p:bgPr>
         <a:solidFill>
-          <a:srgbClr val="FFFFFF"/>
+          <a:srgbClr val="F8F8FA"/>
         </a:solidFill>
         <a:effectLst/>
       </p:bgPr>
@@ -6649,44 +8479,36 @@
       <p:grpSpPr/>
       <p:sp>
         <p:nvSpPr>
-          <p:cNvPr id="2" name="Rectangle 1"/>
-          <p:cNvSpPr/>
-          <p:nvPr/>
-        </p:nvSpPr>
-        <p:spPr>
-          <a:xfrm>
-            <a:off x="0" y="0"/>
-            <a:ext cx="73152" cy="6858000"/>
-          </a:xfrm>
-          <a:prstGeom prst="rect">
-            <a:avLst/>
-          </a:prstGeom>
-          <a:solidFill>
-            <a:srgbClr val="003DA5"/>
-          </a:solidFill>
-          <a:ln>
-            <a:noFill/>
-          </a:ln>
-        </p:spPr>
-        <p:style>
-          <a:lnRef idx="1">
-            <a:schemeClr val="accent1"/>
-          </a:lnRef>
-          <a:fillRef idx="3">
-            <a:schemeClr val="accent1"/>
-          </a:fillRef>
-          <a:effectRef idx="2">
-            <a:schemeClr val="accent1"/>
-          </a:effectRef>
-          <a:fontRef idx="minor">
-            <a:schemeClr val="lt1"/>
-          </a:fontRef>
-        </p:style>
-        <p:txBody>
-          <a:bodyPr rtlCol="0" anchor="ctr"/>
-          <a:lstStyle/>
-          <a:p>
-            <a:pPr algn="ctr"/>
+          <p:cNvPr id="2" name="TextBox 1"/>
+          <p:cNvSpPr txBox="1"/>
+          <p:nvPr/>
+        </p:nvSpPr>
+        <p:spPr>
+          <a:xfrm>
+            <a:off x="609600" y="304800"/>
+            <a:ext cx="2540000" cy="279400"/>
+          </a:xfrm>
+          <a:prstGeom prst="rect">
+            <a:avLst/>
+          </a:prstGeom>
+          <a:noFill/>
+        </p:spPr>
+        <p:txBody>
+          <a:bodyPr wrap="square">
+            <a:spAutoFit/>
+          </a:bodyPr>
+          <a:lstStyle/>
+          <a:p>
+            <a:pPr algn="l"/>
+            <a:r>
+              <a:rPr sz="1600" b="1" i="0">
+                <a:solidFill>
+                  <a:srgbClr val="191D2E"/>
+                </a:solidFill>
+                <a:latin typeface="Arial"/>
+              </a:rPr>
+              <a:t>FKB  Campus</a:t>
+            </a:r>
           </a:p>
         </p:txBody>
       </p:sp>
@@ -6698,8 +8520,78 @@
         </p:nvSpPr>
         <p:spPr>
           <a:xfrm>
-            <a:off x="228600" y="182880"/>
-            <a:ext cx="11430000" cy="320040"/>
+            <a:off x="0" y="304800"/>
+            <a:ext cx="11582400" cy="279400"/>
+          </a:xfrm>
+          <a:prstGeom prst="rect">
+            <a:avLst/>
+          </a:prstGeom>
+          <a:noFill/>
+        </p:spPr>
+        <p:txBody>
+          <a:bodyPr wrap="square">
+            <a:spAutoFit/>
+          </a:bodyPr>
+          <a:lstStyle/>
+          <a:p>
+            <a:pPr algn="r"/>
+            <a:r>
+              <a:rPr sz="1300" b="0" i="0" spc="100">
+                <a:solidFill>
+                  <a:srgbClr val="7B7FA0"/>
+                </a:solidFill>
+                <a:latin typeface="Courier New"/>
+              </a:rPr>
+              <a:t>§ I · MODULINHALTE</a:t>
+            </a:r>
+          </a:p>
+        </p:txBody>
+      </p:sp>
+      <p:sp>
+        <p:nvSpPr>
+          <p:cNvPr id="4" name="TextBox 3"/>
+          <p:cNvSpPr txBox="1"/>
+          <p:nvPr/>
+        </p:nvSpPr>
+        <p:spPr>
+          <a:xfrm>
+            <a:off x="0" y="6350000"/>
+            <a:ext cx="11582400" cy="228600"/>
+          </a:xfrm>
+          <a:prstGeom prst="rect">
+            <a:avLst/>
+          </a:prstGeom>
+          <a:noFill/>
+        </p:spPr>
+        <p:txBody>
+          <a:bodyPr wrap="square">
+            <a:spAutoFit/>
+          </a:bodyPr>
+          <a:lstStyle/>
+          <a:p>
+            <a:pPr algn="r"/>
+            <a:r>
+              <a:rPr sz="1300" b="0" i="0">
+                <a:solidFill>
+                  <a:srgbClr val="7B7FA0"/>
+                </a:solidFill>
+                <a:latin typeface="Courier New"/>
+              </a:rPr>
+              <a:t>06 / 12</a:t>
+            </a:r>
+          </a:p>
+        </p:txBody>
+      </p:sp>
+      <p:sp>
+        <p:nvSpPr>
+          <p:cNvPr id="5" name="TextBox 4"/>
+          <p:cNvSpPr txBox="1"/>
+          <p:nvPr/>
+        </p:nvSpPr>
+        <p:spPr>
+          <a:xfrm>
+            <a:off x="609600" y="1016000"/>
+            <a:ext cx="4953000" cy="2032000"/>
           </a:xfrm>
           <a:prstGeom prst="rect">
             <a:avLst/>
@@ -6714,27 +8606,27 @@
           <a:p>
             <a:pPr algn="l"/>
             <a:r>
-              <a:rPr sz="900" b="0" i="0">
-                <a:solidFill>
-                  <a:srgbClr val="556575"/>
-                </a:solidFill>
-                <a:latin typeface="Arial"/>
-              </a:rPr>
-              <a:t>M10 · Modulinhalte</a:t>
-            </a:r>
-          </a:p>
-        </p:txBody>
-      </p:sp>
-      <p:sp>
-        <p:nvSpPr>
-          <p:cNvPr id="4" name="TextBox 3"/>
-          <p:cNvSpPr txBox="1"/>
-          <p:nvPr/>
-        </p:nvSpPr>
-        <p:spPr>
-          <a:xfrm>
-            <a:off x="365760" y="274320"/>
-            <a:ext cx="11430000" cy="777240"/>
+              <a:rPr sz="6000" b="0" i="0">
+                <a:solidFill>
+                  <a:srgbClr val="191D2E"/>
+                </a:solidFill>
+                <a:latin typeface="Georgia"/>
+              </a:rPr>
+              <a:t>4.3 Praxiscase: Florian Maurer, Metallbau GmbH &amp; Co. KG</a:t>
+            </a:r>
+          </a:p>
+        </p:txBody>
+      </p:sp>
+      <p:sp>
+        <p:nvSpPr>
+          <p:cNvPr id="6" name="TextBox 5"/>
+          <p:cNvSpPr txBox="1"/>
+          <p:nvPr/>
+        </p:nvSpPr>
+        <p:spPr>
+          <a:xfrm>
+            <a:off x="609600" y="3175000"/>
+            <a:ext cx="4953000" cy="1270000"/>
           </a:xfrm>
           <a:prstGeom prst="rect">
             <a:avLst/>
@@ -6749,71 +8641,28 @@
           <a:p>
             <a:pPr algn="l"/>
             <a:r>
-              <a:rPr sz="2200" b="1" i="0">
-                <a:solidFill>
-                  <a:srgbClr val="003DA5"/>
-                </a:solidFill>
-                <a:latin typeface="Arial"/>
-              </a:rPr>
-              <a:t>4.2 Theorie-Input: Das SPIN-Fragenmodell</a:t>
-            </a:r>
-          </a:p>
-        </p:txBody>
-      </p:sp>
-      <p:sp>
-        <p:nvSpPr>
-          <p:cNvPr id="5" name="Rectangle 4"/>
-          <p:cNvSpPr/>
-          <p:nvPr/>
-        </p:nvSpPr>
-        <p:spPr>
-          <a:xfrm>
-            <a:off x="365760" y="1005840"/>
-            <a:ext cx="11430000" cy="27432"/>
-          </a:xfrm>
-          <a:prstGeom prst="rect">
-            <a:avLst/>
-          </a:prstGeom>
-          <a:solidFill>
-            <a:srgbClr val="D1D5DB"/>
-          </a:solidFill>
-          <a:ln>
-            <a:noFill/>
-          </a:ln>
-        </p:spPr>
-        <p:style>
-          <a:lnRef idx="1">
-            <a:schemeClr val="accent1"/>
-          </a:lnRef>
-          <a:fillRef idx="3">
-            <a:schemeClr val="accent1"/>
-          </a:fillRef>
-          <a:effectRef idx="2">
-            <a:schemeClr val="accent1"/>
-          </a:effectRef>
-          <a:fontRef idx="minor">
-            <a:schemeClr val="lt1"/>
-          </a:fontRef>
-        </p:style>
-        <p:txBody>
-          <a:bodyPr rtlCol="0" anchor="ctr"/>
-          <a:lstStyle/>
-          <a:p>
-            <a:pPr algn="ctr"/>
+              <a:rPr sz="2000" b="0" i="0">
+                <a:solidFill>
+                  <a:srgbClr val="4D5270"/>
+                </a:solidFill>
+                <a:latin typeface="Georgia"/>
+              </a:rPr>
+              <a:t>Unternehmensprofil (Berater-Information)</a:t>
+            </a:r>
           </a:p>
         </p:txBody>
       </p:sp>
       <p:graphicFrame>
         <p:nvGraphicFramePr>
-          <p:cNvPr id="6" name="Table 5"/>
+          <p:cNvPr id="7" name="Table 6"/>
           <p:cNvGraphicFramePr>
             <a:graphicFrameLocks noGrp="1"/>
           </p:cNvGraphicFramePr>
           <p:nvPr/>
         </p:nvGraphicFramePr>
         <p:xfrm>
-          <a:off x="365760" y="1143000"/>
-          <a:ext cx="11430000" cy="2377440"/>
+          <a:off x="6096000" y="1016000"/>
+          <a:ext cx="6502400" cy="3556000"/>
         </p:xfrm>
         <a:graphic>
           <a:graphicData uri="http://schemas.openxmlformats.org/drawingml/2006/table">
@@ -6822,31 +8671,29 @@
                 <a:tableStyleId>{5C22544A-7EE6-4342-B048-85BDC9FD1C3A}</a:tableStyleId>
               </a:tblPr>
               <a:tblGrid>
-                <a:gridCol w="2857500"/>
-                <a:gridCol w="2857500"/>
-                <a:gridCol w="2857500"/>
-                <a:gridCol w="2857500"/>
+                <a:gridCol w="3251200"/>
+                <a:gridCol w="3251200"/>
               </a:tblGrid>
-              <a:tr h="475488">
+              <a:tr h="444500">
                 <a:tc>
                   <a:txBody>
                     <a:bodyPr wrap="square"/>
                     <a:lstStyle/>
                     <a:p>
                       <a:r>
-                        <a:rPr sz="1100" b="1">
+                        <a:rPr sz="1400" b="1">
                           <a:solidFill>
-                            <a:srgbClr val="FFFFFF"/>
+                            <a:srgbClr val="F8F8FA"/>
                           </a:solidFill>
-                          <a:latin typeface="Arial"/>
+                          <a:latin typeface="Courier New"/>
                         </a:rPr>
-                        <a:t>Fragetyp</a:t>
+                        <a:t>Merkmal</a:t>
                       </a:r>
                     </a:p>
                   </a:txBody>
                   <a:tcPr>
                     <a:solidFill>
-                      <a:srgbClr val="003DA5"/>
+                      <a:srgbClr val="191D2E"/>
                     </a:solidFill>
                   </a:tcPr>
                 </a:tc>
@@ -6856,19 +8703,43 @@
                     <a:lstStyle/>
                     <a:p>
                       <a:r>
-                        <a:rPr sz="1100" b="1">
+                        <a:rPr sz="1400" b="1">
                           <a:solidFill>
-                            <a:srgbClr val="FFFFFF"/>
+                            <a:srgbClr val="F8F8FA"/>
                           </a:solidFill>
-                          <a:latin typeface="Arial"/>
+                          <a:latin typeface="Courier New"/>
                         </a:rPr>
-                        <a:t>Zweck</a:t>
+                        <a:t>Detail</a:t>
                       </a:r>
                     </a:p>
                   </a:txBody>
                   <a:tcPr>
                     <a:solidFill>
-                      <a:srgbClr val="003DA5"/>
+                      <a:srgbClr val="191D2E"/>
+                    </a:solidFill>
+                  </a:tcPr>
+                </a:tc>
+              </a:tr>
+              <a:tr h="444500">
+                <a:tc>
+                  <a:txBody>
+                    <a:bodyPr wrap="square"/>
+                    <a:lstStyle/>
+                    <a:p>
+                      <a:r>
+                        <a:rPr sz="1600" b="0">
+                          <a:solidFill>
+                            <a:srgbClr val="191D2E"/>
+                          </a:solidFill>
+                          <a:latin typeface="Courier New"/>
+                        </a:rPr>
+                        <a:t>Unternehmen</a:t>
+                      </a:r>
+                    </a:p>
+                  </a:txBody>
+                  <a:tcPr>
+                    <a:solidFill>
+                      <a:srgbClr val="F8F8FA"/>
                     </a:solidFill>
                   </a:tcPr>
                 </a:tc>
@@ -6878,19 +8749,43 @@
                     <a:lstStyle/>
                     <a:p>
                       <a:r>
-                        <a:rPr sz="1100" b="1">
+                        <a:rPr sz="1600" b="0">
                           <a:solidFill>
-                            <a:srgbClr val="FFFFFF"/>
+                            <a:srgbClr val="191D2E"/>
                           </a:solidFill>
-                          <a:latin typeface="Arial"/>
+                          <a:latin typeface="Courier New"/>
                         </a:rPr>
-                        <a:t>Wann einsetzen?</a:t>
+                        <a:t>Maurer Metallbau GmbH &amp; Co. KG, Süddeutschland</a:t>
                       </a:r>
                     </a:p>
                   </a:txBody>
                   <a:tcPr>
                     <a:solidFill>
-                      <a:srgbClr val="003DA5"/>
+                      <a:srgbClr val="F8F8FA"/>
+                    </a:solidFill>
+                  </a:tcPr>
+                </a:tc>
+              </a:tr>
+              <a:tr h="444500">
+                <a:tc>
+                  <a:txBody>
+                    <a:bodyPr wrap="square"/>
+                    <a:lstStyle/>
+                    <a:p>
+                      <a:r>
+                        <a:rPr sz="1600" b="0">
+                          <a:solidFill>
+                            <a:srgbClr val="191D2E"/>
+                          </a:solidFill>
+                          <a:latin typeface="Courier New"/>
+                        </a:rPr>
+                        <a:t>Branche</a:t>
+                      </a:r>
+                    </a:p>
+                  </a:txBody>
+                  <a:tcPr>
+                    <a:solidFill>
+                      <a:srgbClr val="F0F0F5"/>
                     </a:solidFill>
                   </a:tcPr>
                 </a:tc>
@@ -6900,43 +8795,43 @@
                     <a:lstStyle/>
                     <a:p>
                       <a:r>
-                        <a:rPr sz="1100" b="1">
+                        <a:rPr sz="1600" b="0">
                           <a:solidFill>
-                            <a:srgbClr val="FFFFFF"/>
+                            <a:srgbClr val="191D2E"/>
                           </a:solidFill>
-                          <a:latin typeface="Arial"/>
+                          <a:latin typeface="Courier New"/>
                         </a:rPr>
-                        <a:t>Beispiele im Firmenkunden-Jahresgespräch</a:t>
+                        <a:t>Metallverarbeitung / Lohnfertigung</a:t>
                       </a:r>
                     </a:p>
                   </a:txBody>
                   <a:tcPr>
                     <a:solidFill>
-                      <a:srgbClr val="003DA5"/>
+                      <a:srgbClr val="F0F0F5"/>
                     </a:solidFill>
                   </a:tcPr>
                 </a:tc>
               </a:tr>
-              <a:tr h="475488">
+              <a:tr h="444500">
                 <a:tc>
                   <a:txBody>
                     <a:bodyPr wrap="square"/>
                     <a:lstStyle/>
                     <a:p>
                       <a:r>
-                        <a:rPr sz="1100" b="0">
+                        <a:rPr sz="1600" b="0">
                           <a:solidFill>
-                            <a:srgbClr val="1A1A1A"/>
+                            <a:srgbClr val="191D2E"/>
                           </a:solidFill>
-                          <a:latin typeface="Arial"/>
+                          <a:latin typeface="Courier New"/>
                         </a:rPr>
-                        <a:t>S – Situation</a:t>
+                        <a:t>Umsatz</a:t>
                       </a:r>
                     </a:p>
                   </a:txBody>
                   <a:tcPr>
                     <a:solidFill>
-                      <a:srgbClr val="FFFFFF"/>
+                      <a:srgbClr val="F8F8FA"/>
                     </a:solidFill>
                   </a:tcPr>
                 </a:tc>
@@ -6946,19 +8841,43 @@
                     <a:lstStyle/>
                     <a:p>
                       <a:r>
-                        <a:rPr sz="1100" b="0">
+                        <a:rPr sz="1600" b="0">
                           <a:solidFill>
-                            <a:srgbClr val="1A1A1A"/>
+                            <a:srgbClr val="191D2E"/>
                           </a:solidFill>
-                          <a:latin typeface="Arial"/>
+                          <a:latin typeface="Courier New"/>
                         </a:rPr>
-                        <a:t>IST-Stand erheben; Kontext verstehen</a:t>
+                        <a:t>3,2 Mio. EUR (Vorjahr 2,9 Mio. EUR)</a:t>
                       </a:r>
                     </a:p>
                   </a:txBody>
                   <a:tcPr>
                     <a:solidFill>
-                      <a:srgbClr val="FFFFFF"/>
+                      <a:srgbClr val="F8F8FA"/>
+                    </a:solidFill>
+                  </a:tcPr>
+                </a:tc>
+              </a:tr>
+              <a:tr h="444500">
+                <a:tc>
+                  <a:txBody>
+                    <a:bodyPr wrap="square"/>
+                    <a:lstStyle/>
+                    <a:p>
+                      <a:r>
+                        <a:rPr sz="1600" b="0">
+                          <a:solidFill>
+                            <a:srgbClr val="191D2E"/>
+                          </a:solidFill>
+                          <a:latin typeface="Courier New"/>
+                        </a:rPr>
+                        <a:t>Mitarbeiter</a:t>
+                      </a:r>
+                    </a:p>
+                  </a:txBody>
+                  <a:tcPr>
+                    <a:solidFill>
+                      <a:srgbClr val="F0F0F5"/>
                     </a:solidFill>
                   </a:tcPr>
                 </a:tc>
@@ -6968,19 +8887,43 @@
                     <a:lstStyle/>
                     <a:p>
                       <a:r>
-                        <a:rPr sz="1100" b="0">
+                        <a:rPr sz="1600" b="0">
                           <a:solidFill>
-                            <a:srgbClr val="1A1A1A"/>
+                            <a:srgbClr val="191D2E"/>
                           </a:solidFill>
-                          <a:latin typeface="Arial"/>
+                          <a:latin typeface="Courier New"/>
                         </a:rPr>
-                        <a:t>Zu Beginn; sparsam – bekannte Fakten nicht abfragen, sondern kommentieren und ergänzen</a:t>
+                        <a:t>14 Personen (davon 10 gewerblich)</a:t>
                       </a:r>
                     </a:p>
                   </a:txBody>
                   <a:tcPr>
                     <a:solidFill>
-                      <a:srgbClr val="FFFFFF"/>
+                      <a:srgbClr val="F0F0F5"/>
+                    </a:solidFill>
+                  </a:tcPr>
+                </a:tc>
+              </a:tr>
+              <a:tr h="444500">
+                <a:tc>
+                  <a:txBody>
+                    <a:bodyPr wrap="square"/>
+                    <a:lstStyle/>
+                    <a:p>
+                      <a:r>
+                        <a:rPr sz="1600" b="0">
+                          <a:solidFill>
+                            <a:srgbClr val="191D2E"/>
+                          </a:solidFill>
+                          <a:latin typeface="Courier New"/>
+                        </a:rPr>
+                        <a:t>Geschäftsführer</a:t>
+                      </a:r>
+                    </a:p>
+                  </a:txBody>
+                  <a:tcPr>
+                    <a:solidFill>
+                      <a:srgbClr val="F8F8FA"/>
                     </a:solidFill>
                   </a:tcPr>
                 </a:tc>
@@ -6990,43 +8933,43 @@
                     <a:lstStyle/>
                     <a:p>
                       <a:r>
-                        <a:rPr sz="1100" b="0">
+                        <a:rPr sz="1600" b="0">
                           <a:solidFill>
-                            <a:srgbClr val="1A1A1A"/>
+                            <a:srgbClr val="191D2E"/>
                           </a:solidFill>
-                          <a:latin typeface="Arial"/>
+                          <a:latin typeface="Courier New"/>
                         </a:rPr>
-                        <a:t>Richtig: „Sie hatten letztes Jahr +10 % Umsatz – was war der Haupttreiber?" (zeigt Vorbereitung, öffnet Gespräch) · „Welche Märkte haben Sie seitdem neu erschlossen?" · Falsch im Jahresgespräch: „Wie hat sich Ihr Umsatz im letzten Jahr entwickelt?" (der Berater hat die Bilanz vor sich – wirkt unvorbereitet)</a:t>
+                        <a:t>Florian Maurer, 54 Jahre</a:t>
                       </a:r>
                     </a:p>
                   </a:txBody>
                   <a:tcPr>
                     <a:solidFill>
-                      <a:srgbClr val="FFFFFF"/>
+                      <a:srgbClr val="F8F8FA"/>
                     </a:solidFill>
                   </a:tcPr>
                 </a:tc>
               </a:tr>
-              <a:tr h="475488">
+              <a:tr h="444500">
                 <a:tc>
                   <a:txBody>
                     <a:bodyPr wrap="square"/>
                     <a:lstStyle/>
                     <a:p>
                       <a:r>
-                        <a:rPr sz="1100" b="0">
+                        <a:rPr sz="1600" b="0">
                           <a:solidFill>
-                            <a:srgbClr val="1A1A1A"/>
+                            <a:srgbClr val="191D2E"/>
                           </a:solidFill>
-                          <a:latin typeface="Arial"/>
+                          <a:latin typeface="Courier New"/>
                         </a:rPr>
-                        <a:t>P – Problem</a:t>
+                        <a:t>Bankverbindung</a:t>
                       </a:r>
                     </a:p>
                   </a:txBody>
                   <a:tcPr>
                     <a:solidFill>
-                      <a:srgbClr val="F4F6FA"/>
+                      <a:srgbClr val="F0F0F5"/>
                     </a:solidFill>
                   </a:tcPr>
                 </a:tc>
@@ -7036,19 +8979,43 @@
                     <a:lstStyle/>
                     <a:p>
                       <a:r>
-                        <a:rPr sz="1100" b="0">
+                        <a:rPr sz="1600" b="0">
                           <a:solidFill>
-                            <a:srgbClr val="1A1A1A"/>
+                            <a:srgbClr val="191D2E"/>
                           </a:solidFill>
-                          <a:latin typeface="Arial"/>
+                          <a:latin typeface="Courier New"/>
                         </a:rPr>
-                        <a:t>Herausforderungen identifizieren; Schmerzen sichtbar machen</a:t>
+                        <a:t>VR-Bank Musterregion eG, Kontokorrentlinie 250 TEUR</a:t>
                       </a:r>
                     </a:p>
                   </a:txBody>
                   <a:tcPr>
                     <a:solidFill>
-                      <a:srgbClr val="F4F6FA"/>
+                      <a:srgbClr val="F0F0F5"/>
+                    </a:solidFill>
+                  </a:tcPr>
+                </a:tc>
+              </a:tr>
+              <a:tr h="444500">
+                <a:tc>
+                  <a:txBody>
+                    <a:bodyPr wrap="square"/>
+                    <a:lstStyle/>
+                    <a:p>
+                      <a:r>
+                        <a:rPr sz="1600" b="0">
+                          <a:solidFill>
+                            <a:srgbClr val="191D2E"/>
+                          </a:solidFill>
+                          <a:latin typeface="Courier New"/>
+                        </a:rPr>
+                        <a:t>Aktuelle Situation</a:t>
+                      </a:r>
+                    </a:p>
+                  </a:txBody>
+                  <a:tcPr>
+                    <a:solidFill>
+                      <a:srgbClr val="F8F8FA"/>
                     </a:solidFill>
                   </a:tcPr>
                 </a:tc>
@@ -7058,221 +9025,19 @@
                     <a:lstStyle/>
                     <a:p>
                       <a:r>
-                        <a:rPr sz="1100" b="0">
+                        <a:rPr sz="1600" b="0">
                           <a:solidFill>
-                            <a:srgbClr val="1A1A1A"/>
+                            <a:srgbClr val="191D2E"/>
                           </a:solidFill>
-                          <a:latin typeface="Arial"/>
+                          <a:latin typeface="Courier New"/>
                         </a:rPr>
-                        <a:t>Nach dem IST-Stand; aktiv suchen</a:t>
+                        <a:t>Jahresgespräch nach Bilanzeinreichung 2024. Eigenkapitalquote 24 %. Umsatzanstieg +10 % durch neuen Großkunden (Automotive Tier 2).</a:t>
                       </a:r>
                     </a:p>
                   </a:txBody>
                   <a:tcPr>
                     <a:solidFill>
-                      <a:srgbClr val="F4F6FA"/>
-                    </a:solidFill>
-                  </a:tcPr>
-                </a:tc>
-                <a:tc>
-                  <a:txBody>
-                    <a:bodyPr wrap="square"/>
-                    <a:lstStyle/>
-                    <a:p>
-                      <a:r>
-                        <a:rPr sz="1100" b="0">
-                          <a:solidFill>
-                            <a:srgbClr val="1A1A1A"/>
-                          </a:solidFill>
-                          <a:latin typeface="Arial"/>
-                        </a:rPr>
-                        <a:t>„Wo haben Sie die größten Planungsunsicherheiten?" „Was bereitet Ihnen im Tagesgeschäft am meisten Sorgen?"</a:t>
-                      </a:r>
-                    </a:p>
-                  </a:txBody>
-                  <a:tcPr>
-                    <a:solidFill>
-                      <a:srgbClr val="F4F6FA"/>
-                    </a:solidFill>
-                  </a:tcPr>
-                </a:tc>
-              </a:tr>
-              <a:tr h="475488">
-                <a:tc>
-                  <a:txBody>
-                    <a:bodyPr wrap="square"/>
-                    <a:lstStyle/>
-                    <a:p>
-                      <a:r>
-                        <a:rPr sz="1100" b="0">
-                          <a:solidFill>
-                            <a:srgbClr val="1A1A1A"/>
-                          </a:solidFill>
-                          <a:latin typeface="Arial"/>
-                        </a:rPr>
-                        <a:t>I – Implication</a:t>
-                      </a:r>
-                    </a:p>
-                  </a:txBody>
-                  <a:tcPr>
-                    <a:solidFill>
-                      <a:srgbClr val="FFFFFF"/>
-                    </a:solidFill>
-                  </a:tcPr>
-                </a:tc>
-                <a:tc>
-                  <a:txBody>
-                    <a:bodyPr wrap="square"/>
-                    <a:lstStyle/>
-                    <a:p>
-                      <a:r>
-                        <a:rPr sz="1100" b="0">
-                          <a:solidFill>
-                            <a:srgbClr val="1A1A1A"/>
-                          </a:solidFill>
-                          <a:latin typeface="Arial"/>
-                        </a:rPr>
-                        <a:t>Konsequenzen und Bedeutung der Probleme verdeutlichen; Problemdruck erhöhen</a:t>
-                      </a:r>
-                    </a:p>
-                  </a:txBody>
-                  <a:tcPr>
-                    <a:solidFill>
-                      <a:srgbClr val="FFFFFF"/>
-                    </a:solidFill>
-                  </a:tcPr>
-                </a:tc>
-                <a:tc>
-                  <a:txBody>
-                    <a:bodyPr wrap="square"/>
-                    <a:lstStyle/>
-                    <a:p>
-                      <a:r>
-                        <a:rPr sz="1100" b="0">
-                          <a:solidFill>
-                            <a:srgbClr val="1A1A1A"/>
-                          </a:solidFill>
-                          <a:latin typeface="Arial"/>
-                        </a:rPr>
-                        <a:t>Wenn Problem benannt; vor Lösungspräsentation</a:t>
-                      </a:r>
-                    </a:p>
-                  </a:txBody>
-                  <a:tcPr>
-                    <a:solidFill>
-                      <a:srgbClr val="FFFFFF"/>
-                    </a:solidFill>
-                  </a:tcPr>
-                </a:tc>
-                <a:tc>
-                  <a:txBody>
-                    <a:bodyPr wrap="square"/>
-                    <a:lstStyle/>
-                    <a:p>
-                      <a:r>
-                        <a:rPr sz="1100" b="0">
-                          <a:solidFill>
-                            <a:srgbClr val="1A1A1A"/>
-                          </a:solidFill>
-                          <a:latin typeface="Arial"/>
-                        </a:rPr>
-                        <a:t>„Was würde das für Ihre Mitarbeiter bedeuten, wenn …?" „Welche Auswirkungen hat das auf Ihre Investitionspläne?"</a:t>
-                      </a:r>
-                    </a:p>
-                  </a:txBody>
-                  <a:tcPr>
-                    <a:solidFill>
-                      <a:srgbClr val="FFFFFF"/>
-                    </a:solidFill>
-                  </a:tcPr>
-                </a:tc>
-              </a:tr>
-              <a:tr h="475488">
-                <a:tc>
-                  <a:txBody>
-                    <a:bodyPr wrap="square"/>
-                    <a:lstStyle/>
-                    <a:p>
-                      <a:r>
-                        <a:rPr sz="1100" b="0">
-                          <a:solidFill>
-                            <a:srgbClr val="1A1A1A"/>
-                          </a:solidFill>
-                          <a:latin typeface="Arial"/>
-                        </a:rPr>
-                        <a:t>N – Need-Payoff</a:t>
-                      </a:r>
-                    </a:p>
-                  </a:txBody>
-                  <a:tcPr>
-                    <a:solidFill>
-                      <a:srgbClr val="F4F6FA"/>
-                    </a:solidFill>
-                  </a:tcPr>
-                </a:tc>
-                <a:tc>
-                  <a:txBody>
-                    <a:bodyPr wrap="square"/>
-                    <a:lstStyle/>
-                    <a:p>
-                      <a:r>
-                        <a:rPr sz="1100" b="0">
-                          <a:solidFill>
-                            <a:srgbClr val="1A1A1A"/>
-                          </a:solidFill>
-                          <a:latin typeface="Arial"/>
-                        </a:rPr>
-                        <a:t>Nutzenwunsch des Kunden aktivieren; er formuliert die Lösung selbst</a:t>
-                      </a:r>
-                    </a:p>
-                  </a:txBody>
-                  <a:tcPr>
-                    <a:solidFill>
-                      <a:srgbClr val="F4F6FA"/>
-                    </a:solidFill>
-                  </a:tcPr>
-                </a:tc>
-                <a:tc>
-                  <a:txBody>
-                    <a:bodyPr wrap="square"/>
-                    <a:lstStyle/>
-                    <a:p>
-                      <a:r>
-                        <a:rPr sz="1100" b="0">
-                          <a:solidFill>
-                            <a:srgbClr val="1A1A1A"/>
-                          </a:solidFill>
-                          <a:latin typeface="Arial"/>
-                        </a:rPr>
-                        <a:t>Wenn Problemdruck spürbar ist</a:t>
-                      </a:r>
-                    </a:p>
-                  </a:txBody>
-                  <a:tcPr>
-                    <a:solidFill>
-                      <a:srgbClr val="F4F6FA"/>
-                    </a:solidFill>
-                  </a:tcPr>
-                </a:tc>
-                <a:tc>
-                  <a:txBody>
-                    <a:bodyPr wrap="square"/>
-                    <a:lstStyle/>
-                    <a:p>
-                      <a:r>
-                        <a:rPr sz="1100" b="0">
-                          <a:solidFill>
-                            <a:srgbClr val="1A1A1A"/>
-                          </a:solidFill>
-                          <a:latin typeface="Arial"/>
-                        </a:rPr>
-                        <a:t>„Was wäre für Sie der Wert einer verbindlichen Liquiditätslinie?" „Wie wichtig wäre es, das bis Jahresende geregelt zu haben?"</a:t>
-                      </a:r>
-                    </a:p>
-                  </a:txBody>
-                  <a:tcPr>
-                    <a:solidFill>
-                      <a:srgbClr val="F4F6FA"/>
+                      <a:srgbClr val="F8F8FA"/>
                     </a:solidFill>
                   </a:tcPr>
                 </a:tc>
@@ -7295,7 +9060,7 @@
     <p:bg>
       <p:bgPr>
         <a:solidFill>
-          <a:srgbClr val="1A1A1A"/>
+          <a:srgbClr val="F8F8FA"/>
         </a:solidFill>
         <a:effectLst/>
       </p:bgPr>
@@ -7309,20 +9074,160 @@
       <p:grpSpPr/>
       <p:sp>
         <p:nvSpPr>
-          <p:cNvPr id="2" name="Rectangle 1"/>
+          <p:cNvPr id="2" name="TextBox 1"/>
+          <p:cNvSpPr txBox="1"/>
+          <p:nvPr/>
+        </p:nvSpPr>
+        <p:spPr>
+          <a:xfrm>
+            <a:off x="609600" y="304800"/>
+            <a:ext cx="2540000" cy="279400"/>
+          </a:xfrm>
+          <a:prstGeom prst="rect">
+            <a:avLst/>
+          </a:prstGeom>
+          <a:noFill/>
+        </p:spPr>
+        <p:txBody>
+          <a:bodyPr wrap="square">
+            <a:spAutoFit/>
+          </a:bodyPr>
+          <a:lstStyle/>
+          <a:p>
+            <a:pPr algn="l"/>
+            <a:r>
+              <a:rPr sz="1600" b="1" i="0">
+                <a:solidFill>
+                  <a:srgbClr val="191D2E"/>
+                </a:solidFill>
+                <a:latin typeface="Arial"/>
+              </a:rPr>
+              <a:t>FKB  Campus</a:t>
+            </a:r>
+          </a:p>
+        </p:txBody>
+      </p:sp>
+      <p:sp>
+        <p:nvSpPr>
+          <p:cNvPr id="3" name="TextBox 2"/>
+          <p:cNvSpPr txBox="1"/>
+          <p:nvPr/>
+        </p:nvSpPr>
+        <p:spPr>
+          <a:xfrm>
+            <a:off x="0" y="304800"/>
+            <a:ext cx="11582400" cy="279400"/>
+          </a:xfrm>
+          <a:prstGeom prst="rect">
+            <a:avLst/>
+          </a:prstGeom>
+          <a:noFill/>
+        </p:spPr>
+        <p:txBody>
+          <a:bodyPr wrap="square">
+            <a:spAutoFit/>
+          </a:bodyPr>
+          <a:lstStyle/>
+          <a:p>
+            <a:pPr algn="r"/>
+            <a:r>
+              <a:rPr sz="1300" b="0" i="0" spc="100">
+                <a:solidFill>
+                  <a:srgbClr val="7B7FA0"/>
+                </a:solidFill>
+                <a:latin typeface="Courier New"/>
+              </a:rPr>
+              <a:t>§ I · MODULINHALTE</a:t>
+            </a:r>
+          </a:p>
+        </p:txBody>
+      </p:sp>
+      <p:sp>
+        <p:nvSpPr>
+          <p:cNvPr id="4" name="TextBox 3"/>
+          <p:cNvSpPr txBox="1"/>
+          <p:nvPr/>
+        </p:nvSpPr>
+        <p:spPr>
+          <a:xfrm>
+            <a:off x="0" y="6350000"/>
+            <a:ext cx="11582400" cy="228600"/>
+          </a:xfrm>
+          <a:prstGeom prst="rect">
+            <a:avLst/>
+          </a:prstGeom>
+          <a:noFill/>
+        </p:spPr>
+        <p:txBody>
+          <a:bodyPr wrap="square">
+            <a:spAutoFit/>
+          </a:bodyPr>
+          <a:lstStyle/>
+          <a:p>
+            <a:pPr algn="r"/>
+            <a:r>
+              <a:rPr sz="1300" b="0" i="0">
+                <a:solidFill>
+                  <a:srgbClr val="7B7FA0"/>
+                </a:solidFill>
+                <a:latin typeface="Courier New"/>
+              </a:rPr>
+              <a:t>07 / 12</a:t>
+            </a:r>
+          </a:p>
+        </p:txBody>
+      </p:sp>
+      <p:sp>
+        <p:nvSpPr>
+          <p:cNvPr id="5" name="TextBox 4"/>
+          <p:cNvSpPr txBox="1"/>
+          <p:nvPr/>
+        </p:nvSpPr>
+        <p:spPr>
+          <a:xfrm>
+            <a:off x="609600" y="889000"/>
+            <a:ext cx="10972800" cy="1397000"/>
+          </a:xfrm>
+          <a:prstGeom prst="rect">
+            <a:avLst/>
+          </a:prstGeom>
+          <a:noFill/>
+        </p:spPr>
+        <p:txBody>
+          <a:bodyPr wrap="square">
+            <a:spAutoFit/>
+          </a:bodyPr>
+          <a:lstStyle/>
+          <a:p>
+            <a:pPr algn="l"/>
+            <a:r>
+              <a:rPr sz="7200" b="0" i="0">
+                <a:solidFill>
+                  <a:srgbClr val="191D2E"/>
+                </a:solidFill>
+                <a:latin typeface="Georgia"/>
+              </a:rPr>
+              <a:t>Bekannte Bedarfe (sichtbar)</a:t>
+            </a:r>
+          </a:p>
+        </p:txBody>
+      </p:sp>
+      <p:sp>
+        <p:nvSpPr>
+          <p:cNvPr id="6" name="Rectangle 5"/>
           <p:cNvSpPr/>
           <p:nvPr/>
         </p:nvSpPr>
         <p:spPr>
           <a:xfrm>
-            <a:off x="0" y="0"/>
-            <a:ext cx="73152" cy="6858000"/>
+            <a:off x="609600" y="2286000"/>
+            <a:ext cx="10972800" cy="6350"/>
           </a:xfrm>
           <a:prstGeom prst="rect">
             <a:avLst/>
           </a:prstGeom>
           <a:solidFill>
-            <a:srgbClr val="E05B00"/>
+            <a:srgbClr val="191D2E"/>
           </a:solidFill>
           <a:ln>
             <a:noFill/>
@@ -7352,14 +9257,14 @@
       </p:sp>
       <p:sp>
         <p:nvSpPr>
-          <p:cNvPr id="3" name="TextBox 2"/>
-          <p:cNvSpPr txBox="1"/>
-          <p:nvPr/>
-        </p:nvSpPr>
-        <p:spPr>
-          <a:xfrm>
-            <a:off x="365760" y="2011680"/>
-            <a:ext cx="11430000" cy="2011680"/>
+          <p:cNvPr id="7" name="TextBox 6"/>
+          <p:cNvSpPr txBox="1"/>
+          <p:nvPr/>
+        </p:nvSpPr>
+        <p:spPr>
+          <a:xfrm>
+            <a:off x="609600" y="2438400"/>
+            <a:ext cx="304800" cy="355600"/>
           </a:xfrm>
           <a:prstGeom prst="rect">
             <a:avLst/>
@@ -7374,13 +9279,118 @@
           <a:p>
             <a:pPr algn="l"/>
             <a:r>
-              <a:rPr sz="3600" b="1" i="0">
-                <a:solidFill>
-                  <a:srgbClr val="FFFFFF"/>
-                </a:solidFill>
-                <a:latin typeface="Arial"/>
-              </a:rPr>
-              <a:t>4.3 Praxiscase: Florian Maurer, Metallbau GmbH &amp; Co. KG</a:t>
+              <a:rPr sz="2800" b="0" i="0">
+                <a:solidFill>
+                  <a:srgbClr val="1F2B56"/>
+                </a:solidFill>
+                <a:latin typeface="Georgia"/>
+              </a:rPr>
+              <a:t>–</a:t>
+            </a:r>
+          </a:p>
+        </p:txBody>
+      </p:sp>
+      <p:sp>
+        <p:nvSpPr>
+          <p:cNvPr id="8" name="TextBox 7"/>
+          <p:cNvSpPr txBox="1"/>
+          <p:nvPr/>
+        </p:nvSpPr>
+        <p:spPr>
+          <a:xfrm>
+            <a:off x="1016000" y="2413000"/>
+            <a:ext cx="9906000" cy="571500"/>
+          </a:xfrm>
+          <a:prstGeom prst="rect">
+            <a:avLst/>
+          </a:prstGeom>
+          <a:noFill/>
+        </p:spPr>
+        <p:txBody>
+          <a:bodyPr wrap="square">
+            <a:spAutoFit/>
+          </a:bodyPr>
+          <a:lstStyle/>
+          <a:p>
+            <a:pPr algn="l"/>
+            <a:r>
+              <a:rPr sz="2600" b="0" i="0">
+                <a:solidFill>
+                  <a:srgbClr val="191D2E"/>
+                </a:solidFill>
+                <a:latin typeface="Georgia"/>
+              </a:rPr>
+              <a:t>Maschinenerneuerung: Zwei Drehmaschinen (Investitionsvolumen ca. 180 TEUR) geplant</a:t>
+            </a:r>
+          </a:p>
+        </p:txBody>
+      </p:sp>
+      <p:sp>
+        <p:nvSpPr>
+          <p:cNvPr id="9" name="TextBox 8"/>
+          <p:cNvSpPr txBox="1"/>
+          <p:nvPr/>
+        </p:nvSpPr>
+        <p:spPr>
+          <a:xfrm>
+            <a:off x="609600" y="3073400"/>
+            <a:ext cx="304800" cy="355600"/>
+          </a:xfrm>
+          <a:prstGeom prst="rect">
+            <a:avLst/>
+          </a:prstGeom>
+          <a:noFill/>
+        </p:spPr>
+        <p:txBody>
+          <a:bodyPr wrap="square">
+            <a:spAutoFit/>
+          </a:bodyPr>
+          <a:lstStyle/>
+          <a:p>
+            <a:pPr algn="l"/>
+            <a:r>
+              <a:rPr sz="2800" b="0" i="0">
+                <a:solidFill>
+                  <a:srgbClr val="1F2B56"/>
+                </a:solidFill>
+                <a:latin typeface="Georgia"/>
+              </a:rPr>
+              <a:t>–</a:t>
+            </a:r>
+          </a:p>
+        </p:txBody>
+      </p:sp>
+      <p:sp>
+        <p:nvSpPr>
+          <p:cNvPr id="10" name="TextBox 9"/>
+          <p:cNvSpPr txBox="1"/>
+          <p:nvPr/>
+        </p:nvSpPr>
+        <p:spPr>
+          <a:xfrm>
+            <a:off x="1016000" y="3048000"/>
+            <a:ext cx="9906000" cy="571500"/>
+          </a:xfrm>
+          <a:prstGeom prst="rect">
+            <a:avLst/>
+          </a:prstGeom>
+          <a:noFill/>
+        </p:spPr>
+        <p:txBody>
+          <a:bodyPr wrap="square">
+            <a:spAutoFit/>
+          </a:bodyPr>
+          <a:lstStyle/>
+          <a:p>
+            <a:pPr algn="l"/>
+            <a:r>
+              <a:rPr sz="2600" b="0" i="0">
+                <a:solidFill>
+                  <a:srgbClr val="191D2E"/>
+                </a:solidFill>
+                <a:latin typeface="Georgia"/>
+              </a:rPr>
+              <a:t>Erweiterung der Kontokorrentlinie auf 400 TEUR für Auftragsvorfinanzierung</a:t>
             </a:r>
           </a:p>
         </p:txBody>
@@ -7399,7 +9409,7 @@
     <p:bg>
       <p:bgPr>
         <a:solidFill>
-          <a:srgbClr val="FFFFFF"/>
+          <a:srgbClr val="F8F8FA"/>
         </a:solidFill>
         <a:effectLst/>
       </p:bgPr>
@@ -7413,20 +9423,160 @@
       <p:grpSpPr/>
       <p:sp>
         <p:nvSpPr>
-          <p:cNvPr id="2" name="Rectangle 1"/>
+          <p:cNvPr id="2" name="TextBox 1"/>
+          <p:cNvSpPr txBox="1"/>
+          <p:nvPr/>
+        </p:nvSpPr>
+        <p:spPr>
+          <a:xfrm>
+            <a:off x="609600" y="304800"/>
+            <a:ext cx="2540000" cy="279400"/>
+          </a:xfrm>
+          <a:prstGeom prst="rect">
+            <a:avLst/>
+          </a:prstGeom>
+          <a:noFill/>
+        </p:spPr>
+        <p:txBody>
+          <a:bodyPr wrap="square">
+            <a:spAutoFit/>
+          </a:bodyPr>
+          <a:lstStyle/>
+          <a:p>
+            <a:pPr algn="l"/>
+            <a:r>
+              <a:rPr sz="1600" b="1" i="0">
+                <a:solidFill>
+                  <a:srgbClr val="191D2E"/>
+                </a:solidFill>
+                <a:latin typeface="Arial"/>
+              </a:rPr>
+              <a:t>FKB  Campus</a:t>
+            </a:r>
+          </a:p>
+        </p:txBody>
+      </p:sp>
+      <p:sp>
+        <p:nvSpPr>
+          <p:cNvPr id="3" name="TextBox 2"/>
+          <p:cNvSpPr txBox="1"/>
+          <p:nvPr/>
+        </p:nvSpPr>
+        <p:spPr>
+          <a:xfrm>
+            <a:off x="0" y="304800"/>
+            <a:ext cx="11582400" cy="279400"/>
+          </a:xfrm>
+          <a:prstGeom prst="rect">
+            <a:avLst/>
+          </a:prstGeom>
+          <a:noFill/>
+        </p:spPr>
+        <p:txBody>
+          <a:bodyPr wrap="square">
+            <a:spAutoFit/>
+          </a:bodyPr>
+          <a:lstStyle/>
+          <a:p>
+            <a:pPr algn="r"/>
+            <a:r>
+              <a:rPr sz="1300" b="0" i="0" spc="100">
+                <a:solidFill>
+                  <a:srgbClr val="7B7FA0"/>
+                </a:solidFill>
+                <a:latin typeface="Courier New"/>
+              </a:rPr>
+              <a:t>§ I · MODULINHALTE</a:t>
+            </a:r>
+          </a:p>
+        </p:txBody>
+      </p:sp>
+      <p:sp>
+        <p:nvSpPr>
+          <p:cNvPr id="4" name="TextBox 3"/>
+          <p:cNvSpPr txBox="1"/>
+          <p:nvPr/>
+        </p:nvSpPr>
+        <p:spPr>
+          <a:xfrm>
+            <a:off x="0" y="6350000"/>
+            <a:ext cx="11582400" cy="228600"/>
+          </a:xfrm>
+          <a:prstGeom prst="rect">
+            <a:avLst/>
+          </a:prstGeom>
+          <a:noFill/>
+        </p:spPr>
+        <p:txBody>
+          <a:bodyPr wrap="square">
+            <a:spAutoFit/>
+          </a:bodyPr>
+          <a:lstStyle/>
+          <a:p>
+            <a:pPr algn="r"/>
+            <a:r>
+              <a:rPr sz="1300" b="0" i="0">
+                <a:solidFill>
+                  <a:srgbClr val="7B7FA0"/>
+                </a:solidFill>
+                <a:latin typeface="Courier New"/>
+              </a:rPr>
+              <a:t>08 / 12</a:t>
+            </a:r>
+          </a:p>
+        </p:txBody>
+      </p:sp>
+      <p:sp>
+        <p:nvSpPr>
+          <p:cNvPr id="5" name="TextBox 4"/>
+          <p:cNvSpPr txBox="1"/>
+          <p:nvPr/>
+        </p:nvSpPr>
+        <p:spPr>
+          <a:xfrm>
+            <a:off x="609600" y="889000"/>
+            <a:ext cx="10972800" cy="1397000"/>
+          </a:xfrm>
+          <a:prstGeom prst="rect">
+            <a:avLst/>
+          </a:prstGeom>
+          <a:noFill/>
+        </p:spPr>
+        <p:txBody>
+          <a:bodyPr wrap="square">
+            <a:spAutoFit/>
+          </a:bodyPr>
+          <a:lstStyle/>
+          <a:p>
+            <a:pPr algn="l"/>
+            <a:r>
+              <a:rPr sz="7200" b="0" i="0">
+                <a:solidFill>
+                  <a:srgbClr val="191D2E"/>
+                </a:solidFill>
+                <a:latin typeface="Georgia"/>
+              </a:rPr>
+              <a:t>Latente Bedarfe (nur dem Unternehmer bekannt – für Rollenspieler)</a:t>
+            </a:r>
+          </a:p>
+        </p:txBody>
+      </p:sp>
+      <p:sp>
+        <p:nvSpPr>
+          <p:cNvPr id="6" name="Rectangle 5"/>
           <p:cNvSpPr/>
           <p:nvPr/>
         </p:nvSpPr>
         <p:spPr>
           <a:xfrm>
-            <a:off x="0" y="0"/>
-            <a:ext cx="73152" cy="6858000"/>
+            <a:off x="609600" y="2286000"/>
+            <a:ext cx="10972800" cy="6350"/>
           </a:xfrm>
           <a:prstGeom prst="rect">
             <a:avLst/>
           </a:prstGeom>
           <a:solidFill>
-            <a:srgbClr val="003DA5"/>
+            <a:srgbClr val="191D2E"/>
           </a:solidFill>
           <a:ln>
             <a:noFill/>
@@ -7456,14 +9606,425 @@
       </p:sp>
       <p:sp>
         <p:nvSpPr>
+          <p:cNvPr id="7" name="TextBox 6"/>
+          <p:cNvSpPr txBox="1"/>
+          <p:nvPr/>
+        </p:nvSpPr>
+        <p:spPr>
+          <a:xfrm>
+            <a:off x="609600" y="2438400"/>
+            <a:ext cx="304800" cy="355600"/>
+          </a:xfrm>
+          <a:prstGeom prst="rect">
+            <a:avLst/>
+          </a:prstGeom>
+          <a:noFill/>
+        </p:spPr>
+        <p:txBody>
+          <a:bodyPr wrap="square">
+            <a:spAutoFit/>
+          </a:bodyPr>
+          <a:lstStyle/>
+          <a:p>
+            <a:pPr algn="l"/>
+            <a:r>
+              <a:rPr sz="2800" b="0" i="0">
+                <a:solidFill>
+                  <a:srgbClr val="1F2B56"/>
+                </a:solidFill>
+                <a:latin typeface="Georgia"/>
+              </a:rPr>
+              <a:t>–</a:t>
+            </a:r>
+          </a:p>
+        </p:txBody>
+      </p:sp>
+      <p:sp>
+        <p:nvSpPr>
+          <p:cNvPr id="8" name="TextBox 7"/>
+          <p:cNvSpPr txBox="1"/>
+          <p:nvPr/>
+        </p:nvSpPr>
+        <p:spPr>
+          <a:xfrm>
+            <a:off x="1016000" y="2413000"/>
+            <a:ext cx="9906000" cy="571500"/>
+          </a:xfrm>
+          <a:prstGeom prst="rect">
+            <a:avLst/>
+          </a:prstGeom>
+          <a:noFill/>
+        </p:spPr>
+        <p:txBody>
+          <a:bodyPr wrap="square">
+            <a:spAutoFit/>
+          </a:bodyPr>
+          <a:lstStyle/>
+          <a:p>
+            <a:pPr algn="l"/>
+            <a:r>
+              <a:rPr sz="2600" b="0" i="0">
+                <a:solidFill>
+                  <a:srgbClr val="191D2E"/>
+                </a:solidFill>
+                <a:latin typeface="Georgia"/>
+              </a:rPr>
+              <a:t>Nachfolge ungeklärt (echter latenter Bedarf): Sohn (26) zeigt kein Interesse; Maurer hat kein Testament, keinen Gesellschaftervertrag für den Todesfall. Maurer spricht nicht darüber, weil er das…</a:t>
+            </a:r>
+          </a:p>
+        </p:txBody>
+      </p:sp>
+      <p:sp>
+        <p:nvSpPr>
+          <p:cNvPr id="9" name="TextBox 8"/>
+          <p:cNvSpPr txBox="1"/>
+          <p:nvPr/>
+        </p:nvSpPr>
+        <p:spPr>
+          <a:xfrm>
+            <a:off x="609600" y="3073400"/>
+            <a:ext cx="304800" cy="355600"/>
+          </a:xfrm>
+          <a:prstGeom prst="rect">
+            <a:avLst/>
+          </a:prstGeom>
+          <a:noFill/>
+        </p:spPr>
+        <p:txBody>
+          <a:bodyPr wrap="square">
+            <a:spAutoFit/>
+          </a:bodyPr>
+          <a:lstStyle/>
+          <a:p>
+            <a:pPr algn="l"/>
+            <a:r>
+              <a:rPr sz="2800" b="0" i="0">
+                <a:solidFill>
+                  <a:srgbClr val="1F2B56"/>
+                </a:solidFill>
+                <a:latin typeface="Georgia"/>
+              </a:rPr>
+              <a:t>–</a:t>
+            </a:r>
+          </a:p>
+        </p:txBody>
+      </p:sp>
+      <p:sp>
+        <p:nvSpPr>
+          <p:cNvPr id="10" name="TextBox 9"/>
+          <p:cNvSpPr txBox="1"/>
+          <p:nvPr/>
+        </p:nvSpPr>
+        <p:spPr>
+          <a:xfrm>
+            <a:off x="1016000" y="3048000"/>
+            <a:ext cx="9906000" cy="571500"/>
+          </a:xfrm>
+          <a:prstGeom prst="rect">
+            <a:avLst/>
+          </a:prstGeom>
+          <a:noFill/>
+        </p:spPr>
+        <p:txBody>
+          <a:bodyPr wrap="square">
+            <a:spAutoFit/>
+          </a:bodyPr>
+          <a:lstStyle/>
+          <a:p>
+            <a:pPr algn="l"/>
+            <a:r>
+              <a:rPr sz="2600" b="0" i="0">
+                <a:solidFill>
+                  <a:srgbClr val="191D2E"/>
+                </a:solidFill>
+                <a:latin typeface="Georgia"/>
+              </a:rPr>
+              <a:t>Stille Beteiligung läuft aus (echter latenter Bedarf): Ein Schwager ist seit 2012 stiller Gesellschafter (80 TEUR). Die Beteiligung hat eine Kündigungsfrist bis Ende 2025; Maurer hat noch keine…</a:t>
+            </a:r>
+          </a:p>
+        </p:txBody>
+      </p:sp>
+      <p:sp>
+        <p:nvSpPr>
+          <p:cNvPr id="11" name="TextBox 10"/>
+          <p:cNvSpPr txBox="1"/>
+          <p:nvPr/>
+        </p:nvSpPr>
+        <p:spPr>
+          <a:xfrm>
+            <a:off x="609600" y="3708400"/>
+            <a:ext cx="304800" cy="355600"/>
+          </a:xfrm>
+          <a:prstGeom prst="rect">
+            <a:avLst/>
+          </a:prstGeom>
+          <a:noFill/>
+        </p:spPr>
+        <p:txBody>
+          <a:bodyPr wrap="square">
+            <a:spAutoFit/>
+          </a:bodyPr>
+          <a:lstStyle/>
+          <a:p>
+            <a:pPr algn="l"/>
+            <a:r>
+              <a:rPr sz="2800" b="0" i="0">
+                <a:solidFill>
+                  <a:srgbClr val="1F2B56"/>
+                </a:solidFill>
+                <a:latin typeface="Georgia"/>
+              </a:rPr>
+              <a:t>–</a:t>
+            </a:r>
+          </a:p>
+        </p:txBody>
+      </p:sp>
+      <p:sp>
+        <p:nvSpPr>
+          <p:cNvPr id="12" name="TextBox 11"/>
+          <p:cNvSpPr txBox="1"/>
+          <p:nvPr/>
+        </p:nvSpPr>
+        <p:spPr>
+          <a:xfrm>
+            <a:off x="1016000" y="3683000"/>
+            <a:ext cx="9906000" cy="571500"/>
+          </a:xfrm>
+          <a:prstGeom prst="rect">
+            <a:avLst/>
+          </a:prstGeom>
+          <a:noFill/>
+        </p:spPr>
+        <p:txBody>
+          <a:bodyPr wrap="square">
+            <a:spAutoFit/>
+          </a:bodyPr>
+          <a:lstStyle/>
+          <a:p>
+            <a:pPr algn="l"/>
+            <a:r>
+              <a:rPr sz="2600" b="0" i="0">
+                <a:solidFill>
+                  <a:srgbClr val="191D2E"/>
+                </a:solidFill>
+                <a:latin typeface="Georgia"/>
+              </a:rPr>
+              <a:t>Liquiditätsengpass (bekannt, aber nicht priorisiert): Der neue Großkunde zahlt mit 60 Tagen Ziel; bei Großaufträgen (&gt; 80 TEUR) entsteht Vorlauffinanzierungsbedarf. Maurer hält das für ein temporäres…</a:t>
+            </a:r>
+          </a:p>
+        </p:txBody>
+      </p:sp>
+      <p:sp>
+        <p:nvSpPr>
+          <p:cNvPr id="13" name="TextBox 12"/>
+          <p:cNvSpPr txBox="1"/>
+          <p:nvPr/>
+        </p:nvSpPr>
+        <p:spPr>
+          <a:xfrm>
+            <a:off x="609600" y="4343400"/>
+            <a:ext cx="304800" cy="355600"/>
+          </a:xfrm>
+          <a:prstGeom prst="rect">
+            <a:avLst/>
+          </a:prstGeom>
+          <a:noFill/>
+        </p:spPr>
+        <p:txBody>
+          <a:bodyPr wrap="square">
+            <a:spAutoFit/>
+          </a:bodyPr>
+          <a:lstStyle/>
+          <a:p>
+            <a:pPr algn="l"/>
+            <a:r>
+              <a:rPr sz="2800" b="0" i="0">
+                <a:solidFill>
+                  <a:srgbClr val="1F2B56"/>
+                </a:solidFill>
+                <a:latin typeface="Georgia"/>
+              </a:rPr>
+              <a:t>–</a:t>
+            </a:r>
+          </a:p>
+        </p:txBody>
+      </p:sp>
+      <p:sp>
+        <p:nvSpPr>
+          <p:cNvPr id="14" name="TextBox 13"/>
+          <p:cNvSpPr txBox="1"/>
+          <p:nvPr/>
+        </p:nvSpPr>
+        <p:spPr>
+          <a:xfrm>
+            <a:off x="1016000" y="4318000"/>
+            <a:ext cx="9906000" cy="571500"/>
+          </a:xfrm>
+          <a:prstGeom prst="rect">
+            <a:avLst/>
+          </a:prstGeom>
+          <a:noFill/>
+        </p:spPr>
+        <p:txBody>
+          <a:bodyPr wrap="square">
+            <a:spAutoFit/>
+          </a:bodyPr>
+          <a:lstStyle/>
+          <a:p>
+            <a:pPr algn="l"/>
+            <a:r>
+              <a:rPr sz="2600" b="0" i="0">
+                <a:solidFill>
+                  <a:srgbClr val="191D2E"/>
+                </a:solidFill>
+                <a:latin typeface="Georgia"/>
+              </a:rPr>
+              <a:t>Private Absicherung (latent): Florian Maurer hat seit Jahren keine BU-Versicherung mehr; private Krankenversicherung läuft als Einzelvertrag ohne Unternehmensbezug.</a:t>
+            </a:r>
+          </a:p>
+        </p:txBody>
+      </p:sp>
+    </p:spTree>
+  </p:cSld>
+  <p:clrMapOvr>
+    <a:masterClrMapping/>
+  </p:clrMapOvr>
+</p:sld>
+</file>
+
+<file path=ppt/slides/slide9.xml><?xml version="1.0" encoding="utf-8"?>
+<p:sld xmlns:a="http://schemas.openxmlformats.org/drawingml/2006/main" xmlns:p="http://schemas.openxmlformats.org/presentationml/2006/main" xmlns:r="http://schemas.openxmlformats.org/officeDocument/2006/relationships">
+  <p:cSld>
+    <p:bg>
+      <p:bgPr>
+        <a:solidFill>
+          <a:srgbClr val="F8F8FA"/>
+        </a:solidFill>
+        <a:effectLst/>
+      </p:bgPr>
+    </p:bg>
+    <p:spTree>
+      <p:nvGrpSpPr>
+        <p:cNvPr id="1" name=""/>
+        <p:cNvGrpSpPr/>
+        <p:nvPr/>
+      </p:nvGrpSpPr>
+      <p:grpSpPr/>
+      <p:sp>
+        <p:nvSpPr>
+          <p:cNvPr id="2" name="TextBox 1"/>
+          <p:cNvSpPr txBox="1"/>
+          <p:nvPr/>
+        </p:nvSpPr>
+        <p:spPr>
+          <a:xfrm>
+            <a:off x="609600" y="304800"/>
+            <a:ext cx="2540000" cy="279400"/>
+          </a:xfrm>
+          <a:prstGeom prst="rect">
+            <a:avLst/>
+          </a:prstGeom>
+          <a:noFill/>
+        </p:spPr>
+        <p:txBody>
+          <a:bodyPr wrap="square">
+            <a:spAutoFit/>
+          </a:bodyPr>
+          <a:lstStyle/>
+          <a:p>
+            <a:pPr algn="l"/>
+            <a:r>
+              <a:rPr sz="1600" b="1" i="0">
+                <a:solidFill>
+                  <a:srgbClr val="191D2E"/>
+                </a:solidFill>
+                <a:latin typeface="Arial"/>
+              </a:rPr>
+              <a:t>FKB  Campus</a:t>
+            </a:r>
+          </a:p>
+        </p:txBody>
+      </p:sp>
+      <p:sp>
+        <p:nvSpPr>
           <p:cNvPr id="3" name="TextBox 2"/>
           <p:cNvSpPr txBox="1"/>
           <p:nvPr/>
         </p:nvSpPr>
         <p:spPr>
           <a:xfrm>
-            <a:off x="228600" y="182880"/>
-            <a:ext cx="11430000" cy="320040"/>
+            <a:off x="0" y="304800"/>
+            <a:ext cx="11582400" cy="279400"/>
+          </a:xfrm>
+          <a:prstGeom prst="rect">
+            <a:avLst/>
+          </a:prstGeom>
+          <a:noFill/>
+        </p:spPr>
+        <p:txBody>
+          <a:bodyPr wrap="square">
+            <a:spAutoFit/>
+          </a:bodyPr>
+          <a:lstStyle/>
+          <a:p>
+            <a:pPr algn="r"/>
+            <a:r>
+              <a:rPr sz="1300" b="0" i="0" spc="100">
+                <a:solidFill>
+                  <a:srgbClr val="7B7FA0"/>
+                </a:solidFill>
+                <a:latin typeface="Courier New"/>
+              </a:rPr>
+              <a:t>§ I · MODULINHALTE</a:t>
+            </a:r>
+          </a:p>
+        </p:txBody>
+      </p:sp>
+      <p:sp>
+        <p:nvSpPr>
+          <p:cNvPr id="4" name="TextBox 3"/>
+          <p:cNvSpPr txBox="1"/>
+          <p:nvPr/>
+        </p:nvSpPr>
+        <p:spPr>
+          <a:xfrm>
+            <a:off x="0" y="6350000"/>
+            <a:ext cx="11582400" cy="228600"/>
+          </a:xfrm>
+          <a:prstGeom prst="rect">
+            <a:avLst/>
+          </a:prstGeom>
+          <a:noFill/>
+        </p:spPr>
+        <p:txBody>
+          <a:bodyPr wrap="square">
+            <a:spAutoFit/>
+          </a:bodyPr>
+          <a:lstStyle/>
+          <a:p>
+            <a:pPr algn="r"/>
+            <a:r>
+              <a:rPr sz="1300" b="0" i="0">
+                <a:solidFill>
+                  <a:srgbClr val="7B7FA0"/>
+                </a:solidFill>
+                <a:latin typeface="Courier New"/>
+              </a:rPr>
+              <a:t>09 / 12</a:t>
+            </a:r>
+          </a:p>
+        </p:txBody>
+      </p:sp>
+      <p:sp>
+        <p:nvSpPr>
+          <p:cNvPr id="5" name="TextBox 4"/>
+          <p:cNvSpPr txBox="1"/>
+          <p:nvPr/>
+        </p:nvSpPr>
+        <p:spPr>
+          <a:xfrm>
+            <a:off x="609600" y="889000"/>
+            <a:ext cx="10972800" cy="1397000"/>
           </a:xfrm>
           <a:prstGeom prst="rect">
             <a:avLst/>
@@ -7478,68 +10039,33 @@
           <a:p>
             <a:pPr algn="l"/>
             <a:r>
-              <a:rPr sz="900" b="0" i="0">
-                <a:solidFill>
-                  <a:srgbClr val="556575"/>
-                </a:solidFill>
-                <a:latin typeface="Arial"/>
-              </a:rPr>
-              <a:t>M10 · Modulinhalte</a:t>
-            </a:r>
-          </a:p>
-        </p:txBody>
-      </p:sp>
-      <p:sp>
-        <p:nvSpPr>
-          <p:cNvPr id="4" name="TextBox 3"/>
-          <p:cNvSpPr txBox="1"/>
-          <p:nvPr/>
-        </p:nvSpPr>
-        <p:spPr>
-          <a:xfrm>
-            <a:off x="365760" y="274320"/>
-            <a:ext cx="11430000" cy="777240"/>
-          </a:xfrm>
-          <a:prstGeom prst="rect">
-            <a:avLst/>
-          </a:prstGeom>
-          <a:noFill/>
-        </p:spPr>
-        <p:txBody>
-          <a:bodyPr wrap="square">
-            <a:spAutoFit/>
-          </a:bodyPr>
-          <a:lstStyle/>
-          <a:p>
-            <a:pPr algn="l"/>
-            <a:r>
-              <a:rPr sz="2200" b="1" i="0">
-                <a:solidFill>
-                  <a:srgbClr val="003DA5"/>
-                </a:solidFill>
-                <a:latin typeface="Arial"/>
-              </a:rPr>
-              <a:t>Unternehmensprofil (Berater-Information)</a:t>
-            </a:r>
-          </a:p>
-        </p:txBody>
-      </p:sp>
-      <p:sp>
-        <p:nvSpPr>
-          <p:cNvPr id="5" name="Rectangle 4"/>
+              <a:rPr sz="7200" b="0" i="0">
+                <a:solidFill>
+                  <a:srgbClr val="191D2E"/>
+                </a:solidFill>
+                <a:latin typeface="Georgia"/>
+              </a:rPr>
+              <a:t>Optionale Rollenspielvarianten (für erfahrene Gruppen oder zweite Runde)</a:t>
+            </a:r>
+          </a:p>
+        </p:txBody>
+      </p:sp>
+      <p:sp>
+        <p:nvSpPr>
+          <p:cNvPr id="6" name="Rectangle 5"/>
           <p:cNvSpPr/>
           <p:nvPr/>
         </p:nvSpPr>
         <p:spPr>
           <a:xfrm>
-            <a:off x="365760" y="1005840"/>
-            <a:ext cx="11430000" cy="27432"/>
+            <a:off x="609600" y="2286000"/>
+            <a:ext cx="10972800" cy="6350"/>
           </a:xfrm>
           <a:prstGeom prst="rect">
             <a:avLst/>
           </a:prstGeom>
           <a:solidFill>
-            <a:srgbClr val="D1D5DB"/>
+            <a:srgbClr val="191D2E"/>
           </a:solidFill>
           <a:ln>
             <a:noFill/>
@@ -7567,479 +10093,16 @@
           </a:p>
         </p:txBody>
       </p:sp>
-      <p:graphicFrame>
-        <p:nvGraphicFramePr>
-          <p:cNvPr id="6" name="Table 5"/>
-          <p:cNvGraphicFramePr>
-            <a:graphicFrameLocks noGrp="1"/>
-          </p:cNvGraphicFramePr>
-          <p:nvPr/>
-        </p:nvGraphicFramePr>
-        <p:xfrm>
-          <a:off x="365760" y="1143000"/>
-          <a:ext cx="11430000" cy="3803904"/>
-        </p:xfrm>
-        <a:graphic>
-          <a:graphicData uri="http://schemas.openxmlformats.org/drawingml/2006/table">
-            <a:tbl>
-              <a:tblPr firstRow="1" bandRow="1">
-                <a:tableStyleId>{5C22544A-7EE6-4342-B048-85BDC9FD1C3A}</a:tableStyleId>
-              </a:tblPr>
-              <a:tblGrid>
-                <a:gridCol w="5715000"/>
-                <a:gridCol w="5715000"/>
-              </a:tblGrid>
-              <a:tr h="475488">
-                <a:tc>
-                  <a:txBody>
-                    <a:bodyPr wrap="square"/>
-                    <a:lstStyle/>
-                    <a:p>
-                      <a:r>
-                        <a:rPr sz="1100" b="1">
-                          <a:solidFill>
-                            <a:srgbClr val="FFFFFF"/>
-                          </a:solidFill>
-                          <a:latin typeface="Arial"/>
-                        </a:rPr>
-                        <a:t>Merkmal</a:t>
-                      </a:r>
-                    </a:p>
-                  </a:txBody>
-                  <a:tcPr>
-                    <a:solidFill>
-                      <a:srgbClr val="003DA5"/>
-                    </a:solidFill>
-                  </a:tcPr>
-                </a:tc>
-                <a:tc>
-                  <a:txBody>
-                    <a:bodyPr wrap="square"/>
-                    <a:lstStyle/>
-                    <a:p>
-                      <a:r>
-                        <a:rPr sz="1100" b="1">
-                          <a:solidFill>
-                            <a:srgbClr val="FFFFFF"/>
-                          </a:solidFill>
-                          <a:latin typeface="Arial"/>
-                        </a:rPr>
-                        <a:t>Detail</a:t>
-                      </a:r>
-                    </a:p>
-                  </a:txBody>
-                  <a:tcPr>
-                    <a:solidFill>
-                      <a:srgbClr val="003DA5"/>
-                    </a:solidFill>
-                  </a:tcPr>
-                </a:tc>
-              </a:tr>
-              <a:tr h="475488">
-                <a:tc>
-                  <a:txBody>
-                    <a:bodyPr wrap="square"/>
-                    <a:lstStyle/>
-                    <a:p>
-                      <a:r>
-                        <a:rPr sz="1100" b="0">
-                          <a:solidFill>
-                            <a:srgbClr val="1A1A1A"/>
-                          </a:solidFill>
-                          <a:latin typeface="Arial"/>
-                        </a:rPr>
-                        <a:t>Unternehmen</a:t>
-                      </a:r>
-                    </a:p>
-                  </a:txBody>
-                  <a:tcPr>
-                    <a:solidFill>
-                      <a:srgbClr val="FFFFFF"/>
-                    </a:solidFill>
-                  </a:tcPr>
-                </a:tc>
-                <a:tc>
-                  <a:txBody>
-                    <a:bodyPr wrap="square"/>
-                    <a:lstStyle/>
-                    <a:p>
-                      <a:r>
-                        <a:rPr sz="1100" b="0">
-                          <a:solidFill>
-                            <a:srgbClr val="1A1A1A"/>
-                          </a:solidFill>
-                          <a:latin typeface="Arial"/>
-                        </a:rPr>
-                        <a:t>Maurer Metallbau GmbH &amp; Co. KG, Süddeutschland</a:t>
-                      </a:r>
-                    </a:p>
-                  </a:txBody>
-                  <a:tcPr>
-                    <a:solidFill>
-                      <a:srgbClr val="FFFFFF"/>
-                    </a:solidFill>
-                  </a:tcPr>
-                </a:tc>
-              </a:tr>
-              <a:tr h="475488">
-                <a:tc>
-                  <a:txBody>
-                    <a:bodyPr wrap="square"/>
-                    <a:lstStyle/>
-                    <a:p>
-                      <a:r>
-                        <a:rPr sz="1100" b="0">
-                          <a:solidFill>
-                            <a:srgbClr val="1A1A1A"/>
-                          </a:solidFill>
-                          <a:latin typeface="Arial"/>
-                        </a:rPr>
-                        <a:t>Branche</a:t>
-                      </a:r>
-                    </a:p>
-                  </a:txBody>
-                  <a:tcPr>
-                    <a:solidFill>
-                      <a:srgbClr val="F4F6FA"/>
-                    </a:solidFill>
-                  </a:tcPr>
-                </a:tc>
-                <a:tc>
-                  <a:txBody>
-                    <a:bodyPr wrap="square"/>
-                    <a:lstStyle/>
-                    <a:p>
-                      <a:r>
-                        <a:rPr sz="1100" b="0">
-                          <a:solidFill>
-                            <a:srgbClr val="1A1A1A"/>
-                          </a:solidFill>
-                          <a:latin typeface="Arial"/>
-                        </a:rPr>
-                        <a:t>Metallverarbeitung / Lohnfertigung</a:t>
-                      </a:r>
-                    </a:p>
-                  </a:txBody>
-                  <a:tcPr>
-                    <a:solidFill>
-                      <a:srgbClr val="F4F6FA"/>
-                    </a:solidFill>
-                  </a:tcPr>
-                </a:tc>
-              </a:tr>
-              <a:tr h="475488">
-                <a:tc>
-                  <a:txBody>
-                    <a:bodyPr wrap="square"/>
-                    <a:lstStyle/>
-                    <a:p>
-                      <a:r>
-                        <a:rPr sz="1100" b="0">
-                          <a:solidFill>
-                            <a:srgbClr val="1A1A1A"/>
-                          </a:solidFill>
-                          <a:latin typeface="Arial"/>
-                        </a:rPr>
-                        <a:t>Umsatz</a:t>
-                      </a:r>
-                    </a:p>
-                  </a:txBody>
-                  <a:tcPr>
-                    <a:solidFill>
-                      <a:srgbClr val="FFFFFF"/>
-                    </a:solidFill>
-                  </a:tcPr>
-                </a:tc>
-                <a:tc>
-                  <a:txBody>
-                    <a:bodyPr wrap="square"/>
-                    <a:lstStyle/>
-                    <a:p>
-                      <a:r>
-                        <a:rPr sz="1100" b="0">
-                          <a:solidFill>
-                            <a:srgbClr val="1A1A1A"/>
-                          </a:solidFill>
-                          <a:latin typeface="Arial"/>
-                        </a:rPr>
-                        <a:t>3,2 Mio. EUR (Vorjahr 2,9 Mio. EUR)</a:t>
-                      </a:r>
-                    </a:p>
-                  </a:txBody>
-                  <a:tcPr>
-                    <a:solidFill>
-                      <a:srgbClr val="FFFFFF"/>
-                    </a:solidFill>
-                  </a:tcPr>
-                </a:tc>
-              </a:tr>
-              <a:tr h="475488">
-                <a:tc>
-                  <a:txBody>
-                    <a:bodyPr wrap="square"/>
-                    <a:lstStyle/>
-                    <a:p>
-                      <a:r>
-                        <a:rPr sz="1100" b="0">
-                          <a:solidFill>
-                            <a:srgbClr val="1A1A1A"/>
-                          </a:solidFill>
-                          <a:latin typeface="Arial"/>
-                        </a:rPr>
-                        <a:t>Mitarbeiter</a:t>
-                      </a:r>
-                    </a:p>
-                  </a:txBody>
-                  <a:tcPr>
-                    <a:solidFill>
-                      <a:srgbClr val="F4F6FA"/>
-                    </a:solidFill>
-                  </a:tcPr>
-                </a:tc>
-                <a:tc>
-                  <a:txBody>
-                    <a:bodyPr wrap="square"/>
-                    <a:lstStyle/>
-                    <a:p>
-                      <a:r>
-                        <a:rPr sz="1100" b="0">
-                          <a:solidFill>
-                            <a:srgbClr val="1A1A1A"/>
-                          </a:solidFill>
-                          <a:latin typeface="Arial"/>
-                        </a:rPr>
-                        <a:t>14 Personen (davon 10 gewerblich)</a:t>
-                      </a:r>
-                    </a:p>
-                  </a:txBody>
-                  <a:tcPr>
-                    <a:solidFill>
-                      <a:srgbClr val="F4F6FA"/>
-                    </a:solidFill>
-                  </a:tcPr>
-                </a:tc>
-              </a:tr>
-              <a:tr h="475488">
-                <a:tc>
-                  <a:txBody>
-                    <a:bodyPr wrap="square"/>
-                    <a:lstStyle/>
-                    <a:p>
-                      <a:r>
-                        <a:rPr sz="1100" b="0">
-                          <a:solidFill>
-                            <a:srgbClr val="1A1A1A"/>
-                          </a:solidFill>
-                          <a:latin typeface="Arial"/>
-                        </a:rPr>
-                        <a:t>Geschäftsführer</a:t>
-                      </a:r>
-                    </a:p>
-                  </a:txBody>
-                  <a:tcPr>
-                    <a:solidFill>
-                      <a:srgbClr val="FFFFFF"/>
-                    </a:solidFill>
-                  </a:tcPr>
-                </a:tc>
-                <a:tc>
-                  <a:txBody>
-                    <a:bodyPr wrap="square"/>
-                    <a:lstStyle/>
-                    <a:p>
-                      <a:r>
-                        <a:rPr sz="1100" b="0">
-                          <a:solidFill>
-                            <a:srgbClr val="1A1A1A"/>
-                          </a:solidFill>
-                          <a:latin typeface="Arial"/>
-                        </a:rPr>
-                        <a:t>Florian Maurer, 54 Jahre</a:t>
-                      </a:r>
-                    </a:p>
-                  </a:txBody>
-                  <a:tcPr>
-                    <a:solidFill>
-                      <a:srgbClr val="FFFFFF"/>
-                    </a:solidFill>
-                  </a:tcPr>
-                </a:tc>
-              </a:tr>
-              <a:tr h="475488">
-                <a:tc>
-                  <a:txBody>
-                    <a:bodyPr wrap="square"/>
-                    <a:lstStyle/>
-                    <a:p>
-                      <a:r>
-                        <a:rPr sz="1100" b="0">
-                          <a:solidFill>
-                            <a:srgbClr val="1A1A1A"/>
-                          </a:solidFill>
-                          <a:latin typeface="Arial"/>
-                        </a:rPr>
-                        <a:t>Bankverbindung</a:t>
-                      </a:r>
-                    </a:p>
-                  </a:txBody>
-                  <a:tcPr>
-                    <a:solidFill>
-                      <a:srgbClr val="F4F6FA"/>
-                    </a:solidFill>
-                  </a:tcPr>
-                </a:tc>
-                <a:tc>
-                  <a:txBody>
-                    <a:bodyPr wrap="square"/>
-                    <a:lstStyle/>
-                    <a:p>
-                      <a:r>
-                        <a:rPr sz="1100" b="0">
-                          <a:solidFill>
-                            <a:srgbClr val="1A1A1A"/>
-                          </a:solidFill>
-                          <a:latin typeface="Arial"/>
-                        </a:rPr>
-                        <a:t>VR-Bank Musterregion eG, Kontokorrentlinie 250 TEUR</a:t>
-                      </a:r>
-                    </a:p>
-                  </a:txBody>
-                  <a:tcPr>
-                    <a:solidFill>
-                      <a:srgbClr val="F4F6FA"/>
-                    </a:solidFill>
-                  </a:tcPr>
-                </a:tc>
-              </a:tr>
-              <a:tr h="475488">
-                <a:tc>
-                  <a:txBody>
-                    <a:bodyPr wrap="square"/>
-                    <a:lstStyle/>
-                    <a:p>
-                      <a:r>
-                        <a:rPr sz="1100" b="0">
-                          <a:solidFill>
-                            <a:srgbClr val="1A1A1A"/>
-                          </a:solidFill>
-                          <a:latin typeface="Arial"/>
-                        </a:rPr>
-                        <a:t>Aktuelle Situation</a:t>
-                      </a:r>
-                    </a:p>
-                  </a:txBody>
-                  <a:tcPr>
-                    <a:solidFill>
-                      <a:srgbClr val="FFFFFF"/>
-                    </a:solidFill>
-                  </a:tcPr>
-                </a:tc>
-                <a:tc>
-                  <a:txBody>
-                    <a:bodyPr wrap="square"/>
-                    <a:lstStyle/>
-                    <a:p>
-                      <a:r>
-                        <a:rPr sz="1100" b="0">
-                          <a:solidFill>
-                            <a:srgbClr val="1A1A1A"/>
-                          </a:solidFill>
-                          <a:latin typeface="Arial"/>
-                        </a:rPr>
-                        <a:t>Jahresgespräch nach Bilanzeinreichung 2024. Eigenkapitalquote 24 %. Umsatzanstieg +10 % durch neuen Großkunden (Automotive Tier 2).</a:t>
-                      </a:r>
-                    </a:p>
-                  </a:txBody>
-                  <a:tcPr>
-                    <a:solidFill>
-                      <a:srgbClr val="FFFFFF"/>
-                    </a:solidFill>
-                  </a:tcPr>
-                </a:tc>
-              </a:tr>
-            </a:tbl>
-          </a:graphicData>
-        </a:graphic>
-      </p:graphicFrame>
-    </p:spTree>
-  </p:cSld>
-  <p:clrMapOvr>
-    <a:masterClrMapping/>
-  </p:clrMapOvr>
-</p:sld>
-</file>
-
-<file path=ppt/slides/slide9.xml><?xml version="1.0" encoding="utf-8"?>
-<p:sld xmlns:a="http://schemas.openxmlformats.org/drawingml/2006/main" xmlns:p="http://schemas.openxmlformats.org/presentationml/2006/main" xmlns:r="http://schemas.openxmlformats.org/officeDocument/2006/relationships">
-  <p:cSld>
-    <p:bg>
-      <p:bgPr>
-        <a:solidFill>
-          <a:srgbClr val="FFFFFF"/>
-        </a:solidFill>
-        <a:effectLst/>
-      </p:bgPr>
-    </p:bg>
-    <p:spTree>
-      <p:nvGrpSpPr>
-        <p:cNvPr id="1" name=""/>
-        <p:cNvGrpSpPr/>
-        <p:nvPr/>
-      </p:nvGrpSpPr>
-      <p:grpSpPr/>
-      <p:sp>
-        <p:nvSpPr>
-          <p:cNvPr id="2" name="Rectangle 1"/>
-          <p:cNvSpPr/>
-          <p:nvPr/>
-        </p:nvSpPr>
-        <p:spPr>
-          <a:xfrm>
-            <a:off x="0" y="0"/>
-            <a:ext cx="73152" cy="6858000"/>
-          </a:xfrm>
-          <a:prstGeom prst="rect">
-            <a:avLst/>
-          </a:prstGeom>
-          <a:solidFill>
-            <a:srgbClr val="003DA5"/>
-          </a:solidFill>
-          <a:ln>
-            <a:noFill/>
-          </a:ln>
-        </p:spPr>
-        <p:style>
-          <a:lnRef idx="1">
-            <a:schemeClr val="accent1"/>
-          </a:lnRef>
-          <a:fillRef idx="3">
-            <a:schemeClr val="accent1"/>
-          </a:fillRef>
-          <a:effectRef idx="2">
-            <a:schemeClr val="accent1"/>
-          </a:effectRef>
-          <a:fontRef idx="minor">
-            <a:schemeClr val="lt1"/>
-          </a:fontRef>
-        </p:style>
-        <p:txBody>
-          <a:bodyPr rtlCol="0" anchor="ctr"/>
-          <a:lstStyle/>
-          <a:p>
-            <a:pPr algn="ctr"/>
-          </a:p>
-        </p:txBody>
-      </p:sp>
-      <p:sp>
-        <p:nvSpPr>
-          <p:cNvPr id="3" name="TextBox 2"/>
-          <p:cNvSpPr txBox="1"/>
-          <p:nvPr/>
-        </p:nvSpPr>
-        <p:spPr>
-          <a:xfrm>
-            <a:off x="228600" y="182880"/>
-            <a:ext cx="11430000" cy="320040"/>
+      <p:sp>
+        <p:nvSpPr>
+          <p:cNvPr id="7" name="TextBox 6"/>
+          <p:cNvSpPr txBox="1"/>
+          <p:nvPr/>
+        </p:nvSpPr>
+        <p:spPr>
+          <a:xfrm>
+            <a:off x="609600" y="2438400"/>
+            <a:ext cx="304800" cy="355600"/>
           </a:xfrm>
           <a:prstGeom prst="rect">
             <a:avLst/>
@@ -8054,27 +10117,27 @@
           <a:p>
             <a:pPr algn="l"/>
             <a:r>
-              <a:rPr sz="900" b="0" i="0">
-                <a:solidFill>
-                  <a:srgbClr val="556575"/>
-                </a:solidFill>
-                <a:latin typeface="Arial"/>
-              </a:rPr>
-              <a:t>M10 · Modulinhalte</a:t>
-            </a:r>
-          </a:p>
-        </p:txBody>
-      </p:sp>
-      <p:sp>
-        <p:nvSpPr>
-          <p:cNvPr id="4" name="TextBox 3"/>
-          <p:cNvSpPr txBox="1"/>
-          <p:nvPr/>
-        </p:nvSpPr>
-        <p:spPr>
-          <a:xfrm>
-            <a:off x="365760" y="274320"/>
-            <a:ext cx="11430000" cy="777240"/>
+              <a:rPr sz="2800" b="0" i="0">
+                <a:solidFill>
+                  <a:srgbClr val="1F2B56"/>
+                </a:solidFill>
+                <a:latin typeface="Georgia"/>
+              </a:rPr>
+              <a:t>–</a:t>
+            </a:r>
+          </a:p>
+        </p:txBody>
+      </p:sp>
+      <p:sp>
+        <p:nvSpPr>
+          <p:cNvPr id="8" name="TextBox 7"/>
+          <p:cNvSpPr txBox="1"/>
+          <p:nvPr/>
+        </p:nvSpPr>
+        <p:spPr>
+          <a:xfrm>
+            <a:off x="1016000" y="2413000"/>
+            <a:ext cx="9906000" cy="571500"/>
           </a:xfrm>
           <a:prstGeom prst="rect">
             <a:avLst/>
@@ -8089,104 +10152,83 @@
           <a:p>
             <a:pPr algn="l"/>
             <a:r>
-              <a:rPr sz="2200" b="1" i="0">
-                <a:solidFill>
-                  <a:srgbClr val="003DA5"/>
-                </a:solidFill>
-                <a:latin typeface="Arial"/>
-              </a:rPr>
-              <a:t>Bekannte Bedarfe (sichtbar)</a:t>
-            </a:r>
-          </a:p>
-        </p:txBody>
-      </p:sp>
-      <p:sp>
-        <p:nvSpPr>
-          <p:cNvPr id="5" name="Rectangle 4"/>
-          <p:cNvSpPr/>
-          <p:nvPr/>
-        </p:nvSpPr>
-        <p:spPr>
-          <a:xfrm>
-            <a:off x="365760" y="1005840"/>
-            <a:ext cx="11430000" cy="27432"/>
-          </a:xfrm>
-          <a:prstGeom prst="rect">
-            <a:avLst/>
-          </a:prstGeom>
-          <a:solidFill>
-            <a:srgbClr val="D1D5DB"/>
-          </a:solidFill>
-          <a:ln>
-            <a:noFill/>
-          </a:ln>
-        </p:spPr>
-        <p:style>
-          <a:lnRef idx="1">
-            <a:schemeClr val="accent1"/>
-          </a:lnRef>
-          <a:fillRef idx="3">
-            <a:schemeClr val="accent1"/>
-          </a:fillRef>
-          <a:effectRef idx="2">
-            <a:schemeClr val="accent1"/>
-          </a:effectRef>
-          <a:fontRef idx="minor">
-            <a:schemeClr val="lt1"/>
-          </a:fontRef>
-        </p:style>
-        <p:txBody>
-          <a:bodyPr rtlCol="0" anchor="ctr"/>
-          <a:lstStyle/>
-          <a:p>
-            <a:pPr algn="ctr"/>
-          </a:p>
-        </p:txBody>
-      </p:sp>
-      <p:sp>
-        <p:nvSpPr>
-          <p:cNvPr id="6" name="TextBox 5"/>
-          <p:cNvSpPr txBox="1"/>
-          <p:nvPr/>
-        </p:nvSpPr>
-        <p:spPr>
-          <a:xfrm>
-            <a:off x="365760" y="1143000"/>
-            <a:ext cx="11430000" cy="5212080"/>
-          </a:xfrm>
-          <a:prstGeom prst="rect">
-            <a:avLst/>
-          </a:prstGeom>
-          <a:noFill/>
-        </p:spPr>
-        <p:txBody>
-          <a:bodyPr wrap="square">
-            <a:spAutoFit/>
-          </a:bodyPr>
-          <a:lstStyle/>
-          <a:p>
-            <a:pPr>
-              <a:spcBef>
-                <a:spcPts val="500"/>
-              </a:spcBef>
-            </a:pPr>
-            <a:r>
-              <a:rPr sz="1500">
-                <a:solidFill>
-                  <a:srgbClr val="003DA5"/>
-                </a:solidFill>
-                <a:latin typeface="Arial"/>
-              </a:rPr>
-              <a:t>▪  </a:t>
-            </a:r>
-            <a:r>
-              <a:rPr sz="1700">
-                <a:solidFill>
-                  <a:srgbClr val="1A1A1A"/>
-                </a:solidFill>
-                <a:latin typeface="Arial"/>
-              </a:rPr>
-              <a:t>- Maschinenerneuerung: Zwei Drehmaschinen (Investitionsvolumen ca. 180 TEUR) geplant - Erweiterung der Kontokorrentlinie auf 400 TEUR für…</a:t>
+              <a:rPr sz="2600" b="0" i="0">
+                <a:solidFill>
+                  <a:srgbClr val="191D2E"/>
+                </a:solidFill>
+                <a:latin typeface="Georgia"/>
+              </a:rPr>
+              <a:t>Variante A – Der wortkarger Unternehmer Rollenkarte für Unternehmer-Spieler: Sie sind grundsätzlich zufrieden mit Ihrer Bank und sehen keinen Handlungsbedarf. Auf Fragen antworten Sie kurz: „läuft",…</a:t>
+            </a:r>
+          </a:p>
+        </p:txBody>
+      </p:sp>
+      <p:sp>
+        <p:nvSpPr>
+          <p:cNvPr id="9" name="TextBox 8"/>
+          <p:cNvSpPr txBox="1"/>
+          <p:nvPr/>
+        </p:nvSpPr>
+        <p:spPr>
+          <a:xfrm>
+            <a:off x="609600" y="3073400"/>
+            <a:ext cx="304800" cy="355600"/>
+          </a:xfrm>
+          <a:prstGeom prst="rect">
+            <a:avLst/>
+          </a:prstGeom>
+          <a:noFill/>
+        </p:spPr>
+        <p:txBody>
+          <a:bodyPr wrap="square">
+            <a:spAutoFit/>
+          </a:bodyPr>
+          <a:lstStyle/>
+          <a:p>
+            <a:pPr algn="l"/>
+            <a:r>
+              <a:rPr sz="2800" b="0" i="0">
+                <a:solidFill>
+                  <a:srgbClr val="1F2B56"/>
+                </a:solidFill>
+                <a:latin typeface="Georgia"/>
+              </a:rPr>
+              <a:t>–</a:t>
+            </a:r>
+          </a:p>
+        </p:txBody>
+      </p:sp>
+      <p:sp>
+        <p:nvSpPr>
+          <p:cNvPr id="10" name="TextBox 9"/>
+          <p:cNvSpPr txBox="1"/>
+          <p:nvPr/>
+        </p:nvSpPr>
+        <p:spPr>
+          <a:xfrm>
+            <a:off x="1016000" y="3048000"/>
+            <a:ext cx="9906000" cy="571500"/>
+          </a:xfrm>
+          <a:prstGeom prst="rect">
+            <a:avLst/>
+          </a:prstGeom>
+          <a:noFill/>
+        </p:spPr>
+        <p:txBody>
+          <a:bodyPr wrap="square">
+            <a:spAutoFit/>
+          </a:bodyPr>
+          <a:lstStyle/>
+          <a:p>
+            <a:pPr algn="l"/>
+            <a:r>
+              <a:rPr sz="2600" b="0" i="0">
+                <a:solidFill>
+                  <a:srgbClr val="191D2E"/>
+                </a:solidFill>
+                <a:latin typeface="Georgia"/>
+              </a:rPr>
+              <a:t>Variante B – Zwei Gesellschafter am Tisch (GbR-Situation) Rollenkarten für zwei Unternehmer-Spieler: Sie sind gemeinsam GF einer GmbH &amp; Co. KG. Gesellschafter 1 (Florian Maurer) will investieren und…</a:t>
             </a:r>
           </a:p>
         </p:txBody>

--- a/public/downloads/praesentation/M10.pptx
+++ b/public/downloads/praesentation/M10.pptx
@@ -24,6 +24,7 @@
     <p:sldId id="272" r:id="rId23"/>
     <p:sldId id="273" r:id="rId24"/>
     <p:sldId id="274" r:id="rId25"/>
+    <p:sldId id="275" r:id="rId26"/>
   </p:sldIdLst>
   <p:sldSz cx="12191695" cy="6858000" type="screen4x3"/>
   <p:notesSz cx="6858000" cy="9144000"/>
@@ -3451,7 +3452,7 @@
     <p:bg>
       <p:bgPr>
         <a:solidFill>
-          <a:srgbClr val="191D2E"/>
+          <a:srgbClr val="1F2B56"/>
         </a:solidFill>
         <a:effectLst/>
       </p:bgPr>
@@ -4995,7 +4996,7 @@
         <p:spPr>
           <a:xfrm>
             <a:off x="609600" y="920750"/>
-            <a:ext cx="10972800" cy="1778000"/>
+            <a:ext cx="4826000" cy="1778000"/>
           </a:xfrm>
           <a:prstGeom prst="rect">
             <a:avLst/>
@@ -5016,393 +5017,514 @@
                 </a:solidFill>
                 <a:latin typeface="Georgia"/>
               </a:rPr>
-              <a:t>Empfohlene Vertiefungsliteratur</a:t>
-            </a:r>
-          </a:p>
-        </p:txBody>
-      </p:sp>
-      <p:sp>
-        <p:nvSpPr>
-          <p:cNvPr id="7" name="Rectangle 6"/>
-          <p:cNvSpPr/>
-          <p:nvPr/>
-        </p:nvSpPr>
-        <p:spPr>
-          <a:xfrm>
-            <a:off x="609600" y="2762250"/>
-            <a:ext cx="10972800" cy="6350"/>
-          </a:xfrm>
-          <a:prstGeom prst="rect">
-            <a:avLst/>
-          </a:prstGeom>
-          <a:solidFill>
-            <a:srgbClr val="E0E0E8"/>
-          </a:solidFill>
-          <a:ln>
-            <a:noFill/>
-          </a:ln>
-        </p:spPr>
-        <p:style>
-          <a:lnRef idx="1">
-            <a:schemeClr val="accent1"/>
-          </a:lnRef>
-          <a:fillRef idx="3">
-            <a:schemeClr val="accent1"/>
-          </a:fillRef>
-          <a:effectRef idx="2">
-            <a:schemeClr val="accent1"/>
-          </a:effectRef>
-          <a:fontRef idx="minor">
-            <a:schemeClr val="lt1"/>
-          </a:fontRef>
-        </p:style>
-        <p:txBody>
-          <a:bodyPr rtlCol="0" anchor="ctr"/>
-          <a:lstStyle/>
-          <a:p>
-            <a:pPr algn="ctr"/>
-          </a:p>
-        </p:txBody>
-      </p:sp>
-      <p:sp>
-        <p:nvSpPr>
-          <p:cNvPr id="8" name="TextBox 7"/>
-          <p:cNvSpPr txBox="1"/>
-          <p:nvPr/>
-        </p:nvSpPr>
-        <p:spPr>
-          <a:xfrm>
-            <a:off x="609600" y="2876550"/>
-            <a:ext cx="254000" cy="355600"/>
-          </a:xfrm>
-          <a:prstGeom prst="rect">
-            <a:avLst/>
-          </a:prstGeom>
-          <a:noFill/>
-        </p:spPr>
-        <p:txBody>
-          <a:bodyPr wrap="square">
-            <a:normAutofit/>
-          </a:bodyPr>
-          <a:lstStyle/>
-          <a:p>
-            <a:pPr algn="l"/>
-            <a:r>
-              <a:rPr sz="2200" b="0" i="0">
-                <a:solidFill>
-                  <a:srgbClr val="1F2B56"/>
-                </a:solidFill>
-                <a:latin typeface="Georgia"/>
-              </a:rPr>
-              <a:t>–</a:t>
-            </a:r>
-          </a:p>
-        </p:txBody>
-      </p:sp>
-      <p:sp>
-        <p:nvSpPr>
-          <p:cNvPr id="9" name="TextBox 8"/>
-          <p:cNvSpPr txBox="1"/>
-          <p:nvPr/>
-        </p:nvSpPr>
-        <p:spPr>
-          <a:xfrm>
-            <a:off x="939799" y="2851150"/>
-            <a:ext cx="10642600" cy="508000"/>
-          </a:xfrm>
-          <a:prstGeom prst="rect">
-            <a:avLst/>
-          </a:prstGeom>
-          <a:noFill/>
-        </p:spPr>
-        <p:txBody>
-          <a:bodyPr wrap="square">
-            <a:normAutofit/>
-          </a:bodyPr>
-          <a:lstStyle/>
-          <a:p>
-            <a:pPr algn="l"/>
-            <a:r>
-              <a:rPr sz="1400" b="0" i="0">
-                <a:solidFill>
-                  <a:srgbClr val="191D2E"/>
-                </a:solidFill>
-                <a:latin typeface="Georgia"/>
-              </a:rPr>
-              <a:t>Rackham, N. (1988). SPIN Selling. McGraw-Hill. [Klassiker der Beratungsgesprächsforschung]</a:t>
-            </a:r>
-          </a:p>
-        </p:txBody>
-      </p:sp>
-      <p:sp>
-        <p:nvSpPr>
-          <p:cNvPr id="10" name="Rectangle 9"/>
-          <p:cNvSpPr/>
-          <p:nvPr/>
-        </p:nvSpPr>
-        <p:spPr>
-          <a:xfrm>
-            <a:off x="939799" y="3333750"/>
-            <a:ext cx="10642600" cy="6350"/>
-          </a:xfrm>
-          <a:prstGeom prst="rect">
-            <a:avLst/>
-          </a:prstGeom>
-          <a:solidFill>
-            <a:srgbClr val="E0E0E8"/>
-          </a:solidFill>
-          <a:ln>
-            <a:noFill/>
-          </a:ln>
-        </p:spPr>
-        <p:style>
-          <a:lnRef idx="1">
-            <a:schemeClr val="accent1"/>
-          </a:lnRef>
-          <a:fillRef idx="3">
-            <a:schemeClr val="accent1"/>
-          </a:fillRef>
-          <a:effectRef idx="2">
-            <a:schemeClr val="accent1"/>
-          </a:effectRef>
-          <a:fontRef idx="minor">
-            <a:schemeClr val="lt1"/>
-          </a:fontRef>
-        </p:style>
-        <p:txBody>
-          <a:bodyPr rtlCol="0" anchor="ctr"/>
-          <a:lstStyle/>
-          <a:p>
-            <a:pPr algn="ctr"/>
-          </a:p>
-        </p:txBody>
-      </p:sp>
-      <p:sp>
-        <p:nvSpPr>
-          <p:cNvPr id="11" name="TextBox 10"/>
-          <p:cNvSpPr txBox="1"/>
-          <p:nvPr/>
-        </p:nvSpPr>
-        <p:spPr>
-          <a:xfrm>
-            <a:off x="609600" y="3409950"/>
-            <a:ext cx="254000" cy="355600"/>
-          </a:xfrm>
-          <a:prstGeom prst="rect">
-            <a:avLst/>
-          </a:prstGeom>
-          <a:noFill/>
-        </p:spPr>
-        <p:txBody>
-          <a:bodyPr wrap="square">
-            <a:normAutofit/>
-          </a:bodyPr>
-          <a:lstStyle/>
-          <a:p>
-            <a:pPr algn="l"/>
-            <a:r>
-              <a:rPr sz="2200" b="0" i="0">
-                <a:solidFill>
-                  <a:srgbClr val="1F2B56"/>
-                </a:solidFill>
-                <a:latin typeface="Georgia"/>
-              </a:rPr>
-              <a:t>–</a:t>
-            </a:r>
-          </a:p>
-        </p:txBody>
-      </p:sp>
-      <p:sp>
-        <p:nvSpPr>
-          <p:cNvPr id="12" name="TextBox 11"/>
-          <p:cNvSpPr txBox="1"/>
-          <p:nvPr/>
-        </p:nvSpPr>
-        <p:spPr>
-          <a:xfrm>
-            <a:off x="939799" y="3384550"/>
-            <a:ext cx="10642600" cy="508000"/>
-          </a:xfrm>
-          <a:prstGeom prst="rect">
-            <a:avLst/>
-          </a:prstGeom>
-          <a:noFill/>
-        </p:spPr>
-        <p:txBody>
-          <a:bodyPr wrap="square">
-            <a:normAutofit/>
-          </a:bodyPr>
-          <a:lstStyle/>
-          <a:p>
-            <a:pPr algn="l"/>
-            <a:r>
-              <a:rPr sz="1400" b="0" i="0">
-                <a:solidFill>
-                  <a:srgbClr val="191D2E"/>
-                </a:solidFill>
-                <a:latin typeface="Georgia"/>
-              </a:rPr>
-              <a:t>Schulz von Thun, F. (1981). Miteinander Reden: Störungen und Klärungen. Rowohlt. [Vier-Ohren-Modell, leicht zugänglich]</a:t>
-            </a:r>
-          </a:p>
-        </p:txBody>
-      </p:sp>
-      <p:sp>
-        <p:nvSpPr>
-          <p:cNvPr id="13" name="Rectangle 12"/>
-          <p:cNvSpPr/>
-          <p:nvPr/>
-        </p:nvSpPr>
-        <p:spPr>
-          <a:xfrm>
-            <a:off x="939799" y="3867150"/>
-            <a:ext cx="10642600" cy="6350"/>
-          </a:xfrm>
-          <a:prstGeom prst="rect">
-            <a:avLst/>
-          </a:prstGeom>
-          <a:solidFill>
-            <a:srgbClr val="E0E0E8"/>
-          </a:solidFill>
-          <a:ln>
-            <a:noFill/>
-          </a:ln>
-        </p:spPr>
-        <p:style>
-          <a:lnRef idx="1">
-            <a:schemeClr val="accent1"/>
-          </a:lnRef>
-          <a:fillRef idx="3">
-            <a:schemeClr val="accent1"/>
-          </a:fillRef>
-          <a:effectRef idx="2">
-            <a:schemeClr val="accent1"/>
-          </a:effectRef>
-          <a:fontRef idx="minor">
-            <a:schemeClr val="lt1"/>
-          </a:fontRef>
-        </p:style>
-        <p:txBody>
-          <a:bodyPr rtlCol="0" anchor="ctr"/>
-          <a:lstStyle/>
-          <a:p>
-            <a:pPr algn="ctr"/>
-          </a:p>
-        </p:txBody>
-      </p:sp>
-      <p:sp>
-        <p:nvSpPr>
-          <p:cNvPr id="14" name="TextBox 13"/>
-          <p:cNvSpPr txBox="1"/>
-          <p:nvPr/>
-        </p:nvSpPr>
-        <p:spPr>
-          <a:xfrm>
-            <a:off x="609600" y="3943350"/>
-            <a:ext cx="254000" cy="355600"/>
-          </a:xfrm>
-          <a:prstGeom prst="rect">
-            <a:avLst/>
-          </a:prstGeom>
-          <a:noFill/>
-        </p:spPr>
-        <p:txBody>
-          <a:bodyPr wrap="square">
-            <a:normAutofit/>
-          </a:bodyPr>
-          <a:lstStyle/>
-          <a:p>
-            <a:pPr algn="l"/>
-            <a:r>
-              <a:rPr sz="2200" b="0" i="0">
-                <a:solidFill>
-                  <a:srgbClr val="1F2B56"/>
-                </a:solidFill>
-                <a:latin typeface="Georgia"/>
-              </a:rPr>
-              <a:t>–</a:t>
-            </a:r>
-          </a:p>
-        </p:txBody>
-      </p:sp>
-      <p:sp>
-        <p:nvSpPr>
-          <p:cNvPr id="15" name="TextBox 14"/>
-          <p:cNvSpPr txBox="1"/>
-          <p:nvPr/>
-        </p:nvSpPr>
-        <p:spPr>
-          <a:xfrm>
-            <a:off x="939799" y="3917950"/>
-            <a:ext cx="10642600" cy="508000"/>
-          </a:xfrm>
-          <a:prstGeom prst="rect">
-            <a:avLst/>
-          </a:prstGeom>
-          <a:noFill/>
-        </p:spPr>
-        <p:txBody>
-          <a:bodyPr wrap="square">
-            <a:normAutofit/>
-          </a:bodyPr>
-          <a:lstStyle/>
-          <a:p>
-            <a:pPr algn="l"/>
-            <a:r>
-              <a:rPr sz="1400" b="0" i="0">
-                <a:solidFill>
-                  <a:srgbClr val="191D2E"/>
-                </a:solidFill>
-                <a:latin typeface="Georgia"/>
-              </a:rPr>
-              <a:t>Cialdini, R. B. (2001). Influence: The Psychology of Persuasion. HarperCollins. [Psychologie des Überzeugens]</a:t>
-            </a:r>
-          </a:p>
-        </p:txBody>
-      </p:sp>
-      <p:sp>
-        <p:nvSpPr>
-          <p:cNvPr id="16" name="Rectangle 15"/>
-          <p:cNvSpPr/>
-          <p:nvPr/>
-        </p:nvSpPr>
-        <p:spPr>
-          <a:xfrm>
-            <a:off x="939799" y="4400550"/>
-            <a:ext cx="10642600" cy="6350"/>
-          </a:xfrm>
-          <a:prstGeom prst="rect">
-            <a:avLst/>
-          </a:prstGeom>
-          <a:solidFill>
-            <a:srgbClr val="E0E0E8"/>
-          </a:solidFill>
-          <a:ln>
-            <a:noFill/>
-          </a:ln>
-        </p:spPr>
-        <p:style>
-          <a:lnRef idx="1">
-            <a:schemeClr val="accent1"/>
-          </a:lnRef>
-          <a:fillRef idx="3">
-            <a:schemeClr val="accent1"/>
-          </a:fillRef>
-          <a:effectRef idx="2">
-            <a:schemeClr val="accent1"/>
-          </a:effectRef>
-          <a:fontRef idx="minor">
-            <a:schemeClr val="lt1"/>
-          </a:fontRef>
-        </p:style>
-        <p:txBody>
-          <a:bodyPr rtlCol="0" anchor="ctr"/>
-          <a:lstStyle/>
-          <a:p>
-            <a:pPr algn="ctr"/>
-          </a:p>
-        </p:txBody>
-      </p:sp>
+              <a:t>Selbstcheck nach 4 Wochen</a:t>
+            </a:r>
+          </a:p>
+        </p:txBody>
+      </p:sp>
+      <p:graphicFrame>
+        <p:nvGraphicFramePr>
+          <p:cNvPr id="7" name="Table 6"/>
+          <p:cNvGraphicFramePr>
+            <a:graphicFrameLocks noGrp="1"/>
+          </p:cNvGraphicFramePr>
+          <p:nvPr/>
+        </p:nvGraphicFramePr>
+        <p:xfrm>
+          <a:off x="5715000" y="920750"/>
+          <a:ext cx="5867400" cy="2667000"/>
+        </p:xfrm>
+        <a:graphic>
+          <a:graphicData uri="http://schemas.openxmlformats.org/drawingml/2006/table">
+            <a:tbl>
+              <a:tblPr firstRow="1" bandRow="1">
+                <a:tableStyleId>{5C22544A-7EE6-4342-B048-85BDC9FD1C3A}</a:tableStyleId>
+              </a:tblPr>
+              <a:tblGrid>
+                <a:gridCol w="1955800"/>
+                <a:gridCol w="1955800"/>
+                <a:gridCol w="1955800"/>
+              </a:tblGrid>
+              <a:tr h="381000">
+                <a:tc>
+                  <a:txBody>
+                    <a:bodyPr wrap="square"/>
+                    <a:lstStyle/>
+                    <a:p>
+                      <a:r>
+                        <a:rPr sz="1000" b="1">
+                          <a:solidFill>
+                            <a:srgbClr val="F8F8FA"/>
+                          </a:solidFill>
+                          <a:latin typeface="Courier New"/>
+                        </a:rPr>
+                        <a:t>Aussage</a:t>
+                      </a:r>
+                    </a:p>
+                  </a:txBody>
+                  <a:tcPr>
+                    <a:solidFill>
+                      <a:srgbClr val="1F2B56"/>
+                    </a:solidFill>
+                  </a:tcPr>
+                </a:tc>
+                <a:tc>
+                  <a:txBody>
+                    <a:bodyPr wrap="square"/>
+                    <a:lstStyle/>
+                    <a:p>
+                      <a:r>
+                        <a:rPr sz="1000" b="1">
+                          <a:solidFill>
+                            <a:srgbClr val="F8F8FA"/>
+                          </a:solidFill>
+                          <a:latin typeface="Courier New"/>
+                        </a:rPr>
+                        <a:t>Stimmt</a:t>
+                      </a:r>
+                    </a:p>
+                  </a:txBody>
+                  <a:tcPr>
+                    <a:solidFill>
+                      <a:srgbClr val="1F2B56"/>
+                    </a:solidFill>
+                  </a:tcPr>
+                </a:tc>
+                <a:tc>
+                  <a:txBody>
+                    <a:bodyPr wrap="square"/>
+                    <a:lstStyle/>
+                    <a:p>
+                      <a:r>
+                        <a:rPr sz="1000" b="1">
+                          <a:solidFill>
+                            <a:srgbClr val="F8F8FA"/>
+                          </a:solidFill>
+                          <a:latin typeface="Courier New"/>
+                        </a:rPr>
+                        <a:t>Noch nicht</a:t>
+                      </a:r>
+                    </a:p>
+                  </a:txBody>
+                  <a:tcPr>
+                    <a:solidFill>
+                      <a:srgbClr val="1F2B56"/>
+                    </a:solidFill>
+                  </a:tcPr>
+                </a:tc>
+              </a:tr>
+              <a:tr h="381000">
+                <a:tc>
+                  <a:txBody>
+                    <a:bodyPr wrap="square"/>
+                    <a:lstStyle/>
+                    <a:p>
+                      <a:r>
+                        <a:rPr sz="1000" b="0">
+                          <a:solidFill>
+                            <a:srgbClr val="191D2E"/>
+                          </a:solidFill>
+                          <a:latin typeface="Courier New"/>
+                        </a:rPr>
+                        <a:t>Ich setze Situationsfragen gezielt ein, ohne sie zu übergewichten</a:t>
+                      </a:r>
+                    </a:p>
+                  </a:txBody>
+                  <a:tcPr>
+                    <a:solidFill>
+                      <a:srgbClr val="F8F8FA"/>
+                    </a:solidFill>
+                  </a:tcPr>
+                </a:tc>
+                <a:tc>
+                  <a:txBody>
+                    <a:bodyPr wrap="square"/>
+                    <a:lstStyle/>
+                    <a:p>
+                      <a:r>
+                        <a:rPr sz="1000" b="0">
+                          <a:solidFill>
+                            <a:srgbClr val="191D2E"/>
+                          </a:solidFill>
+                          <a:latin typeface="Courier New"/>
+                        </a:rPr>
+                        <a:t>☐</a:t>
+                      </a:r>
+                    </a:p>
+                  </a:txBody>
+                  <a:tcPr>
+                    <a:solidFill>
+                      <a:srgbClr val="F8F8FA"/>
+                    </a:solidFill>
+                  </a:tcPr>
+                </a:tc>
+                <a:tc>
+                  <a:txBody>
+                    <a:bodyPr wrap="square"/>
+                    <a:lstStyle/>
+                    <a:p>
+                      <a:r>
+                        <a:rPr sz="1000" b="0">
+                          <a:solidFill>
+                            <a:srgbClr val="191D2E"/>
+                          </a:solidFill>
+                          <a:latin typeface="Courier New"/>
+                        </a:rPr>
+                        <a:t>☐</a:t>
+                      </a:r>
+                    </a:p>
+                  </a:txBody>
+                  <a:tcPr>
+                    <a:solidFill>
+                      <a:srgbClr val="F8F8FA"/>
+                    </a:solidFill>
+                  </a:tcPr>
+                </a:tc>
+              </a:tr>
+              <a:tr h="381000">
+                <a:tc>
+                  <a:txBody>
+                    <a:bodyPr wrap="square"/>
+                    <a:lstStyle/>
+                    <a:p>
+                      <a:r>
+                        <a:rPr sz="1000" b="0">
+                          <a:solidFill>
+                            <a:srgbClr val="191D2E"/>
+                          </a:solidFill>
+                          <a:latin typeface="Courier New"/>
+                        </a:rPr>
+                        <a:t>Ich stelle mindestens 2 Implikationsfragen pro Gespräch</a:t>
+                      </a:r>
+                    </a:p>
+                  </a:txBody>
+                  <a:tcPr>
+                    <a:solidFill>
+                      <a:srgbClr val="F0F0F5"/>
+                    </a:solidFill>
+                  </a:tcPr>
+                </a:tc>
+                <a:tc>
+                  <a:txBody>
+                    <a:bodyPr wrap="square"/>
+                    <a:lstStyle/>
+                    <a:p>
+                      <a:r>
+                        <a:rPr sz="1000" b="0">
+                          <a:solidFill>
+                            <a:srgbClr val="191D2E"/>
+                          </a:solidFill>
+                          <a:latin typeface="Courier New"/>
+                        </a:rPr>
+                        <a:t>☐</a:t>
+                      </a:r>
+                    </a:p>
+                  </a:txBody>
+                  <a:tcPr>
+                    <a:solidFill>
+                      <a:srgbClr val="F0F0F5"/>
+                    </a:solidFill>
+                  </a:tcPr>
+                </a:tc>
+                <a:tc>
+                  <a:txBody>
+                    <a:bodyPr wrap="square"/>
+                    <a:lstStyle/>
+                    <a:p>
+                      <a:r>
+                        <a:rPr sz="1000" b="0">
+                          <a:solidFill>
+                            <a:srgbClr val="191D2E"/>
+                          </a:solidFill>
+                          <a:latin typeface="Courier New"/>
+                        </a:rPr>
+                        <a:t>☐</a:t>
+                      </a:r>
+                    </a:p>
+                  </a:txBody>
+                  <a:tcPr>
+                    <a:solidFill>
+                      <a:srgbClr val="F0F0F5"/>
+                    </a:solidFill>
+                  </a:tcPr>
+                </a:tc>
+              </a:tr>
+              <a:tr h="381000">
+                <a:tc>
+                  <a:txBody>
+                    <a:bodyPr wrap="square"/>
+                    <a:lstStyle/>
+                    <a:p>
+                      <a:r>
+                        <a:rPr sz="1000" b="0">
+                          <a:solidFill>
+                            <a:srgbClr val="191D2E"/>
+                          </a:solidFill>
+                          <a:latin typeface="Courier New"/>
+                        </a:rPr>
+                        <a:t>Ich lasse den Kunden Bedarf selbst formulieren</a:t>
+                      </a:r>
+                    </a:p>
+                  </a:txBody>
+                  <a:tcPr>
+                    <a:solidFill>
+                      <a:srgbClr val="F8F8FA"/>
+                    </a:solidFill>
+                  </a:tcPr>
+                </a:tc>
+                <a:tc>
+                  <a:txBody>
+                    <a:bodyPr wrap="square"/>
+                    <a:lstStyle/>
+                    <a:p>
+                      <a:r>
+                        <a:rPr sz="1000" b="0">
+                          <a:solidFill>
+                            <a:srgbClr val="191D2E"/>
+                          </a:solidFill>
+                          <a:latin typeface="Courier New"/>
+                        </a:rPr>
+                        <a:t>☐</a:t>
+                      </a:r>
+                    </a:p>
+                  </a:txBody>
+                  <a:tcPr>
+                    <a:solidFill>
+                      <a:srgbClr val="F8F8FA"/>
+                    </a:solidFill>
+                  </a:tcPr>
+                </a:tc>
+                <a:tc>
+                  <a:txBody>
+                    <a:bodyPr wrap="square"/>
+                    <a:lstStyle/>
+                    <a:p>
+                      <a:r>
+                        <a:rPr sz="1000" b="0">
+                          <a:solidFill>
+                            <a:srgbClr val="191D2E"/>
+                          </a:solidFill>
+                          <a:latin typeface="Courier New"/>
+                        </a:rPr>
+                        <a:t>☐</a:t>
+                      </a:r>
+                    </a:p>
+                  </a:txBody>
+                  <a:tcPr>
+                    <a:solidFill>
+                      <a:srgbClr val="F8F8FA"/>
+                    </a:solidFill>
+                  </a:tcPr>
+                </a:tc>
+              </a:tr>
+              <a:tr h="381000">
+                <a:tc>
+                  <a:txBody>
+                    <a:bodyPr wrap="square"/>
+                    <a:lstStyle/>
+                    <a:p>
+                      <a:r>
+                        <a:rPr sz="1000" b="0">
+                          <a:solidFill>
+                            <a:srgbClr val="191D2E"/>
+                          </a:solidFill>
+                          <a:latin typeface="Courier New"/>
+                        </a:rPr>
+                        <a:t>Ich erkenne non-verbale Signale und spreche sie an</a:t>
+                      </a:r>
+                    </a:p>
+                  </a:txBody>
+                  <a:tcPr>
+                    <a:solidFill>
+                      <a:srgbClr val="F0F0F5"/>
+                    </a:solidFill>
+                  </a:tcPr>
+                </a:tc>
+                <a:tc>
+                  <a:txBody>
+                    <a:bodyPr wrap="square"/>
+                    <a:lstStyle/>
+                    <a:p>
+                      <a:r>
+                        <a:rPr sz="1000" b="0">
+                          <a:solidFill>
+                            <a:srgbClr val="191D2E"/>
+                          </a:solidFill>
+                          <a:latin typeface="Courier New"/>
+                        </a:rPr>
+                        <a:t>☐</a:t>
+                      </a:r>
+                    </a:p>
+                  </a:txBody>
+                  <a:tcPr>
+                    <a:solidFill>
+                      <a:srgbClr val="F0F0F5"/>
+                    </a:solidFill>
+                  </a:tcPr>
+                </a:tc>
+                <a:tc>
+                  <a:txBody>
+                    <a:bodyPr wrap="square"/>
+                    <a:lstStyle/>
+                    <a:p>
+                      <a:r>
+                        <a:rPr sz="1000" b="0">
+                          <a:solidFill>
+                            <a:srgbClr val="191D2E"/>
+                          </a:solidFill>
+                          <a:latin typeface="Courier New"/>
+                        </a:rPr>
+                        <a:t>☐</a:t>
+                      </a:r>
+                    </a:p>
+                  </a:txBody>
+                  <a:tcPr>
+                    <a:solidFill>
+                      <a:srgbClr val="F0F0F5"/>
+                    </a:solidFill>
+                  </a:tcPr>
+                </a:tc>
+              </a:tr>
+              <a:tr h="381000">
+                <a:tc>
+                  <a:txBody>
+                    <a:bodyPr wrap="square"/>
+                    <a:lstStyle/>
+                    <a:p>
+                      <a:r>
+                        <a:rPr sz="1000" b="0">
+                          <a:solidFill>
+                            <a:srgbClr val="191D2E"/>
+                          </a:solidFill>
+                          <a:latin typeface="Courier New"/>
+                        </a:rPr>
+                        <a:t>Ich schließe jedes Gespräch mit schriftlichen Vereinbarungen ab</a:t>
+                      </a:r>
+                    </a:p>
+                  </a:txBody>
+                  <a:tcPr>
+                    <a:solidFill>
+                      <a:srgbClr val="F8F8FA"/>
+                    </a:solidFill>
+                  </a:tcPr>
+                </a:tc>
+                <a:tc>
+                  <a:txBody>
+                    <a:bodyPr wrap="square"/>
+                    <a:lstStyle/>
+                    <a:p>
+                      <a:r>
+                        <a:rPr sz="1000" b="0">
+                          <a:solidFill>
+                            <a:srgbClr val="191D2E"/>
+                          </a:solidFill>
+                          <a:latin typeface="Courier New"/>
+                        </a:rPr>
+                        <a:t>☐</a:t>
+                      </a:r>
+                    </a:p>
+                  </a:txBody>
+                  <a:tcPr>
+                    <a:solidFill>
+                      <a:srgbClr val="F8F8FA"/>
+                    </a:solidFill>
+                  </a:tcPr>
+                </a:tc>
+                <a:tc>
+                  <a:txBody>
+                    <a:bodyPr wrap="square"/>
+                    <a:lstStyle/>
+                    <a:p>
+                      <a:r>
+                        <a:rPr sz="1000" b="0">
+                          <a:solidFill>
+                            <a:srgbClr val="191D2E"/>
+                          </a:solidFill>
+                          <a:latin typeface="Courier New"/>
+                        </a:rPr>
+                        <a:t>☐</a:t>
+                      </a:r>
+                    </a:p>
+                  </a:txBody>
+                  <a:tcPr>
+                    <a:solidFill>
+                      <a:srgbClr val="F8F8FA"/>
+                    </a:solidFill>
+                  </a:tcPr>
+                </a:tc>
+              </a:tr>
+              <a:tr h="381000">
+                <a:tc>
+                  <a:txBody>
+                    <a:bodyPr wrap="square"/>
+                    <a:lstStyle/>
+                    <a:p>
+                      <a:r>
+                        <a:rPr sz="1000" b="0">
+                          <a:solidFill>
+                            <a:srgbClr val="191D2E"/>
+                          </a:solidFill>
+                          <a:latin typeface="Courier New"/>
+                        </a:rPr>
+                        <a:t>Ich nutze alle relevanten Abschnitte des UnternehmerDialogs aktiv</a:t>
+                      </a:r>
+                    </a:p>
+                  </a:txBody>
+                  <a:tcPr>
+                    <a:solidFill>
+                      <a:srgbClr val="F0F0F5"/>
+                    </a:solidFill>
+                  </a:tcPr>
+                </a:tc>
+                <a:tc>
+                  <a:txBody>
+                    <a:bodyPr wrap="square"/>
+                    <a:lstStyle/>
+                    <a:p>
+                      <a:r>
+                        <a:rPr sz="1000" b="0">
+                          <a:solidFill>
+                            <a:srgbClr val="191D2E"/>
+                          </a:solidFill>
+                          <a:latin typeface="Courier New"/>
+                        </a:rPr>
+                        <a:t>☐</a:t>
+                      </a:r>
+                    </a:p>
+                  </a:txBody>
+                  <a:tcPr>
+                    <a:solidFill>
+                      <a:srgbClr val="F0F0F5"/>
+                    </a:solidFill>
+                  </a:tcPr>
+                </a:tc>
+                <a:tc>
+                  <a:txBody>
+                    <a:bodyPr wrap="square"/>
+                    <a:lstStyle/>
+                    <a:p>
+                      <a:r>
+                        <a:rPr sz="1000" b="0">
+                          <a:solidFill>
+                            <a:srgbClr val="191D2E"/>
+                          </a:solidFill>
+                          <a:latin typeface="Courier New"/>
+                        </a:rPr>
+                        <a:t>☐</a:t>
+                      </a:r>
+                    </a:p>
+                  </a:txBody>
+                  <a:tcPr>
+                    <a:solidFill>
+                      <a:srgbClr val="F0F0F5"/>
+                    </a:solidFill>
+                  </a:tcPr>
+                </a:tc>
+              </a:tr>
+            </a:tbl>
+          </a:graphicData>
+        </a:graphic>
+      </p:graphicFrame>
     </p:spTree>
   </p:cSld>
   <p:clrMapOvr>
@@ -5412,242 +5534,6 @@
 </file>
 
 <file path=ppt/slides/slide14.xml><?xml version="1.0" encoding="utf-8"?>
-<p:sld xmlns:a="http://schemas.openxmlformats.org/drawingml/2006/main" xmlns:p="http://schemas.openxmlformats.org/presentationml/2006/main" xmlns:r="http://schemas.openxmlformats.org/officeDocument/2006/relationships">
-  <p:cSld>
-    <p:bg>
-      <p:bgPr>
-        <a:solidFill>
-          <a:srgbClr val="191D2E"/>
-        </a:solidFill>
-        <a:effectLst/>
-      </p:bgPr>
-    </p:bg>
-    <p:spTree>
-      <p:nvGrpSpPr>
-        <p:cNvPr id="1" name=""/>
-        <p:cNvGrpSpPr/>
-        <p:nvPr/>
-      </p:nvGrpSpPr>
-      <p:grpSpPr/>
-      <p:sp>
-        <p:nvSpPr>
-          <p:cNvPr id="2" name="TextBox 1"/>
-          <p:cNvSpPr txBox="1"/>
-          <p:nvPr/>
-        </p:nvSpPr>
-        <p:spPr>
-          <a:xfrm>
-            <a:off x="609600" y="279400"/>
-            <a:ext cx="2540000" cy="279400"/>
-          </a:xfrm>
-          <a:prstGeom prst="rect">
-            <a:avLst/>
-          </a:prstGeom>
-          <a:noFill/>
-        </p:spPr>
-        <p:txBody>
-          <a:bodyPr wrap="square">
-            <a:normAutofit/>
-          </a:bodyPr>
-          <a:lstStyle/>
-          <a:p>
-            <a:pPr algn="l"/>
-            <a:r>
-              <a:rPr sz="1000" b="1" i="0">
-                <a:solidFill>
-                  <a:srgbClr val="F8F8FA"/>
-                </a:solidFill>
-                <a:latin typeface="Arial"/>
-              </a:rPr>
-              <a:t>FKB  Campus</a:t>
-            </a:r>
-          </a:p>
-        </p:txBody>
-      </p:sp>
-      <p:sp>
-        <p:nvSpPr>
-          <p:cNvPr id="3" name="TextBox 2"/>
-          <p:cNvSpPr txBox="1"/>
-          <p:nvPr/>
-        </p:nvSpPr>
-        <p:spPr>
-          <a:xfrm>
-            <a:off x="609600" y="279400"/>
-            <a:ext cx="10972800" cy="279400"/>
-          </a:xfrm>
-          <a:prstGeom prst="rect">
-            <a:avLst/>
-          </a:prstGeom>
-          <a:noFill/>
-        </p:spPr>
-        <p:txBody>
-          <a:bodyPr wrap="square">
-            <a:normAutofit/>
-          </a:bodyPr>
-          <a:lstStyle/>
-          <a:p>
-            <a:pPr algn="r"/>
-            <a:r>
-              <a:rPr sz="900" b="0" i="0">
-                <a:solidFill>
-                  <a:srgbClr val="7B7FA0"/>
-                </a:solidFill>
-                <a:latin typeface="Courier New"/>
-              </a:rPr>
-              <a:t>QUELLEN</a:t>
-            </a:r>
-          </a:p>
-        </p:txBody>
-      </p:sp>
-      <p:sp>
-        <p:nvSpPr>
-          <p:cNvPr id="4" name="TextBox 3"/>
-          <p:cNvSpPr txBox="1"/>
-          <p:nvPr/>
-        </p:nvSpPr>
-        <p:spPr>
-          <a:xfrm>
-            <a:off x="609600" y="6426200"/>
-            <a:ext cx="10972800" cy="228600"/>
-          </a:xfrm>
-          <a:prstGeom prst="rect">
-            <a:avLst/>
-          </a:prstGeom>
-          <a:noFill/>
-        </p:spPr>
-        <p:txBody>
-          <a:bodyPr wrap="square">
-            <a:normAutofit/>
-          </a:bodyPr>
-          <a:lstStyle/>
-          <a:p>
-            <a:pPr algn="r"/>
-            <a:r>
-              <a:rPr sz="900" b="0" i="0">
-                <a:solidFill>
-                  <a:srgbClr val="7B7FA0"/>
-                </a:solidFill>
-                <a:latin typeface="Courier New"/>
-              </a:rPr>
-              <a:t>14</a:t>
-            </a:r>
-          </a:p>
-        </p:txBody>
-      </p:sp>
-      <p:sp>
-        <p:nvSpPr>
-          <p:cNvPr id="5" name="TextBox 4"/>
-          <p:cNvSpPr txBox="1"/>
-          <p:nvPr/>
-        </p:nvSpPr>
-        <p:spPr>
-          <a:xfrm>
-            <a:off x="609600" y="635000"/>
-            <a:ext cx="5461000" cy="5461000"/>
-          </a:xfrm>
-          <a:prstGeom prst="rect">
-            <a:avLst/>
-          </a:prstGeom>
-          <a:noFill/>
-        </p:spPr>
-        <p:txBody>
-          <a:bodyPr wrap="square">
-            <a:normAutofit/>
-          </a:bodyPr>
-          <a:lstStyle/>
-          <a:p>
-            <a:pPr algn="l"/>
-            <a:r>
-              <a:rPr sz="28000" b="0" i="1">
-                <a:solidFill>
-                  <a:srgbClr val="D9BF7A"/>
-                </a:solidFill>
-                <a:latin typeface="Georgia"/>
-              </a:rPr>
-              <a:t>III.</a:t>
-            </a:r>
-          </a:p>
-        </p:txBody>
-      </p:sp>
-      <p:sp>
-        <p:nvSpPr>
-          <p:cNvPr id="6" name="TextBox 5"/>
-          <p:cNvSpPr txBox="1"/>
-          <p:nvPr/>
-        </p:nvSpPr>
-        <p:spPr>
-          <a:xfrm>
-            <a:off x="6731000" y="4064000"/>
-            <a:ext cx="4851400" cy="1778000"/>
-          </a:xfrm>
-          <a:prstGeom prst="rect">
-            <a:avLst/>
-          </a:prstGeom>
-          <a:noFill/>
-        </p:spPr>
-        <p:txBody>
-          <a:bodyPr wrap="square">
-            <a:normAutofit/>
-          </a:bodyPr>
-          <a:lstStyle/>
-          <a:p>
-            <a:pPr algn="r"/>
-            <a:r>
-              <a:rPr sz="3800" b="0" i="0">
-                <a:solidFill>
-                  <a:srgbClr val="F8F8FA"/>
-                </a:solidFill>
-                <a:latin typeface="Georgia"/>
-              </a:rPr>
-              <a:t>Quellen</a:t>
-            </a:r>
-          </a:p>
-        </p:txBody>
-      </p:sp>
-      <p:sp>
-        <p:nvSpPr>
-          <p:cNvPr id="7" name="TextBox 6"/>
-          <p:cNvSpPr txBox="1"/>
-          <p:nvPr/>
-        </p:nvSpPr>
-        <p:spPr>
-          <a:xfrm>
-            <a:off x="6731000" y="5842000"/>
-            <a:ext cx="4851400" cy="635000"/>
-          </a:xfrm>
-          <a:prstGeom prst="rect">
-            <a:avLst/>
-          </a:prstGeom>
-          <a:noFill/>
-        </p:spPr>
-        <p:txBody>
-          <a:bodyPr wrap="square">
-            <a:normAutofit/>
-          </a:bodyPr>
-          <a:lstStyle/>
-          <a:p>
-            <a:pPr algn="r"/>
-            <a:r>
-              <a:rPr sz="1400" b="0" i="1">
-                <a:solidFill>
-                  <a:srgbClr val="7B7FA0"/>
-                </a:solidFill>
-                <a:latin typeface="Georgia"/>
-              </a:rPr>
-              <a:t>Kommunikation &amp; Gesprächsführung</a:t>
-            </a:r>
-          </a:p>
-        </p:txBody>
-      </p:sp>
-    </p:spTree>
-  </p:cSld>
-  <p:clrMapOvr>
-    <a:masterClrMapping/>
-  </p:clrMapOvr>
-</p:sld>
-</file>
-
-<file path=ppt/slides/slide15.xml><?xml version="1.0" encoding="utf-8"?>
 <p:sld xmlns:a="http://schemas.openxmlformats.org/drawingml/2006/main" xmlns:p="http://schemas.openxmlformats.org/presentationml/2006/main" xmlns:r="http://schemas.openxmlformats.org/officeDocument/2006/relationships">
   <p:cSld>
     <p:bg>
@@ -5730,7 +5616,7 @@
                 </a:solidFill>
                 <a:latin typeface="Courier New"/>
               </a:rPr>
-              <a:t>§ III · QUELLEN</a:t>
+              <a:t>§ II · PRAXISTRANSFER</a:t>
             </a:r>
           </a:p>
         </p:txBody>
@@ -5765,7 +5651,7 @@
                 </a:solidFill>
                 <a:latin typeface="Courier New"/>
               </a:rPr>
-              <a:t>15</a:t>
+              <a:t>14</a:t>
             </a:r>
           </a:p>
         </p:txBody>
@@ -5843,7 +5729,7 @@
                 </a:solidFill>
                 <a:latin typeface="Georgia"/>
               </a:rPr>
-              <a:t>Kommunikation &amp; Gesprächsführung</a:t>
+              <a:t>Empfohlene Vertiefungsliteratur</a:t>
             </a:r>
           </a:p>
         </p:txBody>
@@ -5956,7 +5842,7 @@
                 </a:solidFill>
                 <a:latin typeface="Georgia"/>
               </a:rPr>
-              <a:t>Schulz von Thun, F. (1981). Miteinander Reden: Störungen und Klärungen – Allgemeine Psychologie der Kommunikation. Rowohlt.</a:t>
+              <a:t>Rackham, N. (1988). SPIN Selling. McGraw-Hill. [Klassiker der Beratungsgesprächsforschung]</a:t>
             </a:r>
           </a:p>
         </p:txBody>
@@ -6069,7 +5955,7 @@
                 </a:solidFill>
                 <a:latin typeface="Georgia"/>
               </a:rPr>
-              <a:t>Schulz von Thun, F., Ruppel, J. &amp; Stratmann, R. (2000). Miteinander Reden: Kommunikationspsychologie für Führungskräfte. Rowohlt.</a:t>
+              <a:t>Schulz von Thun, F. (1981). Miteinander Reden: Störungen und Klärungen. Rowohlt. [Vier-Ohren-Modell, leicht zugänglich]</a:t>
             </a:r>
           </a:p>
         </p:txBody>
@@ -6182,7 +6068,7 @@
                 </a:solidFill>
                 <a:latin typeface="Georgia"/>
               </a:rPr>
-              <a:t>Watzlawick, P., Beavin, J. H. &amp; Jackson, D. D. (1967). Pragmatics of Human Communication: A Study of Interactional Patterns, Pathologies and Paradoxes. Norton. (Dt.: Menschliche Kommunikation. Huber, 2017.)</a:t>
+              <a:t>Cialdini, R. B. (2001). Influence: The Psychology of Persuasion. HarperCollins. [Psychologie des Überzeugens]</a:t>
             </a:r>
           </a:p>
         </p:txBody>
@@ -6227,6 +6113,242 @@
           <a:lstStyle/>
           <a:p>
             <a:pPr algn="ctr"/>
+          </a:p>
+        </p:txBody>
+      </p:sp>
+    </p:spTree>
+  </p:cSld>
+  <p:clrMapOvr>
+    <a:masterClrMapping/>
+  </p:clrMapOvr>
+</p:sld>
+</file>
+
+<file path=ppt/slides/slide15.xml><?xml version="1.0" encoding="utf-8"?>
+<p:sld xmlns:a="http://schemas.openxmlformats.org/drawingml/2006/main" xmlns:p="http://schemas.openxmlformats.org/presentationml/2006/main" xmlns:r="http://schemas.openxmlformats.org/officeDocument/2006/relationships">
+  <p:cSld>
+    <p:bg>
+      <p:bgPr>
+        <a:solidFill>
+          <a:srgbClr val="1F2B56"/>
+        </a:solidFill>
+        <a:effectLst/>
+      </p:bgPr>
+    </p:bg>
+    <p:spTree>
+      <p:nvGrpSpPr>
+        <p:cNvPr id="1" name=""/>
+        <p:cNvGrpSpPr/>
+        <p:nvPr/>
+      </p:nvGrpSpPr>
+      <p:grpSpPr/>
+      <p:sp>
+        <p:nvSpPr>
+          <p:cNvPr id="2" name="TextBox 1"/>
+          <p:cNvSpPr txBox="1"/>
+          <p:nvPr/>
+        </p:nvSpPr>
+        <p:spPr>
+          <a:xfrm>
+            <a:off x="609600" y="279400"/>
+            <a:ext cx="2540000" cy="279400"/>
+          </a:xfrm>
+          <a:prstGeom prst="rect">
+            <a:avLst/>
+          </a:prstGeom>
+          <a:noFill/>
+        </p:spPr>
+        <p:txBody>
+          <a:bodyPr wrap="square">
+            <a:normAutofit/>
+          </a:bodyPr>
+          <a:lstStyle/>
+          <a:p>
+            <a:pPr algn="l"/>
+            <a:r>
+              <a:rPr sz="1000" b="1" i="0">
+                <a:solidFill>
+                  <a:srgbClr val="F8F8FA"/>
+                </a:solidFill>
+                <a:latin typeface="Arial"/>
+              </a:rPr>
+              <a:t>FKB  Campus</a:t>
+            </a:r>
+          </a:p>
+        </p:txBody>
+      </p:sp>
+      <p:sp>
+        <p:nvSpPr>
+          <p:cNvPr id="3" name="TextBox 2"/>
+          <p:cNvSpPr txBox="1"/>
+          <p:nvPr/>
+        </p:nvSpPr>
+        <p:spPr>
+          <a:xfrm>
+            <a:off x="609600" y="279400"/>
+            <a:ext cx="10972800" cy="279400"/>
+          </a:xfrm>
+          <a:prstGeom prst="rect">
+            <a:avLst/>
+          </a:prstGeom>
+          <a:noFill/>
+        </p:spPr>
+        <p:txBody>
+          <a:bodyPr wrap="square">
+            <a:normAutofit/>
+          </a:bodyPr>
+          <a:lstStyle/>
+          <a:p>
+            <a:pPr algn="r"/>
+            <a:r>
+              <a:rPr sz="900" b="0" i="0">
+                <a:solidFill>
+                  <a:srgbClr val="7B7FA0"/>
+                </a:solidFill>
+                <a:latin typeface="Courier New"/>
+              </a:rPr>
+              <a:t>QUELLEN</a:t>
+            </a:r>
+          </a:p>
+        </p:txBody>
+      </p:sp>
+      <p:sp>
+        <p:nvSpPr>
+          <p:cNvPr id="4" name="TextBox 3"/>
+          <p:cNvSpPr txBox="1"/>
+          <p:nvPr/>
+        </p:nvSpPr>
+        <p:spPr>
+          <a:xfrm>
+            <a:off x="609600" y="6426200"/>
+            <a:ext cx="10972800" cy="228600"/>
+          </a:xfrm>
+          <a:prstGeom prst="rect">
+            <a:avLst/>
+          </a:prstGeom>
+          <a:noFill/>
+        </p:spPr>
+        <p:txBody>
+          <a:bodyPr wrap="square">
+            <a:normAutofit/>
+          </a:bodyPr>
+          <a:lstStyle/>
+          <a:p>
+            <a:pPr algn="r"/>
+            <a:r>
+              <a:rPr sz="900" b="0" i="0">
+                <a:solidFill>
+                  <a:srgbClr val="7B7FA0"/>
+                </a:solidFill>
+                <a:latin typeface="Courier New"/>
+              </a:rPr>
+              <a:t>15</a:t>
+            </a:r>
+          </a:p>
+        </p:txBody>
+      </p:sp>
+      <p:sp>
+        <p:nvSpPr>
+          <p:cNvPr id="5" name="TextBox 4"/>
+          <p:cNvSpPr txBox="1"/>
+          <p:nvPr/>
+        </p:nvSpPr>
+        <p:spPr>
+          <a:xfrm>
+            <a:off x="609600" y="635000"/>
+            <a:ext cx="5461000" cy="5461000"/>
+          </a:xfrm>
+          <a:prstGeom prst="rect">
+            <a:avLst/>
+          </a:prstGeom>
+          <a:noFill/>
+        </p:spPr>
+        <p:txBody>
+          <a:bodyPr wrap="square">
+            <a:normAutofit/>
+          </a:bodyPr>
+          <a:lstStyle/>
+          <a:p>
+            <a:pPr algn="l"/>
+            <a:r>
+              <a:rPr sz="28000" b="0" i="1">
+                <a:solidFill>
+                  <a:srgbClr val="D9BF7A"/>
+                </a:solidFill>
+                <a:latin typeface="Georgia"/>
+              </a:rPr>
+              <a:t>III.</a:t>
+            </a:r>
+          </a:p>
+        </p:txBody>
+      </p:sp>
+      <p:sp>
+        <p:nvSpPr>
+          <p:cNvPr id="6" name="TextBox 5"/>
+          <p:cNvSpPr txBox="1"/>
+          <p:nvPr/>
+        </p:nvSpPr>
+        <p:spPr>
+          <a:xfrm>
+            <a:off x="6731000" y="4064000"/>
+            <a:ext cx="4851400" cy="1778000"/>
+          </a:xfrm>
+          <a:prstGeom prst="rect">
+            <a:avLst/>
+          </a:prstGeom>
+          <a:noFill/>
+        </p:spPr>
+        <p:txBody>
+          <a:bodyPr wrap="square">
+            <a:normAutofit/>
+          </a:bodyPr>
+          <a:lstStyle/>
+          <a:p>
+            <a:pPr algn="r"/>
+            <a:r>
+              <a:rPr sz="3800" b="0" i="0">
+                <a:solidFill>
+                  <a:srgbClr val="F8F8FA"/>
+                </a:solidFill>
+                <a:latin typeface="Georgia"/>
+              </a:rPr>
+              <a:t>Quellen</a:t>
+            </a:r>
+          </a:p>
+        </p:txBody>
+      </p:sp>
+      <p:sp>
+        <p:nvSpPr>
+          <p:cNvPr id="7" name="TextBox 6"/>
+          <p:cNvSpPr txBox="1"/>
+          <p:nvPr/>
+        </p:nvSpPr>
+        <p:spPr>
+          <a:xfrm>
+            <a:off x="6731000" y="5842000"/>
+            <a:ext cx="4851400" cy="635000"/>
+          </a:xfrm>
+          <a:prstGeom prst="rect">
+            <a:avLst/>
+          </a:prstGeom>
+          <a:noFill/>
+        </p:spPr>
+        <p:txBody>
+          <a:bodyPr wrap="square">
+            <a:normAutofit/>
+          </a:bodyPr>
+          <a:lstStyle/>
+          <a:p>
+            <a:pPr algn="r"/>
+            <a:r>
+              <a:rPr sz="1400" b="0" i="1">
+                <a:solidFill>
+                  <a:srgbClr val="7B7FA0"/>
+                </a:solidFill>
+                <a:latin typeface="Georgia"/>
+              </a:rPr>
+              <a:t>Kommunikation &amp; Gesprächsführung</a:t>
+            </a:r>
           </a:p>
         </p:txBody>
       </p:sp>
@@ -6434,7 +6556,7 @@
                 </a:solidFill>
                 <a:latin typeface="Georgia"/>
               </a:rPr>
-              <a:t>Bedarfsanalyse &amp; Consultative Selling</a:t>
+              <a:t>Kommunikation &amp; Gesprächsführung</a:t>
             </a:r>
           </a:p>
         </p:txBody>
@@ -6547,7 +6669,7 @@
                 </a:solidFill>
                 <a:latin typeface="Georgia"/>
               </a:rPr>
-              <a:t>Rackham, N. (1988). SPIN Selling. McGraw-Hill.</a:t>
+              <a:t>Schulz von Thun, F. (1981). Miteinander Reden: Störungen und Klärungen – Allgemeine Psychologie der Kommunikation. Rowohlt.</a:t>
             </a:r>
           </a:p>
         </p:txBody>
@@ -6660,7 +6782,7 @@
                 </a:solidFill>
                 <a:latin typeface="Georgia"/>
               </a:rPr>
-              <a:t>Hanan, M. (1970). Consultative Selling. AMACOM.</a:t>
+              <a:t>Schulz von Thun, F., Ruppel, J. &amp; Stratmann, R. (2000). Miteinander Reden: Kommunikationspsychologie für Führungskräfte. Rowohlt.</a:t>
             </a:r>
           </a:p>
         </p:txBody>
@@ -6773,7 +6895,7 @@
                 </a:solidFill>
                 <a:latin typeface="Georgia"/>
               </a:rPr>
-              <a:t>Cialdini, R. B. (2001). Influence: The Psychology of Persuasion (Rev. ed.). HarperCollins.</a:t>
+              <a:t>Watzlawick, P., Beavin, J. H. &amp; Jackson, D. D. (1967). Pragmatics of Human Communication: A Study of Interactional Patterns, Pathologies and Paradoxes. Norton. (Dt.: Menschliche Kommunikation. Huber, 2017.)</a:t>
             </a:r>
           </a:p>
         </p:txBody>
@@ -7025,7 +7147,7 @@
                 </a:solidFill>
                 <a:latin typeface="Georgia"/>
               </a:rPr>
-              <a:t>Bankfachlich</a:t>
+              <a:t>Bedarfsanalyse &amp; Consultative Selling</a:t>
             </a:r>
           </a:p>
         </p:txBody>
@@ -7138,7 +7260,7 @@
                 </a:solidFill>
                 <a:latin typeface="Georgia"/>
               </a:rPr>
-              <a:t>Heim, G. (2007). Handbuch Firmenkundengeschäft: Kreditentscheidung – Risikomanagement – Eigenkapitalunterlegung nach Basel II. Bankakademie-Verlag.</a:t>
+              <a:t>Rackham, N. (1988). SPIN Selling. McGraw-Hill.</a:t>
             </a:r>
           </a:p>
         </p:txBody>
@@ -7251,7 +7373,7 @@
                 </a:solidFill>
                 <a:latin typeface="Georgia"/>
               </a:rPr>
-              <a:t>zeb consulting. (2020). Firmenkundenstudie 8.0.</a:t>
+              <a:t>Hanan, M. (1970). Consultative Selling. AMACOM.</a:t>
             </a:r>
           </a:p>
         </p:txBody>
@@ -7364,7 +7486,7 @@
                 </a:solidFill>
                 <a:latin typeface="Georgia"/>
               </a:rPr>
-              <a:t>Roland Berger. (2024). KMU-Banking: Firmenkundenberater 2.0.</a:t>
+              <a:t>Cialdini, R. B. (2001). Influence: The Psychology of Persuasion (Rev. ed.). HarperCollins.</a:t>
             </a:r>
           </a:p>
         </p:txBody>
@@ -7595,7 +7717,7 @@
         <p:spPr>
           <a:xfrm>
             <a:off x="609600" y="920750"/>
-            <a:ext cx="10972800" cy="1270000"/>
+            <a:ext cx="10972800" cy="1778000"/>
           </a:xfrm>
           <a:prstGeom prst="rect">
             <a:avLst/>
@@ -7616,7 +7738,7 @@
                 </a:solidFill>
                 <a:latin typeface="Georgia"/>
               </a:rPr>
-              <a:t>Didaktik &amp; Kompetenzmodell</a:t>
+              <a:t>Bankfachlich</a:t>
             </a:r>
           </a:p>
         </p:txBody>
@@ -7629,121 +7751,8 @@
         </p:nvSpPr>
         <p:spPr>
           <a:xfrm>
-            <a:off x="609600" y="2254250"/>
+            <a:off x="609600" y="2762250"/>
             <a:ext cx="10972800" cy="6350"/>
-          </a:xfrm>
-          <a:prstGeom prst="rect">
-            <a:avLst/>
-          </a:prstGeom>
-          <a:solidFill>
-            <a:srgbClr val="191D2E"/>
-          </a:solidFill>
-          <a:ln>
-            <a:noFill/>
-          </a:ln>
-        </p:spPr>
-        <p:style>
-          <a:lnRef idx="1">
-            <a:schemeClr val="accent1"/>
-          </a:lnRef>
-          <a:fillRef idx="3">
-            <a:schemeClr val="accent1"/>
-          </a:fillRef>
-          <a:effectRef idx="2">
-            <a:schemeClr val="accent1"/>
-          </a:effectRef>
-          <a:fontRef idx="minor">
-            <a:schemeClr val="lt1"/>
-          </a:fontRef>
-        </p:style>
-        <p:txBody>
-          <a:bodyPr rtlCol="0" anchor="ctr"/>
-          <a:lstStyle/>
-          <a:p>
-            <a:pPr algn="ctr"/>
-          </a:p>
-        </p:txBody>
-      </p:sp>
-      <p:sp>
-        <p:nvSpPr>
-          <p:cNvPr id="8" name="TextBox 7"/>
-          <p:cNvSpPr txBox="1"/>
-          <p:nvPr/>
-        </p:nvSpPr>
-        <p:spPr>
-          <a:xfrm>
-            <a:off x="609600" y="2343150"/>
-            <a:ext cx="304800" cy="254000"/>
-          </a:xfrm>
-          <a:prstGeom prst="rect">
-            <a:avLst/>
-          </a:prstGeom>
-          <a:noFill/>
-        </p:spPr>
-        <p:txBody>
-          <a:bodyPr wrap="square">
-            <a:normAutofit/>
-          </a:bodyPr>
-          <a:lstStyle/>
-          <a:p>
-            <a:pPr algn="l"/>
-            <a:r>
-              <a:rPr sz="1000" b="0" i="0">
-                <a:solidFill>
-                  <a:srgbClr val="1F2B56"/>
-                </a:solidFill>
-                <a:latin typeface="Courier New"/>
-              </a:rPr>
-              <a:t>01</a:t>
-            </a:r>
-          </a:p>
-        </p:txBody>
-      </p:sp>
-      <p:sp>
-        <p:nvSpPr>
-          <p:cNvPr id="9" name="TextBox 8"/>
-          <p:cNvSpPr txBox="1"/>
-          <p:nvPr/>
-        </p:nvSpPr>
-        <p:spPr>
-          <a:xfrm>
-            <a:off x="990599" y="2317750"/>
-            <a:ext cx="4699000" cy="558800"/>
-          </a:xfrm>
-          <a:prstGeom prst="rect">
-            <a:avLst/>
-          </a:prstGeom>
-          <a:noFill/>
-        </p:spPr>
-        <p:txBody>
-          <a:bodyPr wrap="square">
-            <a:normAutofit/>
-          </a:bodyPr>
-          <a:lstStyle/>
-          <a:p>
-            <a:pPr algn="l"/>
-            <a:r>
-              <a:rPr sz="1400" b="0" i="0">
-                <a:solidFill>
-                  <a:srgbClr val="191D2E"/>
-                </a:solidFill>
-                <a:latin typeface="Georgia"/>
-              </a:rPr>
-              <a:t>Anderson, L. W. &amp; Krathwohl, D. R. (Hrsg.). (2001). A Taxonomy for Learning, Teaching, and Assessing. Addison Wesley Longman.</a:t>
-            </a:r>
-          </a:p>
-        </p:txBody>
-      </p:sp>
-      <p:sp>
-        <p:nvSpPr>
-          <p:cNvPr id="10" name="Rectangle 9"/>
-          <p:cNvSpPr/>
-          <p:nvPr/>
-        </p:nvSpPr>
-        <p:spPr>
-          <a:xfrm>
-            <a:off x="609600" y="2889250"/>
-            <a:ext cx="5080000" cy="6350"/>
           </a:xfrm>
           <a:prstGeom prst="rect">
             <a:avLst/>
@@ -7779,14 +7788,14 @@
       </p:sp>
       <p:sp>
         <p:nvSpPr>
-          <p:cNvPr id="11" name="TextBox 10"/>
-          <p:cNvSpPr txBox="1"/>
-          <p:nvPr/>
-        </p:nvSpPr>
-        <p:spPr>
-          <a:xfrm>
-            <a:off x="609600" y="2952750"/>
-            <a:ext cx="304800" cy="254000"/>
+          <p:cNvPr id="8" name="TextBox 7"/>
+          <p:cNvSpPr txBox="1"/>
+          <p:nvPr/>
+        </p:nvSpPr>
+        <p:spPr>
+          <a:xfrm>
+            <a:off x="609600" y="2876550"/>
+            <a:ext cx="254000" cy="355600"/>
           </a:xfrm>
           <a:prstGeom prst="rect">
             <a:avLst/>
@@ -7801,27 +7810,27 @@
           <a:p>
             <a:pPr algn="l"/>
             <a:r>
-              <a:rPr sz="1000" b="0" i="0">
+              <a:rPr sz="2200" b="0" i="0">
                 <a:solidFill>
                   <a:srgbClr val="1F2B56"/>
                 </a:solidFill>
-                <a:latin typeface="Courier New"/>
-              </a:rPr>
-              <a:t>02</a:t>
-            </a:r>
-          </a:p>
-        </p:txBody>
-      </p:sp>
-      <p:sp>
-        <p:nvSpPr>
-          <p:cNvPr id="12" name="TextBox 11"/>
-          <p:cNvSpPr txBox="1"/>
-          <p:nvPr/>
-        </p:nvSpPr>
-        <p:spPr>
-          <a:xfrm>
-            <a:off x="990599" y="2927350"/>
-            <a:ext cx="4699000" cy="558800"/>
+                <a:latin typeface="Georgia"/>
+              </a:rPr>
+              <a:t>–</a:t>
+            </a:r>
+          </a:p>
+        </p:txBody>
+      </p:sp>
+      <p:sp>
+        <p:nvSpPr>
+          <p:cNvPr id="9" name="TextBox 8"/>
+          <p:cNvSpPr txBox="1"/>
+          <p:nvPr/>
+        </p:nvSpPr>
+        <p:spPr>
+          <a:xfrm>
+            <a:off x="939799" y="2851150"/>
+            <a:ext cx="10642600" cy="508000"/>
           </a:xfrm>
           <a:prstGeom prst="rect">
             <a:avLst/>
@@ -7842,21 +7851,21 @@
                 </a:solidFill>
                 <a:latin typeface="Georgia"/>
               </a:rPr>
-              <a:t>Dreyfus, H. L. &amp; Dreyfus, S. E. (1980). A Five-Stage Model of the Mental Activities Involved in Directed Skill Acquisition.</a:t>
-            </a:r>
-          </a:p>
-        </p:txBody>
-      </p:sp>
-      <p:sp>
-        <p:nvSpPr>
-          <p:cNvPr id="13" name="Rectangle 12"/>
+              <a:t>Heim, G. (2007). Handbuch Firmenkundengeschäft: Kreditentscheidung – Risikomanagement – Eigenkapitalunterlegung nach Basel II. Bankakademie-Verlag.</a:t>
+            </a:r>
+          </a:p>
+        </p:txBody>
+      </p:sp>
+      <p:sp>
+        <p:nvSpPr>
+          <p:cNvPr id="10" name="Rectangle 9"/>
           <p:cNvSpPr/>
           <p:nvPr/>
         </p:nvSpPr>
         <p:spPr>
           <a:xfrm>
-            <a:off x="609600" y="3498850"/>
-            <a:ext cx="5080000" cy="6350"/>
+            <a:off x="939799" y="3333750"/>
+            <a:ext cx="10642600" cy="6350"/>
           </a:xfrm>
           <a:prstGeom prst="rect">
             <a:avLst/>
@@ -7892,14 +7901,14 @@
       </p:sp>
       <p:sp>
         <p:nvSpPr>
-          <p:cNvPr id="14" name="TextBox 13"/>
-          <p:cNvSpPr txBox="1"/>
-          <p:nvPr/>
-        </p:nvSpPr>
-        <p:spPr>
-          <a:xfrm>
-            <a:off x="6502400" y="2343150"/>
-            <a:ext cx="304800" cy="254000"/>
+          <p:cNvPr id="11" name="TextBox 10"/>
+          <p:cNvSpPr txBox="1"/>
+          <p:nvPr/>
+        </p:nvSpPr>
+        <p:spPr>
+          <a:xfrm>
+            <a:off x="609600" y="3409950"/>
+            <a:ext cx="254000" cy="355600"/>
           </a:xfrm>
           <a:prstGeom prst="rect">
             <a:avLst/>
@@ -7914,27 +7923,27 @@
           <a:p>
             <a:pPr algn="l"/>
             <a:r>
-              <a:rPr sz="1000" b="0" i="0">
+              <a:rPr sz="2200" b="0" i="0">
                 <a:solidFill>
                   <a:srgbClr val="1F2B56"/>
                 </a:solidFill>
-                <a:latin typeface="Courier New"/>
-              </a:rPr>
-              <a:t>01</a:t>
-            </a:r>
-          </a:p>
-        </p:txBody>
-      </p:sp>
-      <p:sp>
-        <p:nvSpPr>
-          <p:cNvPr id="15" name="TextBox 14"/>
-          <p:cNvSpPr txBox="1"/>
-          <p:nvPr/>
-        </p:nvSpPr>
-        <p:spPr>
-          <a:xfrm>
-            <a:off x="6883400" y="2317750"/>
-            <a:ext cx="4699000" cy="558800"/>
+                <a:latin typeface="Georgia"/>
+              </a:rPr>
+              <a:t>–</a:t>
+            </a:r>
+          </a:p>
+        </p:txBody>
+      </p:sp>
+      <p:sp>
+        <p:nvSpPr>
+          <p:cNvPr id="12" name="TextBox 11"/>
+          <p:cNvSpPr txBox="1"/>
+          <p:nvPr/>
+        </p:nvSpPr>
+        <p:spPr>
+          <a:xfrm>
+            <a:off x="939799" y="3384550"/>
+            <a:ext cx="10642600" cy="508000"/>
           </a:xfrm>
           <a:prstGeom prst="rect">
             <a:avLst/>
@@ -7955,21 +7964,21 @@
                 </a:solidFill>
                 <a:latin typeface="Georgia"/>
               </a:rPr>
-              <a:t>Kirkpatrick, D. L. (1994). Evaluating Training Programs: The Four Levels. Berrett-Koehler.</a:t>
-            </a:r>
-          </a:p>
-        </p:txBody>
-      </p:sp>
-      <p:sp>
-        <p:nvSpPr>
-          <p:cNvPr id="16" name="Rectangle 15"/>
+              <a:t>zeb consulting. (2020). Firmenkundenstudie 8.0.</a:t>
+            </a:r>
+          </a:p>
+        </p:txBody>
+      </p:sp>
+      <p:sp>
+        <p:nvSpPr>
+          <p:cNvPr id="13" name="Rectangle 12"/>
           <p:cNvSpPr/>
           <p:nvPr/>
         </p:nvSpPr>
         <p:spPr>
           <a:xfrm>
-            <a:off x="6502400" y="2889250"/>
-            <a:ext cx="5080000" cy="6350"/>
+            <a:off x="939799" y="3867150"/>
+            <a:ext cx="10642600" cy="6350"/>
           </a:xfrm>
           <a:prstGeom prst="rect">
             <a:avLst/>
@@ -8005,14 +8014,14 @@
       </p:sp>
       <p:sp>
         <p:nvSpPr>
-          <p:cNvPr id="17" name="TextBox 16"/>
-          <p:cNvSpPr txBox="1"/>
-          <p:nvPr/>
-        </p:nvSpPr>
-        <p:spPr>
-          <a:xfrm>
-            <a:off x="6502400" y="2952750"/>
-            <a:ext cx="304800" cy="254000"/>
+          <p:cNvPr id="14" name="TextBox 13"/>
+          <p:cNvSpPr txBox="1"/>
+          <p:nvPr/>
+        </p:nvSpPr>
+        <p:spPr>
+          <a:xfrm>
+            <a:off x="609600" y="3943350"/>
+            <a:ext cx="254000" cy="355600"/>
           </a:xfrm>
           <a:prstGeom prst="rect">
             <a:avLst/>
@@ -8027,27 +8036,27 @@
           <a:p>
             <a:pPr algn="l"/>
             <a:r>
-              <a:rPr sz="1000" b="0" i="0">
+              <a:rPr sz="2200" b="0" i="0">
                 <a:solidFill>
                   <a:srgbClr val="1F2B56"/>
                 </a:solidFill>
-                <a:latin typeface="Courier New"/>
-              </a:rPr>
-              <a:t>02</a:t>
-            </a:r>
-          </a:p>
-        </p:txBody>
-      </p:sp>
-      <p:sp>
-        <p:nvSpPr>
-          <p:cNvPr id="18" name="TextBox 17"/>
-          <p:cNvSpPr txBox="1"/>
-          <p:nvPr/>
-        </p:nvSpPr>
-        <p:spPr>
-          <a:xfrm>
-            <a:off x="6883400" y="2927350"/>
-            <a:ext cx="4699000" cy="558800"/>
+                <a:latin typeface="Georgia"/>
+              </a:rPr>
+              <a:t>–</a:t>
+            </a:r>
+          </a:p>
+        </p:txBody>
+      </p:sp>
+      <p:sp>
+        <p:nvSpPr>
+          <p:cNvPr id="15" name="TextBox 14"/>
+          <p:cNvSpPr txBox="1"/>
+          <p:nvPr/>
+        </p:nvSpPr>
+        <p:spPr>
+          <a:xfrm>
+            <a:off x="939799" y="3917950"/>
+            <a:ext cx="10642600" cy="508000"/>
           </a:xfrm>
           <a:prstGeom prst="rect">
             <a:avLst/>
@@ -8068,21 +8077,21 @@
                 </a:solidFill>
                 <a:latin typeface="Georgia"/>
               </a:rPr>
-              <a:t>Kolb, D. A. (1984). Experiential Learning: Experience as the Source of Learning and Development. Prentice Hall.</a:t>
-            </a:r>
-          </a:p>
-        </p:txBody>
-      </p:sp>
-      <p:sp>
-        <p:nvSpPr>
-          <p:cNvPr id="19" name="Rectangle 18"/>
+              <a:t>Roland Berger. (2024). KMU-Banking: Firmenkundenberater 2.0.</a:t>
+            </a:r>
+          </a:p>
+        </p:txBody>
+      </p:sp>
+      <p:sp>
+        <p:nvSpPr>
+          <p:cNvPr id="16" name="Rectangle 15"/>
           <p:cNvSpPr/>
           <p:nvPr/>
         </p:nvSpPr>
         <p:spPr>
           <a:xfrm>
-            <a:off x="6502400" y="3498850"/>
-            <a:ext cx="5080000" cy="6350"/>
+            <a:off x="939799" y="4400550"/>
+            <a:ext cx="10642600" cy="6350"/>
           </a:xfrm>
           <a:prstGeom prst="rect">
             <a:avLst/>
@@ -8150,8 +8159,8 @@
         </p:nvSpPr>
         <p:spPr>
           <a:xfrm>
-            <a:off x="609600" y="457200"/>
-            <a:ext cx="3175000" cy="279400"/>
+            <a:off x="609600" y="279400"/>
+            <a:ext cx="2540000" cy="279400"/>
           </a:xfrm>
           <a:prstGeom prst="rect">
             <a:avLst/>
@@ -8185,7 +8194,7 @@
         </p:nvSpPr>
         <p:spPr>
           <a:xfrm>
-            <a:off x="609600" y="457200"/>
+            <a:off x="609600" y="279400"/>
             <a:ext cx="10972800" cy="279400"/>
           </a:xfrm>
           <a:prstGeom prst="rect">
@@ -8207,7 +8216,7 @@
                 </a:solidFill>
                 <a:latin typeface="Courier New"/>
               </a:rPr>
-              <a:t>Ende · v1.0</a:t>
+              <a:t>§ III · QUELLEN</a:t>
             </a:r>
           </a:p>
         </p:txBody>
@@ -8220,30 +8229,29 @@
         </p:nvSpPr>
         <p:spPr>
           <a:xfrm>
-            <a:off x="609600" y="1143000"/>
-            <a:ext cx="10972800" cy="3556000"/>
-          </a:xfrm>
-          <a:prstGeom prst="rect">
-            <a:avLst/>
-          </a:prstGeom>
-          <a:noFill/>
-        </p:spPr>
-        <p:txBody>
-          <a:bodyPr wrap="square">
-            <a:normAutofit/>
-          </a:bodyPr>
-          <a:lstStyle/>
-          <a:p>
-            <a:pPr algn="l"/>
-            <a:r>
-              <a:rPr sz="9600" b="0" i="0">
-                <a:solidFill>
-                  <a:srgbClr val="191D2E"/>
-                </a:solidFill>
-                <a:latin typeface="Georgia"/>
-              </a:rPr>
-              <a:t>Danke.
-Fragen?</a:t>
+            <a:off x="609600" y="6426200"/>
+            <a:ext cx="10972800" cy="228600"/>
+          </a:xfrm>
+          <a:prstGeom prst="rect">
+            <a:avLst/>
+          </a:prstGeom>
+          <a:noFill/>
+        </p:spPr>
+        <p:txBody>
+          <a:bodyPr wrap="square">
+            <a:normAutofit/>
+          </a:bodyPr>
+          <a:lstStyle/>
+          <a:p>
+            <a:pPr algn="r"/>
+            <a:r>
+              <a:rPr sz="900" b="0" i="0">
+                <a:solidFill>
+                  <a:srgbClr val="7B7FA0"/>
+                </a:solidFill>
+                <a:latin typeface="Courier New"/>
+              </a:rPr>
+              <a:t>19</a:t>
             </a:r>
           </a:p>
         </p:txBody>
@@ -8256,7 +8264,7 @@
         </p:nvSpPr>
         <p:spPr>
           <a:xfrm>
-            <a:off x="609600" y="4826000"/>
+            <a:off x="609600" y="825500"/>
             <a:ext cx="10972800" cy="6350"/>
           </a:xfrm>
           <a:prstGeom prst="rect">
@@ -8299,8 +8307,8 @@
         </p:nvSpPr>
         <p:spPr>
           <a:xfrm>
-            <a:off x="609600" y="4953000"/>
-            <a:ext cx="5715000" cy="1143000"/>
+            <a:off x="609600" y="920750"/>
+            <a:ext cx="10972800" cy="1270000"/>
           </a:xfrm>
           <a:prstGeom prst="rect">
             <a:avLst/>
@@ -8315,27 +8323,70 @@
           <a:p>
             <a:pPr algn="l"/>
             <a:r>
-              <a:rPr sz="1400" b="0" i="1">
+              <a:rPr sz="3800" b="0" i="0">
                 <a:solidFill>
                   <a:srgbClr val="191D2E"/>
                 </a:solidFill>
                 <a:latin typeface="Georgia"/>
               </a:rPr>
-              <a:t>Modul «Strukturierte Bedarfsanalyse» auf FKB Campus — 3 Lernziele, Praxisfall und Quellenapparat.</a:t>
-            </a:r>
-          </a:p>
-        </p:txBody>
-      </p:sp>
-      <p:sp>
-        <p:nvSpPr>
-          <p:cNvPr id="7" name="TextBox 6"/>
-          <p:cNvSpPr txBox="1"/>
-          <p:nvPr/>
-        </p:nvSpPr>
-        <p:spPr>
-          <a:xfrm>
-            <a:off x="6731000" y="4953000"/>
-            <a:ext cx="2413000" cy="177800"/>
+              <a:t>Didaktik &amp; Kompetenzmodell</a:t>
+            </a:r>
+          </a:p>
+        </p:txBody>
+      </p:sp>
+      <p:sp>
+        <p:nvSpPr>
+          <p:cNvPr id="7" name="Rectangle 6"/>
+          <p:cNvSpPr/>
+          <p:nvPr/>
+        </p:nvSpPr>
+        <p:spPr>
+          <a:xfrm>
+            <a:off x="609600" y="2254250"/>
+            <a:ext cx="10972800" cy="6350"/>
+          </a:xfrm>
+          <a:prstGeom prst="rect">
+            <a:avLst/>
+          </a:prstGeom>
+          <a:solidFill>
+            <a:srgbClr val="191D2E"/>
+          </a:solidFill>
+          <a:ln>
+            <a:noFill/>
+          </a:ln>
+        </p:spPr>
+        <p:style>
+          <a:lnRef idx="1">
+            <a:schemeClr val="accent1"/>
+          </a:lnRef>
+          <a:fillRef idx="3">
+            <a:schemeClr val="accent1"/>
+          </a:fillRef>
+          <a:effectRef idx="2">
+            <a:schemeClr val="accent1"/>
+          </a:effectRef>
+          <a:fontRef idx="minor">
+            <a:schemeClr val="lt1"/>
+          </a:fontRef>
+        </p:style>
+        <p:txBody>
+          <a:bodyPr rtlCol="0" anchor="ctr"/>
+          <a:lstStyle/>
+          <a:p>
+            <a:pPr algn="ctr"/>
+          </a:p>
+        </p:txBody>
+      </p:sp>
+      <p:sp>
+        <p:nvSpPr>
+          <p:cNvPr id="8" name="TextBox 7"/>
+          <p:cNvSpPr txBox="1"/>
+          <p:nvPr/>
+        </p:nvSpPr>
+        <p:spPr>
+          <a:xfrm>
+            <a:off x="609600" y="2343150"/>
+            <a:ext cx="304800" cy="254000"/>
           </a:xfrm>
           <a:prstGeom prst="rect">
             <a:avLst/>
@@ -8350,27 +8401,27 @@
           <a:p>
             <a:pPr algn="l"/>
             <a:r>
-              <a:rPr sz="900" b="0" i="0">
-                <a:solidFill>
-                  <a:srgbClr val="7B7FA0"/>
+              <a:rPr sz="1000" b="0" i="0">
+                <a:solidFill>
+                  <a:srgbClr val="1F2B56"/>
                 </a:solidFill>
                 <a:latin typeface="Courier New"/>
               </a:rPr>
-              <a:t>Kontakt</a:t>
-            </a:r>
-          </a:p>
-        </p:txBody>
-      </p:sp>
-      <p:sp>
-        <p:nvSpPr>
-          <p:cNvPr id="8" name="TextBox 7"/>
-          <p:cNvSpPr txBox="1"/>
-          <p:nvPr/>
-        </p:nvSpPr>
-        <p:spPr>
-          <a:xfrm>
-            <a:off x="6731000" y="5156200"/>
-            <a:ext cx="2413000" cy="381000"/>
+              <a:t>01</a:t>
+            </a:r>
+          </a:p>
+        </p:txBody>
+      </p:sp>
+      <p:sp>
+        <p:nvSpPr>
+          <p:cNvPr id="9" name="TextBox 8"/>
+          <p:cNvSpPr txBox="1"/>
+          <p:nvPr/>
+        </p:nvSpPr>
+        <p:spPr>
+          <a:xfrm>
+            <a:off x="990599" y="2317750"/>
+            <a:ext cx="4699000" cy="558800"/>
           </a:xfrm>
           <a:prstGeom prst="rect">
             <a:avLst/>
@@ -8391,21 +8442,64 @@
                 </a:solidFill>
                 <a:latin typeface="Georgia"/>
               </a:rPr>
-              <a:t>info@benedikt-zoller.de</a:t>
-            </a:r>
-          </a:p>
-        </p:txBody>
-      </p:sp>
-      <p:sp>
-        <p:nvSpPr>
-          <p:cNvPr id="9" name="TextBox 8"/>
-          <p:cNvSpPr txBox="1"/>
-          <p:nvPr/>
-        </p:nvSpPr>
-        <p:spPr>
-          <a:xfrm>
-            <a:off x="9398000" y="4953000"/>
-            <a:ext cx="2184400" cy="177800"/>
+              <a:t>Anderson, L. W. &amp; Krathwohl, D. R. (Hrsg.). (2001). A Taxonomy for Learning, Teaching, and Assessing. Addison Wesley Longman.</a:t>
+            </a:r>
+          </a:p>
+        </p:txBody>
+      </p:sp>
+      <p:sp>
+        <p:nvSpPr>
+          <p:cNvPr id="10" name="Rectangle 9"/>
+          <p:cNvSpPr/>
+          <p:nvPr/>
+        </p:nvSpPr>
+        <p:spPr>
+          <a:xfrm>
+            <a:off x="609600" y="2889250"/>
+            <a:ext cx="5080000" cy="6350"/>
+          </a:xfrm>
+          <a:prstGeom prst="rect">
+            <a:avLst/>
+          </a:prstGeom>
+          <a:solidFill>
+            <a:srgbClr val="E0E0E8"/>
+          </a:solidFill>
+          <a:ln>
+            <a:noFill/>
+          </a:ln>
+        </p:spPr>
+        <p:style>
+          <a:lnRef idx="1">
+            <a:schemeClr val="accent1"/>
+          </a:lnRef>
+          <a:fillRef idx="3">
+            <a:schemeClr val="accent1"/>
+          </a:fillRef>
+          <a:effectRef idx="2">
+            <a:schemeClr val="accent1"/>
+          </a:effectRef>
+          <a:fontRef idx="minor">
+            <a:schemeClr val="lt1"/>
+          </a:fontRef>
+        </p:style>
+        <p:txBody>
+          <a:bodyPr rtlCol="0" anchor="ctr"/>
+          <a:lstStyle/>
+          <a:p>
+            <a:pPr algn="ctr"/>
+          </a:p>
+        </p:txBody>
+      </p:sp>
+      <p:sp>
+        <p:nvSpPr>
+          <p:cNvPr id="11" name="TextBox 10"/>
+          <p:cNvSpPr txBox="1"/>
+          <p:nvPr/>
+        </p:nvSpPr>
+        <p:spPr>
+          <a:xfrm>
+            <a:off x="609600" y="2952750"/>
+            <a:ext cx="304800" cy="254000"/>
           </a:xfrm>
           <a:prstGeom prst="rect">
             <a:avLst/>
@@ -8420,27 +8514,27 @@
           <a:p>
             <a:pPr algn="l"/>
             <a:r>
-              <a:rPr sz="900" b="0" i="0">
-                <a:solidFill>
-                  <a:srgbClr val="7B7FA0"/>
+              <a:rPr sz="1000" b="0" i="0">
+                <a:solidFill>
+                  <a:srgbClr val="1F2B56"/>
                 </a:solidFill>
                 <a:latin typeface="Courier New"/>
               </a:rPr>
-              <a:t>Modul</a:t>
-            </a:r>
-          </a:p>
-        </p:txBody>
-      </p:sp>
-      <p:sp>
-        <p:nvSpPr>
-          <p:cNvPr id="10" name="TextBox 9"/>
-          <p:cNvSpPr txBox="1"/>
-          <p:nvPr/>
-        </p:nvSpPr>
-        <p:spPr>
-          <a:xfrm>
-            <a:off x="9398000" y="5156200"/>
-            <a:ext cx="2184400" cy="381000"/>
+              <a:t>02</a:t>
+            </a:r>
+          </a:p>
+        </p:txBody>
+      </p:sp>
+      <p:sp>
+        <p:nvSpPr>
+          <p:cNvPr id="12" name="TextBox 11"/>
+          <p:cNvSpPr txBox="1"/>
+          <p:nvPr/>
+        </p:nvSpPr>
+        <p:spPr>
+          <a:xfrm>
+            <a:off x="990599" y="2927350"/>
+            <a:ext cx="4699000" cy="558800"/>
           </a:xfrm>
           <a:prstGeom prst="rect">
             <a:avLst/>
@@ -8461,8 +8555,277 @@
                 </a:solidFill>
                 <a:latin typeface="Georgia"/>
               </a:rPr>
-              <a:t>M10 · Sparring</a:t>
-            </a:r>
+              <a:t>Dreyfus, H. L. &amp; Dreyfus, S. E. (1980). A Five-Stage Model of the Mental Activities Involved in Directed Skill Acquisition.</a:t>
+            </a:r>
+          </a:p>
+        </p:txBody>
+      </p:sp>
+      <p:sp>
+        <p:nvSpPr>
+          <p:cNvPr id="13" name="Rectangle 12"/>
+          <p:cNvSpPr/>
+          <p:nvPr/>
+        </p:nvSpPr>
+        <p:spPr>
+          <a:xfrm>
+            <a:off x="609600" y="3498850"/>
+            <a:ext cx="5080000" cy="6350"/>
+          </a:xfrm>
+          <a:prstGeom prst="rect">
+            <a:avLst/>
+          </a:prstGeom>
+          <a:solidFill>
+            <a:srgbClr val="E0E0E8"/>
+          </a:solidFill>
+          <a:ln>
+            <a:noFill/>
+          </a:ln>
+        </p:spPr>
+        <p:style>
+          <a:lnRef idx="1">
+            <a:schemeClr val="accent1"/>
+          </a:lnRef>
+          <a:fillRef idx="3">
+            <a:schemeClr val="accent1"/>
+          </a:fillRef>
+          <a:effectRef idx="2">
+            <a:schemeClr val="accent1"/>
+          </a:effectRef>
+          <a:fontRef idx="minor">
+            <a:schemeClr val="lt1"/>
+          </a:fontRef>
+        </p:style>
+        <p:txBody>
+          <a:bodyPr rtlCol="0" anchor="ctr"/>
+          <a:lstStyle/>
+          <a:p>
+            <a:pPr algn="ctr"/>
+          </a:p>
+        </p:txBody>
+      </p:sp>
+      <p:sp>
+        <p:nvSpPr>
+          <p:cNvPr id="14" name="TextBox 13"/>
+          <p:cNvSpPr txBox="1"/>
+          <p:nvPr/>
+        </p:nvSpPr>
+        <p:spPr>
+          <a:xfrm>
+            <a:off x="6502400" y="2343150"/>
+            <a:ext cx="304800" cy="254000"/>
+          </a:xfrm>
+          <a:prstGeom prst="rect">
+            <a:avLst/>
+          </a:prstGeom>
+          <a:noFill/>
+        </p:spPr>
+        <p:txBody>
+          <a:bodyPr wrap="square">
+            <a:normAutofit/>
+          </a:bodyPr>
+          <a:lstStyle/>
+          <a:p>
+            <a:pPr algn="l"/>
+            <a:r>
+              <a:rPr sz="1000" b="0" i="0">
+                <a:solidFill>
+                  <a:srgbClr val="1F2B56"/>
+                </a:solidFill>
+                <a:latin typeface="Courier New"/>
+              </a:rPr>
+              <a:t>01</a:t>
+            </a:r>
+          </a:p>
+        </p:txBody>
+      </p:sp>
+      <p:sp>
+        <p:nvSpPr>
+          <p:cNvPr id="15" name="TextBox 14"/>
+          <p:cNvSpPr txBox="1"/>
+          <p:nvPr/>
+        </p:nvSpPr>
+        <p:spPr>
+          <a:xfrm>
+            <a:off x="6883400" y="2317750"/>
+            <a:ext cx="4699000" cy="558800"/>
+          </a:xfrm>
+          <a:prstGeom prst="rect">
+            <a:avLst/>
+          </a:prstGeom>
+          <a:noFill/>
+        </p:spPr>
+        <p:txBody>
+          <a:bodyPr wrap="square">
+            <a:normAutofit/>
+          </a:bodyPr>
+          <a:lstStyle/>
+          <a:p>
+            <a:pPr algn="l"/>
+            <a:r>
+              <a:rPr sz="1400" b="0" i="0">
+                <a:solidFill>
+                  <a:srgbClr val="191D2E"/>
+                </a:solidFill>
+                <a:latin typeface="Georgia"/>
+              </a:rPr>
+              <a:t>Kirkpatrick, D. L. (1994). Evaluating Training Programs: The Four Levels. Berrett-Koehler.</a:t>
+            </a:r>
+          </a:p>
+        </p:txBody>
+      </p:sp>
+      <p:sp>
+        <p:nvSpPr>
+          <p:cNvPr id="16" name="Rectangle 15"/>
+          <p:cNvSpPr/>
+          <p:nvPr/>
+        </p:nvSpPr>
+        <p:spPr>
+          <a:xfrm>
+            <a:off x="6502400" y="2889250"/>
+            <a:ext cx="5080000" cy="6350"/>
+          </a:xfrm>
+          <a:prstGeom prst="rect">
+            <a:avLst/>
+          </a:prstGeom>
+          <a:solidFill>
+            <a:srgbClr val="E0E0E8"/>
+          </a:solidFill>
+          <a:ln>
+            <a:noFill/>
+          </a:ln>
+        </p:spPr>
+        <p:style>
+          <a:lnRef idx="1">
+            <a:schemeClr val="accent1"/>
+          </a:lnRef>
+          <a:fillRef idx="3">
+            <a:schemeClr val="accent1"/>
+          </a:fillRef>
+          <a:effectRef idx="2">
+            <a:schemeClr val="accent1"/>
+          </a:effectRef>
+          <a:fontRef idx="minor">
+            <a:schemeClr val="lt1"/>
+          </a:fontRef>
+        </p:style>
+        <p:txBody>
+          <a:bodyPr rtlCol="0" anchor="ctr"/>
+          <a:lstStyle/>
+          <a:p>
+            <a:pPr algn="ctr"/>
+          </a:p>
+        </p:txBody>
+      </p:sp>
+      <p:sp>
+        <p:nvSpPr>
+          <p:cNvPr id="17" name="TextBox 16"/>
+          <p:cNvSpPr txBox="1"/>
+          <p:nvPr/>
+        </p:nvSpPr>
+        <p:spPr>
+          <a:xfrm>
+            <a:off x="6502400" y="2952750"/>
+            <a:ext cx="304800" cy="254000"/>
+          </a:xfrm>
+          <a:prstGeom prst="rect">
+            <a:avLst/>
+          </a:prstGeom>
+          <a:noFill/>
+        </p:spPr>
+        <p:txBody>
+          <a:bodyPr wrap="square">
+            <a:normAutofit/>
+          </a:bodyPr>
+          <a:lstStyle/>
+          <a:p>
+            <a:pPr algn="l"/>
+            <a:r>
+              <a:rPr sz="1000" b="0" i="0">
+                <a:solidFill>
+                  <a:srgbClr val="1F2B56"/>
+                </a:solidFill>
+                <a:latin typeface="Courier New"/>
+              </a:rPr>
+              <a:t>02</a:t>
+            </a:r>
+          </a:p>
+        </p:txBody>
+      </p:sp>
+      <p:sp>
+        <p:nvSpPr>
+          <p:cNvPr id="18" name="TextBox 17"/>
+          <p:cNvSpPr txBox="1"/>
+          <p:nvPr/>
+        </p:nvSpPr>
+        <p:spPr>
+          <a:xfrm>
+            <a:off x="6883400" y="2927350"/>
+            <a:ext cx="4699000" cy="558800"/>
+          </a:xfrm>
+          <a:prstGeom prst="rect">
+            <a:avLst/>
+          </a:prstGeom>
+          <a:noFill/>
+        </p:spPr>
+        <p:txBody>
+          <a:bodyPr wrap="square">
+            <a:normAutofit/>
+          </a:bodyPr>
+          <a:lstStyle/>
+          <a:p>
+            <a:pPr algn="l"/>
+            <a:r>
+              <a:rPr sz="1400" b="0" i="0">
+                <a:solidFill>
+                  <a:srgbClr val="191D2E"/>
+                </a:solidFill>
+                <a:latin typeface="Georgia"/>
+              </a:rPr>
+              <a:t>Kolb, D. A. (1984). Experiential Learning: Experience as the Source of Learning and Development. Prentice Hall.</a:t>
+            </a:r>
+          </a:p>
+        </p:txBody>
+      </p:sp>
+      <p:sp>
+        <p:nvSpPr>
+          <p:cNvPr id="19" name="Rectangle 18"/>
+          <p:cNvSpPr/>
+          <p:nvPr/>
+        </p:nvSpPr>
+        <p:spPr>
+          <a:xfrm>
+            <a:off x="6502400" y="3498850"/>
+            <a:ext cx="5080000" cy="6350"/>
+          </a:xfrm>
+          <a:prstGeom prst="rect">
+            <a:avLst/>
+          </a:prstGeom>
+          <a:solidFill>
+            <a:srgbClr val="E0E0E8"/>
+          </a:solidFill>
+          <a:ln>
+            <a:noFill/>
+          </a:ln>
+        </p:spPr>
+        <p:style>
+          <a:lnRef idx="1">
+            <a:schemeClr val="accent1"/>
+          </a:lnRef>
+          <a:fillRef idx="3">
+            <a:schemeClr val="accent1"/>
+          </a:fillRef>
+          <a:effectRef idx="2">
+            <a:schemeClr val="accent1"/>
+          </a:effectRef>
+          <a:fontRef idx="minor">
+            <a:schemeClr val="lt1"/>
+          </a:fontRef>
+        </p:style>
+        <p:txBody>
+          <a:bodyPr rtlCol="0" anchor="ctr"/>
+          <a:lstStyle/>
+          <a:p>
+            <a:pPr algn="ctr"/>
           </a:p>
         </p:txBody>
       </p:sp>
@@ -8726,29 +9089,29 @@
         </p:nvSpPr>
         <p:spPr>
           <a:xfrm>
-            <a:off x="4064000" y="927100"/>
-            <a:ext cx="508000" cy="647700"/>
-          </a:xfrm>
-          <a:prstGeom prst="rect">
-            <a:avLst/>
-          </a:prstGeom>
-          <a:noFill/>
-        </p:spPr>
-        <p:txBody>
-          <a:bodyPr wrap="square">
+            <a:off x="4064000" y="939799"/>
+            <a:ext cx="762000" cy="647700"/>
+          </a:xfrm>
+          <a:prstGeom prst="rect">
+            <a:avLst/>
+          </a:prstGeom>
+          <a:noFill/>
+        </p:spPr>
+        <p:txBody>
+          <a:bodyPr wrap="none">
             <a:normAutofit/>
           </a:bodyPr>
           <a:lstStyle/>
           <a:p>
             <a:pPr algn="l"/>
             <a:r>
-              <a:rPr sz="2600" b="0" i="1">
+              <a:rPr sz="2400" b="0" i="1">
                 <a:solidFill>
                   <a:srgbClr val="1F2B56"/>
                 </a:solidFill>
                 <a:latin typeface="Georgia"/>
               </a:rPr>
-              <a:t>I.</a:t>
+              <a:t>I</a:t>
             </a:r>
           </a:p>
         </p:txBody>
@@ -8761,8 +9124,8 @@
         </p:nvSpPr>
         <p:spPr>
           <a:xfrm>
-            <a:off x="4699000" y="952500"/>
-            <a:ext cx="6858000" cy="622300"/>
+            <a:off x="4953000" y="952500"/>
+            <a:ext cx="6629400" cy="635000"/>
           </a:xfrm>
           <a:prstGeom prst="rect">
             <a:avLst/>
@@ -8796,7 +9159,7 @@
         </p:nvSpPr>
         <p:spPr>
           <a:xfrm>
-            <a:off x="4064000" y="1574800"/>
+            <a:off x="4064000" y="1587500"/>
             <a:ext cx="7518399" cy="6350"/>
           </a:xfrm>
           <a:prstGeom prst="rect">
@@ -8839,29 +9202,29 @@
         </p:nvSpPr>
         <p:spPr>
           <a:xfrm>
-            <a:off x="4064000" y="1612900"/>
-            <a:ext cx="508000" cy="647700"/>
-          </a:xfrm>
-          <a:prstGeom prst="rect">
-            <a:avLst/>
-          </a:prstGeom>
-          <a:noFill/>
-        </p:spPr>
-        <p:txBody>
-          <a:bodyPr wrap="square">
+            <a:off x="4064000" y="1638300"/>
+            <a:ext cx="762000" cy="647700"/>
+          </a:xfrm>
+          <a:prstGeom prst="rect">
+            <a:avLst/>
+          </a:prstGeom>
+          <a:noFill/>
+        </p:spPr>
+        <p:txBody>
+          <a:bodyPr wrap="none">
             <a:normAutofit/>
           </a:bodyPr>
           <a:lstStyle/>
           <a:p>
             <a:pPr algn="l"/>
             <a:r>
-              <a:rPr sz="2600" b="0" i="1">
+              <a:rPr sz="2400" b="0" i="1">
                 <a:solidFill>
                   <a:srgbClr val="1F2B56"/>
                 </a:solidFill>
                 <a:latin typeface="Georgia"/>
               </a:rPr>
-              <a:t>II.</a:t>
+              <a:t>II</a:t>
             </a:r>
           </a:p>
         </p:txBody>
@@ -8874,8 +9237,8 @@
         </p:nvSpPr>
         <p:spPr>
           <a:xfrm>
-            <a:off x="4699000" y="1638300"/>
-            <a:ext cx="6858000" cy="622300"/>
+            <a:off x="4953000" y="1651000"/>
+            <a:ext cx="6629400" cy="635000"/>
           </a:xfrm>
           <a:prstGeom prst="rect">
             <a:avLst/>
@@ -8909,7 +9272,7 @@
         </p:nvSpPr>
         <p:spPr>
           <a:xfrm>
-            <a:off x="4064000" y="2260600"/>
+            <a:off x="4064000" y="2286000"/>
             <a:ext cx="7518399" cy="6350"/>
           </a:xfrm>
           <a:prstGeom prst="rect">
@@ -8952,29 +9315,29 @@
         </p:nvSpPr>
         <p:spPr>
           <a:xfrm>
-            <a:off x="4064000" y="2298700"/>
-            <a:ext cx="508000" cy="647700"/>
-          </a:xfrm>
-          <a:prstGeom prst="rect">
-            <a:avLst/>
-          </a:prstGeom>
-          <a:noFill/>
-        </p:spPr>
-        <p:txBody>
-          <a:bodyPr wrap="square">
+            <a:off x="4064000" y="2336800"/>
+            <a:ext cx="762000" cy="647700"/>
+          </a:xfrm>
+          <a:prstGeom prst="rect">
+            <a:avLst/>
+          </a:prstGeom>
+          <a:noFill/>
+        </p:spPr>
+        <p:txBody>
+          <a:bodyPr wrap="none">
             <a:normAutofit/>
           </a:bodyPr>
           <a:lstStyle/>
           <a:p>
             <a:pPr algn="l"/>
             <a:r>
-              <a:rPr sz="2600" b="0" i="1">
+              <a:rPr sz="2400" b="0" i="1">
                 <a:solidFill>
                   <a:srgbClr val="1F2B56"/>
                 </a:solidFill>
                 <a:latin typeface="Georgia"/>
               </a:rPr>
-              <a:t>III.</a:t>
+              <a:t>III</a:t>
             </a:r>
           </a:p>
         </p:txBody>
@@ -8987,8 +9350,8 @@
         </p:nvSpPr>
         <p:spPr>
           <a:xfrm>
-            <a:off x="4699000" y="2324100"/>
-            <a:ext cx="6858000" cy="622300"/>
+            <a:off x="4953000" y="2349500"/>
+            <a:ext cx="6629400" cy="635000"/>
           </a:xfrm>
           <a:prstGeom prst="rect">
             <a:avLst/>
@@ -9010,6 +9373,356 @@
                 <a:latin typeface="Georgia"/>
               </a:rPr>
               <a:t>Den Vollständigkeitsgrad einer Bedarfsanalyse bewerten, offene Dimensionen benennen und die nächsten Gesprächsschritte priorisieren</a:t>
+            </a:r>
+          </a:p>
+        </p:txBody>
+      </p:sp>
+    </p:spTree>
+  </p:cSld>
+  <p:clrMapOvr>
+    <a:masterClrMapping/>
+  </p:clrMapOvr>
+</p:sld>
+</file>
+
+<file path=ppt/slides/slide20.xml><?xml version="1.0" encoding="utf-8"?>
+<p:sld xmlns:a="http://schemas.openxmlformats.org/drawingml/2006/main" xmlns:p="http://schemas.openxmlformats.org/presentationml/2006/main" xmlns:r="http://schemas.openxmlformats.org/officeDocument/2006/relationships">
+  <p:cSld>
+    <p:bg>
+      <p:bgPr>
+        <a:solidFill>
+          <a:srgbClr val="F8F8FA"/>
+        </a:solidFill>
+        <a:effectLst/>
+      </p:bgPr>
+    </p:bg>
+    <p:spTree>
+      <p:nvGrpSpPr>
+        <p:cNvPr id="1" name=""/>
+        <p:cNvGrpSpPr/>
+        <p:nvPr/>
+      </p:nvGrpSpPr>
+      <p:grpSpPr/>
+      <p:sp>
+        <p:nvSpPr>
+          <p:cNvPr id="2" name="TextBox 1"/>
+          <p:cNvSpPr txBox="1"/>
+          <p:nvPr/>
+        </p:nvSpPr>
+        <p:spPr>
+          <a:xfrm>
+            <a:off x="609600" y="457200"/>
+            <a:ext cx="3175000" cy="279400"/>
+          </a:xfrm>
+          <a:prstGeom prst="rect">
+            <a:avLst/>
+          </a:prstGeom>
+          <a:noFill/>
+        </p:spPr>
+        <p:txBody>
+          <a:bodyPr wrap="square">
+            <a:normAutofit/>
+          </a:bodyPr>
+          <a:lstStyle/>
+          <a:p>
+            <a:pPr algn="l"/>
+            <a:r>
+              <a:rPr sz="1000" b="1" i="0">
+                <a:solidFill>
+                  <a:srgbClr val="191D2E"/>
+                </a:solidFill>
+                <a:latin typeface="Arial"/>
+              </a:rPr>
+              <a:t>FKB  Campus</a:t>
+            </a:r>
+          </a:p>
+        </p:txBody>
+      </p:sp>
+      <p:sp>
+        <p:nvSpPr>
+          <p:cNvPr id="3" name="TextBox 2"/>
+          <p:cNvSpPr txBox="1"/>
+          <p:nvPr/>
+        </p:nvSpPr>
+        <p:spPr>
+          <a:xfrm>
+            <a:off x="609600" y="457200"/>
+            <a:ext cx="10972800" cy="279400"/>
+          </a:xfrm>
+          <a:prstGeom prst="rect">
+            <a:avLst/>
+          </a:prstGeom>
+          <a:noFill/>
+        </p:spPr>
+        <p:txBody>
+          <a:bodyPr wrap="square">
+            <a:normAutofit/>
+          </a:bodyPr>
+          <a:lstStyle/>
+          <a:p>
+            <a:pPr algn="r"/>
+            <a:r>
+              <a:rPr sz="900" b="0" i="0">
+                <a:solidFill>
+                  <a:srgbClr val="7B7FA0"/>
+                </a:solidFill>
+                <a:latin typeface="Courier New"/>
+              </a:rPr>
+              <a:t>Ende · v1.0</a:t>
+            </a:r>
+          </a:p>
+        </p:txBody>
+      </p:sp>
+      <p:sp>
+        <p:nvSpPr>
+          <p:cNvPr id="4" name="TextBox 3"/>
+          <p:cNvSpPr txBox="1"/>
+          <p:nvPr/>
+        </p:nvSpPr>
+        <p:spPr>
+          <a:xfrm>
+            <a:off x="609600" y="1143000"/>
+            <a:ext cx="10972800" cy="3556000"/>
+          </a:xfrm>
+          <a:prstGeom prst="rect">
+            <a:avLst/>
+          </a:prstGeom>
+          <a:noFill/>
+        </p:spPr>
+        <p:txBody>
+          <a:bodyPr wrap="square">
+            <a:normAutofit/>
+          </a:bodyPr>
+          <a:lstStyle/>
+          <a:p>
+            <a:pPr algn="l"/>
+            <a:r>
+              <a:rPr sz="9600" b="0" i="0">
+                <a:solidFill>
+                  <a:srgbClr val="191D2E"/>
+                </a:solidFill>
+                <a:latin typeface="Georgia"/>
+              </a:rPr>
+              <a:t>Danke.
+Fragen?</a:t>
+            </a:r>
+          </a:p>
+        </p:txBody>
+      </p:sp>
+      <p:sp>
+        <p:nvSpPr>
+          <p:cNvPr id="5" name="Rectangle 4"/>
+          <p:cNvSpPr/>
+          <p:nvPr/>
+        </p:nvSpPr>
+        <p:spPr>
+          <a:xfrm>
+            <a:off x="609600" y="4826000"/>
+            <a:ext cx="10972800" cy="6350"/>
+          </a:xfrm>
+          <a:prstGeom prst="rect">
+            <a:avLst/>
+          </a:prstGeom>
+          <a:solidFill>
+            <a:srgbClr val="191D2E"/>
+          </a:solidFill>
+          <a:ln>
+            <a:noFill/>
+          </a:ln>
+        </p:spPr>
+        <p:style>
+          <a:lnRef idx="1">
+            <a:schemeClr val="accent1"/>
+          </a:lnRef>
+          <a:fillRef idx="3">
+            <a:schemeClr val="accent1"/>
+          </a:fillRef>
+          <a:effectRef idx="2">
+            <a:schemeClr val="accent1"/>
+          </a:effectRef>
+          <a:fontRef idx="minor">
+            <a:schemeClr val="lt1"/>
+          </a:fontRef>
+        </p:style>
+        <p:txBody>
+          <a:bodyPr rtlCol="0" anchor="ctr"/>
+          <a:lstStyle/>
+          <a:p>
+            <a:pPr algn="ctr"/>
+          </a:p>
+        </p:txBody>
+      </p:sp>
+      <p:sp>
+        <p:nvSpPr>
+          <p:cNvPr id="6" name="TextBox 5"/>
+          <p:cNvSpPr txBox="1"/>
+          <p:nvPr/>
+        </p:nvSpPr>
+        <p:spPr>
+          <a:xfrm>
+            <a:off x="609600" y="4953000"/>
+            <a:ext cx="5715000" cy="1143000"/>
+          </a:xfrm>
+          <a:prstGeom prst="rect">
+            <a:avLst/>
+          </a:prstGeom>
+          <a:noFill/>
+        </p:spPr>
+        <p:txBody>
+          <a:bodyPr wrap="square">
+            <a:normAutofit/>
+          </a:bodyPr>
+          <a:lstStyle/>
+          <a:p>
+            <a:pPr algn="l"/>
+            <a:r>
+              <a:rPr sz="1400" b="0" i="1">
+                <a:solidFill>
+                  <a:srgbClr val="191D2E"/>
+                </a:solidFill>
+                <a:latin typeface="Georgia"/>
+              </a:rPr>
+              <a:t>Modul «Strukturierte Bedarfsanalyse» auf FKB Campus — 3 Lernziele, Praxisfall und Quellenapparat.</a:t>
+            </a:r>
+          </a:p>
+        </p:txBody>
+      </p:sp>
+      <p:sp>
+        <p:nvSpPr>
+          <p:cNvPr id="7" name="TextBox 6"/>
+          <p:cNvSpPr txBox="1"/>
+          <p:nvPr/>
+        </p:nvSpPr>
+        <p:spPr>
+          <a:xfrm>
+            <a:off x="6731000" y="4953000"/>
+            <a:ext cx="2413000" cy="177800"/>
+          </a:xfrm>
+          <a:prstGeom prst="rect">
+            <a:avLst/>
+          </a:prstGeom>
+          <a:noFill/>
+        </p:spPr>
+        <p:txBody>
+          <a:bodyPr wrap="square">
+            <a:normAutofit/>
+          </a:bodyPr>
+          <a:lstStyle/>
+          <a:p>
+            <a:pPr algn="l"/>
+            <a:r>
+              <a:rPr sz="900" b="0" i="0">
+                <a:solidFill>
+                  <a:srgbClr val="7B7FA0"/>
+                </a:solidFill>
+                <a:latin typeface="Courier New"/>
+              </a:rPr>
+              <a:t>Kontakt</a:t>
+            </a:r>
+          </a:p>
+        </p:txBody>
+      </p:sp>
+      <p:sp>
+        <p:nvSpPr>
+          <p:cNvPr id="8" name="TextBox 7"/>
+          <p:cNvSpPr txBox="1"/>
+          <p:nvPr/>
+        </p:nvSpPr>
+        <p:spPr>
+          <a:xfrm>
+            <a:off x="6731000" y="5156200"/>
+            <a:ext cx="2413000" cy="381000"/>
+          </a:xfrm>
+          <a:prstGeom prst="rect">
+            <a:avLst/>
+          </a:prstGeom>
+          <a:noFill/>
+        </p:spPr>
+        <p:txBody>
+          <a:bodyPr wrap="square">
+            <a:normAutofit/>
+          </a:bodyPr>
+          <a:lstStyle/>
+          <a:p>
+            <a:pPr algn="l"/>
+            <a:r>
+              <a:rPr sz="1400" b="0" i="0">
+                <a:solidFill>
+                  <a:srgbClr val="191D2E"/>
+                </a:solidFill>
+                <a:latin typeface="Georgia"/>
+              </a:rPr>
+              <a:t>info@benedikt-zoller.de</a:t>
+            </a:r>
+          </a:p>
+        </p:txBody>
+      </p:sp>
+      <p:sp>
+        <p:nvSpPr>
+          <p:cNvPr id="9" name="TextBox 8"/>
+          <p:cNvSpPr txBox="1"/>
+          <p:nvPr/>
+        </p:nvSpPr>
+        <p:spPr>
+          <a:xfrm>
+            <a:off x="9398000" y="4953000"/>
+            <a:ext cx="2184400" cy="177800"/>
+          </a:xfrm>
+          <a:prstGeom prst="rect">
+            <a:avLst/>
+          </a:prstGeom>
+          <a:noFill/>
+        </p:spPr>
+        <p:txBody>
+          <a:bodyPr wrap="square">
+            <a:normAutofit/>
+          </a:bodyPr>
+          <a:lstStyle/>
+          <a:p>
+            <a:pPr algn="l"/>
+            <a:r>
+              <a:rPr sz="900" b="0" i="0">
+                <a:solidFill>
+                  <a:srgbClr val="7B7FA0"/>
+                </a:solidFill>
+                <a:latin typeface="Courier New"/>
+              </a:rPr>
+              <a:t>Modul</a:t>
+            </a:r>
+          </a:p>
+        </p:txBody>
+      </p:sp>
+      <p:sp>
+        <p:nvSpPr>
+          <p:cNvPr id="10" name="TextBox 9"/>
+          <p:cNvSpPr txBox="1"/>
+          <p:nvPr/>
+        </p:nvSpPr>
+        <p:spPr>
+          <a:xfrm>
+            <a:off x="9398000" y="5156200"/>
+            <a:ext cx="2184400" cy="381000"/>
+          </a:xfrm>
+          <a:prstGeom prst="rect">
+            <a:avLst/>
+          </a:prstGeom>
+          <a:noFill/>
+        </p:spPr>
+        <p:txBody>
+          <a:bodyPr wrap="square">
+            <a:normAutofit/>
+          </a:bodyPr>
+          <a:lstStyle/>
+          <a:p>
+            <a:pPr algn="l"/>
+            <a:r>
+              <a:rPr sz="1400" b="0" i="0">
+                <a:solidFill>
+                  <a:srgbClr val="191D2E"/>
+                </a:solidFill>
+                <a:latin typeface="Georgia"/>
+              </a:rPr>
+              <a:t>M10 · Sparring</a:t>
             </a:r>
           </a:p>
         </p:txBody>
@@ -9028,7 +9741,7 @@
     <p:bg>
       <p:bgPr>
         <a:solidFill>
-          <a:srgbClr val="191D2E"/>
+          <a:srgbClr val="1F2B56"/>
         </a:solidFill>
         <a:effectLst/>
       </p:bgPr>
@@ -9536,7 +10249,7 @@
                   </a:txBody>
                   <a:tcPr>
                     <a:solidFill>
-                      <a:srgbClr val="191D2E"/>
+                      <a:srgbClr val="1F2B56"/>
                     </a:solidFill>
                   </a:tcPr>
                 </a:tc>
@@ -9558,7 +10271,7 @@
                   </a:txBody>
                   <a:tcPr>
                     <a:solidFill>
-                      <a:srgbClr val="191D2E"/>
+                      <a:srgbClr val="1F2B56"/>
                     </a:solidFill>
                   </a:tcPr>
                 </a:tc>
@@ -9580,7 +10293,7 @@
                   </a:txBody>
                   <a:tcPr>
                     <a:solidFill>
-                      <a:srgbClr val="191D2E"/>
+                      <a:srgbClr val="1F2B56"/>
                     </a:solidFill>
                   </a:tcPr>
                 </a:tc>
@@ -10148,7 +10861,7 @@
                   </a:txBody>
                   <a:tcPr>
                     <a:solidFill>
-                      <a:srgbClr val="191D2E"/>
+                      <a:srgbClr val="1F2B56"/>
                     </a:solidFill>
                   </a:tcPr>
                 </a:tc>
@@ -10170,7 +10883,7 @@
                   </a:txBody>
                   <a:tcPr>
                     <a:solidFill>
-                      <a:srgbClr val="191D2E"/>
+                      <a:srgbClr val="1F2B56"/>
                     </a:solidFill>
                   </a:tcPr>
                 </a:tc>
@@ -10192,7 +10905,7 @@
                   </a:txBody>
                   <a:tcPr>
                     <a:solidFill>
-                      <a:srgbClr val="191D2E"/>
+                      <a:srgbClr val="1F2B56"/>
                     </a:solidFill>
                   </a:tcPr>
                 </a:tc>
@@ -10214,7 +10927,7 @@
                   </a:txBody>
                   <a:tcPr>
                     <a:solidFill>
-                      <a:srgbClr val="191D2E"/>
+                      <a:srgbClr val="1F2B56"/>
                     </a:solidFill>
                   </a:tcPr>
                 </a:tc>
@@ -10868,7 +11581,7 @@
                   </a:txBody>
                   <a:tcPr>
                     <a:solidFill>
-                      <a:srgbClr val="191D2E"/>
+                      <a:srgbClr val="1F2B56"/>
                     </a:solidFill>
                   </a:tcPr>
                 </a:tc>
@@ -10890,7 +11603,7 @@
                   </a:txBody>
                   <a:tcPr>
                     <a:solidFill>
-                      <a:srgbClr val="191D2E"/>
+                      <a:srgbClr val="1F2B56"/>
                     </a:solidFill>
                   </a:tcPr>
                 </a:tc>

--- a/public/downloads/praesentation/M10.pptx
+++ b/public/downloads/praesentation/M10.pptx
@@ -3252,7 +3252,42 @@
       </p:sp>
       <p:sp>
         <p:nvSpPr>
-          <p:cNvPr id="6" name="Rectangle 5"/>
+          <p:cNvPr id="6" name="TextBox 5"/>
+          <p:cNvSpPr txBox="1"/>
+          <p:nvPr/>
+        </p:nvSpPr>
+        <p:spPr>
+          <a:xfrm>
+            <a:off x="685800" y="3977639"/>
+            <a:ext cx="10817352" cy="731520"/>
+          </a:xfrm>
+          <a:prstGeom prst="rect">
+            <a:avLst/>
+          </a:prstGeom>
+          <a:noFill/>
+        </p:spPr>
+        <p:txBody>
+          <a:bodyPr wrap="square">
+            <a:spAutoFit/>
+          </a:bodyPr>
+          <a:lstStyle/>
+          <a:p>
+            <a:pPr algn="l"/>
+            <a:r>
+              <a:rPr sz="1900" b="0" i="1">
+                <a:solidFill>
+                  <a:srgbClr val="BECDE6"/>
+                </a:solidFill>
+                <a:latin typeface="Source Serif 4"/>
+              </a:rPr>
+              <a:t>Vom Jahresgespräch zum echten Bedarf</a:t>
+            </a:r>
+          </a:p>
+        </p:txBody>
+      </p:sp>
+      <p:sp>
+        <p:nvSpPr>
+          <p:cNvPr id="7" name="Rectangle 6"/>
           <p:cNvSpPr/>
           <p:nvPr/>
         </p:nvSpPr>
@@ -3295,14 +3330,14 @@
       </p:sp>
       <p:sp>
         <p:nvSpPr>
-          <p:cNvPr id="7" name="TextBox 6"/>
+          <p:cNvPr id="8" name="TextBox 7"/>
           <p:cNvSpPr txBox="1"/>
           <p:nvPr/>
         </p:nvSpPr>
         <p:spPr>
           <a:xfrm>
             <a:off x="685800" y="5193792"/>
-            <a:ext cx="5408676" cy="201168"/>
+            <a:ext cx="3605784" cy="201168"/>
           </a:xfrm>
           <a:prstGeom prst="rect">
             <a:avLst/>
@@ -3330,14 +3365,14 @@
       </p:sp>
       <p:sp>
         <p:nvSpPr>
-          <p:cNvPr id="8" name="TextBox 7"/>
+          <p:cNvPr id="9" name="TextBox 8"/>
           <p:cNvSpPr txBox="1"/>
           <p:nvPr/>
         </p:nvSpPr>
         <p:spPr>
           <a:xfrm>
             <a:off x="685800" y="5394960"/>
-            <a:ext cx="5408676" cy="320040"/>
+            <a:ext cx="3605784" cy="320040"/>
           </a:xfrm>
           <a:prstGeom prst="rect">
             <a:avLst/>
@@ -3365,14 +3400,14 @@
       </p:sp>
       <p:sp>
         <p:nvSpPr>
-          <p:cNvPr id="9" name="TextBox 8"/>
+          <p:cNvPr id="10" name="TextBox 9"/>
           <p:cNvSpPr txBox="1"/>
           <p:nvPr/>
         </p:nvSpPr>
         <p:spPr>
           <a:xfrm>
-            <a:off x="6094476" y="5193792"/>
-            <a:ext cx="5408676" cy="201168"/>
+            <a:off x="4291584" y="5193792"/>
+            <a:ext cx="3605784" cy="201168"/>
           </a:xfrm>
           <a:prstGeom prst="rect">
             <a:avLst/>
@@ -3393,21 +3428,21 @@
                 </a:solidFill>
                 <a:latin typeface="JetBrains Mono"/>
               </a:rPr>
-              <a:t>VERSION</a:t>
-            </a:r>
-          </a:p>
-        </p:txBody>
-      </p:sp>
-      <p:sp>
-        <p:nvSpPr>
-          <p:cNvPr id="10" name="TextBox 9"/>
+              <a:t>KOMPETENZSTUFE</a:t>
+            </a:r>
+          </a:p>
+        </p:txBody>
+      </p:sp>
+      <p:sp>
+        <p:nvSpPr>
+          <p:cNvPr id="11" name="TextBox 10"/>
           <p:cNvSpPr txBox="1"/>
           <p:nvPr/>
         </p:nvSpPr>
         <p:spPr>
           <a:xfrm>
-            <a:off x="6094476" y="5394960"/>
-            <a:ext cx="5408676" cy="320040"/>
+            <a:off x="4291584" y="5394960"/>
+            <a:ext cx="3605784" cy="320040"/>
           </a:xfrm>
           <a:prstGeom prst="rect">
             <a:avLst/>
@@ -3428,6 +3463,76 @@
                 </a:solidFill>
                 <a:latin typeface="Arial"/>
               </a:rPr>
+              <a:t>Sparring</a:t>
+            </a:r>
+          </a:p>
+        </p:txBody>
+      </p:sp>
+      <p:sp>
+        <p:nvSpPr>
+          <p:cNvPr id="12" name="TextBox 11"/>
+          <p:cNvSpPr txBox="1"/>
+          <p:nvPr/>
+        </p:nvSpPr>
+        <p:spPr>
+          <a:xfrm>
+            <a:off x="7897368" y="5193792"/>
+            <a:ext cx="3605784" cy="201168"/>
+          </a:xfrm>
+          <a:prstGeom prst="rect">
+            <a:avLst/>
+          </a:prstGeom>
+          <a:noFill/>
+        </p:spPr>
+        <p:txBody>
+          <a:bodyPr wrap="none">
+            <a:spAutoFit/>
+          </a:bodyPr>
+          <a:lstStyle/>
+          <a:p>
+            <a:pPr algn="l"/>
+            <a:r>
+              <a:rPr sz="700">
+                <a:solidFill>
+                  <a:srgbClr val="A0B4D2"/>
+                </a:solidFill>
+                <a:latin typeface="JetBrains Mono"/>
+              </a:rPr>
+              <a:t>VERSION</a:t>
+            </a:r>
+          </a:p>
+        </p:txBody>
+      </p:sp>
+      <p:sp>
+        <p:nvSpPr>
+          <p:cNvPr id="13" name="TextBox 12"/>
+          <p:cNvSpPr txBox="1"/>
+          <p:nvPr/>
+        </p:nvSpPr>
+        <p:spPr>
+          <a:xfrm>
+            <a:off x="7897368" y="5394960"/>
+            <a:ext cx="3605784" cy="320040"/>
+          </a:xfrm>
+          <a:prstGeom prst="rect">
+            <a:avLst/>
+          </a:prstGeom>
+          <a:noFill/>
+        </p:spPr>
+        <p:txBody>
+          <a:bodyPr wrap="square">
+            <a:spAutoFit/>
+          </a:bodyPr>
+          <a:lstStyle/>
+          <a:p>
+            <a:pPr algn="l"/>
+            <a:r>
+              <a:rPr sz="1100" b="0" i="0">
+                <a:solidFill>
+                  <a:srgbClr val="FFFFFF"/>
+                </a:solidFill>
+                <a:latin typeface="Arial"/>
+              </a:rPr>
               <a:t>v1.0</a:t>
             </a:r>
           </a:p>
@@ -3435,7 +3540,7 @@
       </p:sp>
       <p:sp>
         <p:nvSpPr>
-          <p:cNvPr id="11" name="Rectangle 10"/>
+          <p:cNvPr id="14" name="Rectangle 13"/>
           <p:cNvSpPr/>
           <p:nvPr/>
         </p:nvSpPr>
@@ -3478,7 +3583,7 @@
       </p:sp>
       <p:sp>
         <p:nvSpPr>
-          <p:cNvPr id="12" name="TextBox 11"/>
+          <p:cNvPr id="15" name="TextBox 14"/>
           <p:cNvSpPr txBox="1"/>
           <p:nvPr/>
         </p:nvSpPr>
@@ -3513,7 +3618,7 @@
       </p:sp>
       <p:sp>
         <p:nvSpPr>
-          <p:cNvPr id="13" name="TextBox 12"/>
+          <p:cNvPr id="16" name="TextBox 15"/>
           <p:cNvSpPr txBox="1"/>
           <p:nvPr/>
         </p:nvSpPr>
